--- a/Slide/203012520014 _Dina Diana Tambunan_Slide.pptx
+++ b/Slide/203012520014 _Dina Diana Tambunan_Slide.pptx
@@ -109,19 +109,24 @@
       </a:defRPr>
     </a:lvl9pPr>
   </p:defaultTextStyle>
+  <p:extLst>
+    <p:ext uri="{EFAFB233-063F-42B5-8137-9DF3F51BA10A}">
+      <p15:sldGuideLst xmlns:p15="http://schemas.microsoft.com/office/powerpoint/2012/main"/>
+    </p:ext>
+  </p:extLst>
 </p:presentation>
 </file>
 
 <file path=ppt/diagrams/colors1.xml><?xml version="1.0" encoding="utf-8"?>
-<dgm:colorsDef xmlns:dgm="http://schemas.openxmlformats.org/drawingml/2006/diagram" xmlns:a="http://schemas.openxmlformats.org/drawingml/2006/main" uniqueId="urn:microsoft.com/office/officeart/2005/8/colors/colorful5">
+<dgm:colorsDef xmlns:dgm="http://schemas.openxmlformats.org/drawingml/2006/diagram" xmlns:a="http://schemas.openxmlformats.org/drawingml/2006/main" uniqueId="urn:microsoft.com/office/officeart/2018/5/colors/Iconchunking_neutralbg_colorful1">
   <dgm:title val=""/>
   <dgm:desc val=""/>
   <dgm:catLst>
-    <dgm:cat type="colorful" pri="10500"/>
+    <dgm:cat type="colorful" pri="10100"/>
   </dgm:catLst>
   <dgm:styleLbl name="node0">
     <dgm:fillClrLst meth="repeat">
-      <a:schemeClr val="accent4"/>
+      <a:schemeClr val="accent1"/>
     </dgm:fillClrLst>
     <dgm:linClrLst meth="repeat">
       <a:schemeClr val="lt1"/>
@@ -132,12 +137,17 @@
     <dgm:txEffectClrLst/>
   </dgm:styleLbl>
   <dgm:styleLbl name="node1">
-    <dgm:fillClrLst>
+    <dgm:fillClrLst meth="repeat">
+      <a:schemeClr val="accent2"/>
+      <a:schemeClr val="accent3"/>
+      <a:schemeClr val="accent4"/>
       <a:schemeClr val="accent5"/>
       <a:schemeClr val="accent6"/>
     </dgm:fillClrLst>
     <dgm:linClrLst meth="repeat">
-      <a:schemeClr val="lt1"/>
+      <a:schemeClr val="lt1">
+        <a:alpha val="0"/>
+      </a:schemeClr>
     </dgm:linClrLst>
     <dgm:effectClrLst/>
     <dgm:txLinClrLst/>
@@ -145,11 +155,17 @@
     <dgm:txEffectClrLst/>
   </dgm:styleLbl>
   <dgm:styleLbl name="alignNode1">
-    <dgm:fillClrLst>
+    <dgm:fillClrLst meth="repeat">
+      <a:schemeClr val="accent2"/>
+      <a:schemeClr val="accent3"/>
+      <a:schemeClr val="accent4"/>
       <a:schemeClr val="accent5"/>
       <a:schemeClr val="accent6"/>
     </dgm:fillClrLst>
-    <dgm:linClrLst>
+    <dgm:linClrLst meth="repeat">
+      <a:schemeClr val="accent2"/>
+      <a:schemeClr val="accent3"/>
+      <a:schemeClr val="accent4"/>
       <a:schemeClr val="accent5"/>
       <a:schemeClr val="accent6"/>
     </dgm:linClrLst>
@@ -159,7 +175,10 @@
     <dgm:txEffectClrLst/>
   </dgm:styleLbl>
   <dgm:styleLbl name="lnNode1">
-    <dgm:fillClrLst>
+    <dgm:fillClrLst meth="repeat">
+      <a:schemeClr val="accent2"/>
+      <a:schemeClr val="accent3"/>
+      <a:schemeClr val="accent4"/>
       <a:schemeClr val="accent5"/>
       <a:schemeClr val="accent6"/>
     </dgm:fillClrLst>
@@ -172,7 +191,16 @@
     <dgm:txEffectClrLst/>
   </dgm:styleLbl>
   <dgm:styleLbl name="vennNode1">
-    <dgm:fillClrLst>
+    <dgm:fillClrLst meth="repeat">
+      <a:schemeClr val="accent2">
+        <a:alpha val="50000"/>
+      </a:schemeClr>
+      <a:schemeClr val="accent3">
+        <a:alpha val="50000"/>
+      </a:schemeClr>
+      <a:schemeClr val="accent4">
+        <a:alpha val="50000"/>
+      </a:schemeClr>
       <a:schemeClr val="accent5">
         <a:alpha val="50000"/>
       </a:schemeClr>
@@ -190,7 +218,7 @@
   </dgm:styleLbl>
   <dgm:styleLbl name="node2">
     <dgm:fillClrLst>
-      <a:schemeClr val="accent6"/>
+      <a:schemeClr val="accent2"/>
     </dgm:fillClrLst>
     <dgm:linClrLst meth="repeat">
       <a:schemeClr val="lt1"/>
@@ -202,7 +230,7 @@
   </dgm:styleLbl>
   <dgm:styleLbl name="node3">
     <dgm:fillClrLst>
-      <a:schemeClr val="accent1"/>
+      <a:schemeClr val="accent3"/>
     </dgm:fillClrLst>
     <dgm:linClrLst meth="repeat">
       <a:schemeClr val="lt1"/>
@@ -214,7 +242,7 @@
   </dgm:styleLbl>
   <dgm:styleLbl name="node4">
     <dgm:fillClrLst>
-      <a:schemeClr val="accent2"/>
+      <a:schemeClr val="accent4"/>
     </dgm:fillClrLst>
     <dgm:linClrLst meth="repeat">
       <a:schemeClr val="lt1"/>
@@ -225,7 +253,16 @@
     <dgm:txEffectClrLst/>
   </dgm:styleLbl>
   <dgm:styleLbl name="fgImgPlace1">
-    <dgm:fillClrLst>
+    <dgm:fillClrLst meth="repeat">
+      <a:schemeClr val="accent2">
+        <a:tint val="50000"/>
+      </a:schemeClr>
+      <a:schemeClr val="accent3">
+        <a:tint val="50000"/>
+      </a:schemeClr>
+      <a:schemeClr val="accent4">
+        <a:tint val="50000"/>
+      </a:schemeClr>
       <a:schemeClr val="accent5">
         <a:tint val="50000"/>
       </a:schemeClr>
@@ -245,10 +282,10 @@
   </dgm:styleLbl>
   <dgm:styleLbl name="alignImgPlace1">
     <dgm:fillClrLst>
-      <a:schemeClr val="accent5">
+      <a:schemeClr val="accent1">
         <a:tint val="50000"/>
       </a:schemeClr>
-      <a:schemeClr val="accent6">
+      <a:schemeClr val="accent2">
         <a:tint val="20000"/>
       </a:schemeClr>
     </dgm:fillClrLst>
@@ -264,10 +301,10 @@
   </dgm:styleLbl>
   <dgm:styleLbl name="bgImgPlace1">
     <dgm:fillClrLst>
-      <a:schemeClr val="accent5">
+      <a:schemeClr val="accent1">
         <a:tint val="50000"/>
       </a:schemeClr>
-      <a:schemeClr val="accent6">
+      <a:schemeClr val="accent2">
         <a:tint val="20000"/>
       </a:schemeClr>
     </dgm:fillClrLst>
@@ -282,11 +319,14 @@
     <dgm:txEffectClrLst/>
   </dgm:styleLbl>
   <dgm:styleLbl name="sibTrans2D1">
-    <dgm:fillClrLst>
+    <dgm:fillClrLst meth="repeat">
+      <a:schemeClr val="accent2"/>
+      <a:schemeClr val="accent3"/>
+      <a:schemeClr val="accent4"/>
       <a:schemeClr val="accent5"/>
       <a:schemeClr val="accent6"/>
     </dgm:fillClrLst>
-    <dgm:linClrLst meth="repeat">
+    <dgm:linClrLst meth="cycle">
       <a:schemeClr val="lt1"/>
     </dgm:linClrLst>
     <dgm:effectClrLst/>
@@ -295,11 +335,14 @@
     <dgm:txEffectClrLst/>
   </dgm:styleLbl>
   <dgm:styleLbl name="fgSibTrans2D1">
-    <dgm:fillClrLst>
+    <dgm:fillClrLst meth="repeat">
+      <a:schemeClr val="accent2"/>
+      <a:schemeClr val="accent3"/>
+      <a:schemeClr val="accent4"/>
       <a:schemeClr val="accent5"/>
       <a:schemeClr val="accent6"/>
     </dgm:fillClrLst>
-    <dgm:linClrLst meth="repeat">
+    <dgm:linClrLst meth="cycle">
       <a:schemeClr val="lt1"/>
     </dgm:linClrLst>
     <dgm:effectClrLst/>
@@ -310,11 +353,14 @@
     <dgm:txEffectClrLst/>
   </dgm:styleLbl>
   <dgm:styleLbl name="bgSibTrans2D1">
-    <dgm:fillClrLst>
+    <dgm:fillClrLst meth="repeat">
+      <a:schemeClr val="accent2"/>
+      <a:schemeClr val="accent3"/>
+      <a:schemeClr val="accent4"/>
       <a:schemeClr val="accent5"/>
       <a:schemeClr val="accent6"/>
     </dgm:fillClrLst>
-    <dgm:linClrLst meth="repeat">
+    <dgm:linClrLst meth="cycle">
       <a:schemeClr val="lt1"/>
     </dgm:linClrLst>
     <dgm:effectClrLst/>
@@ -325,8 +371,17 @@
     <dgm:txEffectClrLst/>
   </dgm:styleLbl>
   <dgm:styleLbl name="sibTrans1D1">
-    <dgm:fillClrLst/>
-    <dgm:linClrLst>
+    <dgm:fillClrLst meth="repeat">
+      <a:schemeClr val="accent2"/>
+      <a:schemeClr val="accent3"/>
+      <a:schemeClr val="accent4"/>
+      <a:schemeClr val="accent5"/>
+      <a:schemeClr val="accent6"/>
+    </dgm:fillClrLst>
+    <dgm:linClrLst meth="repeat">
+      <a:schemeClr val="accent2"/>
+      <a:schemeClr val="accent3"/>
+      <a:schemeClr val="accent4"/>
       <a:schemeClr val="accent5"/>
       <a:schemeClr val="accent6"/>
     </dgm:linClrLst>
@@ -339,10 +394,10 @@
   </dgm:styleLbl>
   <dgm:styleLbl name="callout">
     <dgm:fillClrLst meth="repeat">
-      <a:schemeClr val="accent5"/>
+      <a:schemeClr val="accent2"/>
     </dgm:fillClrLst>
     <dgm:linClrLst meth="repeat">
-      <a:schemeClr val="accent5">
+      <a:schemeClr val="accent2">
         <a:tint val="50000"/>
       </a:schemeClr>
     </dgm:linClrLst>
@@ -355,12 +410,10 @@
   </dgm:styleLbl>
   <dgm:styleLbl name="asst0">
     <dgm:fillClrLst meth="repeat">
-      <a:schemeClr val="accent5"/>
+      <a:schemeClr val="accent1"/>
     </dgm:fillClrLst>
     <dgm:linClrLst meth="repeat">
-      <a:schemeClr val="lt1">
-        <a:shade val="80000"/>
-      </a:schemeClr>
+      <a:schemeClr val="lt1"/>
     </dgm:linClrLst>
     <dgm:effectClrLst/>
     <dgm:txLinClrLst/>
@@ -369,12 +422,10 @@
   </dgm:styleLbl>
   <dgm:styleLbl name="asst1">
     <dgm:fillClrLst meth="repeat">
-      <a:schemeClr val="accent6"/>
+      <a:schemeClr val="accent2"/>
     </dgm:fillClrLst>
     <dgm:linClrLst meth="repeat">
-      <a:schemeClr val="lt1">
-        <a:shade val="80000"/>
-      </a:schemeClr>
+      <a:schemeClr val="lt1"/>
     </dgm:linClrLst>
     <dgm:effectClrLst/>
     <dgm:txLinClrLst/>
@@ -383,7 +434,7 @@
   </dgm:styleLbl>
   <dgm:styleLbl name="asst2">
     <dgm:fillClrLst>
-      <a:schemeClr val="accent1"/>
+      <a:schemeClr val="accent3"/>
     </dgm:fillClrLst>
     <dgm:linClrLst meth="repeat">
       <a:schemeClr val="lt1"/>
@@ -395,7 +446,7 @@
   </dgm:styleLbl>
   <dgm:styleLbl name="asst3">
     <dgm:fillClrLst>
-      <a:schemeClr val="accent2"/>
+      <a:schemeClr val="accent4"/>
     </dgm:fillClrLst>
     <dgm:linClrLst meth="repeat">
       <a:schemeClr val="lt1"/>
@@ -407,7 +458,7 @@
   </dgm:styleLbl>
   <dgm:styleLbl name="asst4">
     <dgm:fillClrLst>
-      <a:schemeClr val="accent3"/>
+      <a:schemeClr val="accent5"/>
     </dgm:fillClrLst>
     <dgm:linClrLst meth="repeat">
       <a:schemeClr val="lt1"/>
@@ -419,7 +470,7 @@
   </dgm:styleLbl>
   <dgm:styleLbl name="parChTrans2D1">
     <dgm:fillClrLst meth="repeat">
-      <a:schemeClr val="accent5"/>
+      <a:schemeClr val="accent2"/>
     </dgm:fillClrLst>
     <dgm:linClrLst meth="repeat">
       <a:schemeClr val="lt1"/>
@@ -433,7 +484,7 @@
   </dgm:styleLbl>
   <dgm:styleLbl name="parChTrans2D2">
     <dgm:fillClrLst meth="repeat">
-      <a:schemeClr val="accent6"/>
+      <a:schemeClr val="accent3"/>
     </dgm:fillClrLst>
     <dgm:linClrLst meth="repeat">
       <a:schemeClr val="lt1"/>
@@ -445,7 +496,7 @@
   </dgm:styleLbl>
   <dgm:styleLbl name="parChTrans2D3">
     <dgm:fillClrLst meth="repeat">
-      <a:schemeClr val="accent6"/>
+      <a:schemeClr val="accent4"/>
     </dgm:fillClrLst>
     <dgm:linClrLst meth="repeat">
       <a:schemeClr val="lt1"/>
@@ -457,7 +508,7 @@
   </dgm:styleLbl>
   <dgm:styleLbl name="parChTrans2D4">
     <dgm:fillClrLst meth="repeat">
-      <a:schemeClr val="accent1"/>
+      <a:schemeClr val="accent5"/>
     </dgm:fillClrLst>
     <dgm:linClrLst meth="repeat">
       <a:schemeClr val="lt1"/>
@@ -471,10 +522,10 @@
   </dgm:styleLbl>
   <dgm:styleLbl name="parChTrans1D1">
     <dgm:fillClrLst meth="repeat">
-      <a:schemeClr val="accent5"/>
+      <a:schemeClr val="accent2"/>
     </dgm:fillClrLst>
     <dgm:linClrLst meth="repeat">
-      <a:schemeClr val="accent5"/>
+      <a:schemeClr val="accent1"/>
     </dgm:linClrLst>
     <dgm:effectClrLst/>
     <dgm:txLinClrLst/>
@@ -485,12 +536,12 @@
   </dgm:styleLbl>
   <dgm:styleLbl name="parChTrans1D2">
     <dgm:fillClrLst meth="repeat">
-      <a:schemeClr val="accent6">
+      <a:schemeClr val="accent3">
         <a:tint val="90000"/>
       </a:schemeClr>
     </dgm:fillClrLst>
     <dgm:linClrLst meth="repeat">
-      <a:schemeClr val="accent6"/>
+      <a:schemeClr val="accent2"/>
     </dgm:linClrLst>
     <dgm:effectClrLst/>
     <dgm:txLinClrLst/>
@@ -501,12 +552,12 @@
   </dgm:styleLbl>
   <dgm:styleLbl name="parChTrans1D3">
     <dgm:fillClrLst meth="repeat">
-      <a:schemeClr val="accent6">
+      <a:schemeClr val="accent4">
         <a:tint val="70000"/>
       </a:schemeClr>
     </dgm:fillClrLst>
     <dgm:linClrLst meth="repeat">
-      <a:schemeClr val="accent1"/>
+      <a:schemeClr val="accent3"/>
     </dgm:linClrLst>
     <dgm:effectClrLst/>
     <dgm:txLinClrLst/>
@@ -517,12 +568,12 @@
   </dgm:styleLbl>
   <dgm:styleLbl name="parChTrans1D4">
     <dgm:fillClrLst meth="repeat">
-      <a:schemeClr val="accent6">
+      <a:schemeClr val="accent5">
         <a:tint val="50000"/>
       </a:schemeClr>
     </dgm:fillClrLst>
     <dgm:linClrLst meth="repeat">
-      <a:schemeClr val="accent2"/>
+      <a:schemeClr val="accent4"/>
     </dgm:linClrLst>
     <dgm:effectClrLst/>
     <dgm:txLinClrLst/>
@@ -537,7 +588,10 @@
         <a:alpha val="90000"/>
       </a:schemeClr>
     </dgm:fillClrLst>
-    <dgm:linClrLst>
+    <dgm:linClrLst meth="repeat">
+      <a:schemeClr val="accent2"/>
+      <a:schemeClr val="accent3"/>
+      <a:schemeClr val="accent4"/>
       <a:schemeClr val="accent5"/>
       <a:schemeClr val="accent6"/>
     </dgm:linClrLst>
@@ -554,7 +608,10 @@
         <a:alpha val="90000"/>
       </a:schemeClr>
     </dgm:fillClrLst>
-    <dgm:linClrLst>
+    <dgm:linClrLst meth="repeat">
+      <a:schemeClr val="accent2"/>
+      <a:schemeClr val="accent3"/>
+      <a:schemeClr val="accent4"/>
       <a:schemeClr val="accent5"/>
       <a:schemeClr val="accent6"/>
     </dgm:linClrLst>
@@ -571,7 +628,10 @@
         <a:alpha val="90000"/>
       </a:schemeClr>
     </dgm:fillClrLst>
-    <dgm:linClrLst>
+    <dgm:linClrLst meth="repeat">
+      <a:schemeClr val="accent2"/>
+      <a:schemeClr val="accent3"/>
+      <a:schemeClr val="accent4"/>
       <a:schemeClr val="accent5"/>
       <a:schemeClr val="accent6"/>
     </dgm:linClrLst>
@@ -589,7 +649,7 @@
       </a:schemeClr>
     </dgm:fillClrLst>
     <dgm:linClrLst meth="repeat">
-      <a:schemeClr val="accent5"/>
+      <a:schemeClr val="accent1"/>
     </dgm:linClrLst>
     <dgm:effectClrLst/>
     <dgm:txLinClrLst/>
@@ -604,7 +664,10 @@
         <a:alpha val="90000"/>
       </a:schemeClr>
     </dgm:fillClrLst>
-    <dgm:linClrLst>
+    <dgm:linClrLst meth="repeat">
+      <a:schemeClr val="accent2"/>
+      <a:schemeClr val="accent3"/>
+      <a:schemeClr val="accent4"/>
       <a:schemeClr val="accent5"/>
       <a:schemeClr val="accent6"/>
     </dgm:linClrLst>
@@ -619,7 +682,10 @@
     <dgm:fillClrLst meth="repeat">
       <a:schemeClr val="lt1"/>
     </dgm:fillClrLst>
-    <dgm:linClrLst>
+    <dgm:linClrLst meth="repeat">
+      <a:schemeClr val="accent2"/>
+      <a:schemeClr val="accent3"/>
+      <a:schemeClr val="accent4"/>
       <a:schemeClr val="accent5"/>
       <a:schemeClr val="accent6"/>
     </dgm:linClrLst>
@@ -634,7 +700,10 @@
     <dgm:fillClrLst meth="repeat">
       <a:schemeClr val="lt1"/>
     </dgm:fillClrLst>
-    <dgm:linClrLst>
+    <dgm:linClrLst meth="repeat">
+      <a:schemeClr val="accent2"/>
+      <a:schemeClr val="accent3"/>
+      <a:schemeClr val="accent4"/>
       <a:schemeClr val="accent5"/>
       <a:schemeClr val="accent6"/>
     </dgm:linClrLst>
@@ -649,7 +718,10 @@
     <dgm:fillClrLst meth="repeat">
       <a:schemeClr val="lt1"/>
     </dgm:fillClrLst>
-    <dgm:linClrLst>
+    <dgm:linClrLst meth="repeat">
+      <a:schemeClr val="accent2"/>
+      <a:schemeClr val="accent3"/>
+      <a:schemeClr val="accent4"/>
       <a:schemeClr val="accent5"/>
       <a:schemeClr val="accent6"/>
     </dgm:linClrLst>
@@ -661,7 +733,19 @@
     <dgm:txEffectClrLst/>
   </dgm:styleLbl>
   <dgm:styleLbl name="fgAccFollowNode1">
-    <dgm:fillClrLst>
+    <dgm:fillClrLst meth="repeat">
+      <a:schemeClr val="accent2">
+        <a:tint val="40000"/>
+        <a:alpha val="90000"/>
+      </a:schemeClr>
+      <a:schemeClr val="accent3">
+        <a:tint val="40000"/>
+        <a:alpha val="90000"/>
+      </a:schemeClr>
+      <a:schemeClr val="accent4">
+        <a:tint val="40000"/>
+        <a:alpha val="90000"/>
+      </a:schemeClr>
       <a:schemeClr val="accent5">
         <a:tint val="40000"/>
         <a:alpha val="90000"/>
@@ -671,15 +755,79 @@
         <a:alpha val="90000"/>
       </a:schemeClr>
     </dgm:fillClrLst>
-    <dgm:linClrLst>
+    <dgm:linClrLst meth="repeat">
+      <a:schemeClr val="accent2">
+        <a:tint val="40000"/>
+        <a:alpha val="90000"/>
+      </a:schemeClr>
+      <a:schemeClr val="accent3">
+        <a:tint val="40000"/>
+        <a:alpha val="90000"/>
+      </a:schemeClr>
+      <a:schemeClr val="accent4">
+        <a:tint val="40000"/>
+        <a:alpha val="90000"/>
+      </a:schemeClr>
       <a:schemeClr val="accent5">
         <a:tint val="40000"/>
         <a:alpha val="90000"/>
       </a:schemeClr>
+      <a:schemeClr val="accent6">
+        <a:tint val="40000"/>
+        <a:alpha val="90000"/>
+      </a:schemeClr>
+    </dgm:linClrLst>
+    <dgm:effectClrLst/>
+    <dgm:txLinClrLst/>
+    <dgm:txFillClrLst meth="repeat">
+      <a:schemeClr val="dk1"/>
+    </dgm:txFillClrLst>
+    <dgm:txEffectClrLst/>
+  </dgm:styleLbl>
+  <dgm:styleLbl name="alignAccFollowNode1">
+    <dgm:fillClrLst meth="repeat">
+      <a:schemeClr val="accent2">
+        <a:tint val="40000"/>
+        <a:alpha val="90000"/>
+      </a:schemeClr>
+      <a:schemeClr val="accent3">
+        <a:tint val="40000"/>
+        <a:alpha val="90000"/>
+      </a:schemeClr>
+      <a:schemeClr val="accent4">
+        <a:tint val="40000"/>
+        <a:alpha val="90000"/>
+      </a:schemeClr>
       <a:schemeClr val="accent5">
         <a:tint val="40000"/>
         <a:alpha val="90000"/>
       </a:schemeClr>
+      <a:schemeClr val="accent6">
+        <a:tint val="40000"/>
+        <a:alpha val="90000"/>
+      </a:schemeClr>
+    </dgm:fillClrLst>
+    <dgm:linClrLst meth="repeat">
+      <a:schemeClr val="accent2">
+        <a:tint val="40000"/>
+        <a:alpha val="90000"/>
+      </a:schemeClr>
+      <a:schemeClr val="accent3">
+        <a:tint val="40000"/>
+        <a:alpha val="90000"/>
+      </a:schemeClr>
+      <a:schemeClr val="accent4">
+        <a:tint val="40000"/>
+        <a:alpha val="90000"/>
+      </a:schemeClr>
+      <a:schemeClr val="accent5">
+        <a:tint val="40000"/>
+        <a:alpha val="90000"/>
+      </a:schemeClr>
+      <a:schemeClr val="accent6">
+        <a:tint val="40000"/>
+        <a:alpha val="90000"/>
+      </a:schemeClr>
     </dgm:linClrLst>
     <dgm:effectClrLst/>
     <dgm:txLinClrLst/>
@@ -688,8 +836,20 @@
     </dgm:txFillClrLst>
     <dgm:txEffectClrLst/>
   </dgm:styleLbl>
-  <dgm:styleLbl name="alignAccFollowNode1">
-    <dgm:fillClrLst>
+  <dgm:styleLbl name="bgAccFollowNode1">
+    <dgm:fillClrLst meth="repeat">
+      <a:schemeClr val="accent2">
+        <a:tint val="40000"/>
+        <a:alpha val="90000"/>
+      </a:schemeClr>
+      <a:schemeClr val="accent3">
+        <a:tint val="40000"/>
+        <a:alpha val="90000"/>
+      </a:schemeClr>
+      <a:schemeClr val="accent4">
+        <a:tint val="40000"/>
+        <a:alpha val="90000"/>
+      </a:schemeClr>
       <a:schemeClr val="accent5">
         <a:tint val="40000"/>
         <a:alpha val="90000"/>
@@ -699,35 +859,19 @@
         <a:alpha val="90000"/>
       </a:schemeClr>
     </dgm:fillClrLst>
-    <dgm:linClrLst>
-      <a:schemeClr val="accent5">
+    <dgm:linClrLst meth="repeat">
+      <a:schemeClr val="accent2">
         <a:tint val="40000"/>
         <a:alpha val="90000"/>
       </a:schemeClr>
-      <a:schemeClr val="accent6">
+      <a:schemeClr val="accent3">
         <a:tint val="40000"/>
         <a:alpha val="90000"/>
       </a:schemeClr>
-    </dgm:linClrLst>
-    <dgm:effectClrLst/>
-    <dgm:txLinClrLst/>
-    <dgm:txFillClrLst meth="repeat">
-      <a:schemeClr val="dk1"/>
-    </dgm:txFillClrLst>
-    <dgm:txEffectClrLst/>
-  </dgm:styleLbl>
-  <dgm:styleLbl name="bgAccFollowNode1">
-    <dgm:fillClrLst>
-      <a:schemeClr val="accent5">
+      <a:schemeClr val="accent4">
         <a:tint val="40000"/>
         <a:alpha val="90000"/>
       </a:schemeClr>
-      <a:schemeClr val="accent6">
-        <a:tint val="40000"/>
-        <a:alpha val="90000"/>
-      </a:schemeClr>
-    </dgm:fillClrLst>
-    <dgm:linClrLst>
       <a:schemeClr val="accent5">
         <a:tint val="40000"/>
         <a:alpha val="90000"/>
@@ -751,7 +895,7 @@
       </a:schemeClr>
     </dgm:fillClrLst>
     <dgm:linClrLst>
-      <a:schemeClr val="accent4"/>
+      <a:schemeClr val="accent1"/>
     </dgm:linClrLst>
     <dgm:effectClrLst/>
     <dgm:txLinClrLst/>
@@ -767,7 +911,7 @@
       </a:schemeClr>
     </dgm:fillClrLst>
     <dgm:linClrLst>
-      <a:schemeClr val="accent6"/>
+      <a:schemeClr val="accent2"/>
     </dgm:linClrLst>
     <dgm:effectClrLst/>
     <dgm:txLinClrLst/>
@@ -783,7 +927,7 @@
       </a:schemeClr>
     </dgm:fillClrLst>
     <dgm:linClrLst>
-      <a:schemeClr val="accent1"/>
+      <a:schemeClr val="accent3"/>
     </dgm:linClrLst>
     <dgm:effectClrLst/>
     <dgm:txLinClrLst/>
@@ -799,7 +943,7 @@
       </a:schemeClr>
     </dgm:fillClrLst>
     <dgm:linClrLst>
-      <a:schemeClr val="accent2"/>
+      <a:schemeClr val="accent4"/>
     </dgm:linClrLst>
     <dgm:effectClrLst/>
     <dgm:txLinClrLst/>
@@ -810,8 +954,8 @@
   </dgm:styleLbl>
   <dgm:styleLbl name="bgShp">
     <dgm:fillClrLst meth="repeat">
-      <a:schemeClr val="accent5">
-        <a:tint val="40000"/>
+      <a:schemeClr val="bg1">
+        <a:lumMod val="95000"/>
       </a:schemeClr>
     </dgm:fillClrLst>
     <dgm:linClrLst meth="repeat">
@@ -826,7 +970,7 @@
   </dgm:styleLbl>
   <dgm:styleLbl name="dkBgShp">
     <dgm:fillClrLst meth="repeat">
-      <a:schemeClr val="accent5">
+      <a:schemeClr val="accent2">
         <a:shade val="90000"/>
       </a:schemeClr>
     </dgm:fillClrLst>
@@ -842,13 +986,13 @@
   </dgm:styleLbl>
   <dgm:styleLbl name="trBgShp">
     <dgm:fillClrLst meth="repeat">
-      <a:schemeClr val="accent5">
+      <a:schemeClr val="accent1">
         <a:tint val="50000"/>
         <a:alpha val="40000"/>
       </a:schemeClr>
     </dgm:fillClrLst>
     <dgm:linClrLst meth="repeat">
-      <a:schemeClr val="accent5"/>
+      <a:schemeClr val="accent2"/>
     </dgm:linClrLst>
     <dgm:effectClrLst/>
     <dgm:txLinClrLst/>
@@ -859,7 +1003,7 @@
   </dgm:styleLbl>
   <dgm:styleLbl name="fgShp">
     <dgm:fillClrLst meth="repeat">
-      <a:schemeClr val="accent5">
+      <a:schemeClr val="accent2">
         <a:tint val="40000"/>
       </a:schemeClr>
     </dgm:fillClrLst>
@@ -4578,7 +4722,7 @@
 <dgm:dataModel xmlns:dgm="http://schemas.openxmlformats.org/drawingml/2006/diagram" xmlns:a="http://schemas.openxmlformats.org/drawingml/2006/main">
   <dgm:ptLst>
     <dgm:pt modelId="{AC870B48-507B-458A-8C80-08CFDCCA631F}" type="doc">
-      <dgm:prSet loTypeId="urn:microsoft.com/office/officeart/2005/8/layout/vList2" loCatId="list" qsTypeId="urn:microsoft.com/office/officeart/2005/8/quickstyle/simple4" qsCatId="simple" csTypeId="urn:microsoft.com/office/officeart/2005/8/colors/colorful5" csCatId="colorful"/>
+      <dgm:prSet loTypeId="urn:microsoft.com/office/officeart/2018/2/layout/IconVerticalSolidList" loCatId="icon" qsTypeId="urn:microsoft.com/office/officeart/2005/8/quickstyle/simple1" qsCatId="simple" csTypeId="urn:microsoft.com/office/officeart/2018/5/colors/Iconchunking_neutralbg_colorful1" csCatId="colorful" phldr="1"/>
       <dgm:spPr/>
       <dgm:t>
         <a:bodyPr/>
@@ -4589,17 +4733,69 @@
       </dgm:t>
     </dgm:pt>
     <dgm:pt modelId="{0F8F6F88-00B2-4ABE-8B64-F375B9E7A3D4}">
-      <dgm:prSet/>
+      <dgm:prSet custT="1"/>
       <dgm:spPr/>
       <dgm:t>
         <a:bodyPr/>
         <a:lstStyle/>
         <a:p>
-          <a:r>
-            <a:rPr lang="en-MY"/>
-            <a:t>Dilema Trade-off: Solusi eksak matriks (Normal Equation) vs skalabilitas iteratif (Gradient Descent).</a:t>
-          </a:r>
-          <a:endParaRPr lang="en-US"/>
+          <a:pPr>
+            <a:lnSpc>
+              <a:spcPct val="100000"/>
+            </a:lnSpc>
+          </a:pPr>
+          <a:r>
+            <a:rPr lang="en-MY" sz="2000" b="1" dirty="0" err="1"/>
+            <a:t>Dilema</a:t>
+          </a:r>
+          <a:r>
+            <a:rPr lang="en-MY" sz="2000" b="1" dirty="0"/>
+            <a:t> Trade-off: </a:t>
+          </a:r>
+        </a:p>
+        <a:p>
+          <a:pPr>
+            <a:lnSpc>
+              <a:spcPct val="100000"/>
+            </a:lnSpc>
+          </a:pPr>
+          <a:r>
+            <a:rPr lang="en-MY" sz="2000" dirty="0"/>
+            <a:t>Solusi </a:t>
+          </a:r>
+          <a:r>
+            <a:rPr lang="en-MY" sz="2000" dirty="0" err="1"/>
+            <a:t>eksak</a:t>
+          </a:r>
+          <a:r>
+            <a:rPr lang="en-MY" sz="2000" dirty="0"/>
+            <a:t> </a:t>
+          </a:r>
+          <a:r>
+            <a:rPr lang="en-MY" sz="2000" b="1" dirty="0" err="1"/>
+            <a:t>matriks</a:t>
+          </a:r>
+          <a:r>
+            <a:rPr lang="en-MY" sz="2000" dirty="0"/>
+            <a:t> (Normal Equation) vs </a:t>
+          </a:r>
+          <a:r>
+            <a:rPr lang="en-MY" sz="2000" dirty="0" err="1"/>
+            <a:t>skalabilitas</a:t>
+          </a:r>
+          <a:r>
+            <a:rPr lang="en-MY" sz="2000" dirty="0"/>
+            <a:t> </a:t>
+          </a:r>
+          <a:r>
+            <a:rPr lang="en-MY" sz="2000" b="1" dirty="0" err="1"/>
+            <a:t>iteratif</a:t>
+          </a:r>
+          <a:r>
+            <a:rPr lang="en-MY" sz="2000" dirty="0"/>
+            <a:t> (Gradient Descent).</a:t>
+          </a:r>
+          <a:endParaRPr lang="en-US" sz="2000" dirty="0"/>
         </a:p>
       </dgm:t>
     </dgm:pt>
@@ -4626,17 +4822,102 @@
       </dgm:t>
     </dgm:pt>
     <dgm:pt modelId="{4300B8B2-FA58-4C2E-ACE4-C59B8A2F6336}">
-      <dgm:prSet/>
+      <dgm:prSet custT="1"/>
       <dgm:spPr/>
       <dgm:t>
         <a:bodyPr/>
         <a:lstStyle/>
         <a:p>
-          <a:r>
-            <a:rPr lang="en-MY"/>
-            <a:t>Gap Penelitian: Pengujian di Python mengaburkan konsumsi memori asli perangkat keras; diperlukan implementasi C++ from scratch.</a:t>
-          </a:r>
-          <a:endParaRPr lang="en-US"/>
+          <a:pPr>
+            <a:lnSpc>
+              <a:spcPct val="100000"/>
+            </a:lnSpc>
+          </a:pPr>
+          <a:r>
+            <a:rPr lang="en-MY" sz="2000" b="1" dirty="0"/>
+            <a:t>Gap </a:t>
+          </a:r>
+          <a:r>
+            <a:rPr lang="en-MY" sz="2000" b="1" dirty="0" err="1"/>
+            <a:t>Penelitian</a:t>
+          </a:r>
+          <a:r>
+            <a:rPr lang="en-MY" sz="2000" b="1" dirty="0"/>
+            <a:t>: </a:t>
+          </a:r>
+          <a:r>
+            <a:rPr lang="en-MY" sz="2000" dirty="0" err="1"/>
+            <a:t>Pengujian</a:t>
+          </a:r>
+          <a:r>
+            <a:rPr lang="en-MY" sz="2000" dirty="0"/>
+            <a:t> di Python </a:t>
+          </a:r>
+          <a:r>
+            <a:rPr lang="en-MY" sz="2000" dirty="0" err="1"/>
+            <a:t>menyembunyikan</a:t>
+          </a:r>
+          <a:r>
+            <a:rPr lang="en-MY" sz="2000" dirty="0"/>
+            <a:t> </a:t>
+          </a:r>
+          <a:r>
+            <a:rPr lang="en-MY" sz="2000" dirty="0" err="1"/>
+            <a:t>konsumsi</a:t>
+          </a:r>
+          <a:r>
+            <a:rPr lang="en-MY" sz="2000" dirty="0"/>
+            <a:t> </a:t>
+          </a:r>
+          <a:r>
+            <a:rPr lang="en-MY" sz="2000" dirty="0" err="1"/>
+            <a:t>memori</a:t>
+          </a:r>
+          <a:r>
+            <a:rPr lang="en-MY" sz="2000" dirty="0"/>
+            <a:t> </a:t>
+          </a:r>
+          <a:r>
+            <a:rPr lang="en-MY" sz="2000" dirty="0" err="1"/>
+            <a:t>asli</a:t>
+          </a:r>
+          <a:r>
+            <a:rPr lang="en-MY" sz="2000" dirty="0"/>
+            <a:t> </a:t>
+          </a:r>
+          <a:r>
+            <a:rPr lang="en-MY" sz="2000" dirty="0" err="1"/>
+            <a:t>perangkat</a:t>
+          </a:r>
+          <a:r>
+            <a:rPr lang="en-MY" sz="2000" dirty="0"/>
+            <a:t> </a:t>
+          </a:r>
+          <a:r>
+            <a:rPr lang="en-MY" sz="2000" dirty="0" err="1"/>
+            <a:t>keras</a:t>
+          </a:r>
+          <a:r>
+            <a:rPr lang="en-MY" sz="2000" dirty="0"/>
+            <a:t>; </a:t>
+          </a:r>
+          <a:r>
+            <a:rPr lang="en-MY" sz="2000" dirty="0" err="1"/>
+            <a:t>diperlukan</a:t>
+          </a:r>
+          <a:r>
+            <a:rPr lang="en-MY" sz="2000" dirty="0"/>
+            <a:t> </a:t>
+          </a:r>
+          <a:r>
+            <a:rPr lang="en-MY" sz="2000" dirty="0" err="1"/>
+            <a:t>implementasi</a:t>
+          </a:r>
+          <a:r>
+            <a:rPr lang="en-MY" sz="2000" dirty="0"/>
+            <a:t> C++ from scratch.</a:t>
+          </a:r>
+          <a:endParaRPr lang="en-US" sz="2000" dirty="0"/>
         </a:p>
       </dgm:t>
     </dgm:pt>
@@ -4663,17 +4944,78 @@
       </dgm:t>
     </dgm:pt>
     <dgm:pt modelId="{ED83162A-F95E-4713-ABE7-745E368DE450}">
-      <dgm:prSet/>
+      <dgm:prSet custT="1"/>
       <dgm:spPr/>
       <dgm:t>
         <a:bodyPr/>
         <a:lstStyle/>
         <a:p>
-          <a:r>
-            <a:rPr lang="en-MY"/>
-            <a:t>Tujuan: Menguji efisiensi memori/waktu, pengaruh early stopping, dan dampak multikolinearitas.</a:t>
-          </a:r>
-          <a:endParaRPr lang="en-US"/>
+          <a:pPr>
+            <a:lnSpc>
+              <a:spcPct val="100000"/>
+            </a:lnSpc>
+          </a:pPr>
+          <a:r>
+            <a:rPr lang="en-MY" sz="2000" b="1" dirty="0"/>
+            <a:t>Tujuan : </a:t>
+          </a:r>
+          <a:r>
+            <a:rPr lang="en-MY" sz="2000" dirty="0" err="1"/>
+            <a:t>Menguji</a:t>
+          </a:r>
+          <a:r>
+            <a:rPr lang="en-MY" sz="2000" dirty="0"/>
+            <a:t> </a:t>
+          </a:r>
+          <a:r>
+            <a:rPr lang="en-MY" sz="2000" dirty="0" err="1"/>
+            <a:t>efisiensi</a:t>
+          </a:r>
+          <a:r>
+            <a:rPr lang="en-MY" sz="2000" dirty="0"/>
+            <a:t> </a:t>
+          </a:r>
+          <a:r>
+            <a:rPr lang="en-MY" sz="2000" dirty="0" err="1"/>
+            <a:t>memori</a:t>
+          </a:r>
+          <a:r>
+            <a:rPr lang="en-MY" sz="2000" dirty="0"/>
+            <a:t>/</a:t>
+          </a:r>
+          <a:r>
+            <a:rPr lang="en-MY" sz="2000" dirty="0" err="1"/>
+            <a:t>waktu</a:t>
+          </a:r>
+          <a:r>
+            <a:rPr lang="en-MY" sz="2000" dirty="0"/>
+            <a:t>, </a:t>
+          </a:r>
+          <a:r>
+            <a:rPr lang="en-MY" sz="2000" dirty="0" err="1"/>
+            <a:t>pengaruh</a:t>
+          </a:r>
+          <a:r>
+            <a:rPr lang="en-MY" sz="2000" dirty="0"/>
+            <a:t> early stopping, dan </a:t>
+          </a:r>
+          <a:r>
+            <a:rPr lang="en-MY" sz="2000" dirty="0" err="1"/>
+            <a:t>dampak</a:t>
+          </a:r>
+          <a:r>
+            <a:rPr lang="en-MY" sz="2000" dirty="0"/>
+            <a:t> </a:t>
+          </a:r>
+          <a:r>
+            <a:rPr lang="en-MY" sz="2000" dirty="0" err="1"/>
+            <a:t>multikolinearitas</a:t>
+          </a:r>
+          <a:r>
+            <a:rPr lang="en-MY" sz="2000" dirty="0"/>
+            <a:t>.</a:t>
+          </a:r>
+          <a:endParaRPr lang="en-US" sz="2000" dirty="0"/>
         </a:p>
       </dgm:t>
     </dgm:pt>
@@ -4699,64 +5041,196 @@
         </a:p>
       </dgm:t>
     </dgm:pt>
-    <dgm:pt modelId="{FD2B77F2-5B65-467F-8A5E-9F94444D1BDE}" type="pres">
-      <dgm:prSet presAssocID="{AC870B48-507B-458A-8C80-08CFDCCA631F}" presName="linear" presStyleCnt="0">
+    <dgm:pt modelId="{9E96310E-6D4F-4A91-93AA-237162098B5E}" type="pres">
+      <dgm:prSet presAssocID="{AC870B48-507B-458A-8C80-08CFDCCA631F}" presName="root" presStyleCnt="0">
         <dgm:presLayoutVars>
-          <dgm:animLvl val="lvl"/>
+          <dgm:dir/>
           <dgm:resizeHandles val="exact"/>
         </dgm:presLayoutVars>
       </dgm:prSet>
       <dgm:spPr/>
     </dgm:pt>
-    <dgm:pt modelId="{6097716C-6079-41F4-A56F-26DECA8AF27F}" type="pres">
-      <dgm:prSet presAssocID="{0F8F6F88-00B2-4ABE-8B64-F375B9E7A3D4}" presName="parentText" presStyleLbl="node1" presStyleIdx="0" presStyleCnt="3">
+    <dgm:pt modelId="{B6B3D869-AB00-461D-9A74-FA075C2434F1}" type="pres">
+      <dgm:prSet presAssocID="{0F8F6F88-00B2-4ABE-8B64-F375B9E7A3D4}" presName="compNode" presStyleCnt="0"/>
+      <dgm:spPr/>
+    </dgm:pt>
+    <dgm:pt modelId="{AD48C167-F52A-42FD-AFD4-60B7F33272E7}" type="pres">
+      <dgm:prSet presAssocID="{0F8F6F88-00B2-4ABE-8B64-F375B9E7A3D4}" presName="bgRect" presStyleLbl="bgShp" presStyleIdx="0" presStyleCnt="3"/>
+      <dgm:spPr/>
+    </dgm:pt>
+    <dgm:pt modelId="{4DEC03B9-1E7C-4836-80F4-7A454FF6216B}" type="pres">
+      <dgm:prSet presAssocID="{0F8F6F88-00B2-4ABE-8B64-F375B9E7A3D4}" presName="iconRect" presStyleLbl="node1" presStyleIdx="0" presStyleCnt="3"/>
+      <dgm:spPr>
+        <a:blipFill>
+          <a:blip xmlns:r="http://schemas.openxmlformats.org/officeDocument/2006/relationships">
+            <a:extLst>
+              <a:ext uri="{28A0092B-C50C-407E-A947-70E740481C1C}">
+                <a14:useLocalDpi xmlns:a14="http://schemas.microsoft.com/office/drawing/2010/main" val="0"/>
+              </a:ext>
+              <a:ext uri="{96DAC541-7B7A-43D3-8B79-37D633B846F1}">
+                <asvg:svgBlip xmlns:asvg="http://schemas.microsoft.com/office/drawing/2016/SVG/main" r:embed="rId1"/>
+              </a:ext>
+            </a:extLst>
+          </a:blip>
+          <a:stretch>
+            <a:fillRect/>
+          </a:stretch>
+        </a:blipFill>
+        <a:ln>
+          <a:noFill/>
+        </a:ln>
+      </dgm:spPr>
+      <dgm:extLst>
+        <a:ext uri="{E40237B7-FDA0-4F09-8148-C483321AD2D9}">
+          <dgm14:cNvPr xmlns:dgm14="http://schemas.microsoft.com/office/drawing/2010/diagram" id="0" name="" descr="Kiosk"/>
+        </a:ext>
+      </dgm:extLst>
+    </dgm:pt>
+    <dgm:pt modelId="{3849AA41-60BA-44EF-9C76-347AC01C9323}" type="pres">
+      <dgm:prSet presAssocID="{0F8F6F88-00B2-4ABE-8B64-F375B9E7A3D4}" presName="spaceRect" presStyleCnt="0"/>
+      <dgm:spPr/>
+    </dgm:pt>
+    <dgm:pt modelId="{55657922-8308-43AA-8A9E-B2DC00C81DD8}" type="pres">
+      <dgm:prSet presAssocID="{0F8F6F88-00B2-4ABE-8B64-F375B9E7A3D4}" presName="parTx" presStyleLbl="revTx" presStyleIdx="0" presStyleCnt="3">
         <dgm:presLayoutVars>
           <dgm:chMax val="0"/>
-          <dgm:bulletEnabled val="1"/>
+          <dgm:chPref val="0"/>
         </dgm:presLayoutVars>
       </dgm:prSet>
       <dgm:spPr/>
     </dgm:pt>
-    <dgm:pt modelId="{79767C66-06B4-4ACC-B053-AFCAA0D3BB43}" type="pres">
-      <dgm:prSet presAssocID="{A832AE6E-EB1B-4099-BF0F-1AAEC7C7617C}" presName="spacer" presStyleCnt="0"/>
+    <dgm:pt modelId="{96004E22-60D7-406E-9BCA-7A8684016C4B}" type="pres">
+      <dgm:prSet presAssocID="{A832AE6E-EB1B-4099-BF0F-1AAEC7C7617C}" presName="sibTrans" presStyleCnt="0"/>
       <dgm:spPr/>
     </dgm:pt>
-    <dgm:pt modelId="{7EE2F781-AB50-4E75-8E21-C0F78219196E}" type="pres">
-      <dgm:prSet presAssocID="{4300B8B2-FA58-4C2E-ACE4-C59B8A2F6336}" presName="parentText" presStyleLbl="node1" presStyleIdx="1" presStyleCnt="3">
+    <dgm:pt modelId="{39AF2591-4A53-42A0-B98B-414C35ECD160}" type="pres">
+      <dgm:prSet presAssocID="{4300B8B2-FA58-4C2E-ACE4-C59B8A2F6336}" presName="compNode" presStyleCnt="0"/>
+      <dgm:spPr/>
+    </dgm:pt>
+    <dgm:pt modelId="{8926147B-A5C1-473C-9EFD-C8EEA6F43891}" type="pres">
+      <dgm:prSet presAssocID="{4300B8B2-FA58-4C2E-ACE4-C59B8A2F6336}" presName="bgRect" presStyleLbl="bgShp" presStyleIdx="1" presStyleCnt="3"/>
+      <dgm:spPr/>
+    </dgm:pt>
+    <dgm:pt modelId="{F1C7955C-A588-43FC-BE3D-D3EB9119B3F7}" type="pres">
+      <dgm:prSet presAssocID="{4300B8B2-FA58-4C2E-ACE4-C59B8A2F6336}" presName="iconRect" presStyleLbl="node1" presStyleIdx="1" presStyleCnt="3"/>
+      <dgm:spPr>
+        <a:blipFill>
+          <a:blip xmlns:r="http://schemas.openxmlformats.org/officeDocument/2006/relationships">
+            <a:extLst>
+              <a:ext uri="{28A0092B-C50C-407E-A947-70E740481C1C}">
+                <a14:useLocalDpi xmlns:a14="http://schemas.microsoft.com/office/drawing/2010/main" val="0"/>
+              </a:ext>
+              <a:ext uri="{96DAC541-7B7A-43D3-8B79-37D633B846F1}">
+                <asvg:svgBlip xmlns:asvg="http://schemas.microsoft.com/office/drawing/2016/SVG/main" r:embed="rId2"/>
+              </a:ext>
+            </a:extLst>
+          </a:blip>
+          <a:stretch>
+            <a:fillRect/>
+          </a:stretch>
+        </a:blipFill>
+        <a:ln>
+          <a:noFill/>
+        </a:ln>
+      </dgm:spPr>
+      <dgm:extLst>
+        <a:ext uri="{E40237B7-FDA0-4F09-8148-C483321AD2D9}">
+          <dgm14:cNvPr xmlns:dgm14="http://schemas.microsoft.com/office/drawing/2010/diagram" id="0" name="" descr="Questions"/>
+        </a:ext>
+      </dgm:extLst>
+    </dgm:pt>
+    <dgm:pt modelId="{51DE4EFC-5AAC-480E-BF91-507E1083136C}" type="pres">
+      <dgm:prSet presAssocID="{4300B8B2-FA58-4C2E-ACE4-C59B8A2F6336}" presName="spaceRect" presStyleCnt="0"/>
+      <dgm:spPr/>
+    </dgm:pt>
+    <dgm:pt modelId="{E39A09DD-E5D5-4996-9D38-052E284C1266}" type="pres">
+      <dgm:prSet presAssocID="{4300B8B2-FA58-4C2E-ACE4-C59B8A2F6336}" presName="parTx" presStyleLbl="revTx" presStyleIdx="1" presStyleCnt="3">
         <dgm:presLayoutVars>
           <dgm:chMax val="0"/>
-          <dgm:bulletEnabled val="1"/>
+          <dgm:chPref val="0"/>
         </dgm:presLayoutVars>
       </dgm:prSet>
       <dgm:spPr/>
     </dgm:pt>
-    <dgm:pt modelId="{6A8514DF-9D03-4562-A861-C4BA21ED236E}" type="pres">
-      <dgm:prSet presAssocID="{E462BDE3-B142-4AF4-8828-1047ABE7BCDC}" presName="spacer" presStyleCnt="0"/>
+    <dgm:pt modelId="{D22F3576-0EC3-4AC0-ADBA-6FE2E656A8B7}" type="pres">
+      <dgm:prSet presAssocID="{E462BDE3-B142-4AF4-8828-1047ABE7BCDC}" presName="sibTrans" presStyleCnt="0"/>
       <dgm:spPr/>
     </dgm:pt>
-    <dgm:pt modelId="{371B4E9F-BFFB-485B-BF51-2292FD6BC875}" type="pres">
-      <dgm:prSet presAssocID="{ED83162A-F95E-4713-ABE7-745E368DE450}" presName="parentText" presStyleLbl="node1" presStyleIdx="2" presStyleCnt="3">
+    <dgm:pt modelId="{C30E971C-3248-4666-AD70-6156ADB1B195}" type="pres">
+      <dgm:prSet presAssocID="{ED83162A-F95E-4713-ABE7-745E368DE450}" presName="compNode" presStyleCnt="0"/>
+      <dgm:spPr/>
+    </dgm:pt>
+    <dgm:pt modelId="{23D7E6AE-550D-46B6-90A7-BF72802B0DC1}" type="pres">
+      <dgm:prSet presAssocID="{ED83162A-F95E-4713-ABE7-745E368DE450}" presName="bgRect" presStyleLbl="bgShp" presStyleIdx="2" presStyleCnt="3"/>
+      <dgm:spPr/>
+    </dgm:pt>
+    <dgm:pt modelId="{93120592-EE62-4ED8-9E95-E5A85C72BA82}" type="pres">
+      <dgm:prSet presAssocID="{ED83162A-F95E-4713-ABE7-745E368DE450}" presName="iconRect" presStyleLbl="node1" presStyleIdx="2" presStyleCnt="3"/>
+      <dgm:spPr>
+        <a:blipFill>
+          <a:blip xmlns:r="http://schemas.openxmlformats.org/officeDocument/2006/relationships">
+            <a:extLst>
+              <a:ext uri="{28A0092B-C50C-407E-A947-70E740481C1C}">
+                <a14:useLocalDpi xmlns:a14="http://schemas.microsoft.com/office/drawing/2010/main" val="0"/>
+              </a:ext>
+              <a:ext uri="{96DAC541-7B7A-43D3-8B79-37D633B846F1}">
+                <asvg:svgBlip xmlns:asvg="http://schemas.microsoft.com/office/drawing/2016/SVG/main" r:embed="rId3"/>
+              </a:ext>
+            </a:extLst>
+          </a:blip>
+          <a:stretch>
+            <a:fillRect/>
+          </a:stretch>
+        </a:blipFill>
+        <a:ln>
+          <a:noFill/>
+        </a:ln>
+      </dgm:spPr>
+      <dgm:extLst>
+        <a:ext uri="{E40237B7-FDA0-4F09-8148-C483321AD2D9}">
+          <dgm14:cNvPr xmlns:dgm14="http://schemas.microsoft.com/office/drawing/2010/diagram" id="0" name="" descr="Flowchart"/>
+        </a:ext>
+      </dgm:extLst>
+    </dgm:pt>
+    <dgm:pt modelId="{8F84734D-DDFD-4A64-A3A1-C99430EAED0A}" type="pres">
+      <dgm:prSet presAssocID="{ED83162A-F95E-4713-ABE7-745E368DE450}" presName="spaceRect" presStyleCnt="0"/>
+      <dgm:spPr/>
+    </dgm:pt>
+    <dgm:pt modelId="{09AE00A1-5CD1-429D-942E-DD2C7A5E2F9A}" type="pres">
+      <dgm:prSet presAssocID="{ED83162A-F95E-4713-ABE7-745E368DE450}" presName="parTx" presStyleLbl="revTx" presStyleIdx="2" presStyleCnt="3">
         <dgm:presLayoutVars>
           <dgm:chMax val="0"/>
-          <dgm:bulletEnabled val="1"/>
+          <dgm:chPref val="0"/>
         </dgm:presLayoutVars>
       </dgm:prSet>
       <dgm:spPr/>
     </dgm:pt>
   </dgm:ptLst>
   <dgm:cxnLst>
-    <dgm:cxn modelId="{CD1A4526-1B76-45CC-9DB3-C848864F8B65}" type="presOf" srcId="{0F8F6F88-00B2-4ABE-8B64-F375B9E7A3D4}" destId="{6097716C-6079-41F4-A56F-26DECA8AF27F}" srcOrd="0" destOrd="0" presId="urn:microsoft.com/office/officeart/2005/8/layout/vList2"/>
+    <dgm:cxn modelId="{6ABBEF24-143B-4956-B47B-CBB6617F04C1}" type="presOf" srcId="{0F8F6F88-00B2-4ABE-8B64-F375B9E7A3D4}" destId="{55657922-8308-43AA-8A9E-B2DC00C81DD8}" srcOrd="0" destOrd="0" presId="urn:microsoft.com/office/officeart/2018/2/layout/IconVerticalSolidList"/>
     <dgm:cxn modelId="{5D614663-E603-4719-8D3A-F9D428D775DD}" srcId="{AC870B48-507B-458A-8C80-08CFDCCA631F}" destId="{ED83162A-F95E-4713-ABE7-745E368DE450}" srcOrd="2" destOrd="0" parTransId="{F08DE496-08C5-4C42-8268-BEF9B7E11AE8}" sibTransId="{75BEC03A-39A0-42A9-A308-71E0C83C11D1}"/>
     <dgm:cxn modelId="{A1B7B46A-1D0A-4B96-9A2B-E27B7606B1EF}" srcId="{AC870B48-507B-458A-8C80-08CFDCCA631F}" destId="{4300B8B2-FA58-4C2E-ACE4-C59B8A2F6336}" srcOrd="1" destOrd="0" parTransId="{4A4A902D-484A-4A4E-94D7-2884759BFBF4}" sibTransId="{E462BDE3-B142-4AF4-8828-1047ABE7BCDC}"/>
-    <dgm:cxn modelId="{DAB01D73-B725-440B-8D52-F05FFF4815C8}" type="presOf" srcId="{AC870B48-507B-458A-8C80-08CFDCCA631F}" destId="{FD2B77F2-5B65-467F-8A5E-9F94444D1BDE}" srcOrd="0" destOrd="0" presId="urn:microsoft.com/office/officeart/2005/8/layout/vList2"/>
+    <dgm:cxn modelId="{0C05F18C-DF7A-4BEE-96D4-7FF3CAC144AC}" type="presOf" srcId="{4300B8B2-FA58-4C2E-ACE4-C59B8A2F6336}" destId="{E39A09DD-E5D5-4996-9D38-052E284C1266}" srcOrd="0" destOrd="0" presId="urn:microsoft.com/office/officeart/2018/2/layout/IconVerticalSolidList"/>
+    <dgm:cxn modelId="{6222FC8D-62C4-44F4-B4A3-5A505AFD4A01}" type="presOf" srcId="{ED83162A-F95E-4713-ABE7-745E368DE450}" destId="{09AE00A1-5CD1-429D-942E-DD2C7A5E2F9A}" srcOrd="0" destOrd="0" presId="urn:microsoft.com/office/officeart/2018/2/layout/IconVerticalSolidList"/>
     <dgm:cxn modelId="{69943796-4B40-461B-AAE1-B3E27965FB7F}" srcId="{AC870B48-507B-458A-8C80-08CFDCCA631F}" destId="{0F8F6F88-00B2-4ABE-8B64-F375B9E7A3D4}" srcOrd="0" destOrd="0" parTransId="{73E61437-D2F7-45E2-BADF-3A94F03C3478}" sibTransId="{A832AE6E-EB1B-4099-BF0F-1AAEC7C7617C}"/>
-    <dgm:cxn modelId="{2F2D9FB1-2F8A-4CA5-862F-3F2EC6476E0A}" type="presOf" srcId="{ED83162A-F95E-4713-ABE7-745E368DE450}" destId="{371B4E9F-BFFB-485B-BF51-2292FD6BC875}" srcOrd="0" destOrd="0" presId="urn:microsoft.com/office/officeart/2005/8/layout/vList2"/>
-    <dgm:cxn modelId="{150D92E6-8D53-4D8B-B50D-611CEC5A108D}" type="presOf" srcId="{4300B8B2-FA58-4C2E-ACE4-C59B8A2F6336}" destId="{7EE2F781-AB50-4E75-8E21-C0F78219196E}" srcOrd="0" destOrd="0" presId="urn:microsoft.com/office/officeart/2005/8/layout/vList2"/>
-    <dgm:cxn modelId="{A15A9FEF-0F0B-49AA-8850-A5C0C7AC251A}" type="presParOf" srcId="{FD2B77F2-5B65-467F-8A5E-9F94444D1BDE}" destId="{6097716C-6079-41F4-A56F-26DECA8AF27F}" srcOrd="0" destOrd="0" presId="urn:microsoft.com/office/officeart/2005/8/layout/vList2"/>
-    <dgm:cxn modelId="{FA764D1F-7186-4089-873A-41A28D51FB81}" type="presParOf" srcId="{FD2B77F2-5B65-467F-8A5E-9F94444D1BDE}" destId="{79767C66-06B4-4ACC-B053-AFCAA0D3BB43}" srcOrd="1" destOrd="0" presId="urn:microsoft.com/office/officeart/2005/8/layout/vList2"/>
-    <dgm:cxn modelId="{EF89D051-94B8-4A92-B67C-00C4218C4ECD}" type="presParOf" srcId="{FD2B77F2-5B65-467F-8A5E-9F94444D1BDE}" destId="{7EE2F781-AB50-4E75-8E21-C0F78219196E}" srcOrd="2" destOrd="0" presId="urn:microsoft.com/office/officeart/2005/8/layout/vList2"/>
-    <dgm:cxn modelId="{20649E65-5932-40A4-9B42-047649E2E97B}" type="presParOf" srcId="{FD2B77F2-5B65-467F-8A5E-9F94444D1BDE}" destId="{6A8514DF-9D03-4562-A861-C4BA21ED236E}" srcOrd="3" destOrd="0" presId="urn:microsoft.com/office/officeart/2005/8/layout/vList2"/>
-    <dgm:cxn modelId="{4E71BA1C-2AA9-4B76-A35D-1ACA8A06A38F}" type="presParOf" srcId="{FD2B77F2-5B65-467F-8A5E-9F94444D1BDE}" destId="{371B4E9F-BFFB-485B-BF51-2292FD6BC875}" srcOrd="4" destOrd="0" presId="urn:microsoft.com/office/officeart/2005/8/layout/vList2"/>
+    <dgm:cxn modelId="{C80709E4-51F4-4228-996B-B8F5C214C2A1}" type="presOf" srcId="{AC870B48-507B-458A-8C80-08CFDCCA631F}" destId="{9E96310E-6D4F-4A91-93AA-237162098B5E}" srcOrd="0" destOrd="0" presId="urn:microsoft.com/office/officeart/2018/2/layout/IconVerticalSolidList"/>
+    <dgm:cxn modelId="{DC351E7A-FA77-4194-B768-56C1F892E62D}" type="presParOf" srcId="{9E96310E-6D4F-4A91-93AA-237162098B5E}" destId="{B6B3D869-AB00-461D-9A74-FA075C2434F1}" srcOrd="0" destOrd="0" presId="urn:microsoft.com/office/officeart/2018/2/layout/IconVerticalSolidList"/>
+    <dgm:cxn modelId="{53E9BB91-A3B1-45BD-927E-B4286F130883}" type="presParOf" srcId="{B6B3D869-AB00-461D-9A74-FA075C2434F1}" destId="{AD48C167-F52A-42FD-AFD4-60B7F33272E7}" srcOrd="0" destOrd="0" presId="urn:microsoft.com/office/officeart/2018/2/layout/IconVerticalSolidList"/>
+    <dgm:cxn modelId="{606D549A-DF58-4634-9ED4-321BCC4412EA}" type="presParOf" srcId="{B6B3D869-AB00-461D-9A74-FA075C2434F1}" destId="{4DEC03B9-1E7C-4836-80F4-7A454FF6216B}" srcOrd="1" destOrd="0" presId="urn:microsoft.com/office/officeart/2018/2/layout/IconVerticalSolidList"/>
+    <dgm:cxn modelId="{30C9DAEB-A46C-4C80-92BD-AD37ABF6FDBB}" type="presParOf" srcId="{B6B3D869-AB00-461D-9A74-FA075C2434F1}" destId="{3849AA41-60BA-44EF-9C76-347AC01C9323}" srcOrd="2" destOrd="0" presId="urn:microsoft.com/office/officeart/2018/2/layout/IconVerticalSolidList"/>
+    <dgm:cxn modelId="{53CFAE2F-54AA-434C-8E79-4C149D211549}" type="presParOf" srcId="{B6B3D869-AB00-461D-9A74-FA075C2434F1}" destId="{55657922-8308-43AA-8A9E-B2DC00C81DD8}" srcOrd="3" destOrd="0" presId="urn:microsoft.com/office/officeart/2018/2/layout/IconVerticalSolidList"/>
+    <dgm:cxn modelId="{A1DD7A9C-AEAA-4A3C-8D38-A1FA3854105C}" type="presParOf" srcId="{9E96310E-6D4F-4A91-93AA-237162098B5E}" destId="{96004E22-60D7-406E-9BCA-7A8684016C4B}" srcOrd="1" destOrd="0" presId="urn:microsoft.com/office/officeart/2018/2/layout/IconVerticalSolidList"/>
+    <dgm:cxn modelId="{F815BD98-C303-4DF4-837C-19B2CCF4D834}" type="presParOf" srcId="{9E96310E-6D4F-4A91-93AA-237162098B5E}" destId="{39AF2591-4A53-42A0-B98B-414C35ECD160}" srcOrd="2" destOrd="0" presId="urn:microsoft.com/office/officeart/2018/2/layout/IconVerticalSolidList"/>
+    <dgm:cxn modelId="{24E38B89-3DA8-44ED-BF85-824CC09DE3B8}" type="presParOf" srcId="{39AF2591-4A53-42A0-B98B-414C35ECD160}" destId="{8926147B-A5C1-473C-9EFD-C8EEA6F43891}" srcOrd="0" destOrd="0" presId="urn:microsoft.com/office/officeart/2018/2/layout/IconVerticalSolidList"/>
+    <dgm:cxn modelId="{0CBFF33F-54BE-4009-AEEF-6E511C1628C1}" type="presParOf" srcId="{39AF2591-4A53-42A0-B98B-414C35ECD160}" destId="{F1C7955C-A588-43FC-BE3D-D3EB9119B3F7}" srcOrd="1" destOrd="0" presId="urn:microsoft.com/office/officeart/2018/2/layout/IconVerticalSolidList"/>
+    <dgm:cxn modelId="{30D5338A-1104-4E42-BC52-64FC9FD6DB78}" type="presParOf" srcId="{39AF2591-4A53-42A0-B98B-414C35ECD160}" destId="{51DE4EFC-5AAC-480E-BF91-507E1083136C}" srcOrd="2" destOrd="0" presId="urn:microsoft.com/office/officeart/2018/2/layout/IconVerticalSolidList"/>
+    <dgm:cxn modelId="{69B41003-45CB-416F-B0AB-F83F685DB7FC}" type="presParOf" srcId="{39AF2591-4A53-42A0-B98B-414C35ECD160}" destId="{E39A09DD-E5D5-4996-9D38-052E284C1266}" srcOrd="3" destOrd="0" presId="urn:microsoft.com/office/officeart/2018/2/layout/IconVerticalSolidList"/>
+    <dgm:cxn modelId="{8CF13A31-F5C8-4655-871E-B378F5D82CFF}" type="presParOf" srcId="{9E96310E-6D4F-4A91-93AA-237162098B5E}" destId="{D22F3576-0EC3-4AC0-ADBA-6FE2E656A8B7}" srcOrd="3" destOrd="0" presId="urn:microsoft.com/office/officeart/2018/2/layout/IconVerticalSolidList"/>
+    <dgm:cxn modelId="{B4583020-810D-4BFD-A135-FDA62D4CC515}" type="presParOf" srcId="{9E96310E-6D4F-4A91-93AA-237162098B5E}" destId="{C30E971C-3248-4666-AD70-6156ADB1B195}" srcOrd="4" destOrd="0" presId="urn:microsoft.com/office/officeart/2018/2/layout/IconVerticalSolidList"/>
+    <dgm:cxn modelId="{3D94936F-48BB-4804-B34C-D8D1D4EF93B8}" type="presParOf" srcId="{C30E971C-3248-4666-AD70-6156ADB1B195}" destId="{23D7E6AE-550D-46B6-90A7-BF72802B0DC1}" srcOrd="0" destOrd="0" presId="urn:microsoft.com/office/officeart/2018/2/layout/IconVerticalSolidList"/>
+    <dgm:cxn modelId="{2F6AA76B-BF78-4FC2-8C70-A823021E3110}" type="presParOf" srcId="{C30E971C-3248-4666-AD70-6156ADB1B195}" destId="{93120592-EE62-4ED8-9E95-E5A85C72BA82}" srcOrd="1" destOrd="0" presId="urn:microsoft.com/office/officeart/2018/2/layout/IconVerticalSolidList"/>
+    <dgm:cxn modelId="{9A813ABF-D918-450F-9B3F-379CFA360756}" type="presParOf" srcId="{C30E971C-3248-4666-AD70-6156ADB1B195}" destId="{8F84734D-DDFD-4A64-A3A1-C99430EAED0A}" srcOrd="2" destOrd="0" presId="urn:microsoft.com/office/officeart/2018/2/layout/IconVerticalSolidList"/>
+    <dgm:cxn modelId="{541B99A1-8EC7-4A36-A269-EB0E90429DE1}" type="presParOf" srcId="{C30E971C-3248-4666-AD70-6156ADB1B195}" destId="{09AE00A1-5CD1-429D-942E-DD2C7A5E2F9A}" srcOrd="3" destOrd="0" presId="urn:microsoft.com/office/officeart/2018/2/layout/IconVerticalSolidList"/>
   </dgm:cxnLst>
   <dgm:bg/>
   <dgm:whole/>
@@ -4918,93 +5392,101 @@
       </dgm:t>
     </dgm:pt>
     <dgm:pt modelId="{7E54C3E0-CF33-4C95-B562-1317CC6D852A}">
-      <dgm:prSet/>
+      <dgm:prSet custT="1"/>
       <dgm:spPr/>
       <dgm:t>
         <a:bodyPr/>
         <a:lstStyle/>
         <a:p>
           <a:r>
-            <a:rPr lang="en-MY" dirty="0" err="1"/>
+            <a:rPr lang="en-MY" sz="2800" b="1" dirty="0" err="1"/>
             <a:t>Cepat</a:t>
           </a:r>
           <a:r>
-            <a:rPr lang="en-MY" dirty="0"/>
+            <a:rPr lang="en-MY" sz="2800" dirty="0"/>
             <a:t> </a:t>
           </a:r>
           <a:r>
-            <a:rPr lang="en-MY" dirty="0" err="1"/>
+            <a:rPr lang="en-MY" sz="2800" dirty="0" err="1"/>
             <a:t>untuk</a:t>
           </a:r>
           <a:r>
-            <a:rPr lang="en-MY" dirty="0"/>
+            <a:rPr lang="en-MY" sz="2800" dirty="0"/>
             <a:t> </a:t>
           </a:r>
           <a:r>
-            <a:rPr lang="en-MY" dirty="0" err="1"/>
+            <a:rPr lang="en-MY" sz="2800" dirty="0" err="1"/>
             <a:t>fitur</a:t>
           </a:r>
           <a:r>
-            <a:rPr lang="en-MY" dirty="0"/>
+            <a:rPr lang="en-MY" sz="2800" dirty="0"/>
             <a:t> </a:t>
           </a:r>
           <a:r>
-            <a:rPr lang="en-MY" dirty="0" err="1"/>
+            <a:rPr lang="en-MY" sz="2800" dirty="0" err="1"/>
             <a:t>sedikit</a:t>
           </a:r>
           <a:r>
-            <a:rPr lang="en-MY" dirty="0"/>
+            <a:rPr lang="en-MY" sz="2800" dirty="0"/>
             <a:t>, </a:t>
           </a:r>
           <a:r>
-            <a:rPr lang="en-MY" dirty="0" err="1"/>
+            <a:rPr lang="en-MY" sz="2800" dirty="0" err="1"/>
             <a:t>namun</a:t>
           </a:r>
           <a:r>
-            <a:rPr lang="en-MY" dirty="0"/>
+            <a:rPr lang="en-MY" sz="2800" dirty="0"/>
             <a:t> </a:t>
           </a:r>
           <a:r>
-            <a:rPr lang="en-MY" dirty="0" err="1"/>
+            <a:rPr lang="en-MY" sz="2800" dirty="0" err="1"/>
             <a:t>gagal</a:t>
           </a:r>
           <a:r>
-            <a:rPr lang="en-MY" dirty="0"/>
+            <a:rPr lang="en-MY" sz="2800" dirty="0"/>
             <a:t> </a:t>
           </a:r>
           <a:r>
-            <a:rPr lang="en-MY" dirty="0" err="1"/>
+            <a:rPr lang="en-MY" sz="2800" dirty="0" err="1"/>
             <a:t>jika</a:t>
           </a:r>
           <a:r>
-            <a:rPr lang="en-MY" dirty="0"/>
+            <a:rPr lang="en-MY" sz="2800" dirty="0"/>
             <a:t> </a:t>
           </a:r>
           <a:r>
-            <a:rPr lang="en-MY" dirty="0" err="1"/>
+            <a:rPr lang="en-MY" sz="2800" dirty="0" err="1"/>
             <a:t>matriks</a:t>
           </a:r>
           <a:r>
-            <a:rPr lang="en-MY" dirty="0"/>
-            <a:t> singular (</a:t>
-          </a:r>
-          <a:r>
-            <a:rPr lang="en-MY" dirty="0" err="1"/>
+            <a:rPr lang="en-MY" sz="2800" dirty="0"/>
+            <a:t> </a:t>
+          </a:r>
+          <a:r>
+            <a:rPr lang="en-MY" sz="2800" b="1" dirty="0"/>
+            <a:t>singular</a:t>
+          </a:r>
+          <a:r>
+            <a:rPr lang="en-MY" sz="2800" dirty="0"/>
+            <a:t> (</a:t>
+          </a:r>
+          <a:r>
+            <a:rPr lang="en-MY" sz="2800" dirty="0" err="1"/>
             <a:t>determinan</a:t>
           </a:r>
           <a:r>
-            <a:rPr lang="en-MY" dirty="0"/>
+            <a:rPr lang="en-MY" sz="2800" dirty="0"/>
             <a:t> </a:t>
           </a:r>
           <a:r>
-            <a:rPr lang="en-MY" dirty="0" err="1"/>
+            <a:rPr lang="en-MY" sz="2800" dirty="0" err="1"/>
             <a:t>nol</a:t>
           </a:r>
           <a:r>
-            <a:rPr lang="en-MY" dirty="0"/>
+            <a:rPr lang="en-MY" sz="2800" dirty="0"/>
             <a:t>).</a:t>
           </a:r>
-          <a:endParaRPr lang="en-US" dirty="0"/>
+          <a:endParaRPr lang="en-US" sz="2800" dirty="0"/>
         </a:p>
       </dgm:t>
     </dgm:pt>
@@ -5038,7 +5520,7 @@
         <a:lstStyle/>
         <a:p>
           <a:r>
-            <a:rPr lang="en-MY" dirty="0" err="1"/>
+            <a:rPr lang="en-MY" b="1" dirty="0" err="1"/>
             <a:t>Skalabel</a:t>
           </a:r>
           <a:r>
@@ -5091,7 +5573,15 @@
           </a:r>
           <a:r>
             <a:rPr lang="en-MY" dirty="0"/>
-            <a:t> learning rate.</a:t>
+            <a:t> </a:t>
+          </a:r>
+          <a:r>
+            <a:rPr lang="en-MY" b="1" dirty="0"/>
+            <a:t>learning rate</a:t>
+          </a:r>
+          <a:r>
+            <a:rPr lang="en-MY" dirty="0"/>
+            <a:t>.</a:t>
           </a:r>
           <a:endParaRPr lang="en-US" dirty="0"/>
         </a:p>
@@ -5127,8 +5617,52 @@
         <a:lstStyle/>
         <a:p>
           <a:r>
-            <a:rPr lang="en-MY"/>
-            <a:t>Beban komputasi tinggi di awal (Grid Search) demi stabilitas akurasi optimal.</a:t>
+            <a:rPr lang="en-MY" dirty="0"/>
+            <a:t>Beban </a:t>
+          </a:r>
+          <a:r>
+            <a:rPr lang="en-MY" b="1" dirty="0" err="1"/>
+            <a:t>komputasi</a:t>
+          </a:r>
+          <a:r>
+            <a:rPr lang="en-MY" b="1" dirty="0"/>
+            <a:t> </a:t>
+          </a:r>
+          <a:r>
+            <a:rPr lang="en-MY" b="1" dirty="0" err="1"/>
+            <a:t>tinggi</a:t>
+          </a:r>
+          <a:r>
+            <a:rPr lang="en-MY" b="1" dirty="0"/>
+            <a:t> </a:t>
+          </a:r>
+          <a:r>
+            <a:rPr lang="en-MY" dirty="0"/>
+            <a:t>di </a:t>
+          </a:r>
+          <a:r>
+            <a:rPr lang="en-MY" dirty="0" err="1"/>
+            <a:t>awal</a:t>
+          </a:r>
+          <a:r>
+            <a:rPr lang="en-MY" dirty="0"/>
+            <a:t> (Grid Search) demi </a:t>
+          </a:r>
+          <a:r>
+            <a:rPr lang="en-MY" dirty="0" err="1"/>
+            <a:t>stabilitas</a:t>
+          </a:r>
+          <a:r>
+            <a:rPr lang="en-MY" dirty="0"/>
+            <a:t> </a:t>
+          </a:r>
+          <a:r>
+            <a:rPr lang="en-MY" dirty="0" err="1"/>
+            <a:t>akurasi</a:t>
+          </a:r>
+          <a:r>
+            <a:rPr lang="en-MY" dirty="0"/>
+            <a:t> optimal.</a:t>
           </a:r>
           <a:endParaRPr lang="en-US" dirty="0"/>
         </a:p>
@@ -5304,10 +5838,46 @@
             </a:lnSpc>
           </a:pPr>
           <a:r>
-            <a:rPr lang="en-MY"/>
-            <a:t>Arsitektur C++ OOP: Pemisahan ketat antara preprocessing, model, dan evaluasi.</a:t>
-          </a:r>
-          <a:endParaRPr lang="en-US"/>
+            <a:rPr lang="en-MY" dirty="0" err="1"/>
+            <a:t>Arsitektur</a:t>
+          </a:r>
+          <a:r>
+            <a:rPr lang="en-MY" dirty="0"/>
+            <a:t> C++ OOP: </a:t>
+          </a:r>
+          <a:r>
+            <a:rPr lang="en-MY" dirty="0" err="1"/>
+            <a:t>Pemisahan</a:t>
+          </a:r>
+          <a:r>
+            <a:rPr lang="en-MY" dirty="0"/>
+            <a:t> </a:t>
+          </a:r>
+          <a:r>
+            <a:rPr lang="en-MY" dirty="0" err="1"/>
+            <a:t>ketat</a:t>
+          </a:r>
+          <a:r>
+            <a:rPr lang="en-MY" dirty="0"/>
+            <a:t> </a:t>
+          </a:r>
+          <a:r>
+            <a:rPr lang="en-MY" dirty="0" err="1"/>
+            <a:t>antara</a:t>
+          </a:r>
+          <a:r>
+            <a:rPr lang="en-MY" dirty="0"/>
+            <a:t> preprocessing, model, dan </a:t>
+          </a:r>
+          <a:r>
+            <a:rPr lang="en-MY" dirty="0" err="1"/>
+            <a:t>evaluasi</a:t>
+          </a:r>
+          <a:r>
+            <a:rPr lang="en-MY" dirty="0"/>
+            <a:t>.</a:t>
+          </a:r>
+          <a:endParaRPr lang="en-US" dirty="0"/>
         </a:p>
       </dgm:t>
     </dgm:pt>
@@ -5333,7 +5903,7 @@
         </a:p>
       </dgm:t>
     </dgm:pt>
-    <dgm:pt modelId="{7C671053-6896-44CD-8ECC-3C1C4A176612}">
+    <dgm:pt modelId="{249C59D7-CBE6-4896-8949-B4A425BC15AA}">
       <dgm:prSet/>
       <dgm:spPr/>
       <dgm:t>
@@ -5346,116 +5916,40 @@
             </a:lnSpc>
           </a:pPr>
           <a:r>
-            <a:rPr lang="en-MY"/>
-            <a:t>Metrik Uji: Waktu (&lt;chrono&gt;), Memori RAM (Windows API), dan Akurasi (MSE, RMSE, MAE, R^2).</a:t>
-          </a:r>
-          <a:endParaRPr lang="en-US"/>
+            <a:rPr lang="en-MY" b="1" dirty="0"/>
+            <a:t>Dataset 1</a:t>
+          </a:r>
+          <a:r>
+            <a:rPr lang="en-MY" dirty="0"/>
+            <a:t> (Energy): 48.024 baris, 7 </a:t>
+          </a:r>
+          <a:r>
+            <a:rPr lang="en-MY" dirty="0" err="1"/>
+            <a:t>fitur</a:t>
+          </a:r>
+          <a:endParaRPr lang="en-US" dirty="0"/>
         </a:p>
       </dgm:t>
     </dgm:pt>
-    <dgm:pt modelId="{163DFBB6-A2E6-4059-BD49-7D276384C03E}" type="parTrans" cxnId="{3588733B-534C-44F8-888A-DA6AA863EA52}">
+    <dgm:pt modelId="{D99F8772-23FC-4165-8EBD-FCF331F9A13E}" type="parTrans" cxnId="{EB3CB932-8637-460D-BAF8-879682B25723}">
       <dgm:prSet/>
       <dgm:spPr/>
       <dgm:t>
         <a:bodyPr/>
         <a:lstStyle/>
         <a:p>
-          <a:endParaRPr lang="en-US"/>
+          <a:endParaRPr lang="en-MY"/>
         </a:p>
       </dgm:t>
     </dgm:pt>
-    <dgm:pt modelId="{23FF1445-31D7-4FBC-BD8B-073975C18640}" type="sibTrans" cxnId="{3588733B-534C-44F8-888A-DA6AA863EA52}">
+    <dgm:pt modelId="{40C8FDEB-14FF-43EB-A3B0-9740B92F27E3}" type="sibTrans" cxnId="{EB3CB932-8637-460D-BAF8-879682B25723}">
       <dgm:prSet/>
       <dgm:spPr/>
       <dgm:t>
         <a:bodyPr/>
         <a:lstStyle/>
         <a:p>
-          <a:endParaRPr lang="en-US"/>
-        </a:p>
-      </dgm:t>
-    </dgm:pt>
-    <dgm:pt modelId="{A5DB03D4-97DE-4F32-9567-324BCA32CCA6}">
-      <dgm:prSet/>
-      <dgm:spPr/>
-      <dgm:t>
-        <a:bodyPr/>
-        <a:lstStyle/>
-        <a:p>
-          <a:pPr>
-            <a:lnSpc>
-              <a:spcPct val="100000"/>
-            </a:lnSpc>
-          </a:pPr>
-          <a:r>
-            <a:rPr lang="en-MY"/>
-            <a:t>Karakteristik Data:</a:t>
-          </a:r>
-          <a:endParaRPr lang="en-US"/>
-        </a:p>
-      </dgm:t>
-    </dgm:pt>
-    <dgm:pt modelId="{ADCD82C1-CF26-400D-A922-9A4E77991951}" type="parTrans" cxnId="{6C405EA0-1C11-4496-BD96-63F8F3378C5C}">
-      <dgm:prSet/>
-      <dgm:spPr/>
-      <dgm:t>
-        <a:bodyPr/>
-        <a:lstStyle/>
-        <a:p>
-          <a:endParaRPr lang="en-US"/>
-        </a:p>
-      </dgm:t>
-    </dgm:pt>
-    <dgm:pt modelId="{8B22E685-A321-4580-99FE-844C16037379}" type="sibTrans" cxnId="{6C405EA0-1C11-4496-BD96-63F8F3378C5C}">
-      <dgm:prSet/>
-      <dgm:spPr/>
-      <dgm:t>
-        <a:bodyPr/>
-        <a:lstStyle/>
-        <a:p>
-          <a:endParaRPr lang="en-US"/>
-        </a:p>
-      </dgm:t>
-    </dgm:pt>
-    <dgm:pt modelId="{7D025CEB-B2F2-4719-BED6-83576B354EDB}">
-      <dgm:prSet/>
-      <dgm:spPr/>
-      <dgm:t>
-        <a:bodyPr/>
-        <a:lstStyle/>
-        <a:p>
-          <a:pPr>
-            <a:lnSpc>
-              <a:spcPct val="100000"/>
-            </a:lnSpc>
-          </a:pPr>
-          <a:r>
-            <a:rPr lang="en-MY"/>
-            <a:t>- Dataset 1 (Energy): 48.024 baris, 7 fitur (Sampel tinggi, dimensi rendah).</a:t>
-          </a:r>
-          <a:endParaRPr lang="en-US"/>
-        </a:p>
-      </dgm:t>
-    </dgm:pt>
-    <dgm:pt modelId="{1021CA22-FBDF-4C0E-BF02-15B71C6624FA}" type="parTrans" cxnId="{9375F8A2-E8E5-4302-B9B3-BA9D56380BB9}">
-      <dgm:prSet/>
-      <dgm:spPr/>
-      <dgm:t>
-        <a:bodyPr/>
-        <a:lstStyle/>
-        <a:p>
-          <a:endParaRPr lang="en-US"/>
-        </a:p>
-      </dgm:t>
-    </dgm:pt>
-    <dgm:pt modelId="{70D8D649-C85F-44B8-B80C-F5C6BF6569FF}" type="sibTrans" cxnId="{9375F8A2-E8E5-4302-B9B3-BA9D56380BB9}">
-      <dgm:prSet/>
-      <dgm:spPr/>
-      <dgm:t>
-        <a:bodyPr/>
-        <a:lstStyle/>
-        <a:p>
-          <a:endParaRPr lang="en-US"/>
+          <a:endParaRPr lang="en-MY"/>
         </a:p>
       </dgm:t>
     </dgm:pt>
@@ -5472,14 +5966,50 @@
             </a:lnSpc>
           </a:pPr>
           <a:r>
-            <a:rPr lang="en-MY"/>
-            <a:t>- Dataset 2 (Komoditas): 781 baris, 43 kolom (Multikolinearitas tinggi).</a:t>
-          </a:r>
-          <a:endParaRPr lang="en-US"/>
+            <a:rPr lang="en-MY" b="1" dirty="0"/>
+            <a:t>Dataset 2</a:t>
+          </a:r>
+          <a:r>
+            <a:rPr lang="en-MY" dirty="0"/>
+            <a:t> (</a:t>
+          </a:r>
+          <a:r>
+            <a:rPr lang="en-MY" dirty="0" err="1"/>
+            <a:t>Komoditas</a:t>
+          </a:r>
+          <a:r>
+            <a:rPr lang="en-MY" dirty="0"/>
+            <a:t>): 781 baris, 43 </a:t>
+          </a:r>
+          <a:r>
+            <a:rPr lang="en-MY" dirty="0" err="1"/>
+            <a:t>kolom</a:t>
+          </a:r>
+          <a:r>
+            <a:rPr lang="en-MY" dirty="0"/>
+            <a:t> (</a:t>
+          </a:r>
+          <a:r>
+            <a:rPr lang="en-MY" dirty="0" err="1"/>
+            <a:t>Multikolinearitas</a:t>
+          </a:r>
+          <a:r>
+            <a:rPr lang="en-MY" dirty="0"/>
+            <a:t> </a:t>
+          </a:r>
+          <a:r>
+            <a:rPr lang="en-MY" dirty="0" err="1"/>
+            <a:t>tinggi</a:t>
+          </a:r>
+          <a:r>
+            <a:rPr lang="en-MY" dirty="0"/>
+            <a:t>).</a:t>
+          </a:r>
+          <a:endParaRPr lang="en-US" dirty="0"/>
         </a:p>
       </dgm:t>
     </dgm:pt>
-    <dgm:pt modelId="{F5B4735F-0CBC-4469-8BB2-2E12E4719F14}" type="parTrans" cxnId="{435A2575-D665-4AD8-A60D-33AF4659B310}">
+    <dgm:pt modelId="{F5B4735F-0CBC-4469-8BB2-2E12E4719F14}" type="parTrans" cxnId="{92819780-0AF9-4E2B-8D00-0D6DDD2A47BC}">
       <dgm:prSet/>
       <dgm:spPr/>
       <dgm:t>
@@ -5490,7 +6020,7 @@
         </a:p>
       </dgm:t>
     </dgm:pt>
-    <dgm:pt modelId="{F3258BB6-D4A7-46ED-A2B6-41602EC3AA21}" type="sibTrans" cxnId="{435A2575-D665-4AD8-A60D-33AF4659B310}">
+    <dgm:pt modelId="{F3258BB6-D4A7-46ED-A2B6-41602EC3AA21}" type="sibTrans" cxnId="{92819780-0AF9-4E2B-8D00-0D6DDD2A47BC}">
       <dgm:prSet/>
       <dgm:spPr/>
       <dgm:t>
@@ -5498,6 +6028,226 @@
         <a:lstStyle/>
         <a:p>
           <a:endParaRPr lang="en-US"/>
+        </a:p>
+      </dgm:t>
+    </dgm:pt>
+    <dgm:pt modelId="{807050C1-8C11-475E-8C01-26B31FE5EB00}">
+      <dgm:prSet/>
+      <dgm:spPr/>
+      <dgm:t>
+        <a:bodyPr/>
+        <a:lstStyle/>
+        <a:p>
+          <a:pPr>
+            <a:lnSpc>
+              <a:spcPct val="100000"/>
+            </a:lnSpc>
+          </a:pPr>
+          <a:r>
+            <a:rPr lang="en-US"/>
+            <a:t>Komparasi 3 Algoritma :</a:t>
+          </a:r>
+          <a:endParaRPr lang="en-US" dirty="0"/>
+        </a:p>
+      </dgm:t>
+    </dgm:pt>
+    <dgm:pt modelId="{D6007DC2-1F43-4EEE-A15C-A93EDC451510}" type="parTrans" cxnId="{B6B233E5-7A48-41EF-9D2B-4F74B3DD23ED}">
+      <dgm:prSet/>
+      <dgm:spPr/>
+      <dgm:t>
+        <a:bodyPr/>
+        <a:lstStyle/>
+        <a:p>
+          <a:endParaRPr lang="en-MY"/>
+        </a:p>
+      </dgm:t>
+    </dgm:pt>
+    <dgm:pt modelId="{80170D7A-3E9A-4F5A-A147-FD2C7FE5B879}" type="sibTrans" cxnId="{B6B233E5-7A48-41EF-9D2B-4F74B3DD23ED}">
+      <dgm:prSet/>
+      <dgm:spPr/>
+      <dgm:t>
+        <a:bodyPr/>
+        <a:lstStyle/>
+        <a:p>
+          <a:endParaRPr lang="en-MY"/>
+        </a:p>
+      </dgm:t>
+    </dgm:pt>
+    <dgm:pt modelId="{B92F900B-53DE-4750-8858-863E6F595F83}">
+      <dgm:prSet custT="1"/>
+      <dgm:spPr/>
+      <dgm:t>
+        <a:bodyPr/>
+        <a:lstStyle/>
+        <a:p>
+          <a:pPr>
+            <a:lnSpc>
+              <a:spcPct val="100000"/>
+            </a:lnSpc>
+          </a:pPr>
+          <a:r>
+            <a:rPr lang="en-US" sz="1400" b="1"/>
+            <a:t>Normal Equation</a:t>
+          </a:r>
+          <a:endParaRPr lang="en-US" sz="1400" b="1" dirty="0"/>
+        </a:p>
+      </dgm:t>
+    </dgm:pt>
+    <dgm:pt modelId="{3C7429B2-9DF0-425D-9A4A-0E35D2A6CED8}" type="parTrans" cxnId="{91F286CC-5816-4F17-A4B7-BB80E542CE4E}">
+      <dgm:prSet/>
+      <dgm:spPr/>
+      <dgm:t>
+        <a:bodyPr/>
+        <a:lstStyle/>
+        <a:p>
+          <a:endParaRPr lang="en-MY"/>
+        </a:p>
+      </dgm:t>
+    </dgm:pt>
+    <dgm:pt modelId="{0CAD3DCA-4BCE-4BB6-864C-1DB8D45FF20C}" type="sibTrans" cxnId="{91F286CC-5816-4F17-A4B7-BB80E542CE4E}">
+      <dgm:prSet/>
+      <dgm:spPr/>
+      <dgm:t>
+        <a:bodyPr/>
+        <a:lstStyle/>
+        <a:p>
+          <a:endParaRPr lang="en-MY"/>
+        </a:p>
+      </dgm:t>
+    </dgm:pt>
+    <dgm:pt modelId="{56B69E04-51C8-4520-8DF8-E4694A197088}">
+      <dgm:prSet custT="1"/>
+      <dgm:spPr/>
+      <dgm:t>
+        <a:bodyPr/>
+        <a:lstStyle/>
+        <a:p>
+          <a:pPr>
+            <a:lnSpc>
+              <a:spcPct val="100000"/>
+            </a:lnSpc>
+          </a:pPr>
+          <a:r>
+            <a:rPr lang="en-US" sz="1400" b="1" dirty="0"/>
+            <a:t>Gradient Descent Vanila</a:t>
+          </a:r>
+        </a:p>
+      </dgm:t>
+    </dgm:pt>
+    <dgm:pt modelId="{AE0B3524-B3B0-42D3-9722-0FB652001C20}" type="parTrans" cxnId="{EE91C4D6-D528-4014-A577-14104A0943D7}">
+      <dgm:prSet/>
+      <dgm:spPr/>
+      <dgm:t>
+        <a:bodyPr/>
+        <a:lstStyle/>
+        <a:p>
+          <a:endParaRPr lang="en-MY"/>
+        </a:p>
+      </dgm:t>
+    </dgm:pt>
+    <dgm:pt modelId="{854D4520-9114-4B8C-8271-8286D24577AF}" type="sibTrans" cxnId="{EE91C4D6-D528-4014-A577-14104A0943D7}">
+      <dgm:prSet/>
+      <dgm:spPr/>
+      <dgm:t>
+        <a:bodyPr/>
+        <a:lstStyle/>
+        <a:p>
+          <a:endParaRPr lang="en-MY"/>
+        </a:p>
+      </dgm:t>
+    </dgm:pt>
+    <dgm:pt modelId="{E9F94A81-B163-4D7B-A520-EBB1375A3BEB}">
+      <dgm:prSet custT="1"/>
+      <dgm:spPr/>
+      <dgm:t>
+        <a:bodyPr/>
+        <a:lstStyle/>
+        <a:p>
+          <a:pPr>
+            <a:lnSpc>
+              <a:spcPct val="100000"/>
+            </a:lnSpc>
+          </a:pPr>
+          <a:r>
+            <a:rPr lang="en-US" sz="1400" b="1" dirty="0"/>
+            <a:t>Tuned Gradient Descent</a:t>
+          </a:r>
+        </a:p>
+      </dgm:t>
+    </dgm:pt>
+    <dgm:pt modelId="{2E95FCF9-6D99-420A-9B96-F21D89875DE4}" type="parTrans" cxnId="{8E731927-8F89-44AD-A27B-795D6BAC5469}">
+      <dgm:prSet/>
+      <dgm:spPr/>
+      <dgm:t>
+        <a:bodyPr/>
+        <a:lstStyle/>
+        <a:p>
+          <a:endParaRPr lang="en-MY"/>
+        </a:p>
+      </dgm:t>
+    </dgm:pt>
+    <dgm:pt modelId="{F113B8CF-4585-4687-B2C1-69792DE65875}" type="sibTrans" cxnId="{8E731927-8F89-44AD-A27B-795D6BAC5469}">
+      <dgm:prSet/>
+      <dgm:spPr/>
+      <dgm:t>
+        <a:bodyPr/>
+        <a:lstStyle/>
+        <a:p>
+          <a:endParaRPr lang="en-MY"/>
+        </a:p>
+      </dgm:t>
+    </dgm:pt>
+    <dgm:pt modelId="{8064A234-BF1F-4DAF-B90F-5480D92DC4B8}">
+      <dgm:prSet/>
+      <dgm:spPr/>
+      <dgm:t>
+        <a:bodyPr/>
+        <a:lstStyle/>
+        <a:p>
+          <a:pPr>
+            <a:lnSpc>
+              <a:spcPct val="100000"/>
+            </a:lnSpc>
+          </a:pPr>
+          <a:r>
+            <a:rPr lang="en-MY" dirty="0" err="1"/>
+            <a:t>Metrik</a:t>
+          </a:r>
+          <a:r>
+            <a:rPr lang="en-MY" dirty="0"/>
+            <a:t> Uji: Waktu (&lt;chrono&gt;), Memori RAM (Windows API), dan </a:t>
+          </a:r>
+          <a:r>
+            <a:rPr lang="en-MY" dirty="0" err="1"/>
+            <a:t>Akurasi</a:t>
+          </a:r>
+          <a:r>
+            <a:rPr lang="en-MY" dirty="0"/>
+            <a:t> (MSE, RMSE, MAE, R^2).</a:t>
+          </a:r>
+          <a:endParaRPr lang="en-US" dirty="0"/>
+        </a:p>
+      </dgm:t>
+    </dgm:pt>
+    <dgm:pt modelId="{B622D86A-3457-40CE-AAE4-3F9B7C305234}" type="parTrans" cxnId="{73DE7BB8-92F1-46E7-BAD3-D5018ED6D73A}">
+      <dgm:prSet/>
+      <dgm:spPr/>
+      <dgm:t>
+        <a:bodyPr/>
+        <a:lstStyle/>
+        <a:p>
+          <a:endParaRPr lang="en-MY"/>
+        </a:p>
+      </dgm:t>
+    </dgm:pt>
+    <dgm:pt modelId="{F9B93003-B9F8-4BED-81D0-8B6CDA42172F}" type="sibTrans" cxnId="{73DE7BB8-92F1-46E7-BAD3-D5018ED6D73A}">
+      <dgm:prSet/>
+      <dgm:spPr/>
+      <dgm:t>
+        <a:bodyPr/>
+        <a:lstStyle/>
+        <a:p>
+          <a:endParaRPr lang="en-MY"/>
         </a:p>
       </dgm:t>
     </dgm:pt>
@@ -5551,7 +6301,7 @@
       <dgm:spPr/>
     </dgm:pt>
     <dgm:pt modelId="{E7C1B605-ACB0-4AC3-AA7D-3A4FE125391A}" type="pres">
-      <dgm:prSet presAssocID="{85AA5D8F-5F69-462A-93FB-F1BA44709F0A}" presName="parTx" presStyleLbl="revTx" presStyleIdx="0" presStyleCnt="5">
+      <dgm:prSet presAssocID="{85AA5D8F-5F69-462A-93FB-F1BA44709F0A}" presName="parTx" presStyleLbl="revTx" presStyleIdx="0" presStyleCnt="6">
         <dgm:presLayoutVars>
           <dgm:chMax val="0"/>
           <dgm:chPref val="0"/>
@@ -5563,16 +6313,109 @@
       <dgm:prSet presAssocID="{DD59AA08-1673-40DE-9857-B7EE3831CECB}" presName="sibTrans" presStyleCnt="0"/>
       <dgm:spPr/>
     </dgm:pt>
-    <dgm:pt modelId="{E8043BD2-82BD-4C00-8C1E-58C9E18528DC}" type="pres">
-      <dgm:prSet presAssocID="{7C671053-6896-44CD-8ECC-3C1C4A176612}" presName="compNode" presStyleCnt="0"/>
+    <dgm:pt modelId="{D0F841CB-087A-4D6F-B864-2B445975B079}" type="pres">
+      <dgm:prSet presAssocID="{807050C1-8C11-475E-8C01-26B31FE5EB00}" presName="compNode" presStyleCnt="0"/>
       <dgm:spPr/>
     </dgm:pt>
-    <dgm:pt modelId="{6FD62ABC-6DED-434B-B360-5C8C159277DA}" type="pres">
-      <dgm:prSet presAssocID="{7C671053-6896-44CD-8ECC-3C1C4A176612}" presName="bgRect" presStyleLbl="bgShp" presStyleIdx="1" presStyleCnt="5"/>
+    <dgm:pt modelId="{56D79F9F-8B7B-43A2-ACC6-DC01DEFE174F}" type="pres">
+      <dgm:prSet presAssocID="{807050C1-8C11-475E-8C01-26B31FE5EB00}" presName="bgRect" presStyleLbl="bgShp" presStyleIdx="1" presStyleCnt="5"/>
       <dgm:spPr/>
     </dgm:pt>
-    <dgm:pt modelId="{C68AACE6-51CA-4A97-924B-1F0783A3E0C7}" type="pres">
-      <dgm:prSet presAssocID="{7C671053-6896-44CD-8ECC-3C1C4A176612}" presName="iconRect" presStyleLbl="node1" presStyleIdx="1" presStyleCnt="5"/>
+    <dgm:pt modelId="{EEEBBDBC-8178-4624-BF0E-80F7C85B6753}" type="pres">
+      <dgm:prSet presAssocID="{807050C1-8C11-475E-8C01-26B31FE5EB00}" presName="iconRect" presStyleLbl="node1" presStyleIdx="1" presStyleCnt="5"/>
+      <dgm:spPr/>
+    </dgm:pt>
+    <dgm:pt modelId="{96FBE269-F1B1-43F4-97C8-C4610372227C}" type="pres">
+      <dgm:prSet presAssocID="{807050C1-8C11-475E-8C01-26B31FE5EB00}" presName="spaceRect" presStyleCnt="0"/>
+      <dgm:spPr/>
+    </dgm:pt>
+    <dgm:pt modelId="{1BBAC8CA-CC01-433A-B510-15C9853E2A9F}" type="pres">
+      <dgm:prSet presAssocID="{807050C1-8C11-475E-8C01-26B31FE5EB00}" presName="parTx" presStyleLbl="revTx" presStyleIdx="1" presStyleCnt="6">
+        <dgm:presLayoutVars>
+          <dgm:chMax val="0"/>
+          <dgm:chPref val="0"/>
+        </dgm:presLayoutVars>
+      </dgm:prSet>
+      <dgm:spPr/>
+    </dgm:pt>
+    <dgm:pt modelId="{CE2EC13B-828B-4729-969C-C7E824CEF7BD}" type="pres">
+      <dgm:prSet presAssocID="{807050C1-8C11-475E-8C01-26B31FE5EB00}" presName="desTx" presStyleLbl="revTx" presStyleIdx="2" presStyleCnt="6">
+        <dgm:presLayoutVars/>
+      </dgm:prSet>
+      <dgm:spPr/>
+    </dgm:pt>
+    <dgm:pt modelId="{C36A4C0B-D8C5-4A2E-87E0-3AB19282132A}" type="pres">
+      <dgm:prSet presAssocID="{80170D7A-3E9A-4F5A-A147-FD2C7FE5B879}" presName="sibTrans" presStyleCnt="0"/>
+      <dgm:spPr/>
+    </dgm:pt>
+    <dgm:pt modelId="{347F412D-DDFA-4BB9-82E4-7328FCE77A96}" type="pres">
+      <dgm:prSet presAssocID="{8064A234-BF1F-4DAF-B90F-5480D92DC4B8}" presName="compNode" presStyleCnt="0"/>
+      <dgm:spPr/>
+    </dgm:pt>
+    <dgm:pt modelId="{74EEF5FE-0645-4875-8A6D-D9E525D38BB9}" type="pres">
+      <dgm:prSet presAssocID="{8064A234-BF1F-4DAF-B90F-5480D92DC4B8}" presName="bgRect" presStyleLbl="bgShp" presStyleIdx="2" presStyleCnt="5"/>
+      <dgm:spPr/>
+    </dgm:pt>
+    <dgm:pt modelId="{8AAFAEF8-CC7C-4A37-A892-33745DF833BD}" type="pres">
+      <dgm:prSet presAssocID="{8064A234-BF1F-4DAF-B90F-5480D92DC4B8}" presName="iconRect" presStyleLbl="node1" presStyleIdx="2" presStyleCnt="5"/>
+      <dgm:spPr/>
+    </dgm:pt>
+    <dgm:pt modelId="{80003962-E3BE-469F-85A7-D4DB1AA4E862}" type="pres">
+      <dgm:prSet presAssocID="{8064A234-BF1F-4DAF-B90F-5480D92DC4B8}" presName="spaceRect" presStyleCnt="0"/>
+      <dgm:spPr/>
+    </dgm:pt>
+    <dgm:pt modelId="{FED68ED4-F4A8-4999-B56D-D7B33ED1E9E1}" type="pres">
+      <dgm:prSet presAssocID="{8064A234-BF1F-4DAF-B90F-5480D92DC4B8}" presName="parTx" presStyleLbl="revTx" presStyleIdx="3" presStyleCnt="6">
+        <dgm:presLayoutVars>
+          <dgm:chMax val="0"/>
+          <dgm:chPref val="0"/>
+        </dgm:presLayoutVars>
+      </dgm:prSet>
+      <dgm:spPr/>
+    </dgm:pt>
+    <dgm:pt modelId="{1E51939E-E7AE-40D8-8B9B-5B3C974E105D}" type="pres">
+      <dgm:prSet presAssocID="{F9B93003-B9F8-4BED-81D0-8B6CDA42172F}" presName="sibTrans" presStyleCnt="0"/>
+      <dgm:spPr/>
+    </dgm:pt>
+    <dgm:pt modelId="{F19AB5E5-8AC2-437D-AF4C-2E66DC50B40C}" type="pres">
+      <dgm:prSet presAssocID="{249C59D7-CBE6-4896-8949-B4A425BC15AA}" presName="compNode" presStyleCnt="0"/>
+      <dgm:spPr/>
+    </dgm:pt>
+    <dgm:pt modelId="{408C9004-E47E-49AE-B9CB-993ED74C482C}" type="pres">
+      <dgm:prSet presAssocID="{249C59D7-CBE6-4896-8949-B4A425BC15AA}" presName="bgRect" presStyleLbl="bgShp" presStyleIdx="3" presStyleCnt="5"/>
+      <dgm:spPr/>
+    </dgm:pt>
+    <dgm:pt modelId="{83C48CF6-C7BB-45FD-8C92-8A8BBFBD8D99}" type="pres">
+      <dgm:prSet presAssocID="{249C59D7-CBE6-4896-8949-B4A425BC15AA}" presName="iconRect" presStyleLbl="node1" presStyleIdx="3" presStyleCnt="5"/>
+      <dgm:spPr/>
+    </dgm:pt>
+    <dgm:pt modelId="{D129BEAB-C015-4B9E-A133-417177B272F4}" type="pres">
+      <dgm:prSet presAssocID="{249C59D7-CBE6-4896-8949-B4A425BC15AA}" presName="spaceRect" presStyleCnt="0"/>
+      <dgm:spPr/>
+    </dgm:pt>
+    <dgm:pt modelId="{0B38EFF2-8340-44DB-A76C-B231D0E10C01}" type="pres">
+      <dgm:prSet presAssocID="{249C59D7-CBE6-4896-8949-B4A425BC15AA}" presName="parTx" presStyleLbl="revTx" presStyleIdx="4" presStyleCnt="6">
+        <dgm:presLayoutVars>
+          <dgm:chMax val="0"/>
+          <dgm:chPref val="0"/>
+        </dgm:presLayoutVars>
+      </dgm:prSet>
+      <dgm:spPr/>
+    </dgm:pt>
+    <dgm:pt modelId="{ED07E050-CD52-455F-9C86-4CEF23FD9318}" type="pres">
+      <dgm:prSet presAssocID="{40C8FDEB-14FF-43EB-A3B0-9740B92F27E3}" presName="sibTrans" presStyleCnt="0"/>
+      <dgm:spPr/>
+    </dgm:pt>
+    <dgm:pt modelId="{7C57AA9C-F789-46C1-80A3-FBF4C23298FE}" type="pres">
+      <dgm:prSet presAssocID="{CEE68528-AF2B-4779-AC55-60395E7395BB}" presName="compNode" presStyleCnt="0"/>
+      <dgm:spPr/>
+    </dgm:pt>
+    <dgm:pt modelId="{2112CAB0-F140-404C-BCA9-40A3DE4D654F}" type="pres">
+      <dgm:prSet presAssocID="{CEE68528-AF2B-4779-AC55-60395E7395BB}" presName="bgRect" presStyleLbl="bgShp" presStyleIdx="4" presStyleCnt="5"/>
+      <dgm:spPr/>
+    </dgm:pt>
+    <dgm:pt modelId="{1EBE7DDA-BF30-481A-854A-5BA5B98CABFA}" type="pres">
+      <dgm:prSet presAssocID="{CEE68528-AF2B-4779-AC55-60395E7395BB}" presName="iconRect" presStyleLbl="node1" presStyleIdx="4" presStyleCnt="5"/>
       <dgm:spPr>
         <a:blipFill>
           <a:blip xmlns:r="http://schemas.openxmlformats.org/officeDocument/2006/relationships">
@@ -5595,165 +6438,6 @@
       </dgm:spPr>
       <dgm:extLst>
         <a:ext uri="{E40237B7-FDA0-4F09-8148-C483321AD2D9}">
-          <dgm14:cNvPr xmlns:dgm14="http://schemas.microsoft.com/office/drawing/2010/diagram" id="0" name="" descr="Processor"/>
-        </a:ext>
-      </dgm:extLst>
-    </dgm:pt>
-    <dgm:pt modelId="{EB3F9506-9C94-4A03-A89E-115DA3F3604E}" type="pres">
-      <dgm:prSet presAssocID="{7C671053-6896-44CD-8ECC-3C1C4A176612}" presName="spaceRect" presStyleCnt="0"/>
-      <dgm:spPr/>
-    </dgm:pt>
-    <dgm:pt modelId="{950B1FA5-B88F-44FD-9049-381D36CADF6C}" type="pres">
-      <dgm:prSet presAssocID="{7C671053-6896-44CD-8ECC-3C1C4A176612}" presName="parTx" presStyleLbl="revTx" presStyleIdx="1" presStyleCnt="5">
-        <dgm:presLayoutVars>
-          <dgm:chMax val="0"/>
-          <dgm:chPref val="0"/>
-        </dgm:presLayoutVars>
-      </dgm:prSet>
-      <dgm:spPr/>
-    </dgm:pt>
-    <dgm:pt modelId="{03B6D6E5-3884-45FE-BD9E-BB6E23700AAC}" type="pres">
-      <dgm:prSet presAssocID="{23FF1445-31D7-4FBC-BD8B-073975C18640}" presName="sibTrans" presStyleCnt="0"/>
-      <dgm:spPr/>
-    </dgm:pt>
-    <dgm:pt modelId="{87F7A8C9-BC92-4E97-97FF-C82325BA845F}" type="pres">
-      <dgm:prSet presAssocID="{A5DB03D4-97DE-4F32-9567-324BCA32CCA6}" presName="compNode" presStyleCnt="0"/>
-      <dgm:spPr/>
-    </dgm:pt>
-    <dgm:pt modelId="{880A247A-69D8-41AF-9F00-D57CADE45FF2}" type="pres">
-      <dgm:prSet presAssocID="{A5DB03D4-97DE-4F32-9567-324BCA32CCA6}" presName="bgRect" presStyleLbl="bgShp" presStyleIdx="2" presStyleCnt="5"/>
-      <dgm:spPr/>
-    </dgm:pt>
-    <dgm:pt modelId="{064CAEE8-6731-44B8-A3B5-1CD990FC346A}" type="pres">
-      <dgm:prSet presAssocID="{A5DB03D4-97DE-4F32-9567-324BCA32CCA6}" presName="iconRect" presStyleLbl="node1" presStyleIdx="2" presStyleCnt="5"/>
-      <dgm:spPr>
-        <a:blipFill>
-          <a:blip xmlns:r="http://schemas.openxmlformats.org/officeDocument/2006/relationships">
-            <a:extLst>
-              <a:ext uri="{28A0092B-C50C-407E-A947-70E740481C1C}">
-                <a14:useLocalDpi xmlns:a14="http://schemas.microsoft.com/office/drawing/2010/main" val="0"/>
-              </a:ext>
-              <a:ext uri="{96DAC541-7B7A-43D3-8B79-37D633B846F1}">
-                <asvg:svgBlip xmlns:asvg="http://schemas.microsoft.com/office/drawing/2016/SVG/main" r:embed="rId3"/>
-              </a:ext>
-            </a:extLst>
-          </a:blip>
-          <a:stretch>
-            <a:fillRect/>
-          </a:stretch>
-        </a:blipFill>
-        <a:ln>
-          <a:noFill/>
-        </a:ln>
-      </dgm:spPr>
-      <dgm:extLst>
-        <a:ext uri="{E40237B7-FDA0-4F09-8148-C483321AD2D9}">
-          <dgm14:cNvPr xmlns:dgm14="http://schemas.microsoft.com/office/drawing/2010/diagram" id="0" name="" descr="Table"/>
-        </a:ext>
-      </dgm:extLst>
-    </dgm:pt>
-    <dgm:pt modelId="{9DB0631A-FA2B-49D9-AE47-18C0E60F7E1B}" type="pres">
-      <dgm:prSet presAssocID="{A5DB03D4-97DE-4F32-9567-324BCA32CCA6}" presName="spaceRect" presStyleCnt="0"/>
-      <dgm:spPr/>
-    </dgm:pt>
-    <dgm:pt modelId="{596B03D9-E340-4CA2-B44A-EF9DC5C31145}" type="pres">
-      <dgm:prSet presAssocID="{A5DB03D4-97DE-4F32-9567-324BCA32CCA6}" presName="parTx" presStyleLbl="revTx" presStyleIdx="2" presStyleCnt="5">
-        <dgm:presLayoutVars>
-          <dgm:chMax val="0"/>
-          <dgm:chPref val="0"/>
-        </dgm:presLayoutVars>
-      </dgm:prSet>
-      <dgm:spPr/>
-    </dgm:pt>
-    <dgm:pt modelId="{C2E79B2D-7A0E-465C-AAF9-0B90AA5A974D}" type="pres">
-      <dgm:prSet presAssocID="{8B22E685-A321-4580-99FE-844C16037379}" presName="sibTrans" presStyleCnt="0"/>
-      <dgm:spPr/>
-    </dgm:pt>
-    <dgm:pt modelId="{2E07EDBF-B79E-452D-BF76-C9FDF47764A9}" type="pres">
-      <dgm:prSet presAssocID="{7D025CEB-B2F2-4719-BED6-83576B354EDB}" presName="compNode" presStyleCnt="0"/>
-      <dgm:spPr/>
-    </dgm:pt>
-    <dgm:pt modelId="{0921C9BC-DFC9-476E-83B3-486B30726ED5}" type="pres">
-      <dgm:prSet presAssocID="{7D025CEB-B2F2-4719-BED6-83576B354EDB}" presName="bgRect" presStyleLbl="bgShp" presStyleIdx="3" presStyleCnt="5"/>
-      <dgm:spPr/>
-    </dgm:pt>
-    <dgm:pt modelId="{247484BD-C9F6-4F12-B35A-7D5D12481F23}" type="pres">
-      <dgm:prSet presAssocID="{7D025CEB-B2F2-4719-BED6-83576B354EDB}" presName="iconRect" presStyleLbl="node1" presStyleIdx="3" presStyleCnt="5"/>
-      <dgm:spPr>
-        <a:blipFill>
-          <a:blip xmlns:r="http://schemas.openxmlformats.org/officeDocument/2006/relationships">
-            <a:extLst>
-              <a:ext uri="{28A0092B-C50C-407E-A947-70E740481C1C}">
-                <a14:useLocalDpi xmlns:a14="http://schemas.microsoft.com/office/drawing/2010/main" val="0"/>
-              </a:ext>
-              <a:ext uri="{96DAC541-7B7A-43D3-8B79-37D633B846F1}">
-                <asvg:svgBlip xmlns:asvg="http://schemas.microsoft.com/office/drawing/2016/SVG/main" r:embed="rId4"/>
-              </a:ext>
-            </a:extLst>
-          </a:blip>
-          <a:stretch>
-            <a:fillRect/>
-          </a:stretch>
-        </a:blipFill>
-        <a:ln>
-          <a:noFill/>
-        </a:ln>
-      </dgm:spPr>
-      <dgm:extLst>
-        <a:ext uri="{E40237B7-FDA0-4F09-8148-C483321AD2D9}">
-          <dgm14:cNvPr xmlns:dgm14="http://schemas.microsoft.com/office/drawing/2010/diagram" id="0" name="" descr="Statistics"/>
-        </a:ext>
-      </dgm:extLst>
-    </dgm:pt>
-    <dgm:pt modelId="{43E1689D-6AF5-47C2-B885-013EE3D79FFE}" type="pres">
-      <dgm:prSet presAssocID="{7D025CEB-B2F2-4719-BED6-83576B354EDB}" presName="spaceRect" presStyleCnt="0"/>
-      <dgm:spPr/>
-    </dgm:pt>
-    <dgm:pt modelId="{2B13FB02-2D03-4370-9EEC-A0B6A5E342EE}" type="pres">
-      <dgm:prSet presAssocID="{7D025CEB-B2F2-4719-BED6-83576B354EDB}" presName="parTx" presStyleLbl="revTx" presStyleIdx="3" presStyleCnt="5">
-        <dgm:presLayoutVars>
-          <dgm:chMax val="0"/>
-          <dgm:chPref val="0"/>
-        </dgm:presLayoutVars>
-      </dgm:prSet>
-      <dgm:spPr/>
-    </dgm:pt>
-    <dgm:pt modelId="{BE152156-96A2-453B-A738-7B573C59895A}" type="pres">
-      <dgm:prSet presAssocID="{70D8D649-C85F-44B8-B80C-F5C6BF6569FF}" presName="sibTrans" presStyleCnt="0"/>
-      <dgm:spPr/>
-    </dgm:pt>
-    <dgm:pt modelId="{7C57AA9C-F789-46C1-80A3-FBF4C23298FE}" type="pres">
-      <dgm:prSet presAssocID="{CEE68528-AF2B-4779-AC55-60395E7395BB}" presName="compNode" presStyleCnt="0"/>
-      <dgm:spPr/>
-    </dgm:pt>
-    <dgm:pt modelId="{2112CAB0-F140-404C-BCA9-40A3DE4D654F}" type="pres">
-      <dgm:prSet presAssocID="{CEE68528-AF2B-4779-AC55-60395E7395BB}" presName="bgRect" presStyleLbl="bgShp" presStyleIdx="4" presStyleCnt="5"/>
-      <dgm:spPr/>
-    </dgm:pt>
-    <dgm:pt modelId="{1EBE7DDA-BF30-481A-854A-5BA5B98CABFA}" type="pres">
-      <dgm:prSet presAssocID="{CEE68528-AF2B-4779-AC55-60395E7395BB}" presName="iconRect" presStyleLbl="node1" presStyleIdx="4" presStyleCnt="5"/>
-      <dgm:spPr>
-        <a:blipFill>
-          <a:blip xmlns:r="http://schemas.openxmlformats.org/officeDocument/2006/relationships">
-            <a:extLst>
-              <a:ext uri="{28A0092B-C50C-407E-A947-70E740481C1C}">
-                <a14:useLocalDpi xmlns:a14="http://schemas.microsoft.com/office/drawing/2010/main" val="0"/>
-              </a:ext>
-              <a:ext uri="{96DAC541-7B7A-43D3-8B79-37D633B846F1}">
-                <asvg:svgBlip xmlns:asvg="http://schemas.microsoft.com/office/drawing/2016/SVG/main" r:embed="rId5"/>
-              </a:ext>
-            </a:extLst>
-          </a:blip>
-          <a:stretch>
-            <a:fillRect/>
-          </a:stretch>
-        </a:blipFill>
-        <a:ln>
-          <a:noFill/>
-        </a:ln>
-      </dgm:spPr>
-      <dgm:extLst>
-        <a:ext uri="{E40237B7-FDA0-4F09-8148-C483321AD2D9}">
           <dgm14:cNvPr xmlns:dgm14="http://schemas.microsoft.com/office/drawing/2010/diagram" id="0" name="" descr="Target Audience"/>
         </a:ext>
       </dgm:extLst>
@@ -5763,7 +6447,7 @@
       <dgm:spPr/>
     </dgm:pt>
     <dgm:pt modelId="{2A60244E-E964-45B3-84E9-D98EFEB5229E}" type="pres">
-      <dgm:prSet presAssocID="{CEE68528-AF2B-4779-AC55-60395E7395BB}" presName="parTx" presStyleLbl="revTx" presStyleIdx="4" presStyleCnt="5">
+      <dgm:prSet presAssocID="{CEE68528-AF2B-4779-AC55-60395E7395BB}" presName="parTx" presStyleLbl="revTx" presStyleIdx="5" presStyleCnt="6">
         <dgm:presLayoutVars>
           <dgm:chMax val="0"/>
           <dgm:chPref val="0"/>
@@ -5773,46 +6457,53 @@
     </dgm:pt>
   </dgm:ptLst>
   <dgm:cxnLst>
-    <dgm:cxn modelId="{5298D633-5396-456A-88B9-19897EADC366}" type="presOf" srcId="{85AA5D8F-5F69-462A-93FB-F1BA44709F0A}" destId="{E7C1B605-ACB0-4AC3-AA7D-3A4FE125391A}" srcOrd="0" destOrd="0" presId="urn:microsoft.com/office/officeart/2018/2/layout/IconVerticalSolidList"/>
-    <dgm:cxn modelId="{3588733B-534C-44F8-888A-DA6AA863EA52}" srcId="{FE08559D-8337-4A6E-AAAC-2678E01F98F9}" destId="{7C671053-6896-44CD-8ECC-3C1C4A176612}" srcOrd="1" destOrd="0" parTransId="{163DFBB6-A2E6-4059-BD49-7D276384C03E}" sibTransId="{23FF1445-31D7-4FBC-BD8B-073975C18640}"/>
-    <dgm:cxn modelId="{6195F06C-E233-4AD2-84B4-AF7A940BC051}" type="presOf" srcId="{CEE68528-AF2B-4779-AC55-60395E7395BB}" destId="{2A60244E-E964-45B3-84E9-D98EFEB5229E}" srcOrd="0" destOrd="0" presId="urn:microsoft.com/office/officeart/2018/2/layout/IconVerticalSolidList"/>
-    <dgm:cxn modelId="{435A2575-D665-4AD8-A60D-33AF4659B310}" srcId="{FE08559D-8337-4A6E-AAAC-2678E01F98F9}" destId="{CEE68528-AF2B-4779-AC55-60395E7395BB}" srcOrd="4" destOrd="0" parTransId="{F5B4735F-0CBC-4469-8BB2-2E12E4719F14}" sibTransId="{F3258BB6-D4A7-46ED-A2B6-41602EC3AA21}"/>
-    <dgm:cxn modelId="{6C405EA0-1C11-4496-BD96-63F8F3378C5C}" srcId="{FE08559D-8337-4A6E-AAAC-2678E01F98F9}" destId="{A5DB03D4-97DE-4F32-9567-324BCA32CCA6}" srcOrd="2" destOrd="0" parTransId="{ADCD82C1-CF26-400D-A922-9A4E77991951}" sibTransId="{8B22E685-A321-4580-99FE-844C16037379}"/>
-    <dgm:cxn modelId="{9375F8A2-E8E5-4302-B9B3-BA9D56380BB9}" srcId="{FE08559D-8337-4A6E-AAAC-2678E01F98F9}" destId="{7D025CEB-B2F2-4719-BED6-83576B354EDB}" srcOrd="3" destOrd="0" parTransId="{1021CA22-FBDF-4C0E-BF02-15B71C6624FA}" sibTransId="{70D8D649-C85F-44B8-B80C-F5C6BF6569FF}"/>
-    <dgm:cxn modelId="{B9F807A6-0CB7-484F-90B9-1DED192A49BF}" type="presOf" srcId="{A5DB03D4-97DE-4F32-9567-324BCA32CCA6}" destId="{596B03D9-E340-4CA2-B44A-EF9DC5C31145}" srcOrd="0" destOrd="0" presId="urn:microsoft.com/office/officeart/2018/2/layout/IconVerticalSolidList"/>
+    <dgm:cxn modelId="{407D3D06-3817-46A3-B43B-C7392617AA0B}" type="presOf" srcId="{8064A234-BF1F-4DAF-B90F-5480D92DC4B8}" destId="{FED68ED4-F4A8-4999-B56D-D7B33ED1E9E1}" srcOrd="0" destOrd="0" presId="urn:microsoft.com/office/officeart/2018/2/layout/IconVerticalSolidList"/>
+    <dgm:cxn modelId="{8E731927-8F89-44AD-A27B-795D6BAC5469}" srcId="{807050C1-8C11-475E-8C01-26B31FE5EB00}" destId="{E9F94A81-B163-4D7B-A520-EBB1375A3BEB}" srcOrd="2" destOrd="0" parTransId="{2E95FCF9-6D99-420A-9B96-F21D89875DE4}" sibTransId="{F113B8CF-4585-4687-B2C1-69792DE65875}"/>
+    <dgm:cxn modelId="{FF25622B-E123-43D9-AA68-4D50737E5827}" type="presOf" srcId="{56B69E04-51C8-4520-8DF8-E4694A197088}" destId="{CE2EC13B-828B-4729-969C-C7E824CEF7BD}" srcOrd="0" destOrd="1" presId="urn:microsoft.com/office/officeart/2018/2/layout/IconVerticalSolidList"/>
+    <dgm:cxn modelId="{EB3CB932-8637-460D-BAF8-879682B25723}" srcId="{FE08559D-8337-4A6E-AAAC-2678E01F98F9}" destId="{249C59D7-CBE6-4896-8949-B4A425BC15AA}" srcOrd="3" destOrd="0" parTransId="{D99F8772-23FC-4165-8EBD-FCF331F9A13E}" sibTransId="{40C8FDEB-14FF-43EB-A3B0-9740B92F27E3}"/>
+    <dgm:cxn modelId="{BAE98138-2F3C-4091-8ECE-376A343731F0}" type="presOf" srcId="{249C59D7-CBE6-4896-8949-B4A425BC15AA}" destId="{0B38EFF2-8340-44DB-A76C-B231D0E10C01}" srcOrd="0" destOrd="0" presId="urn:microsoft.com/office/officeart/2018/2/layout/IconVerticalSolidList"/>
+    <dgm:cxn modelId="{0870955B-1366-43EA-A3CE-C96E49997E37}" type="presOf" srcId="{CEE68528-AF2B-4779-AC55-60395E7395BB}" destId="{2A60244E-E964-45B3-84E9-D98EFEB5229E}" srcOrd="0" destOrd="0" presId="urn:microsoft.com/office/officeart/2018/2/layout/IconVerticalSolidList"/>
+    <dgm:cxn modelId="{4D4A4D48-9AB9-488B-BE02-C810BC26887F}" type="presOf" srcId="{E9F94A81-B163-4D7B-A520-EBB1375A3BEB}" destId="{CE2EC13B-828B-4729-969C-C7E824CEF7BD}" srcOrd="0" destOrd="2" presId="urn:microsoft.com/office/officeart/2018/2/layout/IconVerticalSolidList"/>
+    <dgm:cxn modelId="{2787F34A-D701-48B0-9F0E-A5C3F1189F98}" type="presOf" srcId="{B92F900B-53DE-4750-8858-863E6F595F83}" destId="{CE2EC13B-828B-4729-969C-C7E824CEF7BD}" srcOrd="0" destOrd="0" presId="urn:microsoft.com/office/officeart/2018/2/layout/IconVerticalSolidList"/>
+    <dgm:cxn modelId="{CE68FB7C-7B5F-4C41-B469-EE6A4DD1CF8C}" type="presOf" srcId="{85AA5D8F-5F69-462A-93FB-F1BA44709F0A}" destId="{E7C1B605-ACB0-4AC3-AA7D-3A4FE125391A}" srcOrd="0" destOrd="0" presId="urn:microsoft.com/office/officeart/2018/2/layout/IconVerticalSolidList"/>
+    <dgm:cxn modelId="{92819780-0AF9-4E2B-8D00-0D6DDD2A47BC}" srcId="{FE08559D-8337-4A6E-AAAC-2678E01F98F9}" destId="{CEE68528-AF2B-4779-AC55-60395E7395BB}" srcOrd="4" destOrd="0" parTransId="{F5B4735F-0CBC-4469-8BB2-2E12E4719F14}" sibTransId="{F3258BB6-D4A7-46ED-A2B6-41602EC3AA21}"/>
     <dgm:cxn modelId="{6FACEAAC-0D2E-46C4-A39E-FE9F30604E5C}" srcId="{FE08559D-8337-4A6E-AAAC-2678E01F98F9}" destId="{85AA5D8F-5F69-462A-93FB-F1BA44709F0A}" srcOrd="0" destOrd="0" parTransId="{EE086127-5C67-435D-81F6-DF6C77BEA56C}" sibTransId="{DD59AA08-1673-40DE-9857-B7EE3831CECB}"/>
+    <dgm:cxn modelId="{73DE7BB8-92F1-46E7-BAD3-D5018ED6D73A}" srcId="{FE08559D-8337-4A6E-AAAC-2678E01F98F9}" destId="{8064A234-BF1F-4DAF-B90F-5480D92DC4B8}" srcOrd="2" destOrd="0" parTransId="{B622D86A-3457-40CE-AAE4-3F9B7C305234}" sibTransId="{F9B93003-B9F8-4BED-81D0-8B6CDA42172F}"/>
     <dgm:cxn modelId="{7299DCBD-7CA8-461C-84D7-7FE6DFCC5EDA}" type="presOf" srcId="{FE08559D-8337-4A6E-AAAC-2678E01F98F9}" destId="{3C4F3C42-7020-4191-84EA-967F217D3615}" srcOrd="0" destOrd="0" presId="urn:microsoft.com/office/officeart/2018/2/layout/IconVerticalSolidList"/>
-    <dgm:cxn modelId="{67052CD4-0E3C-43F1-8C33-005B5C916084}" type="presOf" srcId="{7D025CEB-B2F2-4719-BED6-83576B354EDB}" destId="{2B13FB02-2D03-4370-9EEC-A0B6A5E342EE}" srcOrd="0" destOrd="0" presId="urn:microsoft.com/office/officeart/2018/2/layout/IconVerticalSolidList"/>
-    <dgm:cxn modelId="{83CDEAEE-31CA-4A2D-99BC-96434B7486EE}" type="presOf" srcId="{7C671053-6896-44CD-8ECC-3C1C4A176612}" destId="{950B1FA5-B88F-44FD-9049-381D36CADF6C}" srcOrd="0" destOrd="0" presId="urn:microsoft.com/office/officeart/2018/2/layout/IconVerticalSolidList"/>
-    <dgm:cxn modelId="{A86C476C-B091-418E-A5DF-0D42275EAC63}" type="presParOf" srcId="{3C4F3C42-7020-4191-84EA-967F217D3615}" destId="{9E46882C-BECE-46D0-A135-C91F5BC98DB1}" srcOrd="0" destOrd="0" presId="urn:microsoft.com/office/officeart/2018/2/layout/IconVerticalSolidList"/>
-    <dgm:cxn modelId="{DA15A778-663F-4B1D-81B8-DA4B443ABC4D}" type="presParOf" srcId="{9E46882C-BECE-46D0-A135-C91F5BC98DB1}" destId="{86571330-8E11-46A8-98AD-E775DB58FE69}" srcOrd="0" destOrd="0" presId="urn:microsoft.com/office/officeart/2018/2/layout/IconVerticalSolidList"/>
-    <dgm:cxn modelId="{05802804-3A4B-4CBC-A332-F276B9E74A22}" type="presParOf" srcId="{9E46882C-BECE-46D0-A135-C91F5BC98DB1}" destId="{04294C86-5B50-4EAA-AF41-6314C2F42296}" srcOrd="1" destOrd="0" presId="urn:microsoft.com/office/officeart/2018/2/layout/IconVerticalSolidList"/>
-    <dgm:cxn modelId="{6A603C83-9F6B-42FE-B147-06A04ACA65C4}" type="presParOf" srcId="{9E46882C-BECE-46D0-A135-C91F5BC98DB1}" destId="{CEFB26F4-2B62-475D-8FEA-B9A129086E79}" srcOrd="2" destOrd="0" presId="urn:microsoft.com/office/officeart/2018/2/layout/IconVerticalSolidList"/>
-    <dgm:cxn modelId="{0C4F2457-44F7-419B-87C5-12BB22A5FD69}" type="presParOf" srcId="{9E46882C-BECE-46D0-A135-C91F5BC98DB1}" destId="{E7C1B605-ACB0-4AC3-AA7D-3A4FE125391A}" srcOrd="3" destOrd="0" presId="urn:microsoft.com/office/officeart/2018/2/layout/IconVerticalSolidList"/>
-    <dgm:cxn modelId="{D457015F-2DD1-4479-9568-6B90BA46F78A}" type="presParOf" srcId="{3C4F3C42-7020-4191-84EA-967F217D3615}" destId="{FA23C2C4-FB48-4E04-BA2E-4E3CDF6273AC}" srcOrd="1" destOrd="0" presId="urn:microsoft.com/office/officeart/2018/2/layout/IconVerticalSolidList"/>
-    <dgm:cxn modelId="{E5F07C5A-F8B1-4D19-81F0-F1073B6DEF31}" type="presParOf" srcId="{3C4F3C42-7020-4191-84EA-967F217D3615}" destId="{E8043BD2-82BD-4C00-8C1E-58C9E18528DC}" srcOrd="2" destOrd="0" presId="urn:microsoft.com/office/officeart/2018/2/layout/IconVerticalSolidList"/>
-    <dgm:cxn modelId="{36FBEB60-8D30-466C-9F62-6B238D989E65}" type="presParOf" srcId="{E8043BD2-82BD-4C00-8C1E-58C9E18528DC}" destId="{6FD62ABC-6DED-434B-B360-5C8C159277DA}" srcOrd="0" destOrd="0" presId="urn:microsoft.com/office/officeart/2018/2/layout/IconVerticalSolidList"/>
-    <dgm:cxn modelId="{02A55A87-E693-4A12-BED4-BC6BEC787010}" type="presParOf" srcId="{E8043BD2-82BD-4C00-8C1E-58C9E18528DC}" destId="{C68AACE6-51CA-4A97-924B-1F0783A3E0C7}" srcOrd="1" destOrd="0" presId="urn:microsoft.com/office/officeart/2018/2/layout/IconVerticalSolidList"/>
-    <dgm:cxn modelId="{93F8AECC-3889-4777-9CEA-B00E25814351}" type="presParOf" srcId="{E8043BD2-82BD-4C00-8C1E-58C9E18528DC}" destId="{EB3F9506-9C94-4A03-A89E-115DA3F3604E}" srcOrd="2" destOrd="0" presId="urn:microsoft.com/office/officeart/2018/2/layout/IconVerticalSolidList"/>
-    <dgm:cxn modelId="{177655CE-0D36-46F7-BEC2-F45081A9C718}" type="presParOf" srcId="{E8043BD2-82BD-4C00-8C1E-58C9E18528DC}" destId="{950B1FA5-B88F-44FD-9049-381D36CADF6C}" srcOrd="3" destOrd="0" presId="urn:microsoft.com/office/officeart/2018/2/layout/IconVerticalSolidList"/>
-    <dgm:cxn modelId="{B6CFB544-DEFB-4072-9D17-46A988BC5F70}" type="presParOf" srcId="{3C4F3C42-7020-4191-84EA-967F217D3615}" destId="{03B6D6E5-3884-45FE-BD9E-BB6E23700AAC}" srcOrd="3" destOrd="0" presId="urn:microsoft.com/office/officeart/2018/2/layout/IconVerticalSolidList"/>
-    <dgm:cxn modelId="{86157515-663A-40A3-9B92-A41C19DFF87A}" type="presParOf" srcId="{3C4F3C42-7020-4191-84EA-967F217D3615}" destId="{87F7A8C9-BC92-4E97-97FF-C82325BA845F}" srcOrd="4" destOrd="0" presId="urn:microsoft.com/office/officeart/2018/2/layout/IconVerticalSolidList"/>
-    <dgm:cxn modelId="{CFC71B97-B8C0-475D-8D81-9C2D43FD9ED1}" type="presParOf" srcId="{87F7A8C9-BC92-4E97-97FF-C82325BA845F}" destId="{880A247A-69D8-41AF-9F00-D57CADE45FF2}" srcOrd="0" destOrd="0" presId="urn:microsoft.com/office/officeart/2018/2/layout/IconVerticalSolidList"/>
-    <dgm:cxn modelId="{97D8D663-E713-4475-BB87-E2BCE698F7D1}" type="presParOf" srcId="{87F7A8C9-BC92-4E97-97FF-C82325BA845F}" destId="{064CAEE8-6731-44B8-A3B5-1CD990FC346A}" srcOrd="1" destOrd="0" presId="urn:microsoft.com/office/officeart/2018/2/layout/IconVerticalSolidList"/>
-    <dgm:cxn modelId="{12C0D8B4-D759-4CC0-A0E3-02FD87631395}" type="presParOf" srcId="{87F7A8C9-BC92-4E97-97FF-C82325BA845F}" destId="{9DB0631A-FA2B-49D9-AE47-18C0E60F7E1B}" srcOrd="2" destOrd="0" presId="urn:microsoft.com/office/officeart/2018/2/layout/IconVerticalSolidList"/>
-    <dgm:cxn modelId="{A7383A3A-887A-46E6-823C-514B4B4BF02E}" type="presParOf" srcId="{87F7A8C9-BC92-4E97-97FF-C82325BA845F}" destId="{596B03D9-E340-4CA2-B44A-EF9DC5C31145}" srcOrd="3" destOrd="0" presId="urn:microsoft.com/office/officeart/2018/2/layout/IconVerticalSolidList"/>
-    <dgm:cxn modelId="{08D490E1-3631-4861-B91B-09EE5818A379}" type="presParOf" srcId="{3C4F3C42-7020-4191-84EA-967F217D3615}" destId="{C2E79B2D-7A0E-465C-AAF9-0B90AA5A974D}" srcOrd="5" destOrd="0" presId="urn:microsoft.com/office/officeart/2018/2/layout/IconVerticalSolidList"/>
-    <dgm:cxn modelId="{3EEA8947-E4D7-4332-B186-37F511DACF9C}" type="presParOf" srcId="{3C4F3C42-7020-4191-84EA-967F217D3615}" destId="{2E07EDBF-B79E-452D-BF76-C9FDF47764A9}" srcOrd="6" destOrd="0" presId="urn:microsoft.com/office/officeart/2018/2/layout/IconVerticalSolidList"/>
-    <dgm:cxn modelId="{52E3519B-7BD6-4FEF-9E84-99534A43405C}" type="presParOf" srcId="{2E07EDBF-B79E-452D-BF76-C9FDF47764A9}" destId="{0921C9BC-DFC9-476E-83B3-486B30726ED5}" srcOrd="0" destOrd="0" presId="urn:microsoft.com/office/officeart/2018/2/layout/IconVerticalSolidList"/>
-    <dgm:cxn modelId="{A6F08B03-E0C3-43DE-B615-5409B1C63E5E}" type="presParOf" srcId="{2E07EDBF-B79E-452D-BF76-C9FDF47764A9}" destId="{247484BD-C9F6-4F12-B35A-7D5D12481F23}" srcOrd="1" destOrd="0" presId="urn:microsoft.com/office/officeart/2018/2/layout/IconVerticalSolidList"/>
-    <dgm:cxn modelId="{DF755A6C-EF45-4A8D-B59B-09E52F9A1538}" type="presParOf" srcId="{2E07EDBF-B79E-452D-BF76-C9FDF47764A9}" destId="{43E1689D-6AF5-47C2-B885-013EE3D79FFE}" srcOrd="2" destOrd="0" presId="urn:microsoft.com/office/officeart/2018/2/layout/IconVerticalSolidList"/>
-    <dgm:cxn modelId="{F8388BC2-BDD0-458B-A109-B6D606B8361A}" type="presParOf" srcId="{2E07EDBF-B79E-452D-BF76-C9FDF47764A9}" destId="{2B13FB02-2D03-4370-9EEC-A0B6A5E342EE}" srcOrd="3" destOrd="0" presId="urn:microsoft.com/office/officeart/2018/2/layout/IconVerticalSolidList"/>
-    <dgm:cxn modelId="{E71E9040-DEE9-4D41-B4DC-1726A775AB1B}" type="presParOf" srcId="{3C4F3C42-7020-4191-84EA-967F217D3615}" destId="{BE152156-96A2-453B-A738-7B573C59895A}" srcOrd="7" destOrd="0" presId="urn:microsoft.com/office/officeart/2018/2/layout/IconVerticalSolidList"/>
-    <dgm:cxn modelId="{F7478591-73DC-4E44-84B5-A058BD4D9DA5}" type="presParOf" srcId="{3C4F3C42-7020-4191-84EA-967F217D3615}" destId="{7C57AA9C-F789-46C1-80A3-FBF4C23298FE}" srcOrd="8" destOrd="0" presId="urn:microsoft.com/office/officeart/2018/2/layout/IconVerticalSolidList"/>
-    <dgm:cxn modelId="{8ADBDF16-6CC5-47C2-8098-3F348D561572}" type="presParOf" srcId="{7C57AA9C-F789-46C1-80A3-FBF4C23298FE}" destId="{2112CAB0-F140-404C-BCA9-40A3DE4D654F}" srcOrd="0" destOrd="0" presId="urn:microsoft.com/office/officeart/2018/2/layout/IconVerticalSolidList"/>
-    <dgm:cxn modelId="{04380322-C99B-48CC-BA90-66FC5E82924A}" type="presParOf" srcId="{7C57AA9C-F789-46C1-80A3-FBF4C23298FE}" destId="{1EBE7DDA-BF30-481A-854A-5BA5B98CABFA}" srcOrd="1" destOrd="0" presId="urn:microsoft.com/office/officeart/2018/2/layout/IconVerticalSolidList"/>
-    <dgm:cxn modelId="{9F450A49-3D4C-454E-B5FB-1A5CBECFEBB4}" type="presParOf" srcId="{7C57AA9C-F789-46C1-80A3-FBF4C23298FE}" destId="{643693BE-A8E9-49FC-B7AE-2AF3A7CC053E}" srcOrd="2" destOrd="0" presId="urn:microsoft.com/office/officeart/2018/2/layout/IconVerticalSolidList"/>
-    <dgm:cxn modelId="{8561B245-6A6D-4223-A184-241FC2B52820}" type="presParOf" srcId="{7C57AA9C-F789-46C1-80A3-FBF4C23298FE}" destId="{2A60244E-E964-45B3-84E9-D98EFEB5229E}" srcOrd="3" destOrd="0" presId="urn:microsoft.com/office/officeart/2018/2/layout/IconVerticalSolidList"/>
+    <dgm:cxn modelId="{91F286CC-5816-4F17-A4B7-BB80E542CE4E}" srcId="{807050C1-8C11-475E-8C01-26B31FE5EB00}" destId="{B92F900B-53DE-4750-8858-863E6F595F83}" srcOrd="0" destOrd="0" parTransId="{3C7429B2-9DF0-425D-9A4A-0E35D2A6CED8}" sibTransId="{0CAD3DCA-4BCE-4BB6-864C-1DB8D45FF20C}"/>
+    <dgm:cxn modelId="{EE91C4D6-D528-4014-A577-14104A0943D7}" srcId="{807050C1-8C11-475E-8C01-26B31FE5EB00}" destId="{56B69E04-51C8-4520-8DF8-E4694A197088}" srcOrd="1" destOrd="0" parTransId="{AE0B3524-B3B0-42D3-9722-0FB652001C20}" sibTransId="{854D4520-9114-4B8C-8271-8286D24577AF}"/>
+    <dgm:cxn modelId="{0D510EE1-1683-463C-8423-945C1A024DB0}" type="presOf" srcId="{807050C1-8C11-475E-8C01-26B31FE5EB00}" destId="{1BBAC8CA-CC01-433A-B510-15C9853E2A9F}" srcOrd="0" destOrd="0" presId="urn:microsoft.com/office/officeart/2018/2/layout/IconVerticalSolidList"/>
+    <dgm:cxn modelId="{B6B233E5-7A48-41EF-9D2B-4F74B3DD23ED}" srcId="{FE08559D-8337-4A6E-AAAC-2678E01F98F9}" destId="{807050C1-8C11-475E-8C01-26B31FE5EB00}" srcOrd="1" destOrd="0" parTransId="{D6007DC2-1F43-4EEE-A15C-A93EDC451510}" sibTransId="{80170D7A-3E9A-4F5A-A147-FD2C7FE5B879}"/>
+    <dgm:cxn modelId="{02AFDE86-D1D1-44E2-941E-EEB720F45454}" type="presParOf" srcId="{3C4F3C42-7020-4191-84EA-967F217D3615}" destId="{9E46882C-BECE-46D0-A135-C91F5BC98DB1}" srcOrd="0" destOrd="0" presId="urn:microsoft.com/office/officeart/2018/2/layout/IconVerticalSolidList"/>
+    <dgm:cxn modelId="{B042ABFA-464D-4E7C-BBFC-38EC0AB9D03C}" type="presParOf" srcId="{9E46882C-BECE-46D0-A135-C91F5BC98DB1}" destId="{86571330-8E11-46A8-98AD-E775DB58FE69}" srcOrd="0" destOrd="0" presId="urn:microsoft.com/office/officeart/2018/2/layout/IconVerticalSolidList"/>
+    <dgm:cxn modelId="{99374E9D-EDD8-4EFC-92ED-8C08A409FDE3}" type="presParOf" srcId="{9E46882C-BECE-46D0-A135-C91F5BC98DB1}" destId="{04294C86-5B50-4EAA-AF41-6314C2F42296}" srcOrd="1" destOrd="0" presId="urn:microsoft.com/office/officeart/2018/2/layout/IconVerticalSolidList"/>
+    <dgm:cxn modelId="{B3D65D15-E8F5-41F8-BC46-797D341AD9A1}" type="presParOf" srcId="{9E46882C-BECE-46D0-A135-C91F5BC98DB1}" destId="{CEFB26F4-2B62-475D-8FEA-B9A129086E79}" srcOrd="2" destOrd="0" presId="urn:microsoft.com/office/officeart/2018/2/layout/IconVerticalSolidList"/>
+    <dgm:cxn modelId="{CCA7AE9A-4C33-4EC4-A45C-6103F6B613DB}" type="presParOf" srcId="{9E46882C-BECE-46D0-A135-C91F5BC98DB1}" destId="{E7C1B605-ACB0-4AC3-AA7D-3A4FE125391A}" srcOrd="3" destOrd="0" presId="urn:microsoft.com/office/officeart/2018/2/layout/IconVerticalSolidList"/>
+    <dgm:cxn modelId="{7C69F2D6-7A15-4A68-A4B7-2997B179945E}" type="presParOf" srcId="{3C4F3C42-7020-4191-84EA-967F217D3615}" destId="{FA23C2C4-FB48-4E04-BA2E-4E3CDF6273AC}" srcOrd="1" destOrd="0" presId="urn:microsoft.com/office/officeart/2018/2/layout/IconVerticalSolidList"/>
+    <dgm:cxn modelId="{6D7D6EAB-153A-404C-A1B2-DD50C0601ECA}" type="presParOf" srcId="{3C4F3C42-7020-4191-84EA-967F217D3615}" destId="{D0F841CB-087A-4D6F-B864-2B445975B079}" srcOrd="2" destOrd="0" presId="urn:microsoft.com/office/officeart/2018/2/layout/IconVerticalSolidList"/>
+    <dgm:cxn modelId="{7D217C22-1D5F-4DBA-ABCD-47C1078DBDE2}" type="presParOf" srcId="{D0F841CB-087A-4D6F-B864-2B445975B079}" destId="{56D79F9F-8B7B-43A2-ACC6-DC01DEFE174F}" srcOrd="0" destOrd="0" presId="urn:microsoft.com/office/officeart/2018/2/layout/IconVerticalSolidList"/>
+    <dgm:cxn modelId="{101658CA-3587-4012-B741-20A1DA624BC4}" type="presParOf" srcId="{D0F841CB-087A-4D6F-B864-2B445975B079}" destId="{EEEBBDBC-8178-4624-BF0E-80F7C85B6753}" srcOrd="1" destOrd="0" presId="urn:microsoft.com/office/officeart/2018/2/layout/IconVerticalSolidList"/>
+    <dgm:cxn modelId="{57D7734E-6ACC-4A05-ADC4-3C1B04325A20}" type="presParOf" srcId="{D0F841CB-087A-4D6F-B864-2B445975B079}" destId="{96FBE269-F1B1-43F4-97C8-C4610372227C}" srcOrd="2" destOrd="0" presId="urn:microsoft.com/office/officeart/2018/2/layout/IconVerticalSolidList"/>
+    <dgm:cxn modelId="{118EB5D3-1276-418D-844A-990EAFE04B7F}" type="presParOf" srcId="{D0F841CB-087A-4D6F-B864-2B445975B079}" destId="{1BBAC8CA-CC01-433A-B510-15C9853E2A9F}" srcOrd="3" destOrd="0" presId="urn:microsoft.com/office/officeart/2018/2/layout/IconVerticalSolidList"/>
+    <dgm:cxn modelId="{B15EE49B-CCC0-4B1F-ACFB-FDE38D0270F7}" type="presParOf" srcId="{D0F841CB-087A-4D6F-B864-2B445975B079}" destId="{CE2EC13B-828B-4729-969C-C7E824CEF7BD}" srcOrd="4" destOrd="0" presId="urn:microsoft.com/office/officeart/2018/2/layout/IconVerticalSolidList"/>
+    <dgm:cxn modelId="{05F56AD4-344D-46B4-90CB-6AD50F789385}" type="presParOf" srcId="{3C4F3C42-7020-4191-84EA-967F217D3615}" destId="{C36A4C0B-D8C5-4A2E-87E0-3AB19282132A}" srcOrd="3" destOrd="0" presId="urn:microsoft.com/office/officeart/2018/2/layout/IconVerticalSolidList"/>
+    <dgm:cxn modelId="{553AF792-3FD3-4D65-98F9-1F60E9666B0E}" type="presParOf" srcId="{3C4F3C42-7020-4191-84EA-967F217D3615}" destId="{347F412D-DDFA-4BB9-82E4-7328FCE77A96}" srcOrd="4" destOrd="0" presId="urn:microsoft.com/office/officeart/2018/2/layout/IconVerticalSolidList"/>
+    <dgm:cxn modelId="{67ABFB2B-8F32-4CAC-A2B0-6100A9322CF9}" type="presParOf" srcId="{347F412D-DDFA-4BB9-82E4-7328FCE77A96}" destId="{74EEF5FE-0645-4875-8A6D-D9E525D38BB9}" srcOrd="0" destOrd="0" presId="urn:microsoft.com/office/officeart/2018/2/layout/IconVerticalSolidList"/>
+    <dgm:cxn modelId="{8C4E673E-D708-4D6C-940E-8DDA7D6F03CE}" type="presParOf" srcId="{347F412D-DDFA-4BB9-82E4-7328FCE77A96}" destId="{8AAFAEF8-CC7C-4A37-A892-33745DF833BD}" srcOrd="1" destOrd="0" presId="urn:microsoft.com/office/officeart/2018/2/layout/IconVerticalSolidList"/>
+    <dgm:cxn modelId="{5AE62B1E-1136-4AE1-BB59-72B1A2D823D6}" type="presParOf" srcId="{347F412D-DDFA-4BB9-82E4-7328FCE77A96}" destId="{80003962-E3BE-469F-85A7-D4DB1AA4E862}" srcOrd="2" destOrd="0" presId="urn:microsoft.com/office/officeart/2018/2/layout/IconVerticalSolidList"/>
+    <dgm:cxn modelId="{8E6F4B11-74F7-4082-B983-C5C6B614064D}" type="presParOf" srcId="{347F412D-DDFA-4BB9-82E4-7328FCE77A96}" destId="{FED68ED4-F4A8-4999-B56D-D7B33ED1E9E1}" srcOrd="3" destOrd="0" presId="urn:microsoft.com/office/officeart/2018/2/layout/IconVerticalSolidList"/>
+    <dgm:cxn modelId="{ACCEA82B-67B8-46E8-ABD5-581F8A3E4A8B}" type="presParOf" srcId="{3C4F3C42-7020-4191-84EA-967F217D3615}" destId="{1E51939E-E7AE-40D8-8B9B-5B3C974E105D}" srcOrd="5" destOrd="0" presId="urn:microsoft.com/office/officeart/2018/2/layout/IconVerticalSolidList"/>
+    <dgm:cxn modelId="{B89D1D73-BDD3-4BA2-9BAC-D072CD31D3EB}" type="presParOf" srcId="{3C4F3C42-7020-4191-84EA-967F217D3615}" destId="{F19AB5E5-8AC2-437D-AF4C-2E66DC50B40C}" srcOrd="6" destOrd="0" presId="urn:microsoft.com/office/officeart/2018/2/layout/IconVerticalSolidList"/>
+    <dgm:cxn modelId="{8CB13DCD-C2F5-4226-ABD5-9E1D7B38A4A6}" type="presParOf" srcId="{F19AB5E5-8AC2-437D-AF4C-2E66DC50B40C}" destId="{408C9004-E47E-49AE-B9CB-993ED74C482C}" srcOrd="0" destOrd="0" presId="urn:microsoft.com/office/officeart/2018/2/layout/IconVerticalSolidList"/>
+    <dgm:cxn modelId="{F69FCB95-54E7-4061-9076-62842C58DBB0}" type="presParOf" srcId="{F19AB5E5-8AC2-437D-AF4C-2E66DC50B40C}" destId="{83C48CF6-C7BB-45FD-8C92-8A8BBFBD8D99}" srcOrd="1" destOrd="0" presId="urn:microsoft.com/office/officeart/2018/2/layout/IconVerticalSolidList"/>
+    <dgm:cxn modelId="{2775128C-205A-41A5-8381-9FC5669F214B}" type="presParOf" srcId="{F19AB5E5-8AC2-437D-AF4C-2E66DC50B40C}" destId="{D129BEAB-C015-4B9E-A133-417177B272F4}" srcOrd="2" destOrd="0" presId="urn:microsoft.com/office/officeart/2018/2/layout/IconVerticalSolidList"/>
+    <dgm:cxn modelId="{4A934CFF-EBD5-4CE2-805C-722237AE88D0}" type="presParOf" srcId="{F19AB5E5-8AC2-437D-AF4C-2E66DC50B40C}" destId="{0B38EFF2-8340-44DB-A76C-B231D0E10C01}" srcOrd="3" destOrd="0" presId="urn:microsoft.com/office/officeart/2018/2/layout/IconVerticalSolidList"/>
+    <dgm:cxn modelId="{827861F1-D454-46EB-A4D9-E81EEB84AA9A}" type="presParOf" srcId="{3C4F3C42-7020-4191-84EA-967F217D3615}" destId="{ED07E050-CD52-455F-9C86-4CEF23FD9318}" srcOrd="7" destOrd="0" presId="urn:microsoft.com/office/officeart/2018/2/layout/IconVerticalSolidList"/>
+    <dgm:cxn modelId="{25D600DF-B4D9-462A-BA8F-15074EAE2EB8}" type="presParOf" srcId="{3C4F3C42-7020-4191-84EA-967F217D3615}" destId="{7C57AA9C-F789-46C1-80A3-FBF4C23298FE}" srcOrd="8" destOrd="0" presId="urn:microsoft.com/office/officeart/2018/2/layout/IconVerticalSolidList"/>
+    <dgm:cxn modelId="{9E9C5301-0BB3-4E98-846A-A78084F49F0B}" type="presParOf" srcId="{7C57AA9C-F789-46C1-80A3-FBF4C23298FE}" destId="{2112CAB0-F140-404C-BCA9-40A3DE4D654F}" srcOrd="0" destOrd="0" presId="urn:microsoft.com/office/officeart/2018/2/layout/IconVerticalSolidList"/>
+    <dgm:cxn modelId="{EC63F745-841A-4103-96F3-4DB54C34B798}" type="presParOf" srcId="{7C57AA9C-F789-46C1-80A3-FBF4C23298FE}" destId="{1EBE7DDA-BF30-481A-854A-5BA5B98CABFA}" srcOrd="1" destOrd="0" presId="urn:microsoft.com/office/officeart/2018/2/layout/IconVerticalSolidList"/>
+    <dgm:cxn modelId="{0E4DC8B3-5931-4EFE-A433-281E1C284AC1}" type="presParOf" srcId="{7C57AA9C-F789-46C1-80A3-FBF4C23298FE}" destId="{643693BE-A8E9-49FC-B7AE-2AF3A7CC053E}" srcOrd="2" destOrd="0" presId="urn:microsoft.com/office/officeart/2018/2/layout/IconVerticalSolidList"/>
+    <dgm:cxn modelId="{7DDC36A8-6DDD-4E7D-8C5A-267C90C4F030}" type="presParOf" srcId="{7C57AA9C-F789-46C1-80A3-FBF4C23298FE}" destId="{2A60244E-E964-45B3-84E9-D98EFEB5229E}" srcOrd="3" destOrd="0" presId="urn:microsoft.com/office/officeart/2018/2/layout/IconVerticalSolidList"/>
   </dgm:cxnLst>
   <dgm:bg/>
   <dgm:whole/>
@@ -5828,7 +6519,7 @@
 <dgm:dataModel xmlns:dgm="http://schemas.openxmlformats.org/drawingml/2006/diagram" xmlns:a="http://schemas.openxmlformats.org/drawingml/2006/main">
   <dgm:ptLst>
     <dgm:pt modelId="{BBDE1C87-5C51-44D5-9CC6-4F459036CA20}" type="doc">
-      <dgm:prSet loTypeId="urn:microsoft.com/office/officeart/2016/7/layout/LinearBlockProcessNumbered" loCatId="process" qsTypeId="urn:microsoft.com/office/officeart/2005/8/quickstyle/simple1" qsCatId="simple" csTypeId="urn:microsoft.com/office/officeart/2005/8/colors/colorful1" csCatId="colorful"/>
+      <dgm:prSet loTypeId="urn:microsoft.com/office/officeart/2016/7/layout/LinearBlockProcessNumbered" loCatId="process" qsTypeId="urn:microsoft.com/office/officeart/2005/8/quickstyle/simple1" qsCatId="simple" csTypeId="urn:microsoft.com/office/officeart/2005/8/colors/colorful1" csCatId="colorful" phldr="1"/>
       <dgm:spPr/>
       <dgm:t>
         <a:bodyPr/>
@@ -5846,10 +6537,14 @@
         <a:lstStyle/>
         <a:p>
           <a:r>
-            <a:rPr lang="en-MY"/>
-            <a:t>Akurasi (R^2 ~0.93): Normal Equation paling eksak (MSE: 2416.29). Tuned GD (2416.35) berhasil memangkas error Vanilla GD (2416.49).</a:t>
-          </a:r>
-          <a:endParaRPr lang="en-US"/>
+            <a:rPr lang="en-MY" b="1" dirty="0" err="1"/>
+            <a:t>Akurasi</a:t>
+          </a:r>
+          <a:r>
+            <a:rPr lang="en-MY" b="1" dirty="0"/>
+            <a:t> (R^2 ~0.93):</a:t>
+          </a:r>
+          <a:endParaRPr lang="en-US" b="1" dirty="0"/>
         </a:p>
       </dgm:t>
     </dgm:pt>
@@ -5865,7 +6560,7 @@
       </dgm:t>
     </dgm:pt>
     <dgm:pt modelId="{BC4CFBD0-F3AC-435B-ACCE-CACDC616F123}" type="sibTrans" cxnId="{2437A840-BD6C-420D-966A-F29CEC77E1F3}">
-      <dgm:prSet phldrT="01"/>
+      <dgm:prSet phldrT="01" phldr="0"/>
       <dgm:spPr/>
       <dgm:t>
         <a:bodyPr/>
@@ -5879,17 +6574,29 @@
       </dgm:t>
     </dgm:pt>
     <dgm:pt modelId="{52FDD03F-22EB-4C44-970F-FB1C130A7D6F}">
-      <dgm:prSet/>
+      <dgm:prSet custT="1"/>
       <dgm:spPr/>
       <dgm:t>
         <a:bodyPr/>
         <a:lstStyle/>
         <a:p>
           <a:r>
-            <a:rPr lang="en-MY"/>
-            <a:t>Kecepatan Komputasi: Normal Equation instan (~0.25 detik). Tuned GD terlama (~200 detik) karena proses Grid Search.</a:t>
-          </a:r>
-          <a:endParaRPr lang="en-US"/>
+            <a:rPr lang="en-MY" sz="2100" b="1" dirty="0" err="1"/>
+            <a:t>Kecepatan</a:t>
+          </a:r>
+          <a:r>
+            <a:rPr lang="en-MY" sz="2100" b="1" dirty="0"/>
+            <a:t> </a:t>
+          </a:r>
+          <a:r>
+            <a:rPr lang="en-MY" sz="2100" b="1" dirty="0" err="1"/>
+            <a:t>Komputasi</a:t>
+          </a:r>
+          <a:r>
+            <a:rPr lang="en-MY" sz="2100" b="1" dirty="0"/>
+            <a:t>:</a:t>
+          </a:r>
+          <a:endParaRPr lang="en-US" sz="2100" b="1" dirty="0"/>
         </a:p>
       </dgm:t>
     </dgm:pt>
@@ -5905,7 +6612,7 @@
       </dgm:t>
     </dgm:pt>
     <dgm:pt modelId="{D880E2E8-6C4F-4326-9449-CC81CE1F7F66}" type="sibTrans" cxnId="{AE03AF82-7093-41CF-9668-095285EE6357}">
-      <dgm:prSet phldrT="02"/>
+      <dgm:prSet phldrT="02" phldr="0"/>
       <dgm:spPr/>
       <dgm:t>
         <a:bodyPr/>
@@ -5926,10 +6633,102 @@
         <a:lstStyle/>
         <a:p>
           <a:r>
-            <a:rPr lang="en-MY"/>
-            <a:t>Efisiensi Iterasi: Berkat early stopping, Tuned GD konvergen hanya dalam 540 iterasi, jauh mengungguli Vanilla GD yang terjebak di 4700 iterasi.</a:t>
-          </a:r>
-          <a:endParaRPr lang="en-US"/>
+            <a:rPr lang="en-MY" b="1" dirty="0" err="1"/>
+            <a:t>Efisiensi</a:t>
+          </a:r>
+          <a:r>
+            <a:rPr lang="en-MY" b="1" dirty="0"/>
+            <a:t> </a:t>
+          </a:r>
+          <a:r>
+            <a:rPr lang="en-MY" b="1" dirty="0" err="1"/>
+            <a:t>Iterasi</a:t>
+          </a:r>
+          <a:r>
+            <a:rPr lang="en-MY" b="1" dirty="0"/>
+            <a:t>: </a:t>
+          </a:r>
+        </a:p>
+        <a:p>
+          <a:r>
+            <a:rPr lang="en-MY" dirty="0" err="1"/>
+            <a:t>Berkat</a:t>
+          </a:r>
+          <a:r>
+            <a:rPr lang="en-MY" dirty="0"/>
+            <a:t> early stopping, Tuned GD : </a:t>
+          </a:r>
+          <a:r>
+            <a:rPr lang="en-MY" dirty="0" err="1"/>
+            <a:t>konvergen</a:t>
+          </a:r>
+          <a:r>
+            <a:rPr lang="en-MY" dirty="0"/>
+            <a:t> </a:t>
+          </a:r>
+          <a:r>
+            <a:rPr lang="en-MY" dirty="0" err="1"/>
+            <a:t>hanya</a:t>
+          </a:r>
+          <a:r>
+            <a:rPr lang="en-MY" dirty="0"/>
+            <a:t> </a:t>
+          </a:r>
+          <a:r>
+            <a:rPr lang="en-MY" dirty="0" err="1"/>
+            <a:t>dalam</a:t>
+          </a:r>
+          <a:r>
+            <a:rPr lang="en-MY" dirty="0"/>
+            <a:t> 540 </a:t>
+          </a:r>
+          <a:r>
+            <a:rPr lang="en-MY" dirty="0" err="1"/>
+            <a:t>iterasi</a:t>
+          </a:r>
+          <a:r>
+            <a:rPr lang="en-MY" dirty="0"/>
+            <a:t>, </a:t>
+          </a:r>
+          <a:r>
+            <a:rPr lang="en-MY" dirty="0" err="1"/>
+            <a:t>jauh</a:t>
+          </a:r>
+          <a:r>
+            <a:rPr lang="en-MY" dirty="0"/>
+            <a:t> </a:t>
+          </a:r>
+          <a:r>
+            <a:rPr lang="en-MY" dirty="0" err="1"/>
+            <a:t>mengungguli</a:t>
+          </a:r>
+          <a:r>
+            <a:rPr lang="en-MY" dirty="0"/>
+            <a:t> </a:t>
+          </a:r>
+        </a:p>
+        <a:p>
+          <a:r>
+            <a:rPr lang="en-MY" dirty="0"/>
+            <a:t>Vanilla GD :yang </a:t>
+          </a:r>
+          <a:r>
+            <a:rPr lang="en-MY" dirty="0" err="1"/>
+            <a:t>terjebak</a:t>
+          </a:r>
+          <a:r>
+            <a:rPr lang="en-MY" dirty="0"/>
+            <a:t> di 4700 </a:t>
+          </a:r>
+          <a:r>
+            <a:rPr lang="en-MY" dirty="0" err="1"/>
+            <a:t>iterasi</a:t>
+          </a:r>
+          <a:r>
+            <a:rPr lang="en-MY" dirty="0"/>
+            <a:t>.</a:t>
+          </a:r>
+          <a:endParaRPr lang="en-US" dirty="0"/>
         </a:p>
       </dgm:t>
     </dgm:pt>
@@ -5945,7 +6744,7 @@
       </dgm:t>
     </dgm:pt>
     <dgm:pt modelId="{F0ED05C0-F97F-4C29-94D8-D38F1C2D555D}" type="sibTrans" cxnId="{779AF68A-5E99-4033-98EA-F4730A5BF649}">
-      <dgm:prSet phldrT="03"/>
+      <dgm:prSet phldrT="03" phldr="0"/>
       <dgm:spPr/>
       <dgm:t>
         <a:bodyPr/>
@@ -5957,6 +6756,169 @@
           </a:r>
         </a:p>
       </dgm:t>
+    </dgm:pt>
+    <dgm:pt modelId="{F1673588-3E68-4BE1-AD41-2CB2C8D27E1D}">
+      <dgm:prSet/>
+      <dgm:spPr/>
+      <dgm:t>
+        <a:bodyPr/>
+        <a:lstStyle/>
+        <a:p>
+          <a:r>
+            <a:rPr lang="en-MY" dirty="0"/>
+            <a:t>Normal Equation paling </a:t>
+          </a:r>
+          <a:r>
+            <a:rPr lang="en-MY" dirty="0" err="1"/>
+            <a:t>eksak</a:t>
+          </a:r>
+          <a:r>
+            <a:rPr lang="en-MY" dirty="0"/>
+            <a:t> (MSE: 2416.29).</a:t>
+          </a:r>
+          <a:endParaRPr lang="en-US" dirty="0"/>
+        </a:p>
+      </dgm:t>
+    </dgm:pt>
+    <dgm:pt modelId="{B5405341-B5E0-4975-878F-5FFC435A9AF7}" type="parTrans" cxnId="{D390A2E5-F7C0-4934-8093-3807BA95230A}">
+      <dgm:prSet/>
+      <dgm:spPr/>
+    </dgm:pt>
+    <dgm:pt modelId="{AEA5E5DB-DC89-4852-BD52-D9124661084E}" type="sibTrans" cxnId="{D390A2E5-F7C0-4934-8093-3807BA95230A}">
+      <dgm:prSet phldrT="02" phldr="0"/>
+      <dgm:spPr/>
+    </dgm:pt>
+    <dgm:pt modelId="{80CE2CB4-0430-49DD-BB52-321A64227271}">
+      <dgm:prSet/>
+      <dgm:spPr/>
+      <dgm:t>
+        <a:bodyPr/>
+        <a:lstStyle/>
+        <a:p>
+          <a:r>
+            <a:rPr lang="en-MY" dirty="0"/>
+            <a:t>Tuned GD (2416.35)</a:t>
+          </a:r>
+          <a:endParaRPr lang="en-US" dirty="0"/>
+        </a:p>
+      </dgm:t>
+    </dgm:pt>
+    <dgm:pt modelId="{7779EC29-206D-4E5C-9B3C-A39BE5193B40}" type="parTrans" cxnId="{53E37BC4-CC29-4C5A-BEF4-ADC73F1EA9E4}">
+      <dgm:prSet/>
+      <dgm:spPr/>
+    </dgm:pt>
+    <dgm:pt modelId="{6FD8A693-F8A8-43FA-876C-EBA5C3D7388E}" type="sibTrans" cxnId="{53E37BC4-CC29-4C5A-BEF4-ADC73F1EA9E4}">
+      <dgm:prSet/>
+      <dgm:spPr/>
+    </dgm:pt>
+    <dgm:pt modelId="{28897CD1-08F6-42F1-99BD-20805A0DFD15}">
+      <dgm:prSet/>
+      <dgm:spPr/>
+      <dgm:t>
+        <a:bodyPr/>
+        <a:lstStyle/>
+        <a:p>
+          <a:r>
+            <a:rPr lang="en-MY" dirty="0"/>
+            <a:t>Vanilla GD (2416.49)</a:t>
+          </a:r>
+          <a:endParaRPr lang="en-US" dirty="0"/>
+        </a:p>
+      </dgm:t>
+    </dgm:pt>
+    <dgm:pt modelId="{0A730322-27AA-4D06-8BC7-E7A6A32F4E9A}" type="parTrans" cxnId="{EDFA6842-31AC-48B3-99C9-36F673FE9537}">
+      <dgm:prSet/>
+      <dgm:spPr/>
+    </dgm:pt>
+    <dgm:pt modelId="{F57B1D67-A635-4628-89E7-1E620D82AF9B}" type="sibTrans" cxnId="{EDFA6842-31AC-48B3-99C9-36F673FE9537}">
+      <dgm:prSet/>
+      <dgm:spPr/>
+    </dgm:pt>
+    <dgm:pt modelId="{4651F90D-DA21-4FE4-B16A-6ED98FFAE268}">
+      <dgm:prSet/>
+      <dgm:spPr/>
+      <dgm:t>
+        <a:bodyPr/>
+        <a:lstStyle/>
+        <a:p>
+          <a:r>
+            <a:rPr lang="en-MY" sz="1700" dirty="0"/>
+            <a:t>Normal Equation </a:t>
+          </a:r>
+          <a:r>
+            <a:rPr lang="en-MY" sz="1700" dirty="0" err="1"/>
+            <a:t>instan</a:t>
+          </a:r>
+          <a:r>
+            <a:rPr lang="en-MY" sz="1700" dirty="0"/>
+            <a:t> (~0.25 </a:t>
+          </a:r>
+          <a:r>
+            <a:rPr lang="en-MY" sz="1700" dirty="0" err="1"/>
+            <a:t>detik</a:t>
+          </a:r>
+          <a:r>
+            <a:rPr lang="en-MY" sz="1700" dirty="0"/>
+            <a:t>)</a:t>
+          </a:r>
+          <a:endParaRPr lang="en-US" sz="1700" dirty="0"/>
+        </a:p>
+      </dgm:t>
+    </dgm:pt>
+    <dgm:pt modelId="{3FA35072-FC5E-4D22-894C-701BFFEDF00B}" type="parTrans" cxnId="{35DEC416-159F-47FB-AD0C-432B195753AC}">
+      <dgm:prSet/>
+      <dgm:spPr/>
+    </dgm:pt>
+    <dgm:pt modelId="{339493CF-42CD-407F-BFE0-F97B9BBD1EBC}" type="sibTrans" cxnId="{35DEC416-159F-47FB-AD0C-432B195753AC}">
+      <dgm:prSet phldrT="03" phldr="0"/>
+      <dgm:spPr/>
+    </dgm:pt>
+    <dgm:pt modelId="{9A527794-B561-4589-8113-E8F4D02D1DCE}">
+      <dgm:prSet/>
+      <dgm:spPr/>
+      <dgm:t>
+        <a:bodyPr/>
+        <a:lstStyle/>
+        <a:p>
+          <a:r>
+            <a:rPr lang="en-MY" sz="1700" dirty="0"/>
+            <a:t>Tuned GD </a:t>
+          </a:r>
+          <a:r>
+            <a:rPr lang="en-MY" sz="1700" dirty="0" err="1"/>
+            <a:t>terlama</a:t>
+          </a:r>
+          <a:r>
+            <a:rPr lang="en-MY" sz="1700" dirty="0"/>
+            <a:t> (~200 </a:t>
+          </a:r>
+          <a:r>
+            <a:rPr lang="en-MY" sz="1700" dirty="0" err="1"/>
+            <a:t>detik</a:t>
+          </a:r>
+          <a:r>
+            <a:rPr lang="en-MY" sz="1700" dirty="0"/>
+            <a:t>) </a:t>
+          </a:r>
+          <a:r>
+            <a:rPr lang="en-MY" sz="1700" dirty="0" err="1"/>
+            <a:t>karena</a:t>
+          </a:r>
+          <a:r>
+            <a:rPr lang="en-MY" sz="1700" dirty="0"/>
+            <a:t> proses Grid Search.</a:t>
+          </a:r>
+          <a:endParaRPr lang="en-US" sz="1700" dirty="0"/>
+        </a:p>
+      </dgm:t>
+    </dgm:pt>
+    <dgm:pt modelId="{C1AD6A22-63C8-4C08-8B79-A24402D57CCA}" type="parTrans" cxnId="{184C0372-AE83-44E7-888D-11E63E3E8690}">
+      <dgm:prSet/>
+      <dgm:spPr/>
+    </dgm:pt>
+    <dgm:pt modelId="{6DC75C31-08D1-4FA9-959D-B1B3717595B5}" type="sibTrans" cxnId="{184C0372-AE83-44E7-888D-11E63E3E8690}">
+      <dgm:prSet/>
+      <dgm:spPr/>
     </dgm:pt>
     <dgm:pt modelId="{1D12A0AE-B9CF-4E45-8207-781D940EA34A}" type="pres">
       <dgm:prSet presAssocID="{BBDE1C87-5C51-44D5-9CC6-4F459036CA20}" presName="Name0" presStyleCnt="0">
@@ -6064,33 +7026,43 @@
     </dgm:pt>
   </dgm:ptLst>
   <dgm:cxnLst>
-    <dgm:cxn modelId="{75EE6E03-7899-4C2A-B694-1B14077846FE}" type="presOf" srcId="{D880E2E8-6C4F-4326-9449-CC81CE1F7F66}" destId="{EA08D74B-841F-44CB-9D16-F37A2D482610}" srcOrd="0" destOrd="0" presId="urn:microsoft.com/office/officeart/2016/7/layout/LinearBlockProcessNumbered"/>
-    <dgm:cxn modelId="{821D4006-96AD-42C1-ABEC-F6B0723C6F95}" type="presOf" srcId="{CCBCF089-6713-439E-AD46-8CEC9DD71362}" destId="{089C2C19-75DC-45B1-B75C-8C8450D76B74}" srcOrd="1" destOrd="0" presId="urn:microsoft.com/office/officeart/2016/7/layout/LinearBlockProcessNumbered"/>
-    <dgm:cxn modelId="{9EA49D07-36D4-449D-BA8D-E825AE06D350}" type="presOf" srcId="{F1627425-E951-45DA-818B-F39D7863CB3C}" destId="{8AACB73A-6C9A-4E84-95C7-679D8780A9B2}" srcOrd="0" destOrd="0" presId="urn:microsoft.com/office/officeart/2016/7/layout/LinearBlockProcessNumbered"/>
-    <dgm:cxn modelId="{9BBD5A10-31CC-4159-B6BF-28E5491FC09B}" type="presOf" srcId="{52FDD03F-22EB-4C44-970F-FB1C130A7D6F}" destId="{E1605D92-DD64-4DAF-9131-61A9A2BD4546}" srcOrd="1" destOrd="0" presId="urn:microsoft.com/office/officeart/2016/7/layout/LinearBlockProcessNumbered"/>
+    <dgm:cxn modelId="{7098590A-C7EE-4359-A789-CEB407436162}" type="presOf" srcId="{52FDD03F-22EB-4C44-970F-FB1C130A7D6F}" destId="{E1605D92-DD64-4DAF-9131-61A9A2BD4546}" srcOrd="1" destOrd="0" presId="urn:microsoft.com/office/officeart/2016/7/layout/LinearBlockProcessNumbered"/>
+    <dgm:cxn modelId="{603DAB0C-C0C4-45D9-BB6C-7C97C25E9167}" type="presOf" srcId="{F1673588-3E68-4BE1-AD41-2CB2C8D27E1D}" destId="{089C2C19-75DC-45B1-B75C-8C8450D76B74}" srcOrd="0" destOrd="1" presId="urn:microsoft.com/office/officeart/2016/7/layout/LinearBlockProcessNumbered"/>
+    <dgm:cxn modelId="{35DEC416-159F-47FB-AD0C-432B195753AC}" srcId="{52FDD03F-22EB-4C44-970F-FB1C130A7D6F}" destId="{4651F90D-DA21-4FE4-B16A-6ED98FFAE268}" srcOrd="0" destOrd="0" parTransId="{3FA35072-FC5E-4D22-894C-701BFFEDF00B}" sibTransId="{339493CF-42CD-407F-BFE0-F97B9BBD1EBC}"/>
+    <dgm:cxn modelId="{815BA623-B546-4E35-91CB-3A031ACA469F}" type="presOf" srcId="{F0ED05C0-F97F-4C29-94D8-D38F1C2D555D}" destId="{0D1C63B5-B5D0-4A4A-B30E-4DB347A7469B}" srcOrd="0" destOrd="0" presId="urn:microsoft.com/office/officeart/2016/7/layout/LinearBlockProcessNumbered"/>
     <dgm:cxn modelId="{2437A840-BD6C-420D-966A-F29CEC77E1F3}" srcId="{BBDE1C87-5C51-44D5-9CC6-4F459036CA20}" destId="{CCBCF089-6713-439E-AD46-8CEC9DD71362}" srcOrd="0" destOrd="0" parTransId="{83370664-EEA5-47E5-85B2-4C6D10E8BB11}" sibTransId="{BC4CFBD0-F3AC-435B-ACCE-CACDC616F123}"/>
-    <dgm:cxn modelId="{6C474E6A-BE16-4853-B549-878CB6B97433}" type="presOf" srcId="{F1627425-E951-45DA-818B-F39D7863CB3C}" destId="{EA84E801-DCB2-46C4-A3EB-62A48C0E848A}" srcOrd="1" destOrd="0" presId="urn:microsoft.com/office/officeart/2016/7/layout/LinearBlockProcessNumbered"/>
-    <dgm:cxn modelId="{DD924180-F8FD-4951-AE41-02D050C1E793}" type="presOf" srcId="{CCBCF089-6713-439E-AD46-8CEC9DD71362}" destId="{BCEA3FB9-ED97-440F-962B-F3C51ACE369B}" srcOrd="0" destOrd="0" presId="urn:microsoft.com/office/officeart/2016/7/layout/LinearBlockProcessNumbered"/>
+    <dgm:cxn modelId="{7B840F5C-66CF-4992-893D-B2009C4BB4DF}" type="presOf" srcId="{9A527794-B561-4589-8113-E8F4D02D1DCE}" destId="{E1605D92-DD64-4DAF-9131-61A9A2BD4546}" srcOrd="0" destOrd="2" presId="urn:microsoft.com/office/officeart/2016/7/layout/LinearBlockProcessNumbered"/>
+    <dgm:cxn modelId="{EDFA6842-31AC-48B3-99C9-36F673FE9537}" srcId="{CCBCF089-6713-439E-AD46-8CEC9DD71362}" destId="{28897CD1-08F6-42F1-99BD-20805A0DFD15}" srcOrd="2" destOrd="0" parTransId="{0A730322-27AA-4D06-8BC7-E7A6A32F4E9A}" sibTransId="{F57B1D67-A635-4628-89E7-1E620D82AF9B}"/>
+    <dgm:cxn modelId="{A6953643-0C12-4346-80DD-19F4FF757CD6}" type="presOf" srcId="{CCBCF089-6713-439E-AD46-8CEC9DD71362}" destId="{089C2C19-75DC-45B1-B75C-8C8450D76B74}" srcOrd="1" destOrd="0" presId="urn:microsoft.com/office/officeart/2016/7/layout/LinearBlockProcessNumbered"/>
+    <dgm:cxn modelId="{00AA9A48-D116-450F-9214-DEFC82D15805}" type="presOf" srcId="{28897CD1-08F6-42F1-99BD-20805A0DFD15}" destId="{089C2C19-75DC-45B1-B75C-8C8450D76B74}" srcOrd="0" destOrd="3" presId="urn:microsoft.com/office/officeart/2016/7/layout/LinearBlockProcessNumbered"/>
+    <dgm:cxn modelId="{184C0372-AE83-44E7-888D-11E63E3E8690}" srcId="{52FDD03F-22EB-4C44-970F-FB1C130A7D6F}" destId="{9A527794-B561-4589-8113-E8F4D02D1DCE}" srcOrd="1" destOrd="0" parTransId="{C1AD6A22-63C8-4C08-8B79-A24402D57CCA}" sibTransId="{6DC75C31-08D1-4FA9-959D-B1B3717595B5}"/>
+    <dgm:cxn modelId="{15E74676-73E0-4F02-8001-A871DB9786DF}" type="presOf" srcId="{52FDD03F-22EB-4C44-970F-FB1C130A7D6F}" destId="{BB985DF9-0E4D-40DC-960F-17A75144EE9F}" srcOrd="0" destOrd="0" presId="urn:microsoft.com/office/officeart/2016/7/layout/LinearBlockProcessNumbered"/>
+    <dgm:cxn modelId="{38273659-E52D-4284-A58C-2B28E22C7A53}" type="presOf" srcId="{F1627425-E951-45DA-818B-F39D7863CB3C}" destId="{8AACB73A-6C9A-4E84-95C7-679D8780A9B2}" srcOrd="0" destOrd="0" presId="urn:microsoft.com/office/officeart/2016/7/layout/LinearBlockProcessNumbered"/>
     <dgm:cxn modelId="{AE03AF82-7093-41CF-9668-095285EE6357}" srcId="{BBDE1C87-5C51-44D5-9CC6-4F459036CA20}" destId="{52FDD03F-22EB-4C44-970F-FB1C130A7D6F}" srcOrd="1" destOrd="0" parTransId="{3ECCDDD3-8C47-4FCC-A4FD-F22013BA6E99}" sibTransId="{D880E2E8-6C4F-4326-9449-CC81CE1F7F66}"/>
     <dgm:cxn modelId="{779AF68A-5E99-4033-98EA-F4730A5BF649}" srcId="{BBDE1C87-5C51-44D5-9CC6-4F459036CA20}" destId="{F1627425-E951-45DA-818B-F39D7863CB3C}" srcOrd="2" destOrd="0" parTransId="{7E7A839A-E125-4EB3-93F2-670FD21960A1}" sibTransId="{F0ED05C0-F97F-4C29-94D8-D38F1C2D555D}"/>
     <dgm:cxn modelId="{463BB48F-AA08-4917-A5CC-67BB6BCF7B7F}" type="presOf" srcId="{BBDE1C87-5C51-44D5-9CC6-4F459036CA20}" destId="{1D12A0AE-B9CF-4E45-8207-781D940EA34A}" srcOrd="0" destOrd="0" presId="urn:microsoft.com/office/officeart/2016/7/layout/LinearBlockProcessNumbered"/>
-    <dgm:cxn modelId="{56661F9C-5F46-4F6C-A76D-633CE30C1F24}" type="presOf" srcId="{52FDD03F-22EB-4C44-970F-FB1C130A7D6F}" destId="{BB985DF9-0E4D-40DC-960F-17A75144EE9F}" srcOrd="0" destOrd="0" presId="urn:microsoft.com/office/officeart/2016/7/layout/LinearBlockProcessNumbered"/>
-    <dgm:cxn modelId="{0CD9EFB2-78A8-439B-9B31-76AFFDF18A4B}" type="presOf" srcId="{BC4CFBD0-F3AC-435B-ACCE-CACDC616F123}" destId="{37419F8D-A8E0-41E3-AF0E-C32F6D471BAD}" srcOrd="0" destOrd="0" presId="urn:microsoft.com/office/officeart/2016/7/layout/LinearBlockProcessNumbered"/>
-    <dgm:cxn modelId="{06395FE8-52EE-4F32-BF91-2184B10A66E4}" type="presOf" srcId="{F0ED05C0-F97F-4C29-94D8-D38F1C2D555D}" destId="{0D1C63B5-B5D0-4A4A-B30E-4DB347A7469B}" srcOrd="0" destOrd="0" presId="urn:microsoft.com/office/officeart/2016/7/layout/LinearBlockProcessNumbered"/>
-    <dgm:cxn modelId="{23D27F08-97E4-4228-BCCE-BF71249E551C}" type="presParOf" srcId="{1D12A0AE-B9CF-4E45-8207-781D940EA34A}" destId="{45E1A9CE-8DED-45FE-B26B-0A81A2B95538}" srcOrd="0" destOrd="0" presId="urn:microsoft.com/office/officeart/2016/7/layout/LinearBlockProcessNumbered"/>
-    <dgm:cxn modelId="{24F248FF-FC60-48AB-A5AF-BBFF3723E779}" type="presParOf" srcId="{45E1A9CE-8DED-45FE-B26B-0A81A2B95538}" destId="{BCEA3FB9-ED97-440F-962B-F3C51ACE369B}" srcOrd="0" destOrd="0" presId="urn:microsoft.com/office/officeart/2016/7/layout/LinearBlockProcessNumbered"/>
-    <dgm:cxn modelId="{EDA086EB-FB8F-4C69-98BC-31EFF1BC929D}" type="presParOf" srcId="{45E1A9CE-8DED-45FE-B26B-0A81A2B95538}" destId="{37419F8D-A8E0-41E3-AF0E-C32F6D471BAD}" srcOrd="1" destOrd="0" presId="urn:microsoft.com/office/officeart/2016/7/layout/LinearBlockProcessNumbered"/>
-    <dgm:cxn modelId="{EA70A124-567B-45DD-A18B-0FFF5E4E5B10}" type="presParOf" srcId="{45E1A9CE-8DED-45FE-B26B-0A81A2B95538}" destId="{089C2C19-75DC-45B1-B75C-8C8450D76B74}" srcOrd="2" destOrd="0" presId="urn:microsoft.com/office/officeart/2016/7/layout/LinearBlockProcessNumbered"/>
-    <dgm:cxn modelId="{3935B326-FE4A-4D7E-AD08-1BCF95094F05}" type="presParOf" srcId="{1D12A0AE-B9CF-4E45-8207-781D940EA34A}" destId="{611D3C54-2AAD-4EA0-95EA-A6F840938B31}" srcOrd="1" destOrd="0" presId="urn:microsoft.com/office/officeart/2016/7/layout/LinearBlockProcessNumbered"/>
-    <dgm:cxn modelId="{D285A9B9-4B6D-463C-9F41-B442B9D8E8FF}" type="presParOf" srcId="{1D12A0AE-B9CF-4E45-8207-781D940EA34A}" destId="{286F6970-7ED0-4FF9-A054-66CE3FDE68E9}" srcOrd="2" destOrd="0" presId="urn:microsoft.com/office/officeart/2016/7/layout/LinearBlockProcessNumbered"/>
-    <dgm:cxn modelId="{181FE693-B89E-4610-992D-4C9155289B52}" type="presParOf" srcId="{286F6970-7ED0-4FF9-A054-66CE3FDE68E9}" destId="{BB985DF9-0E4D-40DC-960F-17A75144EE9F}" srcOrd="0" destOrd="0" presId="urn:microsoft.com/office/officeart/2016/7/layout/LinearBlockProcessNumbered"/>
-    <dgm:cxn modelId="{54BFC299-52F7-46F6-8495-95C94F8B2D5C}" type="presParOf" srcId="{286F6970-7ED0-4FF9-A054-66CE3FDE68E9}" destId="{EA08D74B-841F-44CB-9D16-F37A2D482610}" srcOrd="1" destOrd="0" presId="urn:microsoft.com/office/officeart/2016/7/layout/LinearBlockProcessNumbered"/>
-    <dgm:cxn modelId="{150F5891-E9DC-4E33-8820-99B16F061522}" type="presParOf" srcId="{286F6970-7ED0-4FF9-A054-66CE3FDE68E9}" destId="{E1605D92-DD64-4DAF-9131-61A9A2BD4546}" srcOrd="2" destOrd="0" presId="urn:microsoft.com/office/officeart/2016/7/layout/LinearBlockProcessNumbered"/>
-    <dgm:cxn modelId="{2084C53E-3624-4F79-831A-1F4307FF1EE8}" type="presParOf" srcId="{1D12A0AE-B9CF-4E45-8207-781D940EA34A}" destId="{719DE8F2-CF7E-4B88-9B4A-F74BFC912A47}" srcOrd="3" destOrd="0" presId="urn:microsoft.com/office/officeart/2016/7/layout/LinearBlockProcessNumbered"/>
-    <dgm:cxn modelId="{FB215FE5-7F4A-4F90-8733-56BECA34A53F}" type="presParOf" srcId="{1D12A0AE-B9CF-4E45-8207-781D940EA34A}" destId="{7BF15DCE-875B-4D09-BE7E-3E0F1254F3A5}" srcOrd="4" destOrd="0" presId="urn:microsoft.com/office/officeart/2016/7/layout/LinearBlockProcessNumbered"/>
-    <dgm:cxn modelId="{9E1A8869-056C-4D6C-AA7E-6BFBB84B7113}" type="presParOf" srcId="{7BF15DCE-875B-4D09-BE7E-3E0F1254F3A5}" destId="{8AACB73A-6C9A-4E84-95C7-679D8780A9B2}" srcOrd="0" destOrd="0" presId="urn:microsoft.com/office/officeart/2016/7/layout/LinearBlockProcessNumbered"/>
-    <dgm:cxn modelId="{603A2C35-3F43-4DEA-B59B-D24B77E1DA7E}" type="presParOf" srcId="{7BF15DCE-875B-4D09-BE7E-3E0F1254F3A5}" destId="{0D1C63B5-B5D0-4A4A-B30E-4DB347A7469B}" srcOrd="1" destOrd="0" presId="urn:microsoft.com/office/officeart/2016/7/layout/LinearBlockProcessNumbered"/>
-    <dgm:cxn modelId="{8FFC75FA-02E5-44FE-9DC2-0173D682A897}" type="presParOf" srcId="{7BF15DCE-875B-4D09-BE7E-3E0F1254F3A5}" destId="{EA84E801-DCB2-46C4-A3EB-62A48C0E848A}" srcOrd="2" destOrd="0" presId="urn:microsoft.com/office/officeart/2016/7/layout/LinearBlockProcessNumbered"/>
+    <dgm:cxn modelId="{21764EA2-A6E0-4BCB-8D68-2B0E17279E2B}" type="presOf" srcId="{4651F90D-DA21-4FE4-B16A-6ED98FFAE268}" destId="{E1605D92-DD64-4DAF-9131-61A9A2BD4546}" srcOrd="0" destOrd="1" presId="urn:microsoft.com/office/officeart/2016/7/layout/LinearBlockProcessNumbered"/>
+    <dgm:cxn modelId="{8F3AB7AA-5B7D-495B-8849-BB06546399C8}" type="presOf" srcId="{D880E2E8-6C4F-4326-9449-CC81CE1F7F66}" destId="{EA08D74B-841F-44CB-9D16-F37A2D482610}" srcOrd="0" destOrd="0" presId="urn:microsoft.com/office/officeart/2016/7/layout/LinearBlockProcessNumbered"/>
+    <dgm:cxn modelId="{9E7B16B7-7F36-478A-9A9F-6C57FD7DE9D0}" type="presOf" srcId="{CCBCF089-6713-439E-AD46-8CEC9DD71362}" destId="{BCEA3FB9-ED97-440F-962B-F3C51ACE369B}" srcOrd="0" destOrd="0" presId="urn:microsoft.com/office/officeart/2016/7/layout/LinearBlockProcessNumbered"/>
+    <dgm:cxn modelId="{53E37BC4-CC29-4C5A-BEF4-ADC73F1EA9E4}" srcId="{CCBCF089-6713-439E-AD46-8CEC9DD71362}" destId="{80CE2CB4-0430-49DD-BB52-321A64227271}" srcOrd="1" destOrd="0" parTransId="{7779EC29-206D-4E5C-9B3C-A39BE5193B40}" sibTransId="{6FD8A693-F8A8-43FA-876C-EBA5C3D7388E}"/>
+    <dgm:cxn modelId="{B36AECCF-5433-43EC-8FF0-D8DFC931C8B9}" type="presOf" srcId="{80CE2CB4-0430-49DD-BB52-321A64227271}" destId="{089C2C19-75DC-45B1-B75C-8C8450D76B74}" srcOrd="0" destOrd="2" presId="urn:microsoft.com/office/officeart/2016/7/layout/LinearBlockProcessNumbered"/>
+    <dgm:cxn modelId="{FD430CE2-6BEE-4D94-BCB4-984C580C68A5}" type="presOf" srcId="{F1627425-E951-45DA-818B-F39D7863CB3C}" destId="{EA84E801-DCB2-46C4-A3EB-62A48C0E848A}" srcOrd="1" destOrd="0" presId="urn:microsoft.com/office/officeart/2016/7/layout/LinearBlockProcessNumbered"/>
+    <dgm:cxn modelId="{D390A2E5-F7C0-4934-8093-3807BA95230A}" srcId="{CCBCF089-6713-439E-AD46-8CEC9DD71362}" destId="{F1673588-3E68-4BE1-AD41-2CB2C8D27E1D}" srcOrd="0" destOrd="0" parTransId="{B5405341-B5E0-4975-878F-5FFC435A9AF7}" sibTransId="{AEA5E5DB-DC89-4852-BD52-D9124661084E}"/>
+    <dgm:cxn modelId="{9A272CF8-0580-4631-B092-4CD7B98278E1}" type="presOf" srcId="{BC4CFBD0-F3AC-435B-ACCE-CACDC616F123}" destId="{37419F8D-A8E0-41E3-AF0E-C32F6D471BAD}" srcOrd="0" destOrd="0" presId="urn:microsoft.com/office/officeart/2016/7/layout/LinearBlockProcessNumbered"/>
+    <dgm:cxn modelId="{98E28C14-7ED4-4776-BFD3-67B67E33D3CA}" type="presParOf" srcId="{1D12A0AE-B9CF-4E45-8207-781D940EA34A}" destId="{45E1A9CE-8DED-45FE-B26B-0A81A2B95538}" srcOrd="0" destOrd="0" presId="urn:microsoft.com/office/officeart/2016/7/layout/LinearBlockProcessNumbered"/>
+    <dgm:cxn modelId="{A33EAFFC-555A-400A-BF9F-BC2BDA0D19D7}" type="presParOf" srcId="{45E1A9CE-8DED-45FE-B26B-0A81A2B95538}" destId="{BCEA3FB9-ED97-440F-962B-F3C51ACE369B}" srcOrd="0" destOrd="0" presId="urn:microsoft.com/office/officeart/2016/7/layout/LinearBlockProcessNumbered"/>
+    <dgm:cxn modelId="{E8281F09-0539-4720-A3FD-4CA8FA69BA78}" type="presParOf" srcId="{45E1A9CE-8DED-45FE-B26B-0A81A2B95538}" destId="{37419F8D-A8E0-41E3-AF0E-C32F6D471BAD}" srcOrd="1" destOrd="0" presId="urn:microsoft.com/office/officeart/2016/7/layout/LinearBlockProcessNumbered"/>
+    <dgm:cxn modelId="{7F468A30-9D83-4692-9343-96DDEA98BCDA}" type="presParOf" srcId="{45E1A9CE-8DED-45FE-B26B-0A81A2B95538}" destId="{089C2C19-75DC-45B1-B75C-8C8450D76B74}" srcOrd="2" destOrd="0" presId="urn:microsoft.com/office/officeart/2016/7/layout/LinearBlockProcessNumbered"/>
+    <dgm:cxn modelId="{3A01BB45-3717-490C-A890-46E20E402582}" type="presParOf" srcId="{1D12A0AE-B9CF-4E45-8207-781D940EA34A}" destId="{611D3C54-2AAD-4EA0-95EA-A6F840938B31}" srcOrd="1" destOrd="0" presId="urn:microsoft.com/office/officeart/2016/7/layout/LinearBlockProcessNumbered"/>
+    <dgm:cxn modelId="{5F21D466-BF35-4340-BE57-ED9894F88905}" type="presParOf" srcId="{1D12A0AE-B9CF-4E45-8207-781D940EA34A}" destId="{286F6970-7ED0-4FF9-A054-66CE3FDE68E9}" srcOrd="2" destOrd="0" presId="urn:microsoft.com/office/officeart/2016/7/layout/LinearBlockProcessNumbered"/>
+    <dgm:cxn modelId="{E74D426E-D570-4D0E-8E72-C820CE67D66E}" type="presParOf" srcId="{286F6970-7ED0-4FF9-A054-66CE3FDE68E9}" destId="{BB985DF9-0E4D-40DC-960F-17A75144EE9F}" srcOrd="0" destOrd="0" presId="urn:microsoft.com/office/officeart/2016/7/layout/LinearBlockProcessNumbered"/>
+    <dgm:cxn modelId="{86FBD3D3-BA01-4539-B6B0-CE73C1539801}" type="presParOf" srcId="{286F6970-7ED0-4FF9-A054-66CE3FDE68E9}" destId="{EA08D74B-841F-44CB-9D16-F37A2D482610}" srcOrd="1" destOrd="0" presId="urn:microsoft.com/office/officeart/2016/7/layout/LinearBlockProcessNumbered"/>
+    <dgm:cxn modelId="{DB8FF716-E34D-4843-90BE-9CDA7B414E99}" type="presParOf" srcId="{286F6970-7ED0-4FF9-A054-66CE3FDE68E9}" destId="{E1605D92-DD64-4DAF-9131-61A9A2BD4546}" srcOrd="2" destOrd="0" presId="urn:microsoft.com/office/officeart/2016/7/layout/LinearBlockProcessNumbered"/>
+    <dgm:cxn modelId="{EC707FA7-D777-4BB7-95D6-7238C9BBC97A}" type="presParOf" srcId="{1D12A0AE-B9CF-4E45-8207-781D940EA34A}" destId="{719DE8F2-CF7E-4B88-9B4A-F74BFC912A47}" srcOrd="3" destOrd="0" presId="urn:microsoft.com/office/officeart/2016/7/layout/LinearBlockProcessNumbered"/>
+    <dgm:cxn modelId="{9260799E-60C0-4810-B49E-8844166ACCC1}" type="presParOf" srcId="{1D12A0AE-B9CF-4E45-8207-781D940EA34A}" destId="{7BF15DCE-875B-4D09-BE7E-3E0F1254F3A5}" srcOrd="4" destOrd="0" presId="urn:microsoft.com/office/officeart/2016/7/layout/LinearBlockProcessNumbered"/>
+    <dgm:cxn modelId="{AE3BA932-661F-42F9-A95B-40B5B48B7EAF}" type="presParOf" srcId="{7BF15DCE-875B-4D09-BE7E-3E0F1254F3A5}" destId="{8AACB73A-6C9A-4E84-95C7-679D8780A9B2}" srcOrd="0" destOrd="0" presId="urn:microsoft.com/office/officeart/2016/7/layout/LinearBlockProcessNumbered"/>
+    <dgm:cxn modelId="{357AD6FB-4AF7-492E-982D-48E78785E7AE}" type="presParOf" srcId="{7BF15DCE-875B-4D09-BE7E-3E0F1254F3A5}" destId="{0D1C63B5-B5D0-4A4A-B30E-4DB347A7469B}" srcOrd="1" destOrd="0" presId="urn:microsoft.com/office/officeart/2016/7/layout/LinearBlockProcessNumbered"/>
+    <dgm:cxn modelId="{C684BAC7-FD03-4414-98D1-43FA2923B8EE}" type="presParOf" srcId="{7BF15DCE-875B-4D09-BE7E-3E0F1254F3A5}" destId="{EA84E801-DCB2-46C4-A3EB-62A48C0E848A}" srcOrd="2" destOrd="0" presId="urn:microsoft.com/office/officeart/2016/7/layout/LinearBlockProcessNumbered"/>
   </dgm:cxnLst>
   <dgm:bg/>
   <dgm:whole/>
@@ -6436,57 +7408,30 @@
       <dsp:cNvGrpSpPr/>
     </dsp:nvGrpSpPr>
     <dsp:grpSpPr/>
-    <dsp:sp modelId="{6097716C-6079-41F4-A56F-26DECA8AF27F}">
+    <dsp:sp modelId="{AD48C167-F52A-42FD-AFD4-60B7F33272E7}">
       <dsp:nvSpPr>
         <dsp:cNvPr id="0" name=""/>
         <dsp:cNvSpPr/>
       </dsp:nvSpPr>
       <dsp:spPr>
         <a:xfrm>
-          <a:off x="0" y="12862"/>
-          <a:ext cx="6666833" cy="1761398"/>
+          <a:off x="0" y="5072"/>
+          <a:ext cx="6245265" cy="1599425"/>
         </a:xfrm>
         <a:prstGeom prst="roundRect">
-          <a:avLst/>
+          <a:avLst>
+            <a:gd name="adj" fmla="val 10000"/>
+          </a:avLst>
         </a:prstGeom>
-        <a:gradFill rotWithShape="0">
-          <a:gsLst>
-            <a:gs pos="0">
-              <a:schemeClr val="accent5">
-                <a:hueOff val="0"/>
-                <a:satOff val="0"/>
-                <a:lumOff val="0"/>
-                <a:alphaOff val="0"/>
-                <a:satMod val="103000"/>
-                <a:lumMod val="102000"/>
-                <a:tint val="94000"/>
-              </a:schemeClr>
-            </a:gs>
-            <a:gs pos="50000">
-              <a:schemeClr val="accent5">
-                <a:hueOff val="0"/>
-                <a:satOff val="0"/>
-                <a:lumOff val="0"/>
-                <a:alphaOff val="0"/>
-                <a:satMod val="110000"/>
-                <a:lumMod val="100000"/>
-                <a:shade val="100000"/>
-              </a:schemeClr>
-            </a:gs>
-            <a:gs pos="100000">
-              <a:schemeClr val="accent5">
-                <a:hueOff val="0"/>
-                <a:satOff val="0"/>
-                <a:lumOff val="0"/>
-                <a:alphaOff val="0"/>
-                <a:lumMod val="99000"/>
-                <a:satMod val="120000"/>
-                <a:shade val="78000"/>
-              </a:schemeClr>
-            </a:gs>
-          </a:gsLst>
-          <a:lin ang="5400000" scaled="0"/>
-        </a:gradFill>
+        <a:solidFill>
+          <a:schemeClr val="bg1">
+            <a:lumMod val="95000"/>
+            <a:hueOff val="0"/>
+            <a:satOff val="0"/>
+            <a:lumOff val="0"/>
+            <a:alphaOff val="0"/>
+          </a:schemeClr>
+        </a:solidFill>
         <a:ln>
           <a:noFill/>
         </a:ln>
@@ -6496,25 +7441,105 @@
         <a:lnRef idx="0">
           <a:scrgbClr r="0" g="0" b="0"/>
         </a:lnRef>
-        <a:fillRef idx="3">
+        <a:fillRef idx="1">
           <a:scrgbClr r="0" g="0" b="0"/>
         </a:fillRef>
-        <a:effectRef idx="2">
+        <a:effectRef idx="0">
+          <a:scrgbClr r="0" g="0" b="0"/>
+        </a:effectRef>
+        <a:fontRef idx="minor"/>
+      </dsp:style>
+    </dsp:sp>
+    <dsp:sp modelId="{4DEC03B9-1E7C-4836-80F4-7A454FF6216B}">
+      <dsp:nvSpPr>
+        <dsp:cNvPr id="0" name=""/>
+        <dsp:cNvSpPr/>
+      </dsp:nvSpPr>
+      <dsp:spPr>
+        <a:xfrm>
+          <a:off x="483826" y="364942"/>
+          <a:ext cx="880543" cy="879683"/>
+        </a:xfrm>
+        <a:prstGeom prst="rect">
+          <a:avLst/>
+        </a:prstGeom>
+        <a:blipFill>
+          <a:blip xmlns:r="http://schemas.openxmlformats.org/officeDocument/2006/relationships">
+            <a:extLst>
+              <a:ext uri="{28A0092B-C50C-407E-A947-70E740481C1C}">
+                <a14:useLocalDpi xmlns:a14="http://schemas.microsoft.com/office/drawing/2010/main" val="0"/>
+              </a:ext>
+              <a:ext uri="{96DAC541-7B7A-43D3-8B79-37D633B846F1}">
+                <asvg:svgBlip xmlns:asvg="http://schemas.microsoft.com/office/drawing/2016/SVG/main" r:embed="rId1"/>
+              </a:ext>
+            </a:extLst>
+          </a:blip>
+          <a:stretch>
+            <a:fillRect/>
+          </a:stretch>
+        </a:blipFill>
+        <a:ln w="19050" cap="flat" cmpd="sng" algn="ctr">
+          <a:noFill/>
+          <a:prstDash val="solid"/>
+          <a:miter lim="800000"/>
+        </a:ln>
+        <a:effectLst/>
+      </dsp:spPr>
+      <dsp:style>
+        <a:lnRef idx="2">
+          <a:scrgbClr r="0" g="0" b="0"/>
+        </a:lnRef>
+        <a:fillRef idx="1">
+          <a:scrgbClr r="0" g="0" b="0"/>
+        </a:fillRef>
+        <a:effectRef idx="0">
           <a:scrgbClr r="0" g="0" b="0"/>
         </a:effectRef>
         <a:fontRef idx="minor">
           <a:schemeClr val="lt1"/>
         </a:fontRef>
       </dsp:style>
+    </dsp:sp>
+    <dsp:sp modelId="{55657922-8308-43AA-8A9E-B2DC00C81DD8}">
+      <dsp:nvSpPr>
+        <dsp:cNvPr id="0" name=""/>
+        <dsp:cNvSpPr/>
+      </dsp:nvSpPr>
+      <dsp:spPr>
+        <a:xfrm>
+          <a:off x="1848195" y="5072"/>
+          <a:ext cx="4324657" cy="1600988"/>
+        </a:xfrm>
+        <a:prstGeom prst="rect">
+          <a:avLst/>
+        </a:prstGeom>
+        <a:noFill/>
+        <a:ln>
+          <a:noFill/>
+        </a:ln>
+        <a:effectLst/>
+      </dsp:spPr>
+      <dsp:style>
+        <a:lnRef idx="0">
+          <a:scrgbClr r="0" g="0" b="0"/>
+        </a:lnRef>
+        <a:fillRef idx="0">
+          <a:scrgbClr r="0" g="0" b="0"/>
+        </a:fillRef>
+        <a:effectRef idx="0">
+          <a:scrgbClr r="0" g="0" b="0"/>
+        </a:effectRef>
+        <a:fontRef idx="minor"/>
+      </dsp:style>
       <dsp:txBody>
-        <a:bodyPr spcFirstLastPara="0" vert="horz" wrap="square" lIns="95250" tIns="95250" rIns="95250" bIns="95250" numCol="1" spcCol="1270" anchor="ctr" anchorCtr="0">
+        <a:bodyPr spcFirstLastPara="0" vert="horz" wrap="square" lIns="169438" tIns="169438" rIns="169438" bIns="169438" numCol="1" spcCol="1270" anchor="ctr" anchorCtr="0">
           <a:noAutofit/>
         </a:bodyPr>
         <a:lstStyle/>
         <a:p>
-          <a:pPr marL="0" lvl="0" indent="0" algn="l" defTabSz="1111250">
+          <a:pPr marL="0" lvl="0" indent="0" algn="l" defTabSz="889000">
             <a:lnSpc>
-              <a:spcPct val="90000"/>
+              <a:spcPct val="100000"/>
             </a:lnSpc>
             <a:spcBef>
               <a:spcPct val="0"/>
@@ -6525,68 +7550,95 @@
             <a:buNone/>
           </a:pPr>
           <a:r>
-            <a:rPr lang="en-MY" sz="2500" kern="1200"/>
-            <a:t>Dilema Trade-off: Solusi eksak matriks (Normal Equation) vs skalabilitas iteratif (Gradient Descent).</a:t>
-          </a:r>
-          <a:endParaRPr lang="en-US" sz="2500" kern="1200"/>
+            <a:rPr lang="en-MY" sz="2000" b="1" kern="1200" dirty="0" err="1"/>
+            <a:t>Dilema</a:t>
+          </a:r>
+          <a:r>
+            <a:rPr lang="en-MY" sz="2000" b="1" kern="1200" dirty="0"/>
+            <a:t> Trade-off: </a:t>
+          </a:r>
+        </a:p>
+        <a:p>
+          <a:pPr marL="0" lvl="0" indent="0" algn="l" defTabSz="889000">
+            <a:lnSpc>
+              <a:spcPct val="100000"/>
+            </a:lnSpc>
+            <a:spcBef>
+              <a:spcPct val="0"/>
+            </a:spcBef>
+            <a:spcAft>
+              <a:spcPct val="35000"/>
+            </a:spcAft>
+            <a:buNone/>
+          </a:pPr>
+          <a:r>
+            <a:rPr lang="en-MY" sz="2000" kern="1200" dirty="0"/>
+            <a:t>Solusi </a:t>
+          </a:r>
+          <a:r>
+            <a:rPr lang="en-MY" sz="2000" kern="1200" dirty="0" err="1"/>
+            <a:t>eksak</a:t>
+          </a:r>
+          <a:r>
+            <a:rPr lang="en-MY" sz="2000" kern="1200" dirty="0"/>
+            <a:t> </a:t>
+          </a:r>
+          <a:r>
+            <a:rPr lang="en-MY" sz="2000" b="1" kern="1200" dirty="0" err="1"/>
+            <a:t>matriks</a:t>
+          </a:r>
+          <a:r>
+            <a:rPr lang="en-MY" sz="2000" kern="1200" dirty="0"/>
+            <a:t> (Normal Equation) vs </a:t>
+          </a:r>
+          <a:r>
+            <a:rPr lang="en-MY" sz="2000" kern="1200" dirty="0" err="1"/>
+            <a:t>skalabilitas</a:t>
+          </a:r>
+          <a:r>
+            <a:rPr lang="en-MY" sz="2000" kern="1200" dirty="0"/>
+            <a:t> </a:t>
+          </a:r>
+          <a:r>
+            <a:rPr lang="en-MY" sz="2000" b="1" kern="1200" dirty="0" err="1"/>
+            <a:t>iteratif</a:t>
+          </a:r>
+          <a:r>
+            <a:rPr lang="en-MY" sz="2000" kern="1200" dirty="0"/>
+            <a:t> (Gradient Descent).</a:t>
+          </a:r>
+          <a:endParaRPr lang="en-US" sz="2000" kern="1200" dirty="0"/>
         </a:p>
       </dsp:txBody>
       <dsp:txXfrm>
-        <a:off x="85984" y="98846"/>
-        <a:ext cx="6494865" cy="1589430"/>
+        <a:off x="1848195" y="5072"/>
+        <a:ext cx="4324657" cy="1600988"/>
       </dsp:txXfrm>
     </dsp:sp>
-    <dsp:sp modelId="{7EE2F781-AB50-4E75-8E21-C0F78219196E}">
+    <dsp:sp modelId="{8926147B-A5C1-473C-9EFD-C8EEA6F43891}">
       <dsp:nvSpPr>
         <dsp:cNvPr id="0" name=""/>
         <dsp:cNvSpPr/>
       </dsp:nvSpPr>
       <dsp:spPr>
         <a:xfrm>
-          <a:off x="0" y="1846260"/>
-          <a:ext cx="6666833" cy="1761398"/>
+          <a:off x="0" y="1994179"/>
+          <a:ext cx="6245265" cy="1599425"/>
         </a:xfrm>
         <a:prstGeom prst="roundRect">
-          <a:avLst/>
+          <a:avLst>
+            <a:gd name="adj" fmla="val 10000"/>
+          </a:avLst>
         </a:prstGeom>
-        <a:gradFill rotWithShape="0">
-          <a:gsLst>
-            <a:gs pos="0">
-              <a:schemeClr val="accent5">
-                <a:hueOff val="-6076075"/>
-                <a:satOff val="-413"/>
-                <a:lumOff val="981"/>
-                <a:alphaOff val="0"/>
-                <a:satMod val="103000"/>
-                <a:lumMod val="102000"/>
-                <a:tint val="94000"/>
-              </a:schemeClr>
-            </a:gs>
-            <a:gs pos="50000">
-              <a:schemeClr val="accent5">
-                <a:hueOff val="-6076075"/>
-                <a:satOff val="-413"/>
-                <a:lumOff val="981"/>
-                <a:alphaOff val="0"/>
-                <a:satMod val="110000"/>
-                <a:lumMod val="100000"/>
-                <a:shade val="100000"/>
-              </a:schemeClr>
-            </a:gs>
-            <a:gs pos="100000">
-              <a:schemeClr val="accent5">
-                <a:hueOff val="-6076075"/>
-                <a:satOff val="-413"/>
-                <a:lumOff val="981"/>
-                <a:alphaOff val="0"/>
-                <a:lumMod val="99000"/>
-                <a:satMod val="120000"/>
-                <a:shade val="78000"/>
-              </a:schemeClr>
-            </a:gs>
-          </a:gsLst>
-          <a:lin ang="5400000" scaled="0"/>
-        </a:gradFill>
+        <a:solidFill>
+          <a:schemeClr val="bg1">
+            <a:lumMod val="95000"/>
+            <a:hueOff val="0"/>
+            <a:satOff val="0"/>
+            <a:lumOff val="0"/>
+            <a:alphaOff val="0"/>
+          </a:schemeClr>
+        </a:solidFill>
         <a:ln>
           <a:noFill/>
         </a:ln>
@@ -6596,25 +7648,105 @@
         <a:lnRef idx="0">
           <a:scrgbClr r="0" g="0" b="0"/>
         </a:lnRef>
-        <a:fillRef idx="3">
+        <a:fillRef idx="1">
           <a:scrgbClr r="0" g="0" b="0"/>
         </a:fillRef>
-        <a:effectRef idx="2">
+        <a:effectRef idx="0">
+          <a:scrgbClr r="0" g="0" b="0"/>
+        </a:effectRef>
+        <a:fontRef idx="minor"/>
+      </dsp:style>
+    </dsp:sp>
+    <dsp:sp modelId="{F1C7955C-A588-43FC-BE3D-D3EB9119B3F7}">
+      <dsp:nvSpPr>
+        <dsp:cNvPr id="0" name=""/>
+        <dsp:cNvSpPr/>
+      </dsp:nvSpPr>
+      <dsp:spPr>
+        <a:xfrm>
+          <a:off x="483826" y="2354049"/>
+          <a:ext cx="880543" cy="879683"/>
+        </a:xfrm>
+        <a:prstGeom prst="rect">
+          <a:avLst/>
+        </a:prstGeom>
+        <a:blipFill>
+          <a:blip xmlns:r="http://schemas.openxmlformats.org/officeDocument/2006/relationships">
+            <a:extLst>
+              <a:ext uri="{28A0092B-C50C-407E-A947-70E740481C1C}">
+                <a14:useLocalDpi xmlns:a14="http://schemas.microsoft.com/office/drawing/2010/main" val="0"/>
+              </a:ext>
+              <a:ext uri="{96DAC541-7B7A-43D3-8B79-37D633B846F1}">
+                <asvg:svgBlip xmlns:asvg="http://schemas.microsoft.com/office/drawing/2016/SVG/main" r:embed="rId2"/>
+              </a:ext>
+            </a:extLst>
+          </a:blip>
+          <a:stretch>
+            <a:fillRect/>
+          </a:stretch>
+        </a:blipFill>
+        <a:ln w="19050" cap="flat" cmpd="sng" algn="ctr">
+          <a:noFill/>
+          <a:prstDash val="solid"/>
+          <a:miter lim="800000"/>
+        </a:ln>
+        <a:effectLst/>
+      </dsp:spPr>
+      <dsp:style>
+        <a:lnRef idx="2">
+          <a:scrgbClr r="0" g="0" b="0"/>
+        </a:lnRef>
+        <a:fillRef idx="1">
+          <a:scrgbClr r="0" g="0" b="0"/>
+        </a:fillRef>
+        <a:effectRef idx="0">
           <a:scrgbClr r="0" g="0" b="0"/>
         </a:effectRef>
         <a:fontRef idx="minor">
           <a:schemeClr val="lt1"/>
         </a:fontRef>
       </dsp:style>
+    </dsp:sp>
+    <dsp:sp modelId="{E39A09DD-E5D5-4996-9D38-052E284C1266}">
+      <dsp:nvSpPr>
+        <dsp:cNvPr id="0" name=""/>
+        <dsp:cNvSpPr/>
+      </dsp:nvSpPr>
+      <dsp:spPr>
+        <a:xfrm>
+          <a:off x="1848195" y="1994179"/>
+          <a:ext cx="4324657" cy="1600988"/>
+        </a:xfrm>
+        <a:prstGeom prst="rect">
+          <a:avLst/>
+        </a:prstGeom>
+        <a:noFill/>
+        <a:ln>
+          <a:noFill/>
+        </a:ln>
+        <a:effectLst/>
+      </dsp:spPr>
+      <dsp:style>
+        <a:lnRef idx="0">
+          <a:scrgbClr r="0" g="0" b="0"/>
+        </a:lnRef>
+        <a:fillRef idx="0">
+          <a:scrgbClr r="0" g="0" b="0"/>
+        </a:fillRef>
+        <a:effectRef idx="0">
+          <a:scrgbClr r="0" g="0" b="0"/>
+        </a:effectRef>
+        <a:fontRef idx="minor"/>
+      </dsp:style>
       <dsp:txBody>
-        <a:bodyPr spcFirstLastPara="0" vert="horz" wrap="square" lIns="95250" tIns="95250" rIns="95250" bIns="95250" numCol="1" spcCol="1270" anchor="ctr" anchorCtr="0">
+        <a:bodyPr spcFirstLastPara="0" vert="horz" wrap="square" lIns="169438" tIns="169438" rIns="169438" bIns="169438" numCol="1" spcCol="1270" anchor="ctr" anchorCtr="0">
           <a:noAutofit/>
         </a:bodyPr>
         <a:lstStyle/>
         <a:p>
-          <a:pPr marL="0" lvl="0" indent="0" algn="l" defTabSz="1111250">
+          <a:pPr marL="0" lvl="0" indent="0" algn="l" defTabSz="889000">
             <a:lnSpc>
-              <a:spcPct val="90000"/>
+              <a:spcPct val="100000"/>
             </a:lnSpc>
             <a:spcBef>
               <a:spcPct val="0"/>
@@ -6625,68 +7757,121 @@
             <a:buNone/>
           </a:pPr>
           <a:r>
-            <a:rPr lang="en-MY" sz="2500" kern="1200"/>
-            <a:t>Gap Penelitian: Pengujian di Python mengaburkan konsumsi memori asli perangkat keras; diperlukan implementasi C++ from scratch.</a:t>
-          </a:r>
-          <a:endParaRPr lang="en-US" sz="2500" kern="1200"/>
+            <a:rPr lang="en-MY" sz="2000" b="1" kern="1200" dirty="0"/>
+            <a:t>Gap </a:t>
+          </a:r>
+          <a:r>
+            <a:rPr lang="en-MY" sz="2000" b="1" kern="1200" dirty="0" err="1"/>
+            <a:t>Penelitian</a:t>
+          </a:r>
+          <a:r>
+            <a:rPr lang="en-MY" sz="2000" b="1" kern="1200" dirty="0"/>
+            <a:t>: </a:t>
+          </a:r>
+          <a:r>
+            <a:rPr lang="en-MY" sz="2000" kern="1200" dirty="0" err="1"/>
+            <a:t>Pengujian</a:t>
+          </a:r>
+          <a:r>
+            <a:rPr lang="en-MY" sz="2000" kern="1200" dirty="0"/>
+            <a:t> di Python </a:t>
+          </a:r>
+          <a:r>
+            <a:rPr lang="en-MY" sz="2000" kern="1200" dirty="0" err="1"/>
+            <a:t>menyembunyikan</a:t>
+          </a:r>
+          <a:r>
+            <a:rPr lang="en-MY" sz="2000" kern="1200" dirty="0"/>
+            <a:t> </a:t>
+          </a:r>
+          <a:r>
+            <a:rPr lang="en-MY" sz="2000" kern="1200" dirty="0" err="1"/>
+            <a:t>konsumsi</a:t>
+          </a:r>
+          <a:r>
+            <a:rPr lang="en-MY" sz="2000" kern="1200" dirty="0"/>
+            <a:t> </a:t>
+          </a:r>
+          <a:r>
+            <a:rPr lang="en-MY" sz="2000" kern="1200" dirty="0" err="1"/>
+            <a:t>memori</a:t>
+          </a:r>
+          <a:r>
+            <a:rPr lang="en-MY" sz="2000" kern="1200" dirty="0"/>
+            <a:t> </a:t>
+          </a:r>
+          <a:r>
+            <a:rPr lang="en-MY" sz="2000" kern="1200" dirty="0" err="1"/>
+            <a:t>asli</a:t>
+          </a:r>
+          <a:r>
+            <a:rPr lang="en-MY" sz="2000" kern="1200" dirty="0"/>
+            <a:t> </a:t>
+          </a:r>
+          <a:r>
+            <a:rPr lang="en-MY" sz="2000" kern="1200" dirty="0" err="1"/>
+            <a:t>perangkat</a:t>
+          </a:r>
+          <a:r>
+            <a:rPr lang="en-MY" sz="2000" kern="1200" dirty="0"/>
+            <a:t> </a:t>
+          </a:r>
+          <a:r>
+            <a:rPr lang="en-MY" sz="2000" kern="1200" dirty="0" err="1"/>
+            <a:t>keras</a:t>
+          </a:r>
+          <a:r>
+            <a:rPr lang="en-MY" sz="2000" kern="1200" dirty="0"/>
+            <a:t>; </a:t>
+          </a:r>
+          <a:r>
+            <a:rPr lang="en-MY" sz="2000" kern="1200" dirty="0" err="1"/>
+            <a:t>diperlukan</a:t>
+          </a:r>
+          <a:r>
+            <a:rPr lang="en-MY" sz="2000" kern="1200" dirty="0"/>
+            <a:t> </a:t>
+          </a:r>
+          <a:r>
+            <a:rPr lang="en-MY" sz="2000" kern="1200" dirty="0" err="1"/>
+            <a:t>implementasi</a:t>
+          </a:r>
+          <a:r>
+            <a:rPr lang="en-MY" sz="2000" kern="1200" dirty="0"/>
+            <a:t> C++ from scratch.</a:t>
+          </a:r>
+          <a:endParaRPr lang="en-US" sz="2000" kern="1200" dirty="0"/>
         </a:p>
       </dsp:txBody>
       <dsp:txXfrm>
-        <a:off x="85984" y="1932244"/>
-        <a:ext cx="6494865" cy="1589430"/>
+        <a:off x="1848195" y="1994179"/>
+        <a:ext cx="4324657" cy="1600988"/>
       </dsp:txXfrm>
     </dsp:sp>
-    <dsp:sp modelId="{371B4E9F-BFFB-485B-BF51-2292FD6BC875}">
+    <dsp:sp modelId="{23D7E6AE-550D-46B6-90A7-BF72802B0DC1}">
       <dsp:nvSpPr>
         <dsp:cNvPr id="0" name=""/>
         <dsp:cNvSpPr/>
       </dsp:nvSpPr>
       <dsp:spPr>
         <a:xfrm>
-          <a:off x="0" y="3679659"/>
-          <a:ext cx="6666833" cy="1761398"/>
+          <a:off x="0" y="3983286"/>
+          <a:ext cx="6245265" cy="1599425"/>
         </a:xfrm>
         <a:prstGeom prst="roundRect">
-          <a:avLst/>
+          <a:avLst>
+            <a:gd name="adj" fmla="val 10000"/>
+          </a:avLst>
         </a:prstGeom>
-        <a:gradFill rotWithShape="0">
-          <a:gsLst>
-            <a:gs pos="0">
-              <a:schemeClr val="accent5">
-                <a:hueOff val="-12152150"/>
-                <a:satOff val="-826"/>
-                <a:lumOff val="1961"/>
-                <a:alphaOff val="0"/>
-                <a:satMod val="103000"/>
-                <a:lumMod val="102000"/>
-                <a:tint val="94000"/>
-              </a:schemeClr>
-            </a:gs>
-            <a:gs pos="50000">
-              <a:schemeClr val="accent5">
-                <a:hueOff val="-12152150"/>
-                <a:satOff val="-826"/>
-                <a:lumOff val="1961"/>
-                <a:alphaOff val="0"/>
-                <a:satMod val="110000"/>
-                <a:lumMod val="100000"/>
-                <a:shade val="100000"/>
-              </a:schemeClr>
-            </a:gs>
-            <a:gs pos="100000">
-              <a:schemeClr val="accent5">
-                <a:hueOff val="-12152150"/>
-                <a:satOff val="-826"/>
-                <a:lumOff val="1961"/>
-                <a:alphaOff val="0"/>
-                <a:lumMod val="99000"/>
-                <a:satMod val="120000"/>
-                <a:shade val="78000"/>
-              </a:schemeClr>
-            </a:gs>
-          </a:gsLst>
-          <a:lin ang="5400000" scaled="0"/>
-        </a:gradFill>
+        <a:solidFill>
+          <a:schemeClr val="bg1">
+            <a:lumMod val="95000"/>
+            <a:hueOff val="0"/>
+            <a:satOff val="0"/>
+            <a:lumOff val="0"/>
+            <a:alphaOff val="0"/>
+          </a:schemeClr>
+        </a:solidFill>
         <a:ln>
           <a:noFill/>
         </a:ln>
@@ -6696,25 +7881,105 @@
         <a:lnRef idx="0">
           <a:scrgbClr r="0" g="0" b="0"/>
         </a:lnRef>
-        <a:fillRef idx="3">
+        <a:fillRef idx="1">
           <a:scrgbClr r="0" g="0" b="0"/>
         </a:fillRef>
-        <a:effectRef idx="2">
+        <a:effectRef idx="0">
+          <a:scrgbClr r="0" g="0" b="0"/>
+        </a:effectRef>
+        <a:fontRef idx="minor"/>
+      </dsp:style>
+    </dsp:sp>
+    <dsp:sp modelId="{93120592-EE62-4ED8-9E95-E5A85C72BA82}">
+      <dsp:nvSpPr>
+        <dsp:cNvPr id="0" name=""/>
+        <dsp:cNvSpPr/>
+      </dsp:nvSpPr>
+      <dsp:spPr>
+        <a:xfrm>
+          <a:off x="483826" y="4343156"/>
+          <a:ext cx="880543" cy="879683"/>
+        </a:xfrm>
+        <a:prstGeom prst="rect">
+          <a:avLst/>
+        </a:prstGeom>
+        <a:blipFill>
+          <a:blip xmlns:r="http://schemas.openxmlformats.org/officeDocument/2006/relationships">
+            <a:extLst>
+              <a:ext uri="{28A0092B-C50C-407E-A947-70E740481C1C}">
+                <a14:useLocalDpi xmlns:a14="http://schemas.microsoft.com/office/drawing/2010/main" val="0"/>
+              </a:ext>
+              <a:ext uri="{96DAC541-7B7A-43D3-8B79-37D633B846F1}">
+                <asvg:svgBlip xmlns:asvg="http://schemas.microsoft.com/office/drawing/2016/SVG/main" r:embed="rId3"/>
+              </a:ext>
+            </a:extLst>
+          </a:blip>
+          <a:stretch>
+            <a:fillRect/>
+          </a:stretch>
+        </a:blipFill>
+        <a:ln w="19050" cap="flat" cmpd="sng" algn="ctr">
+          <a:noFill/>
+          <a:prstDash val="solid"/>
+          <a:miter lim="800000"/>
+        </a:ln>
+        <a:effectLst/>
+      </dsp:spPr>
+      <dsp:style>
+        <a:lnRef idx="2">
+          <a:scrgbClr r="0" g="0" b="0"/>
+        </a:lnRef>
+        <a:fillRef idx="1">
+          <a:scrgbClr r="0" g="0" b="0"/>
+        </a:fillRef>
+        <a:effectRef idx="0">
           <a:scrgbClr r="0" g="0" b="0"/>
         </a:effectRef>
         <a:fontRef idx="minor">
           <a:schemeClr val="lt1"/>
         </a:fontRef>
       </dsp:style>
+    </dsp:sp>
+    <dsp:sp modelId="{09AE00A1-5CD1-429D-942E-DD2C7A5E2F9A}">
+      <dsp:nvSpPr>
+        <dsp:cNvPr id="0" name=""/>
+        <dsp:cNvSpPr/>
+      </dsp:nvSpPr>
+      <dsp:spPr>
+        <a:xfrm>
+          <a:off x="1848195" y="3983286"/>
+          <a:ext cx="4324657" cy="1600988"/>
+        </a:xfrm>
+        <a:prstGeom prst="rect">
+          <a:avLst/>
+        </a:prstGeom>
+        <a:noFill/>
+        <a:ln>
+          <a:noFill/>
+        </a:ln>
+        <a:effectLst/>
+      </dsp:spPr>
+      <dsp:style>
+        <a:lnRef idx="0">
+          <a:scrgbClr r="0" g="0" b="0"/>
+        </a:lnRef>
+        <a:fillRef idx="0">
+          <a:scrgbClr r="0" g="0" b="0"/>
+        </a:fillRef>
+        <a:effectRef idx="0">
+          <a:scrgbClr r="0" g="0" b="0"/>
+        </a:effectRef>
+        <a:fontRef idx="minor"/>
+      </dsp:style>
       <dsp:txBody>
-        <a:bodyPr spcFirstLastPara="0" vert="horz" wrap="square" lIns="95250" tIns="95250" rIns="95250" bIns="95250" numCol="1" spcCol="1270" anchor="ctr" anchorCtr="0">
+        <a:bodyPr spcFirstLastPara="0" vert="horz" wrap="square" lIns="169438" tIns="169438" rIns="169438" bIns="169438" numCol="1" spcCol="1270" anchor="ctr" anchorCtr="0">
           <a:noAutofit/>
         </a:bodyPr>
         <a:lstStyle/>
         <a:p>
-          <a:pPr marL="0" lvl="0" indent="0" algn="l" defTabSz="1111250">
+          <a:pPr marL="0" lvl="0" indent="0" algn="l" defTabSz="889000">
             <a:lnSpc>
-              <a:spcPct val="90000"/>
+              <a:spcPct val="100000"/>
             </a:lnSpc>
             <a:spcBef>
               <a:spcPct val="0"/>
@@ -6725,15 +7990,71 @@
             <a:buNone/>
           </a:pPr>
           <a:r>
-            <a:rPr lang="en-MY" sz="2500" kern="1200"/>
-            <a:t>Tujuan: Menguji efisiensi memori/waktu, pengaruh early stopping, dan dampak multikolinearitas.</a:t>
-          </a:r>
-          <a:endParaRPr lang="en-US" sz="2500" kern="1200"/>
+            <a:rPr lang="en-MY" sz="2000" b="1" kern="1200" dirty="0"/>
+            <a:t>Tujuan : </a:t>
+          </a:r>
+          <a:r>
+            <a:rPr lang="en-MY" sz="2000" kern="1200" dirty="0" err="1"/>
+            <a:t>Menguji</a:t>
+          </a:r>
+          <a:r>
+            <a:rPr lang="en-MY" sz="2000" kern="1200" dirty="0"/>
+            <a:t> </a:t>
+          </a:r>
+          <a:r>
+            <a:rPr lang="en-MY" sz="2000" kern="1200" dirty="0" err="1"/>
+            <a:t>efisiensi</a:t>
+          </a:r>
+          <a:r>
+            <a:rPr lang="en-MY" sz="2000" kern="1200" dirty="0"/>
+            <a:t> </a:t>
+          </a:r>
+          <a:r>
+            <a:rPr lang="en-MY" sz="2000" kern="1200" dirty="0" err="1"/>
+            <a:t>memori</a:t>
+          </a:r>
+          <a:r>
+            <a:rPr lang="en-MY" sz="2000" kern="1200" dirty="0"/>
+            <a:t>/</a:t>
+          </a:r>
+          <a:r>
+            <a:rPr lang="en-MY" sz="2000" kern="1200" dirty="0" err="1"/>
+            <a:t>waktu</a:t>
+          </a:r>
+          <a:r>
+            <a:rPr lang="en-MY" sz="2000" kern="1200" dirty="0"/>
+            <a:t>, </a:t>
+          </a:r>
+          <a:r>
+            <a:rPr lang="en-MY" sz="2000" kern="1200" dirty="0" err="1"/>
+            <a:t>pengaruh</a:t>
+          </a:r>
+          <a:r>
+            <a:rPr lang="en-MY" sz="2000" kern="1200" dirty="0"/>
+            <a:t> early stopping, dan </a:t>
+          </a:r>
+          <a:r>
+            <a:rPr lang="en-MY" sz="2000" kern="1200" dirty="0" err="1"/>
+            <a:t>dampak</a:t>
+          </a:r>
+          <a:r>
+            <a:rPr lang="en-MY" sz="2000" kern="1200" dirty="0"/>
+            <a:t> </a:t>
+          </a:r>
+          <a:r>
+            <a:rPr lang="en-MY" sz="2000" kern="1200" dirty="0" err="1"/>
+            <a:t>multikolinearitas</a:t>
+          </a:r>
+          <a:r>
+            <a:rPr lang="en-MY" sz="2000" kern="1200" dirty="0"/>
+            <a:t>.</a:t>
+          </a:r>
+          <a:endParaRPr lang="en-US" sz="2000" kern="1200" dirty="0"/>
         </a:p>
       </dsp:txBody>
       <dsp:txXfrm>
-        <a:off x="85984" y="3765643"/>
-        <a:ext cx="6494865" cy="1589430"/>
+        <a:off x="1848195" y="3983286"/>
+        <a:ext cx="4324657" cy="1600988"/>
       </dsp:txXfrm>
     </dsp:sp>
   </dsp:spTree>
@@ -6755,7 +8076,7 @@
       </dsp:nvSpPr>
       <dsp:spPr>
         <a:xfrm>
-          <a:off x="3414" y="137274"/>
+          <a:off x="3414" y="139140"/>
           <a:ext cx="3329572" cy="1052475"/>
         </a:xfrm>
         <a:prstGeom prst="rect">
@@ -6823,7 +8144,7 @@
         </a:p>
       </dsp:txBody>
       <dsp:txXfrm>
-        <a:off x="3414" y="137274"/>
+        <a:off x="3414" y="139140"/>
         <a:ext cx="3329572" cy="1052475"/>
       </dsp:txXfrm>
     </dsp:sp>
@@ -6834,8 +8155,8 @@
       </dsp:nvSpPr>
       <dsp:spPr>
         <a:xfrm>
-          <a:off x="3414" y="1189750"/>
-          <a:ext cx="3329572" cy="2865780"/>
+          <a:off x="3414" y="1191615"/>
+          <a:ext cx="3329572" cy="2862048"/>
         </a:xfrm>
         <a:prstGeom prst="rect">
           <a:avLst/>
@@ -6879,12 +8200,12 @@
         <a:fontRef idx="minor"/>
       </dsp:style>
       <dsp:txBody>
-        <a:bodyPr spcFirstLastPara="0" vert="horz" wrap="square" lIns="154686" tIns="154686" rIns="206248" bIns="232029" numCol="1" spcCol="1270" anchor="t" anchorCtr="0">
+        <a:bodyPr spcFirstLastPara="0" vert="horz" wrap="square" lIns="149352" tIns="149352" rIns="199136" bIns="224028" numCol="1" spcCol="1270" anchor="t" anchorCtr="0">
           <a:noAutofit/>
         </a:bodyPr>
         <a:lstStyle/>
         <a:p>
-          <a:pPr marL="285750" lvl="1" indent="-285750" algn="l" defTabSz="1289050">
+          <a:pPr marL="285750" lvl="1" indent="-285750" algn="l" defTabSz="1244600">
             <a:lnSpc>
               <a:spcPct val="90000"/>
             </a:lnSpc>
@@ -6897,91 +8218,99 @@
             <a:buChar char="•"/>
           </a:pPr>
           <a:r>
-            <a:rPr lang="en-MY" sz="2900" kern="1200" dirty="0" err="1"/>
+            <a:rPr lang="en-MY" sz="2800" b="1" kern="1200" dirty="0" err="1"/>
             <a:t>Cepat</a:t>
           </a:r>
           <a:r>
-            <a:rPr lang="en-MY" sz="2900" kern="1200" dirty="0"/>
+            <a:rPr lang="en-MY" sz="2800" kern="1200" dirty="0"/>
             <a:t> </a:t>
           </a:r>
           <a:r>
-            <a:rPr lang="en-MY" sz="2900" kern="1200" dirty="0" err="1"/>
+            <a:rPr lang="en-MY" sz="2800" kern="1200" dirty="0" err="1"/>
             <a:t>untuk</a:t>
           </a:r>
           <a:r>
-            <a:rPr lang="en-MY" sz="2900" kern="1200" dirty="0"/>
+            <a:rPr lang="en-MY" sz="2800" kern="1200" dirty="0"/>
             <a:t> </a:t>
           </a:r>
           <a:r>
-            <a:rPr lang="en-MY" sz="2900" kern="1200" dirty="0" err="1"/>
+            <a:rPr lang="en-MY" sz="2800" kern="1200" dirty="0" err="1"/>
             <a:t>fitur</a:t>
           </a:r>
           <a:r>
-            <a:rPr lang="en-MY" sz="2900" kern="1200" dirty="0"/>
+            <a:rPr lang="en-MY" sz="2800" kern="1200" dirty="0"/>
             <a:t> </a:t>
           </a:r>
           <a:r>
-            <a:rPr lang="en-MY" sz="2900" kern="1200" dirty="0" err="1"/>
+            <a:rPr lang="en-MY" sz="2800" kern="1200" dirty="0" err="1"/>
             <a:t>sedikit</a:t>
           </a:r>
           <a:r>
-            <a:rPr lang="en-MY" sz="2900" kern="1200" dirty="0"/>
+            <a:rPr lang="en-MY" sz="2800" kern="1200" dirty="0"/>
             <a:t>, </a:t>
           </a:r>
           <a:r>
-            <a:rPr lang="en-MY" sz="2900" kern="1200" dirty="0" err="1"/>
+            <a:rPr lang="en-MY" sz="2800" kern="1200" dirty="0" err="1"/>
             <a:t>namun</a:t>
           </a:r>
           <a:r>
-            <a:rPr lang="en-MY" sz="2900" kern="1200" dirty="0"/>
+            <a:rPr lang="en-MY" sz="2800" kern="1200" dirty="0"/>
             <a:t> </a:t>
           </a:r>
           <a:r>
-            <a:rPr lang="en-MY" sz="2900" kern="1200" dirty="0" err="1"/>
+            <a:rPr lang="en-MY" sz="2800" kern="1200" dirty="0" err="1"/>
             <a:t>gagal</a:t>
           </a:r>
           <a:r>
-            <a:rPr lang="en-MY" sz="2900" kern="1200" dirty="0"/>
+            <a:rPr lang="en-MY" sz="2800" kern="1200" dirty="0"/>
             <a:t> </a:t>
           </a:r>
           <a:r>
-            <a:rPr lang="en-MY" sz="2900" kern="1200" dirty="0" err="1"/>
+            <a:rPr lang="en-MY" sz="2800" kern="1200" dirty="0" err="1"/>
             <a:t>jika</a:t>
           </a:r>
           <a:r>
-            <a:rPr lang="en-MY" sz="2900" kern="1200" dirty="0"/>
+            <a:rPr lang="en-MY" sz="2800" kern="1200" dirty="0"/>
             <a:t> </a:t>
           </a:r>
           <a:r>
-            <a:rPr lang="en-MY" sz="2900" kern="1200" dirty="0" err="1"/>
+            <a:rPr lang="en-MY" sz="2800" kern="1200" dirty="0" err="1"/>
             <a:t>matriks</a:t>
           </a:r>
           <a:r>
-            <a:rPr lang="en-MY" sz="2900" kern="1200" dirty="0"/>
-            <a:t> singular (</a:t>
-          </a:r>
-          <a:r>
-            <a:rPr lang="en-MY" sz="2900" kern="1200" dirty="0" err="1"/>
+            <a:rPr lang="en-MY" sz="2800" kern="1200" dirty="0"/>
+            <a:t> </a:t>
+          </a:r>
+          <a:r>
+            <a:rPr lang="en-MY" sz="2800" b="1" kern="1200" dirty="0"/>
+            <a:t>singular</a:t>
+          </a:r>
+          <a:r>
+            <a:rPr lang="en-MY" sz="2800" kern="1200" dirty="0"/>
+            <a:t> (</a:t>
+          </a:r>
+          <a:r>
+            <a:rPr lang="en-MY" sz="2800" kern="1200" dirty="0" err="1"/>
             <a:t>determinan</a:t>
           </a:r>
           <a:r>
-            <a:rPr lang="en-MY" sz="2900" kern="1200" dirty="0"/>
+            <a:rPr lang="en-MY" sz="2800" kern="1200" dirty="0"/>
             <a:t> </a:t>
           </a:r>
           <a:r>
-            <a:rPr lang="en-MY" sz="2900" kern="1200" dirty="0" err="1"/>
+            <a:rPr lang="en-MY" sz="2800" kern="1200" dirty="0" err="1"/>
             <a:t>nol</a:t>
           </a:r>
           <a:r>
-            <a:rPr lang="en-MY" sz="2900" kern="1200" dirty="0"/>
+            <a:rPr lang="en-MY" sz="2800" kern="1200" dirty="0"/>
             <a:t>).</a:t>
           </a:r>
-          <a:endParaRPr lang="en-US" sz="2900" kern="1200" dirty="0"/>
+          <a:endParaRPr lang="en-US" sz="2800" kern="1200" dirty="0"/>
         </a:p>
       </dsp:txBody>
       <dsp:txXfrm>
-        <a:off x="3414" y="1189750"/>
-        <a:ext cx="3329572" cy="2865780"/>
+        <a:off x="3414" y="1191615"/>
+        <a:ext cx="3329572" cy="2862048"/>
       </dsp:txXfrm>
     </dsp:sp>
     <dsp:sp modelId="{B392A608-A230-4DDE-B581-8A7666609142}">
@@ -6991,7 +8320,7 @@
       </dsp:nvSpPr>
       <dsp:spPr>
         <a:xfrm>
-          <a:off x="3799128" y="137274"/>
+          <a:off x="3799128" y="139140"/>
           <a:ext cx="3329572" cy="1052475"/>
         </a:xfrm>
         <a:prstGeom prst="rect">
@@ -7071,7 +8400,7 @@
         </a:p>
       </dsp:txBody>
       <dsp:txXfrm>
-        <a:off x="3799128" y="137274"/>
+        <a:off x="3799128" y="139140"/>
         <a:ext cx="3329572" cy="1052475"/>
       </dsp:txXfrm>
     </dsp:sp>
@@ -7082,8 +8411,8 @@
       </dsp:nvSpPr>
       <dsp:spPr>
         <a:xfrm>
-          <a:off x="3799128" y="1189750"/>
-          <a:ext cx="3329572" cy="2865780"/>
+          <a:off x="3799128" y="1191615"/>
+          <a:ext cx="3329572" cy="2862048"/>
         </a:xfrm>
         <a:prstGeom prst="rect">
           <a:avLst/>
@@ -7145,7 +8474,7 @@
             <a:buChar char="•"/>
           </a:pPr>
           <a:r>
-            <a:rPr lang="en-MY" sz="2900" kern="1200" dirty="0" err="1"/>
+            <a:rPr lang="en-MY" sz="2900" b="1" kern="1200" dirty="0" err="1"/>
             <a:t>Skalabel</a:t>
           </a:r>
           <a:r>
@@ -7198,14 +8527,22 @@
           </a:r>
           <a:r>
             <a:rPr lang="en-MY" sz="2900" kern="1200" dirty="0"/>
-            <a:t> learning rate.</a:t>
+            <a:t> </a:t>
+          </a:r>
+          <a:r>
+            <a:rPr lang="en-MY" sz="2900" b="1" kern="1200" dirty="0"/>
+            <a:t>learning rate</a:t>
+          </a:r>
+          <a:r>
+            <a:rPr lang="en-MY" sz="2900" kern="1200" dirty="0"/>
+            <a:t>.</a:t>
           </a:r>
           <a:endParaRPr lang="en-US" sz="2900" kern="1200" dirty="0"/>
         </a:p>
       </dsp:txBody>
       <dsp:txXfrm>
-        <a:off x="3799128" y="1189750"/>
-        <a:ext cx="3329572" cy="2865780"/>
+        <a:off x="3799128" y="1191615"/>
+        <a:ext cx="3329572" cy="2862048"/>
       </dsp:txXfrm>
     </dsp:sp>
     <dsp:sp modelId="{F9BF31EC-9000-4221-A960-E08209BE8117}">
@@ -7215,7 +8552,7 @@
       </dsp:nvSpPr>
       <dsp:spPr>
         <a:xfrm>
-          <a:off x="7594841" y="137274"/>
+          <a:off x="7594841" y="139140"/>
           <a:ext cx="3329572" cy="1052475"/>
         </a:xfrm>
         <a:prstGeom prst="rect">
@@ -7295,7 +8632,7 @@
         </a:p>
       </dsp:txBody>
       <dsp:txXfrm>
-        <a:off x="7594841" y="137274"/>
+        <a:off x="7594841" y="139140"/>
         <a:ext cx="3329572" cy="1052475"/>
       </dsp:txXfrm>
     </dsp:sp>
@@ -7306,8 +8643,8 @@
       </dsp:nvSpPr>
       <dsp:spPr>
         <a:xfrm>
-          <a:off x="7594841" y="1189750"/>
-          <a:ext cx="3329572" cy="2865780"/>
+          <a:off x="7594841" y="1191615"/>
+          <a:ext cx="3329572" cy="2862048"/>
         </a:xfrm>
         <a:prstGeom prst="rect">
           <a:avLst/>
@@ -7369,15 +8706,59 @@
             <a:buChar char="•"/>
           </a:pPr>
           <a:r>
-            <a:rPr lang="en-MY" sz="2900" kern="1200"/>
-            <a:t>Beban komputasi tinggi di awal (Grid Search) demi stabilitas akurasi optimal.</a:t>
+            <a:rPr lang="en-MY" sz="2900" kern="1200" dirty="0"/>
+            <a:t>Beban </a:t>
+          </a:r>
+          <a:r>
+            <a:rPr lang="en-MY" sz="2900" b="1" kern="1200" dirty="0" err="1"/>
+            <a:t>komputasi</a:t>
+          </a:r>
+          <a:r>
+            <a:rPr lang="en-MY" sz="2900" b="1" kern="1200" dirty="0"/>
+            <a:t> </a:t>
+          </a:r>
+          <a:r>
+            <a:rPr lang="en-MY" sz="2900" b="1" kern="1200" dirty="0" err="1"/>
+            <a:t>tinggi</a:t>
+          </a:r>
+          <a:r>
+            <a:rPr lang="en-MY" sz="2900" b="1" kern="1200" dirty="0"/>
+            <a:t> </a:t>
+          </a:r>
+          <a:r>
+            <a:rPr lang="en-MY" sz="2900" kern="1200" dirty="0"/>
+            <a:t>di </a:t>
+          </a:r>
+          <a:r>
+            <a:rPr lang="en-MY" sz="2900" kern="1200" dirty="0" err="1"/>
+            <a:t>awal</a:t>
+          </a:r>
+          <a:r>
+            <a:rPr lang="en-MY" sz="2900" kern="1200" dirty="0"/>
+            <a:t> (Grid Search) demi </a:t>
+          </a:r>
+          <a:r>
+            <a:rPr lang="en-MY" sz="2900" kern="1200" dirty="0" err="1"/>
+            <a:t>stabilitas</a:t>
+          </a:r>
+          <a:r>
+            <a:rPr lang="en-MY" sz="2900" kern="1200" dirty="0"/>
+            <a:t> </a:t>
+          </a:r>
+          <a:r>
+            <a:rPr lang="en-MY" sz="2900" kern="1200" dirty="0" err="1"/>
+            <a:t>akurasi</a:t>
+          </a:r>
+          <a:r>
+            <a:rPr lang="en-MY" sz="2900" kern="1200" dirty="0"/>
+            <a:t> optimal.</a:t>
           </a:r>
           <a:endParaRPr lang="en-US" sz="2900" kern="1200" dirty="0"/>
         </a:p>
       </dsp:txBody>
       <dsp:txXfrm>
-        <a:off x="7594841" y="1189750"/>
-        <a:ext cx="3329572" cy="2865780"/>
+        <a:off x="7594841" y="1191615"/>
+        <a:ext cx="3329572" cy="2862048"/>
       </dsp:txXfrm>
     </dsp:sp>
   </dsp:spTree>
@@ -7399,8 +8780,8 @@
       </dsp:nvSpPr>
       <dsp:spPr>
         <a:xfrm>
-          <a:off x="0" y="4366"/>
-          <a:ext cx="6245265" cy="930102"/>
+          <a:off x="0" y="7091"/>
+          <a:ext cx="6245265" cy="929193"/>
         </a:xfrm>
         <a:prstGeom prst="roundRect">
           <a:avLst>
@@ -7441,8 +8822,8 @@
       </dsp:nvSpPr>
       <dsp:spPr>
         <a:xfrm>
-          <a:off x="281355" y="213639"/>
-          <a:ext cx="511556" cy="511556"/>
+          <a:off x="281081" y="216160"/>
+          <a:ext cx="511056" cy="511056"/>
         </a:xfrm>
         <a:prstGeom prst="rect">
           <a:avLst/>
@@ -7491,8 +8872,8 @@
       </dsp:nvSpPr>
       <dsp:spPr>
         <a:xfrm>
-          <a:off x="1074268" y="4366"/>
-          <a:ext cx="5170996" cy="930102"/>
+          <a:off x="1073219" y="7091"/>
+          <a:ext cx="5170996" cy="929193"/>
         </a:xfrm>
         <a:prstGeom prst="rect">
           <a:avLst/>
@@ -7516,7 +8897,7 @@
         <a:fontRef idx="minor"/>
       </dsp:style>
       <dsp:txBody>
-        <a:bodyPr spcFirstLastPara="0" vert="horz" wrap="square" lIns="98436" tIns="98436" rIns="98436" bIns="98436" numCol="1" spcCol="1270" anchor="ctr" anchorCtr="0">
+        <a:bodyPr spcFirstLastPara="0" vert="horz" wrap="square" lIns="98340" tIns="98340" rIns="98340" bIns="98340" numCol="1" spcCol="1270" anchor="ctr" anchorCtr="0">
           <a:noAutofit/>
         </a:bodyPr>
         <a:lstStyle/>
@@ -7534,26 +8915,62 @@
             <a:buNone/>
           </a:pPr>
           <a:r>
-            <a:rPr lang="en-MY" sz="1700" kern="1200"/>
-            <a:t>Arsitektur C++ OOP: Pemisahan ketat antara preprocessing, model, dan evaluasi.</a:t>
-          </a:r>
-          <a:endParaRPr lang="en-US" sz="1700" kern="1200"/>
+            <a:rPr lang="en-MY" sz="1700" kern="1200" dirty="0" err="1"/>
+            <a:t>Arsitektur</a:t>
+          </a:r>
+          <a:r>
+            <a:rPr lang="en-MY" sz="1700" kern="1200" dirty="0"/>
+            <a:t> C++ OOP: </a:t>
+          </a:r>
+          <a:r>
+            <a:rPr lang="en-MY" sz="1700" kern="1200" dirty="0" err="1"/>
+            <a:t>Pemisahan</a:t>
+          </a:r>
+          <a:r>
+            <a:rPr lang="en-MY" sz="1700" kern="1200" dirty="0"/>
+            <a:t> </a:t>
+          </a:r>
+          <a:r>
+            <a:rPr lang="en-MY" sz="1700" kern="1200" dirty="0" err="1"/>
+            <a:t>ketat</a:t>
+          </a:r>
+          <a:r>
+            <a:rPr lang="en-MY" sz="1700" kern="1200" dirty="0"/>
+            <a:t> </a:t>
+          </a:r>
+          <a:r>
+            <a:rPr lang="en-MY" sz="1700" kern="1200" dirty="0" err="1"/>
+            <a:t>antara</a:t>
+          </a:r>
+          <a:r>
+            <a:rPr lang="en-MY" sz="1700" kern="1200" dirty="0"/>
+            <a:t> preprocessing, model, dan </a:t>
+          </a:r>
+          <a:r>
+            <a:rPr lang="en-MY" sz="1700" kern="1200" dirty="0" err="1"/>
+            <a:t>evaluasi</a:t>
+          </a:r>
+          <a:r>
+            <a:rPr lang="en-MY" sz="1700" kern="1200" dirty="0"/>
+            <a:t>.</a:t>
+          </a:r>
+          <a:endParaRPr lang="en-US" sz="1700" kern="1200" dirty="0"/>
         </a:p>
       </dsp:txBody>
       <dsp:txXfrm>
-        <a:off x="1074268" y="4366"/>
-        <a:ext cx="5170996" cy="930102"/>
+        <a:off x="1073219" y="7091"/>
+        <a:ext cx="5170996" cy="929193"/>
       </dsp:txXfrm>
     </dsp:sp>
-    <dsp:sp modelId="{6FD62ABC-6DED-434B-B360-5C8C159277DA}">
+    <dsp:sp modelId="{56D79F9F-8B7B-43A2-ACC6-DC01DEFE174F}">
       <dsp:nvSpPr>
         <dsp:cNvPr id="0" name=""/>
         <dsp:cNvSpPr/>
       </dsp:nvSpPr>
       <dsp:spPr>
         <a:xfrm>
-          <a:off x="0" y="1166994"/>
-          <a:ext cx="6245265" cy="930102"/>
+          <a:off x="0" y="1168584"/>
+          <a:ext cx="6245265" cy="929193"/>
         </a:xfrm>
         <a:prstGeom prst="roundRect">
           <a:avLst>
@@ -7587,15 +9004,594 @@
         <a:fontRef idx="minor"/>
       </dsp:style>
     </dsp:sp>
-    <dsp:sp modelId="{C68AACE6-51CA-4A97-924B-1F0783A3E0C7}">
+    <dsp:sp modelId="{EEEBBDBC-8178-4624-BF0E-80F7C85B6753}">
       <dsp:nvSpPr>
         <dsp:cNvPr id="0" name=""/>
         <dsp:cNvSpPr/>
       </dsp:nvSpPr>
       <dsp:spPr>
         <a:xfrm>
-          <a:off x="281355" y="1376267"/>
-          <a:ext cx="511556" cy="511556"/>
+          <a:off x="281081" y="1377652"/>
+          <a:ext cx="511056" cy="511056"/>
+        </a:xfrm>
+        <a:prstGeom prst="rect">
+          <a:avLst/>
+        </a:prstGeom>
+        <a:solidFill>
+          <a:schemeClr val="accent3">
+            <a:hueOff val="0"/>
+            <a:satOff val="0"/>
+            <a:lumOff val="0"/>
+            <a:alphaOff val="0"/>
+          </a:schemeClr>
+        </a:solidFill>
+        <a:ln w="19050" cap="flat" cmpd="sng" algn="ctr">
+          <a:solidFill>
+            <a:schemeClr val="lt1">
+              <a:alpha val="0"/>
+              <a:hueOff val="0"/>
+              <a:satOff val="0"/>
+              <a:lumOff val="0"/>
+              <a:alphaOff val="0"/>
+            </a:schemeClr>
+          </a:solidFill>
+          <a:prstDash val="solid"/>
+          <a:miter lim="800000"/>
+        </a:ln>
+        <a:effectLst/>
+      </dsp:spPr>
+      <dsp:style>
+        <a:lnRef idx="2">
+          <a:scrgbClr r="0" g="0" b="0"/>
+        </a:lnRef>
+        <a:fillRef idx="1">
+          <a:scrgbClr r="0" g="0" b="0"/>
+        </a:fillRef>
+        <a:effectRef idx="0">
+          <a:scrgbClr r="0" g="0" b="0"/>
+        </a:effectRef>
+        <a:fontRef idx="minor">
+          <a:schemeClr val="lt1"/>
+        </a:fontRef>
+      </dsp:style>
+    </dsp:sp>
+    <dsp:sp modelId="{1BBAC8CA-CC01-433A-B510-15C9853E2A9F}">
+      <dsp:nvSpPr>
+        <dsp:cNvPr id="0" name=""/>
+        <dsp:cNvSpPr/>
+      </dsp:nvSpPr>
+      <dsp:spPr>
+        <a:xfrm>
+          <a:off x="1073219" y="1168584"/>
+          <a:ext cx="2810369" cy="929193"/>
+        </a:xfrm>
+        <a:prstGeom prst="rect">
+          <a:avLst/>
+        </a:prstGeom>
+        <a:noFill/>
+        <a:ln>
+          <a:noFill/>
+        </a:ln>
+        <a:effectLst/>
+      </dsp:spPr>
+      <dsp:style>
+        <a:lnRef idx="0">
+          <a:scrgbClr r="0" g="0" b="0"/>
+        </a:lnRef>
+        <a:fillRef idx="0">
+          <a:scrgbClr r="0" g="0" b="0"/>
+        </a:fillRef>
+        <a:effectRef idx="0">
+          <a:scrgbClr r="0" g="0" b="0"/>
+        </a:effectRef>
+        <a:fontRef idx="minor"/>
+      </dsp:style>
+      <dsp:txBody>
+        <a:bodyPr spcFirstLastPara="0" vert="horz" wrap="square" lIns="98340" tIns="98340" rIns="98340" bIns="98340" numCol="1" spcCol="1270" anchor="ctr" anchorCtr="0">
+          <a:noAutofit/>
+        </a:bodyPr>
+        <a:lstStyle/>
+        <a:p>
+          <a:pPr marL="0" lvl="0" indent="0" algn="l" defTabSz="755650">
+            <a:lnSpc>
+              <a:spcPct val="100000"/>
+            </a:lnSpc>
+            <a:spcBef>
+              <a:spcPct val="0"/>
+            </a:spcBef>
+            <a:spcAft>
+              <a:spcPct val="35000"/>
+            </a:spcAft>
+            <a:buNone/>
+          </a:pPr>
+          <a:r>
+            <a:rPr lang="en-US" sz="1700" kern="1200"/>
+            <a:t>Komparasi 3 Algoritma :</a:t>
+          </a:r>
+          <a:endParaRPr lang="en-US" sz="1700" kern="1200" dirty="0"/>
+        </a:p>
+      </dsp:txBody>
+      <dsp:txXfrm>
+        <a:off x="1073219" y="1168584"/>
+        <a:ext cx="2810369" cy="929193"/>
+      </dsp:txXfrm>
+    </dsp:sp>
+    <dsp:sp modelId="{CE2EC13B-828B-4729-969C-C7E824CEF7BD}">
+      <dsp:nvSpPr>
+        <dsp:cNvPr id="0" name=""/>
+        <dsp:cNvSpPr/>
+      </dsp:nvSpPr>
+      <dsp:spPr>
+        <a:xfrm>
+          <a:off x="3883588" y="1168584"/>
+          <a:ext cx="2360627" cy="929193"/>
+        </a:xfrm>
+        <a:prstGeom prst="rect">
+          <a:avLst/>
+        </a:prstGeom>
+        <a:noFill/>
+        <a:ln>
+          <a:noFill/>
+        </a:ln>
+        <a:effectLst/>
+      </dsp:spPr>
+      <dsp:style>
+        <a:lnRef idx="0">
+          <a:scrgbClr r="0" g="0" b="0"/>
+        </a:lnRef>
+        <a:fillRef idx="0">
+          <a:scrgbClr r="0" g="0" b="0"/>
+        </a:fillRef>
+        <a:effectRef idx="0">
+          <a:scrgbClr r="0" g="0" b="0"/>
+        </a:effectRef>
+        <a:fontRef idx="minor"/>
+      </dsp:style>
+      <dsp:txBody>
+        <a:bodyPr spcFirstLastPara="0" vert="horz" wrap="square" lIns="98340" tIns="98340" rIns="98340" bIns="98340" numCol="1" spcCol="1270" anchor="ctr" anchorCtr="0">
+          <a:noAutofit/>
+        </a:bodyPr>
+        <a:lstStyle/>
+        <a:p>
+          <a:pPr marL="0" lvl="0" indent="0" algn="l" defTabSz="622300">
+            <a:lnSpc>
+              <a:spcPct val="100000"/>
+            </a:lnSpc>
+            <a:spcBef>
+              <a:spcPct val="0"/>
+            </a:spcBef>
+            <a:spcAft>
+              <a:spcPct val="35000"/>
+            </a:spcAft>
+            <a:buNone/>
+          </a:pPr>
+          <a:r>
+            <a:rPr lang="en-US" sz="1400" b="1" kern="1200"/>
+            <a:t>Normal Equation</a:t>
+          </a:r>
+          <a:endParaRPr lang="en-US" sz="1400" b="1" kern="1200" dirty="0"/>
+        </a:p>
+        <a:p>
+          <a:pPr marL="0" lvl="0" indent="0" algn="l" defTabSz="622300">
+            <a:lnSpc>
+              <a:spcPct val="100000"/>
+            </a:lnSpc>
+            <a:spcBef>
+              <a:spcPct val="0"/>
+            </a:spcBef>
+            <a:spcAft>
+              <a:spcPct val="35000"/>
+            </a:spcAft>
+            <a:buNone/>
+          </a:pPr>
+          <a:r>
+            <a:rPr lang="en-US" sz="1400" b="1" kern="1200" dirty="0"/>
+            <a:t>Gradient Descent Vanila</a:t>
+          </a:r>
+        </a:p>
+        <a:p>
+          <a:pPr marL="0" lvl="0" indent="0" algn="l" defTabSz="622300">
+            <a:lnSpc>
+              <a:spcPct val="100000"/>
+            </a:lnSpc>
+            <a:spcBef>
+              <a:spcPct val="0"/>
+            </a:spcBef>
+            <a:spcAft>
+              <a:spcPct val="35000"/>
+            </a:spcAft>
+            <a:buNone/>
+          </a:pPr>
+          <a:r>
+            <a:rPr lang="en-US" sz="1400" b="1" kern="1200" dirty="0"/>
+            <a:t>Tuned Gradient Descent</a:t>
+          </a:r>
+        </a:p>
+      </dsp:txBody>
+      <dsp:txXfrm>
+        <a:off x="3883588" y="1168584"/>
+        <a:ext cx="2360627" cy="929193"/>
+      </dsp:txXfrm>
+    </dsp:sp>
+    <dsp:sp modelId="{74EEF5FE-0645-4875-8A6D-D9E525D38BB9}">
+      <dsp:nvSpPr>
+        <dsp:cNvPr id="0" name=""/>
+        <dsp:cNvSpPr/>
+      </dsp:nvSpPr>
+      <dsp:spPr>
+        <a:xfrm>
+          <a:off x="0" y="2330076"/>
+          <a:ext cx="6245265" cy="929193"/>
+        </a:xfrm>
+        <a:prstGeom prst="roundRect">
+          <a:avLst>
+            <a:gd name="adj" fmla="val 10000"/>
+          </a:avLst>
+        </a:prstGeom>
+        <a:solidFill>
+          <a:schemeClr val="bg1">
+            <a:lumMod val="95000"/>
+            <a:hueOff val="0"/>
+            <a:satOff val="0"/>
+            <a:lumOff val="0"/>
+            <a:alphaOff val="0"/>
+          </a:schemeClr>
+        </a:solidFill>
+        <a:ln>
+          <a:noFill/>
+        </a:ln>
+        <a:effectLst/>
+      </dsp:spPr>
+      <dsp:style>
+        <a:lnRef idx="0">
+          <a:scrgbClr r="0" g="0" b="0"/>
+        </a:lnRef>
+        <a:fillRef idx="1">
+          <a:scrgbClr r="0" g="0" b="0"/>
+        </a:fillRef>
+        <a:effectRef idx="0">
+          <a:scrgbClr r="0" g="0" b="0"/>
+        </a:effectRef>
+        <a:fontRef idx="minor"/>
+      </dsp:style>
+    </dsp:sp>
+    <dsp:sp modelId="{8AAFAEF8-CC7C-4A37-A892-33745DF833BD}">
+      <dsp:nvSpPr>
+        <dsp:cNvPr id="0" name=""/>
+        <dsp:cNvSpPr/>
+      </dsp:nvSpPr>
+      <dsp:spPr>
+        <a:xfrm>
+          <a:off x="281081" y="2539145"/>
+          <a:ext cx="511056" cy="511056"/>
+        </a:xfrm>
+        <a:prstGeom prst="rect">
+          <a:avLst/>
+        </a:prstGeom>
+        <a:solidFill>
+          <a:schemeClr val="accent4">
+            <a:hueOff val="0"/>
+            <a:satOff val="0"/>
+            <a:lumOff val="0"/>
+            <a:alphaOff val="0"/>
+          </a:schemeClr>
+        </a:solidFill>
+        <a:ln w="19050" cap="flat" cmpd="sng" algn="ctr">
+          <a:solidFill>
+            <a:schemeClr val="lt1">
+              <a:alpha val="0"/>
+              <a:hueOff val="0"/>
+              <a:satOff val="0"/>
+              <a:lumOff val="0"/>
+              <a:alphaOff val="0"/>
+            </a:schemeClr>
+          </a:solidFill>
+          <a:prstDash val="solid"/>
+          <a:miter lim="800000"/>
+        </a:ln>
+        <a:effectLst/>
+      </dsp:spPr>
+      <dsp:style>
+        <a:lnRef idx="2">
+          <a:scrgbClr r="0" g="0" b="0"/>
+        </a:lnRef>
+        <a:fillRef idx="1">
+          <a:scrgbClr r="0" g="0" b="0"/>
+        </a:fillRef>
+        <a:effectRef idx="0">
+          <a:scrgbClr r="0" g="0" b="0"/>
+        </a:effectRef>
+        <a:fontRef idx="minor">
+          <a:schemeClr val="lt1"/>
+        </a:fontRef>
+      </dsp:style>
+    </dsp:sp>
+    <dsp:sp modelId="{FED68ED4-F4A8-4999-B56D-D7B33ED1E9E1}">
+      <dsp:nvSpPr>
+        <dsp:cNvPr id="0" name=""/>
+        <dsp:cNvSpPr/>
+      </dsp:nvSpPr>
+      <dsp:spPr>
+        <a:xfrm>
+          <a:off x="1073219" y="2330076"/>
+          <a:ext cx="5170996" cy="929193"/>
+        </a:xfrm>
+        <a:prstGeom prst="rect">
+          <a:avLst/>
+        </a:prstGeom>
+        <a:noFill/>
+        <a:ln>
+          <a:noFill/>
+        </a:ln>
+        <a:effectLst/>
+      </dsp:spPr>
+      <dsp:style>
+        <a:lnRef idx="0">
+          <a:scrgbClr r="0" g="0" b="0"/>
+        </a:lnRef>
+        <a:fillRef idx="0">
+          <a:scrgbClr r="0" g="0" b="0"/>
+        </a:fillRef>
+        <a:effectRef idx="0">
+          <a:scrgbClr r="0" g="0" b="0"/>
+        </a:effectRef>
+        <a:fontRef idx="minor"/>
+      </dsp:style>
+      <dsp:txBody>
+        <a:bodyPr spcFirstLastPara="0" vert="horz" wrap="square" lIns="98340" tIns="98340" rIns="98340" bIns="98340" numCol="1" spcCol="1270" anchor="ctr" anchorCtr="0">
+          <a:noAutofit/>
+        </a:bodyPr>
+        <a:lstStyle/>
+        <a:p>
+          <a:pPr marL="0" lvl="0" indent="0" algn="l" defTabSz="755650">
+            <a:lnSpc>
+              <a:spcPct val="100000"/>
+            </a:lnSpc>
+            <a:spcBef>
+              <a:spcPct val="0"/>
+            </a:spcBef>
+            <a:spcAft>
+              <a:spcPct val="35000"/>
+            </a:spcAft>
+            <a:buNone/>
+          </a:pPr>
+          <a:r>
+            <a:rPr lang="en-MY" sz="1700" kern="1200" dirty="0" err="1"/>
+            <a:t>Metrik</a:t>
+          </a:r>
+          <a:r>
+            <a:rPr lang="en-MY" sz="1700" kern="1200" dirty="0"/>
+            <a:t> Uji: Waktu (&lt;chrono&gt;), Memori RAM (Windows API), dan </a:t>
+          </a:r>
+          <a:r>
+            <a:rPr lang="en-MY" sz="1700" kern="1200" dirty="0" err="1"/>
+            <a:t>Akurasi</a:t>
+          </a:r>
+          <a:r>
+            <a:rPr lang="en-MY" sz="1700" kern="1200" dirty="0"/>
+            <a:t> (MSE, RMSE, MAE, R^2).</a:t>
+          </a:r>
+          <a:endParaRPr lang="en-US" sz="1700" kern="1200" dirty="0"/>
+        </a:p>
+      </dsp:txBody>
+      <dsp:txXfrm>
+        <a:off x="1073219" y="2330076"/>
+        <a:ext cx="5170996" cy="929193"/>
+      </dsp:txXfrm>
+    </dsp:sp>
+    <dsp:sp modelId="{408C9004-E47E-49AE-B9CB-993ED74C482C}">
+      <dsp:nvSpPr>
+        <dsp:cNvPr id="0" name=""/>
+        <dsp:cNvSpPr/>
+      </dsp:nvSpPr>
+      <dsp:spPr>
+        <a:xfrm>
+          <a:off x="0" y="3491568"/>
+          <a:ext cx="6245265" cy="929193"/>
+        </a:xfrm>
+        <a:prstGeom prst="roundRect">
+          <a:avLst>
+            <a:gd name="adj" fmla="val 10000"/>
+          </a:avLst>
+        </a:prstGeom>
+        <a:solidFill>
+          <a:schemeClr val="bg1">
+            <a:lumMod val="95000"/>
+            <a:hueOff val="0"/>
+            <a:satOff val="0"/>
+            <a:lumOff val="0"/>
+            <a:alphaOff val="0"/>
+          </a:schemeClr>
+        </a:solidFill>
+        <a:ln>
+          <a:noFill/>
+        </a:ln>
+        <a:effectLst/>
+      </dsp:spPr>
+      <dsp:style>
+        <a:lnRef idx="0">
+          <a:scrgbClr r="0" g="0" b="0"/>
+        </a:lnRef>
+        <a:fillRef idx="1">
+          <a:scrgbClr r="0" g="0" b="0"/>
+        </a:fillRef>
+        <a:effectRef idx="0">
+          <a:scrgbClr r="0" g="0" b="0"/>
+        </a:effectRef>
+        <a:fontRef idx="minor"/>
+      </dsp:style>
+    </dsp:sp>
+    <dsp:sp modelId="{83C48CF6-C7BB-45FD-8C92-8A8BBFBD8D99}">
+      <dsp:nvSpPr>
+        <dsp:cNvPr id="0" name=""/>
+        <dsp:cNvSpPr/>
+      </dsp:nvSpPr>
+      <dsp:spPr>
+        <a:xfrm>
+          <a:off x="281081" y="3700637"/>
+          <a:ext cx="511056" cy="511056"/>
+        </a:xfrm>
+        <a:prstGeom prst="rect">
+          <a:avLst/>
+        </a:prstGeom>
+        <a:solidFill>
+          <a:schemeClr val="accent5">
+            <a:hueOff val="0"/>
+            <a:satOff val="0"/>
+            <a:lumOff val="0"/>
+            <a:alphaOff val="0"/>
+          </a:schemeClr>
+        </a:solidFill>
+        <a:ln w="19050" cap="flat" cmpd="sng" algn="ctr">
+          <a:solidFill>
+            <a:schemeClr val="lt1">
+              <a:alpha val="0"/>
+              <a:hueOff val="0"/>
+              <a:satOff val="0"/>
+              <a:lumOff val="0"/>
+              <a:alphaOff val="0"/>
+            </a:schemeClr>
+          </a:solidFill>
+          <a:prstDash val="solid"/>
+          <a:miter lim="800000"/>
+        </a:ln>
+        <a:effectLst/>
+      </dsp:spPr>
+      <dsp:style>
+        <a:lnRef idx="2">
+          <a:scrgbClr r="0" g="0" b="0"/>
+        </a:lnRef>
+        <a:fillRef idx="1">
+          <a:scrgbClr r="0" g="0" b="0"/>
+        </a:fillRef>
+        <a:effectRef idx="0">
+          <a:scrgbClr r="0" g="0" b="0"/>
+        </a:effectRef>
+        <a:fontRef idx="minor">
+          <a:schemeClr val="lt1"/>
+        </a:fontRef>
+      </dsp:style>
+    </dsp:sp>
+    <dsp:sp modelId="{0B38EFF2-8340-44DB-A76C-B231D0E10C01}">
+      <dsp:nvSpPr>
+        <dsp:cNvPr id="0" name=""/>
+        <dsp:cNvSpPr/>
+      </dsp:nvSpPr>
+      <dsp:spPr>
+        <a:xfrm>
+          <a:off x="1073219" y="3491568"/>
+          <a:ext cx="5170996" cy="929193"/>
+        </a:xfrm>
+        <a:prstGeom prst="rect">
+          <a:avLst/>
+        </a:prstGeom>
+        <a:noFill/>
+        <a:ln>
+          <a:noFill/>
+        </a:ln>
+        <a:effectLst/>
+      </dsp:spPr>
+      <dsp:style>
+        <a:lnRef idx="0">
+          <a:scrgbClr r="0" g="0" b="0"/>
+        </a:lnRef>
+        <a:fillRef idx="0">
+          <a:scrgbClr r="0" g="0" b="0"/>
+        </a:fillRef>
+        <a:effectRef idx="0">
+          <a:scrgbClr r="0" g="0" b="0"/>
+        </a:effectRef>
+        <a:fontRef idx="minor"/>
+      </dsp:style>
+      <dsp:txBody>
+        <a:bodyPr spcFirstLastPara="0" vert="horz" wrap="square" lIns="98340" tIns="98340" rIns="98340" bIns="98340" numCol="1" spcCol="1270" anchor="ctr" anchorCtr="0">
+          <a:noAutofit/>
+        </a:bodyPr>
+        <a:lstStyle/>
+        <a:p>
+          <a:pPr marL="0" lvl="0" indent="0" algn="l" defTabSz="755650">
+            <a:lnSpc>
+              <a:spcPct val="100000"/>
+            </a:lnSpc>
+            <a:spcBef>
+              <a:spcPct val="0"/>
+            </a:spcBef>
+            <a:spcAft>
+              <a:spcPct val="35000"/>
+            </a:spcAft>
+            <a:buNone/>
+          </a:pPr>
+          <a:r>
+            <a:rPr lang="en-MY" sz="1700" b="1" kern="1200" dirty="0"/>
+            <a:t>Dataset 1</a:t>
+          </a:r>
+          <a:r>
+            <a:rPr lang="en-MY" sz="1700" kern="1200" dirty="0"/>
+            <a:t> (Energy): 48.024 baris, 7 </a:t>
+          </a:r>
+          <a:r>
+            <a:rPr lang="en-MY" sz="1700" kern="1200" dirty="0" err="1"/>
+            <a:t>fitur</a:t>
+          </a:r>
+          <a:endParaRPr lang="en-US" sz="1700" kern="1200" dirty="0"/>
+        </a:p>
+      </dsp:txBody>
+      <dsp:txXfrm>
+        <a:off x="1073219" y="3491568"/>
+        <a:ext cx="5170996" cy="929193"/>
+      </dsp:txXfrm>
+    </dsp:sp>
+    <dsp:sp modelId="{2112CAB0-F140-404C-BCA9-40A3DE4D654F}">
+      <dsp:nvSpPr>
+        <dsp:cNvPr id="0" name=""/>
+        <dsp:cNvSpPr/>
+      </dsp:nvSpPr>
+      <dsp:spPr>
+        <a:xfrm>
+          <a:off x="0" y="4653061"/>
+          <a:ext cx="6245265" cy="929193"/>
+        </a:xfrm>
+        <a:prstGeom prst="roundRect">
+          <a:avLst>
+            <a:gd name="adj" fmla="val 10000"/>
+          </a:avLst>
+        </a:prstGeom>
+        <a:solidFill>
+          <a:schemeClr val="bg1">
+            <a:lumMod val="95000"/>
+            <a:hueOff val="0"/>
+            <a:satOff val="0"/>
+            <a:lumOff val="0"/>
+            <a:alphaOff val="0"/>
+          </a:schemeClr>
+        </a:solidFill>
+        <a:ln>
+          <a:noFill/>
+        </a:ln>
+        <a:effectLst/>
+      </dsp:spPr>
+      <dsp:style>
+        <a:lnRef idx="0">
+          <a:scrgbClr r="0" g="0" b="0"/>
+        </a:lnRef>
+        <a:fillRef idx="1">
+          <a:scrgbClr r="0" g="0" b="0"/>
+        </a:fillRef>
+        <a:effectRef idx="0">
+          <a:scrgbClr r="0" g="0" b="0"/>
+        </a:effectRef>
+        <a:fontRef idx="minor"/>
+      </dsp:style>
+    </dsp:sp>
+    <dsp:sp modelId="{1EBE7DDA-BF30-481A-854A-5BA5B98CABFA}">
+      <dsp:nvSpPr>
+        <dsp:cNvPr id="0" name=""/>
+        <dsp:cNvSpPr/>
+      </dsp:nvSpPr>
+      <dsp:spPr>
+        <a:xfrm>
+          <a:off x="281081" y="4862130"/>
+          <a:ext cx="511056" cy="511056"/>
         </a:xfrm>
         <a:prstGeom prst="rect">
           <a:avLst/>
@@ -7637,15 +9633,15 @@
         </a:fontRef>
       </dsp:style>
     </dsp:sp>
-    <dsp:sp modelId="{950B1FA5-B88F-44FD-9049-381D36CADF6C}">
+    <dsp:sp modelId="{2A60244E-E964-45B3-84E9-D98EFEB5229E}">
       <dsp:nvSpPr>
         <dsp:cNvPr id="0" name=""/>
         <dsp:cNvSpPr/>
       </dsp:nvSpPr>
       <dsp:spPr>
         <a:xfrm>
-          <a:off x="1074268" y="1166994"/>
-          <a:ext cx="5170996" cy="930102"/>
+          <a:off x="1073219" y="4653061"/>
+          <a:ext cx="5170996" cy="929193"/>
         </a:xfrm>
         <a:prstGeom prst="rect">
           <a:avLst/>
@@ -7669,7 +9665,7 @@
         <a:fontRef idx="minor"/>
       </dsp:style>
       <dsp:txBody>
-        <a:bodyPr spcFirstLastPara="0" vert="horz" wrap="square" lIns="98436" tIns="98436" rIns="98436" bIns="98436" numCol="1" spcCol="1270" anchor="ctr" anchorCtr="0">
+        <a:bodyPr spcFirstLastPara="0" vert="horz" wrap="square" lIns="98340" tIns="98340" rIns="98340" bIns="98340" numCol="1" spcCol="1270" anchor="ctr" anchorCtr="0">
           <a:noAutofit/>
         </a:bodyPr>
         <a:lstStyle/>
@@ -7687,474 +9683,51 @@
             <a:buNone/>
           </a:pPr>
           <a:r>
-            <a:rPr lang="en-MY" sz="1700" kern="1200"/>
-            <a:t>Metrik Uji: Waktu (&lt;chrono&gt;), Memori RAM (Windows API), dan Akurasi (MSE, RMSE, MAE, R^2).</a:t>
-          </a:r>
-          <a:endParaRPr lang="en-US" sz="1700" kern="1200"/>
+            <a:rPr lang="en-MY" sz="1700" b="1" kern="1200" dirty="0"/>
+            <a:t>Dataset 2</a:t>
+          </a:r>
+          <a:r>
+            <a:rPr lang="en-MY" sz="1700" kern="1200" dirty="0"/>
+            <a:t> (</a:t>
+          </a:r>
+          <a:r>
+            <a:rPr lang="en-MY" sz="1700" kern="1200" dirty="0" err="1"/>
+            <a:t>Komoditas</a:t>
+          </a:r>
+          <a:r>
+            <a:rPr lang="en-MY" sz="1700" kern="1200" dirty="0"/>
+            <a:t>): 781 baris, 43 </a:t>
+          </a:r>
+          <a:r>
+            <a:rPr lang="en-MY" sz="1700" kern="1200" dirty="0" err="1"/>
+            <a:t>kolom</a:t>
+          </a:r>
+          <a:r>
+            <a:rPr lang="en-MY" sz="1700" kern="1200" dirty="0"/>
+            <a:t> (</a:t>
+          </a:r>
+          <a:r>
+            <a:rPr lang="en-MY" sz="1700" kern="1200" dirty="0" err="1"/>
+            <a:t>Multikolinearitas</a:t>
+          </a:r>
+          <a:r>
+            <a:rPr lang="en-MY" sz="1700" kern="1200" dirty="0"/>
+            <a:t> </a:t>
+          </a:r>
+          <a:r>
+            <a:rPr lang="en-MY" sz="1700" kern="1200" dirty="0" err="1"/>
+            <a:t>tinggi</a:t>
+          </a:r>
+          <a:r>
+            <a:rPr lang="en-MY" sz="1700" kern="1200" dirty="0"/>
+            <a:t>).</a:t>
+          </a:r>
+          <a:endParaRPr lang="en-US" sz="1700" kern="1200" dirty="0"/>
         </a:p>
       </dsp:txBody>
       <dsp:txXfrm>
-        <a:off x="1074268" y="1166994"/>
-        <a:ext cx="5170996" cy="930102"/>
-      </dsp:txXfrm>
-    </dsp:sp>
-    <dsp:sp modelId="{880A247A-69D8-41AF-9F00-D57CADE45FF2}">
-      <dsp:nvSpPr>
-        <dsp:cNvPr id="0" name=""/>
-        <dsp:cNvSpPr/>
-      </dsp:nvSpPr>
-      <dsp:spPr>
-        <a:xfrm>
-          <a:off x="0" y="2329622"/>
-          <a:ext cx="6245265" cy="930102"/>
-        </a:xfrm>
-        <a:prstGeom prst="roundRect">
-          <a:avLst>
-            <a:gd name="adj" fmla="val 10000"/>
-          </a:avLst>
-        </a:prstGeom>
-        <a:solidFill>
-          <a:schemeClr val="bg1">
-            <a:lumMod val="95000"/>
-            <a:hueOff val="0"/>
-            <a:satOff val="0"/>
-            <a:lumOff val="0"/>
-            <a:alphaOff val="0"/>
-          </a:schemeClr>
-        </a:solidFill>
-        <a:ln>
-          <a:noFill/>
-        </a:ln>
-        <a:effectLst/>
-      </dsp:spPr>
-      <dsp:style>
-        <a:lnRef idx="0">
-          <a:scrgbClr r="0" g="0" b="0"/>
-        </a:lnRef>
-        <a:fillRef idx="1">
-          <a:scrgbClr r="0" g="0" b="0"/>
-        </a:fillRef>
-        <a:effectRef idx="0">
-          <a:scrgbClr r="0" g="0" b="0"/>
-        </a:effectRef>
-        <a:fontRef idx="minor"/>
-      </dsp:style>
-    </dsp:sp>
-    <dsp:sp modelId="{064CAEE8-6731-44B8-A3B5-1CD990FC346A}">
-      <dsp:nvSpPr>
-        <dsp:cNvPr id="0" name=""/>
-        <dsp:cNvSpPr/>
-      </dsp:nvSpPr>
-      <dsp:spPr>
-        <a:xfrm>
-          <a:off x="281355" y="2538895"/>
-          <a:ext cx="511556" cy="511556"/>
-        </a:xfrm>
-        <a:prstGeom prst="rect">
-          <a:avLst/>
-        </a:prstGeom>
-        <a:blipFill>
-          <a:blip xmlns:r="http://schemas.openxmlformats.org/officeDocument/2006/relationships">
-            <a:extLst>
-              <a:ext uri="{28A0092B-C50C-407E-A947-70E740481C1C}">
-                <a14:useLocalDpi xmlns:a14="http://schemas.microsoft.com/office/drawing/2010/main" val="0"/>
-              </a:ext>
-              <a:ext uri="{96DAC541-7B7A-43D3-8B79-37D633B846F1}">
-                <asvg:svgBlip xmlns:asvg="http://schemas.microsoft.com/office/drawing/2016/SVG/main" r:embed="rId3"/>
-              </a:ext>
-            </a:extLst>
-          </a:blip>
-          <a:stretch>
-            <a:fillRect/>
-          </a:stretch>
-        </a:blipFill>
-        <a:ln w="19050" cap="flat" cmpd="sng" algn="ctr">
-          <a:noFill/>
-          <a:prstDash val="solid"/>
-          <a:miter lim="800000"/>
-        </a:ln>
-        <a:effectLst/>
-      </dsp:spPr>
-      <dsp:style>
-        <a:lnRef idx="2">
-          <a:scrgbClr r="0" g="0" b="0"/>
-        </a:lnRef>
-        <a:fillRef idx="1">
-          <a:scrgbClr r="0" g="0" b="0"/>
-        </a:fillRef>
-        <a:effectRef idx="0">
-          <a:scrgbClr r="0" g="0" b="0"/>
-        </a:effectRef>
-        <a:fontRef idx="minor">
-          <a:schemeClr val="lt1"/>
-        </a:fontRef>
-      </dsp:style>
-    </dsp:sp>
-    <dsp:sp modelId="{596B03D9-E340-4CA2-B44A-EF9DC5C31145}">
-      <dsp:nvSpPr>
-        <dsp:cNvPr id="0" name=""/>
-        <dsp:cNvSpPr/>
-      </dsp:nvSpPr>
-      <dsp:spPr>
-        <a:xfrm>
-          <a:off x="1074268" y="2329622"/>
-          <a:ext cx="5170996" cy="930102"/>
-        </a:xfrm>
-        <a:prstGeom prst="rect">
-          <a:avLst/>
-        </a:prstGeom>
-        <a:noFill/>
-        <a:ln>
-          <a:noFill/>
-        </a:ln>
-        <a:effectLst/>
-      </dsp:spPr>
-      <dsp:style>
-        <a:lnRef idx="0">
-          <a:scrgbClr r="0" g="0" b="0"/>
-        </a:lnRef>
-        <a:fillRef idx="0">
-          <a:scrgbClr r="0" g="0" b="0"/>
-        </a:fillRef>
-        <a:effectRef idx="0">
-          <a:scrgbClr r="0" g="0" b="0"/>
-        </a:effectRef>
-        <a:fontRef idx="minor"/>
-      </dsp:style>
-      <dsp:txBody>
-        <a:bodyPr spcFirstLastPara="0" vert="horz" wrap="square" lIns="98436" tIns="98436" rIns="98436" bIns="98436" numCol="1" spcCol="1270" anchor="ctr" anchorCtr="0">
-          <a:noAutofit/>
-        </a:bodyPr>
-        <a:lstStyle/>
-        <a:p>
-          <a:pPr marL="0" lvl="0" indent="0" algn="l" defTabSz="755650">
-            <a:lnSpc>
-              <a:spcPct val="100000"/>
-            </a:lnSpc>
-            <a:spcBef>
-              <a:spcPct val="0"/>
-            </a:spcBef>
-            <a:spcAft>
-              <a:spcPct val="35000"/>
-            </a:spcAft>
-            <a:buNone/>
-          </a:pPr>
-          <a:r>
-            <a:rPr lang="en-MY" sz="1700" kern="1200"/>
-            <a:t>Karakteristik Data:</a:t>
-          </a:r>
-          <a:endParaRPr lang="en-US" sz="1700" kern="1200"/>
-        </a:p>
-      </dsp:txBody>
-      <dsp:txXfrm>
-        <a:off x="1074268" y="2329622"/>
-        <a:ext cx="5170996" cy="930102"/>
-      </dsp:txXfrm>
-    </dsp:sp>
-    <dsp:sp modelId="{0921C9BC-DFC9-476E-83B3-486B30726ED5}">
-      <dsp:nvSpPr>
-        <dsp:cNvPr id="0" name=""/>
-        <dsp:cNvSpPr/>
-      </dsp:nvSpPr>
-      <dsp:spPr>
-        <a:xfrm>
-          <a:off x="0" y="3492250"/>
-          <a:ext cx="6245265" cy="930102"/>
-        </a:xfrm>
-        <a:prstGeom prst="roundRect">
-          <a:avLst>
-            <a:gd name="adj" fmla="val 10000"/>
-          </a:avLst>
-        </a:prstGeom>
-        <a:solidFill>
-          <a:schemeClr val="bg1">
-            <a:lumMod val="95000"/>
-            <a:hueOff val="0"/>
-            <a:satOff val="0"/>
-            <a:lumOff val="0"/>
-            <a:alphaOff val="0"/>
-          </a:schemeClr>
-        </a:solidFill>
-        <a:ln>
-          <a:noFill/>
-        </a:ln>
-        <a:effectLst/>
-      </dsp:spPr>
-      <dsp:style>
-        <a:lnRef idx="0">
-          <a:scrgbClr r="0" g="0" b="0"/>
-        </a:lnRef>
-        <a:fillRef idx="1">
-          <a:scrgbClr r="0" g="0" b="0"/>
-        </a:fillRef>
-        <a:effectRef idx="0">
-          <a:scrgbClr r="0" g="0" b="0"/>
-        </a:effectRef>
-        <a:fontRef idx="minor"/>
-      </dsp:style>
-    </dsp:sp>
-    <dsp:sp modelId="{247484BD-C9F6-4F12-B35A-7D5D12481F23}">
-      <dsp:nvSpPr>
-        <dsp:cNvPr id="0" name=""/>
-        <dsp:cNvSpPr/>
-      </dsp:nvSpPr>
-      <dsp:spPr>
-        <a:xfrm>
-          <a:off x="281355" y="3701523"/>
-          <a:ext cx="511556" cy="511556"/>
-        </a:xfrm>
-        <a:prstGeom prst="rect">
-          <a:avLst/>
-        </a:prstGeom>
-        <a:blipFill>
-          <a:blip xmlns:r="http://schemas.openxmlformats.org/officeDocument/2006/relationships">
-            <a:extLst>
-              <a:ext uri="{28A0092B-C50C-407E-A947-70E740481C1C}">
-                <a14:useLocalDpi xmlns:a14="http://schemas.microsoft.com/office/drawing/2010/main" val="0"/>
-              </a:ext>
-              <a:ext uri="{96DAC541-7B7A-43D3-8B79-37D633B846F1}">
-                <asvg:svgBlip xmlns:asvg="http://schemas.microsoft.com/office/drawing/2016/SVG/main" r:embed="rId4"/>
-              </a:ext>
-            </a:extLst>
-          </a:blip>
-          <a:stretch>
-            <a:fillRect/>
-          </a:stretch>
-        </a:blipFill>
-        <a:ln w="19050" cap="flat" cmpd="sng" algn="ctr">
-          <a:noFill/>
-          <a:prstDash val="solid"/>
-          <a:miter lim="800000"/>
-        </a:ln>
-        <a:effectLst/>
-      </dsp:spPr>
-      <dsp:style>
-        <a:lnRef idx="2">
-          <a:scrgbClr r="0" g="0" b="0"/>
-        </a:lnRef>
-        <a:fillRef idx="1">
-          <a:scrgbClr r="0" g="0" b="0"/>
-        </a:fillRef>
-        <a:effectRef idx="0">
-          <a:scrgbClr r="0" g="0" b="0"/>
-        </a:effectRef>
-        <a:fontRef idx="minor">
-          <a:schemeClr val="lt1"/>
-        </a:fontRef>
-      </dsp:style>
-    </dsp:sp>
-    <dsp:sp modelId="{2B13FB02-2D03-4370-9EEC-A0B6A5E342EE}">
-      <dsp:nvSpPr>
-        <dsp:cNvPr id="0" name=""/>
-        <dsp:cNvSpPr/>
-      </dsp:nvSpPr>
-      <dsp:spPr>
-        <a:xfrm>
-          <a:off x="1074268" y="3492250"/>
-          <a:ext cx="5170996" cy="930102"/>
-        </a:xfrm>
-        <a:prstGeom prst="rect">
-          <a:avLst/>
-        </a:prstGeom>
-        <a:noFill/>
-        <a:ln>
-          <a:noFill/>
-        </a:ln>
-        <a:effectLst/>
-      </dsp:spPr>
-      <dsp:style>
-        <a:lnRef idx="0">
-          <a:scrgbClr r="0" g="0" b="0"/>
-        </a:lnRef>
-        <a:fillRef idx="0">
-          <a:scrgbClr r="0" g="0" b="0"/>
-        </a:fillRef>
-        <a:effectRef idx="0">
-          <a:scrgbClr r="0" g="0" b="0"/>
-        </a:effectRef>
-        <a:fontRef idx="minor"/>
-      </dsp:style>
-      <dsp:txBody>
-        <a:bodyPr spcFirstLastPara="0" vert="horz" wrap="square" lIns="98436" tIns="98436" rIns="98436" bIns="98436" numCol="1" spcCol="1270" anchor="ctr" anchorCtr="0">
-          <a:noAutofit/>
-        </a:bodyPr>
-        <a:lstStyle/>
-        <a:p>
-          <a:pPr marL="0" lvl="0" indent="0" algn="l" defTabSz="755650">
-            <a:lnSpc>
-              <a:spcPct val="100000"/>
-            </a:lnSpc>
-            <a:spcBef>
-              <a:spcPct val="0"/>
-            </a:spcBef>
-            <a:spcAft>
-              <a:spcPct val="35000"/>
-            </a:spcAft>
-            <a:buNone/>
-          </a:pPr>
-          <a:r>
-            <a:rPr lang="en-MY" sz="1700" kern="1200"/>
-            <a:t>- Dataset 1 (Energy): 48.024 baris, 7 fitur (Sampel tinggi, dimensi rendah).</a:t>
-          </a:r>
-          <a:endParaRPr lang="en-US" sz="1700" kern="1200"/>
-        </a:p>
-      </dsp:txBody>
-      <dsp:txXfrm>
-        <a:off x="1074268" y="3492250"/>
-        <a:ext cx="5170996" cy="930102"/>
-      </dsp:txXfrm>
-    </dsp:sp>
-    <dsp:sp modelId="{2112CAB0-F140-404C-BCA9-40A3DE4D654F}">
-      <dsp:nvSpPr>
-        <dsp:cNvPr id="0" name=""/>
-        <dsp:cNvSpPr/>
-      </dsp:nvSpPr>
-      <dsp:spPr>
-        <a:xfrm>
-          <a:off x="0" y="4654878"/>
-          <a:ext cx="6245265" cy="930102"/>
-        </a:xfrm>
-        <a:prstGeom prst="roundRect">
-          <a:avLst>
-            <a:gd name="adj" fmla="val 10000"/>
-          </a:avLst>
-        </a:prstGeom>
-        <a:solidFill>
-          <a:schemeClr val="bg1">
-            <a:lumMod val="95000"/>
-            <a:hueOff val="0"/>
-            <a:satOff val="0"/>
-            <a:lumOff val="0"/>
-            <a:alphaOff val="0"/>
-          </a:schemeClr>
-        </a:solidFill>
-        <a:ln>
-          <a:noFill/>
-        </a:ln>
-        <a:effectLst/>
-      </dsp:spPr>
-      <dsp:style>
-        <a:lnRef idx="0">
-          <a:scrgbClr r="0" g="0" b="0"/>
-        </a:lnRef>
-        <a:fillRef idx="1">
-          <a:scrgbClr r="0" g="0" b="0"/>
-        </a:fillRef>
-        <a:effectRef idx="0">
-          <a:scrgbClr r="0" g="0" b="0"/>
-        </a:effectRef>
-        <a:fontRef idx="minor"/>
-      </dsp:style>
-    </dsp:sp>
-    <dsp:sp modelId="{1EBE7DDA-BF30-481A-854A-5BA5B98CABFA}">
-      <dsp:nvSpPr>
-        <dsp:cNvPr id="0" name=""/>
-        <dsp:cNvSpPr/>
-      </dsp:nvSpPr>
-      <dsp:spPr>
-        <a:xfrm>
-          <a:off x="281355" y="4864151"/>
-          <a:ext cx="511556" cy="511556"/>
-        </a:xfrm>
-        <a:prstGeom prst="rect">
-          <a:avLst/>
-        </a:prstGeom>
-        <a:blipFill>
-          <a:blip xmlns:r="http://schemas.openxmlformats.org/officeDocument/2006/relationships">
-            <a:extLst>
-              <a:ext uri="{28A0092B-C50C-407E-A947-70E740481C1C}">
-                <a14:useLocalDpi xmlns:a14="http://schemas.microsoft.com/office/drawing/2010/main" val="0"/>
-              </a:ext>
-              <a:ext uri="{96DAC541-7B7A-43D3-8B79-37D633B846F1}">
-                <asvg:svgBlip xmlns:asvg="http://schemas.microsoft.com/office/drawing/2016/SVG/main" r:embed="rId5"/>
-              </a:ext>
-            </a:extLst>
-          </a:blip>
-          <a:stretch>
-            <a:fillRect/>
-          </a:stretch>
-        </a:blipFill>
-        <a:ln w="19050" cap="flat" cmpd="sng" algn="ctr">
-          <a:noFill/>
-          <a:prstDash val="solid"/>
-          <a:miter lim="800000"/>
-        </a:ln>
-        <a:effectLst/>
-      </dsp:spPr>
-      <dsp:style>
-        <a:lnRef idx="2">
-          <a:scrgbClr r="0" g="0" b="0"/>
-        </a:lnRef>
-        <a:fillRef idx="1">
-          <a:scrgbClr r="0" g="0" b="0"/>
-        </a:fillRef>
-        <a:effectRef idx="0">
-          <a:scrgbClr r="0" g="0" b="0"/>
-        </a:effectRef>
-        <a:fontRef idx="minor">
-          <a:schemeClr val="lt1"/>
-        </a:fontRef>
-      </dsp:style>
-    </dsp:sp>
-    <dsp:sp modelId="{2A60244E-E964-45B3-84E9-D98EFEB5229E}">
-      <dsp:nvSpPr>
-        <dsp:cNvPr id="0" name=""/>
-        <dsp:cNvSpPr/>
-      </dsp:nvSpPr>
-      <dsp:spPr>
-        <a:xfrm>
-          <a:off x="1074268" y="4654878"/>
-          <a:ext cx="5170996" cy="930102"/>
-        </a:xfrm>
-        <a:prstGeom prst="rect">
-          <a:avLst/>
-        </a:prstGeom>
-        <a:noFill/>
-        <a:ln>
-          <a:noFill/>
-        </a:ln>
-        <a:effectLst/>
-      </dsp:spPr>
-      <dsp:style>
-        <a:lnRef idx="0">
-          <a:scrgbClr r="0" g="0" b="0"/>
-        </a:lnRef>
-        <a:fillRef idx="0">
-          <a:scrgbClr r="0" g="0" b="0"/>
-        </a:fillRef>
-        <a:effectRef idx="0">
-          <a:scrgbClr r="0" g="0" b="0"/>
-        </a:effectRef>
-        <a:fontRef idx="minor"/>
-      </dsp:style>
-      <dsp:txBody>
-        <a:bodyPr spcFirstLastPara="0" vert="horz" wrap="square" lIns="98436" tIns="98436" rIns="98436" bIns="98436" numCol="1" spcCol="1270" anchor="ctr" anchorCtr="0">
-          <a:noAutofit/>
-        </a:bodyPr>
-        <a:lstStyle/>
-        <a:p>
-          <a:pPr marL="0" lvl="0" indent="0" algn="l" defTabSz="755650">
-            <a:lnSpc>
-              <a:spcPct val="100000"/>
-            </a:lnSpc>
-            <a:spcBef>
-              <a:spcPct val="0"/>
-            </a:spcBef>
-            <a:spcAft>
-              <a:spcPct val="35000"/>
-            </a:spcAft>
-            <a:buNone/>
-          </a:pPr>
-          <a:r>
-            <a:rPr lang="en-MY" sz="1700" kern="1200"/>
-            <a:t>- Dataset 2 (Komoditas): 781 baris, 43 kolom (Multikolinearitas tinggi).</a:t>
-          </a:r>
-          <a:endParaRPr lang="en-US" sz="1700" kern="1200"/>
-        </a:p>
-      </dsp:txBody>
-      <dsp:txXfrm>
-        <a:off x="1074268" y="4654878"/>
-        <a:ext cx="5170996" cy="930102"/>
+        <a:off x="1073219" y="4653061"/>
+        <a:ext cx="5170996" cy="929193"/>
       </dsp:txXfrm>
     </dsp:sp>
   </dsp:spTree>
@@ -8224,7 +9797,7 @@
         </a:bodyPr>
         <a:lstStyle/>
         <a:p>
-          <a:pPr marL="0" lvl="0" indent="0" algn="l" defTabSz="977900">
+          <a:pPr marL="0" lvl="0" indent="0" algn="l" defTabSz="844550">
             <a:lnSpc>
               <a:spcPct val="90000"/>
             </a:lnSpc>
@@ -8237,10 +9810,79 @@
             <a:buNone/>
           </a:pPr>
           <a:r>
-            <a:rPr lang="en-MY" sz="2200" kern="1200"/>
-            <a:t>Akurasi (R^2 ~0.93): Normal Equation paling eksak (MSE: 2416.29). Tuned GD (2416.35) berhasil memangkas error Vanilla GD (2416.49).</a:t>
-          </a:r>
-          <a:endParaRPr lang="en-US" sz="2200" kern="1200"/>
+            <a:rPr lang="en-MY" sz="1900" b="1" kern="1200" dirty="0" err="1"/>
+            <a:t>Akurasi</a:t>
+          </a:r>
+          <a:r>
+            <a:rPr lang="en-MY" sz="1900" b="1" kern="1200" dirty="0"/>
+            <a:t> (R^2 ~0.93):</a:t>
+          </a:r>
+          <a:endParaRPr lang="en-US" sz="1900" b="1" kern="1200" dirty="0"/>
+        </a:p>
+        <a:p>
+          <a:pPr marL="114300" lvl="1" indent="-114300" algn="l" defTabSz="666750">
+            <a:lnSpc>
+              <a:spcPct val="90000"/>
+            </a:lnSpc>
+            <a:spcBef>
+              <a:spcPct val="0"/>
+            </a:spcBef>
+            <a:spcAft>
+              <a:spcPct val="15000"/>
+            </a:spcAft>
+            <a:buChar char="•"/>
+          </a:pPr>
+          <a:r>
+            <a:rPr lang="en-MY" sz="1500" kern="1200" dirty="0"/>
+            <a:t>Normal Equation paling </a:t>
+          </a:r>
+          <a:r>
+            <a:rPr lang="en-MY" sz="1500" kern="1200" dirty="0" err="1"/>
+            <a:t>eksak</a:t>
+          </a:r>
+          <a:r>
+            <a:rPr lang="en-MY" sz="1500" kern="1200" dirty="0"/>
+            <a:t> (MSE: 2416.29).</a:t>
+          </a:r>
+          <a:endParaRPr lang="en-US" sz="1500" kern="1200" dirty="0"/>
+        </a:p>
+        <a:p>
+          <a:pPr marL="114300" lvl="1" indent="-114300" algn="l" defTabSz="666750">
+            <a:lnSpc>
+              <a:spcPct val="90000"/>
+            </a:lnSpc>
+            <a:spcBef>
+              <a:spcPct val="0"/>
+            </a:spcBef>
+            <a:spcAft>
+              <a:spcPct val="15000"/>
+            </a:spcAft>
+            <a:buChar char="•"/>
+          </a:pPr>
+          <a:r>
+            <a:rPr lang="en-MY" sz="1500" kern="1200" dirty="0"/>
+            <a:t>Tuned GD (2416.35)</a:t>
+          </a:r>
+          <a:endParaRPr lang="en-US" sz="1500" kern="1200" dirty="0"/>
+        </a:p>
+        <a:p>
+          <a:pPr marL="114300" lvl="1" indent="-114300" algn="l" defTabSz="666750">
+            <a:lnSpc>
+              <a:spcPct val="90000"/>
+            </a:lnSpc>
+            <a:spcBef>
+              <a:spcPct val="0"/>
+            </a:spcBef>
+            <a:spcAft>
+              <a:spcPct val="15000"/>
+            </a:spcAft>
+            <a:buChar char="•"/>
+          </a:pPr>
+          <a:r>
+            <a:rPr lang="en-MY" sz="1500" kern="1200" dirty="0"/>
+            <a:t>Vanilla GD (2416.49)</a:t>
+          </a:r>
+          <a:endParaRPr lang="en-US" sz="1500" kern="1200" dirty="0"/>
         </a:p>
       </dsp:txBody>
       <dsp:txXfrm>
@@ -8368,7 +10010,7 @@
         </a:bodyPr>
         <a:lstStyle/>
         <a:p>
-          <a:pPr marL="0" lvl="0" indent="0" algn="l" defTabSz="977900">
+          <a:pPr marL="0" lvl="0" indent="0" algn="l" defTabSz="933450">
             <a:lnSpc>
               <a:spcPct val="90000"/>
             </a:lnSpc>
@@ -8381,10 +10023,100 @@
             <a:buNone/>
           </a:pPr>
           <a:r>
-            <a:rPr lang="en-MY" sz="2200" kern="1200"/>
-            <a:t>Kecepatan Komputasi: Normal Equation instan (~0.25 detik). Tuned GD terlama (~200 detik) karena proses Grid Search.</a:t>
-          </a:r>
-          <a:endParaRPr lang="en-US" sz="2200" kern="1200"/>
+            <a:rPr lang="en-MY" sz="2100" b="1" kern="1200" dirty="0" err="1"/>
+            <a:t>Kecepatan</a:t>
+          </a:r>
+          <a:r>
+            <a:rPr lang="en-MY" sz="2100" b="1" kern="1200" dirty="0"/>
+            <a:t> </a:t>
+          </a:r>
+          <a:r>
+            <a:rPr lang="en-MY" sz="2100" b="1" kern="1200" dirty="0" err="1"/>
+            <a:t>Komputasi</a:t>
+          </a:r>
+          <a:r>
+            <a:rPr lang="en-MY" sz="2100" b="1" kern="1200" dirty="0"/>
+            <a:t>:</a:t>
+          </a:r>
+          <a:endParaRPr lang="en-US" sz="2100" b="1" kern="1200" dirty="0"/>
+        </a:p>
+        <a:p>
+          <a:pPr marL="171450" lvl="1" indent="-171450" algn="l" defTabSz="755650">
+            <a:lnSpc>
+              <a:spcPct val="90000"/>
+            </a:lnSpc>
+            <a:spcBef>
+              <a:spcPct val="0"/>
+            </a:spcBef>
+            <a:spcAft>
+              <a:spcPct val="15000"/>
+            </a:spcAft>
+            <a:buChar char="•"/>
+          </a:pPr>
+          <a:r>
+            <a:rPr lang="en-MY" sz="1700" kern="1200" dirty="0"/>
+            <a:t>Normal Equation </a:t>
+          </a:r>
+          <a:r>
+            <a:rPr lang="en-MY" sz="1700" kern="1200" dirty="0" err="1"/>
+            <a:t>instan</a:t>
+          </a:r>
+          <a:r>
+            <a:rPr lang="en-MY" sz="1700" kern="1200" dirty="0"/>
+            <a:t> (~0.25 </a:t>
+          </a:r>
+          <a:r>
+            <a:rPr lang="en-MY" sz="1700" kern="1200" dirty="0" err="1"/>
+            <a:t>detik</a:t>
+          </a:r>
+          <a:r>
+            <a:rPr lang="en-MY" sz="1700" kern="1200" dirty="0"/>
+            <a:t>)</a:t>
+          </a:r>
+          <a:endParaRPr lang="en-US" sz="1700" kern="1200" dirty="0"/>
+        </a:p>
+        <a:p>
+          <a:pPr marL="171450" lvl="1" indent="-171450" algn="l" defTabSz="755650">
+            <a:lnSpc>
+              <a:spcPct val="90000"/>
+            </a:lnSpc>
+            <a:spcBef>
+              <a:spcPct val="0"/>
+            </a:spcBef>
+            <a:spcAft>
+              <a:spcPct val="15000"/>
+            </a:spcAft>
+            <a:buChar char="•"/>
+          </a:pPr>
+          <a:r>
+            <a:rPr lang="en-MY" sz="1700" kern="1200" dirty="0"/>
+            <a:t>Tuned GD </a:t>
+          </a:r>
+          <a:r>
+            <a:rPr lang="en-MY" sz="1700" kern="1200" dirty="0" err="1"/>
+            <a:t>terlama</a:t>
+          </a:r>
+          <a:r>
+            <a:rPr lang="en-MY" sz="1700" kern="1200" dirty="0"/>
+            <a:t> (~200 </a:t>
+          </a:r>
+          <a:r>
+            <a:rPr lang="en-MY" sz="1700" kern="1200" dirty="0" err="1"/>
+            <a:t>detik</a:t>
+          </a:r>
+          <a:r>
+            <a:rPr lang="en-MY" sz="1700" kern="1200" dirty="0"/>
+            <a:t>) </a:t>
+          </a:r>
+          <a:r>
+            <a:rPr lang="en-MY" sz="1700" kern="1200" dirty="0" err="1"/>
+            <a:t>karena</a:t>
+          </a:r>
+          <a:r>
+            <a:rPr lang="en-MY" sz="1700" kern="1200" dirty="0"/>
+            <a:t> proses Grid Search.</a:t>
+          </a:r>
+          <a:endParaRPr lang="en-US" sz="1700" kern="1200" dirty="0"/>
         </a:p>
       </dsp:txBody>
       <dsp:txXfrm>
@@ -8512,7 +10244,7 @@
         </a:bodyPr>
         <a:lstStyle/>
         <a:p>
-          <a:pPr marL="0" lvl="0" indent="0" algn="l" defTabSz="977900">
+          <a:pPr marL="0" lvl="0" indent="0" algn="l" defTabSz="844550">
             <a:lnSpc>
               <a:spcPct val="90000"/>
             </a:lnSpc>
@@ -8525,10 +10257,126 @@
             <a:buNone/>
           </a:pPr>
           <a:r>
-            <a:rPr lang="en-MY" sz="2200" kern="1200"/>
-            <a:t>Efisiensi Iterasi: Berkat early stopping, Tuned GD konvergen hanya dalam 540 iterasi, jauh mengungguli Vanilla GD yang terjebak di 4700 iterasi.</a:t>
-          </a:r>
-          <a:endParaRPr lang="en-US" sz="2200" kern="1200"/>
+            <a:rPr lang="en-MY" sz="1900" b="1" kern="1200" dirty="0" err="1"/>
+            <a:t>Efisiensi</a:t>
+          </a:r>
+          <a:r>
+            <a:rPr lang="en-MY" sz="1900" b="1" kern="1200" dirty="0"/>
+            <a:t> </a:t>
+          </a:r>
+          <a:r>
+            <a:rPr lang="en-MY" sz="1900" b="1" kern="1200" dirty="0" err="1"/>
+            <a:t>Iterasi</a:t>
+          </a:r>
+          <a:r>
+            <a:rPr lang="en-MY" sz="1900" b="1" kern="1200" dirty="0"/>
+            <a:t>: </a:t>
+          </a:r>
+        </a:p>
+        <a:p>
+          <a:pPr marL="0" lvl="0" indent="0" algn="l" defTabSz="844550">
+            <a:lnSpc>
+              <a:spcPct val="90000"/>
+            </a:lnSpc>
+            <a:spcBef>
+              <a:spcPct val="0"/>
+            </a:spcBef>
+            <a:spcAft>
+              <a:spcPct val="35000"/>
+            </a:spcAft>
+            <a:buNone/>
+          </a:pPr>
+          <a:r>
+            <a:rPr lang="en-MY" sz="1900" kern="1200" dirty="0" err="1"/>
+            <a:t>Berkat</a:t>
+          </a:r>
+          <a:r>
+            <a:rPr lang="en-MY" sz="1900" kern="1200" dirty="0"/>
+            <a:t> early stopping, Tuned GD : </a:t>
+          </a:r>
+          <a:r>
+            <a:rPr lang="en-MY" sz="1900" kern="1200" dirty="0" err="1"/>
+            <a:t>konvergen</a:t>
+          </a:r>
+          <a:r>
+            <a:rPr lang="en-MY" sz="1900" kern="1200" dirty="0"/>
+            <a:t> </a:t>
+          </a:r>
+          <a:r>
+            <a:rPr lang="en-MY" sz="1900" kern="1200" dirty="0" err="1"/>
+            <a:t>hanya</a:t>
+          </a:r>
+          <a:r>
+            <a:rPr lang="en-MY" sz="1900" kern="1200" dirty="0"/>
+            <a:t> </a:t>
+          </a:r>
+          <a:r>
+            <a:rPr lang="en-MY" sz="1900" kern="1200" dirty="0" err="1"/>
+            <a:t>dalam</a:t>
+          </a:r>
+          <a:r>
+            <a:rPr lang="en-MY" sz="1900" kern="1200" dirty="0"/>
+            <a:t> 540 </a:t>
+          </a:r>
+          <a:r>
+            <a:rPr lang="en-MY" sz="1900" kern="1200" dirty="0" err="1"/>
+            <a:t>iterasi</a:t>
+          </a:r>
+          <a:r>
+            <a:rPr lang="en-MY" sz="1900" kern="1200" dirty="0"/>
+            <a:t>, </a:t>
+          </a:r>
+          <a:r>
+            <a:rPr lang="en-MY" sz="1900" kern="1200" dirty="0" err="1"/>
+            <a:t>jauh</a:t>
+          </a:r>
+          <a:r>
+            <a:rPr lang="en-MY" sz="1900" kern="1200" dirty="0"/>
+            <a:t> </a:t>
+          </a:r>
+          <a:r>
+            <a:rPr lang="en-MY" sz="1900" kern="1200" dirty="0" err="1"/>
+            <a:t>mengungguli</a:t>
+          </a:r>
+          <a:r>
+            <a:rPr lang="en-MY" sz="1900" kern="1200" dirty="0"/>
+            <a:t> </a:t>
+          </a:r>
+        </a:p>
+        <a:p>
+          <a:pPr marL="0" lvl="0" indent="0" algn="l" defTabSz="844550">
+            <a:lnSpc>
+              <a:spcPct val="90000"/>
+            </a:lnSpc>
+            <a:spcBef>
+              <a:spcPct val="0"/>
+            </a:spcBef>
+            <a:spcAft>
+              <a:spcPct val="35000"/>
+            </a:spcAft>
+            <a:buNone/>
+          </a:pPr>
+          <a:r>
+            <a:rPr lang="en-MY" sz="1900" kern="1200" dirty="0"/>
+            <a:t>Vanilla GD :yang </a:t>
+          </a:r>
+          <a:r>
+            <a:rPr lang="en-MY" sz="1900" kern="1200" dirty="0" err="1"/>
+            <a:t>terjebak</a:t>
+          </a:r>
+          <a:r>
+            <a:rPr lang="en-MY" sz="1900" kern="1200" dirty="0"/>
+            <a:t> di 4700 </a:t>
+          </a:r>
+          <a:r>
+            <a:rPr lang="en-MY" sz="1900" kern="1200" dirty="0" err="1"/>
+            <a:t>iterasi</a:t>
+          </a:r>
+          <a:r>
+            <a:rPr lang="en-MY" sz="1900" kern="1200" dirty="0"/>
+            <a:t>.</a:t>
+          </a:r>
+          <a:endParaRPr lang="en-US" sz="1900" kern="1200" dirty="0"/>
         </a:p>
       </dsp:txBody>
       <dsp:txXfrm>
@@ -9074,169 +10922,296 @@
 </file>
 
 <file path=ppt/diagrams/layout1.xml><?xml version="1.0" encoding="utf-8"?>
-<dgm:layoutDef xmlns:dgm="http://schemas.openxmlformats.org/drawingml/2006/diagram" xmlns:a="http://schemas.openxmlformats.org/drawingml/2006/main" uniqueId="urn:microsoft.com/office/officeart/2005/8/layout/vList2">
-  <dgm:title val=""/>
-  <dgm:desc val=""/>
+<dgm:layoutDef xmlns:dgm="http://schemas.openxmlformats.org/drawingml/2006/diagram" xmlns:a="http://schemas.openxmlformats.org/drawingml/2006/main" uniqueId="urn:microsoft.com/office/officeart/2018/2/layout/IconVerticalSolidList">
+  <dgm:title val="Icon Vertical Solid List"/>
+  <dgm:desc val="Use to show a series of visuals from top to bottom with Level 1 or Level 1 and Level 2 text grouped in a shape. Works best with icons or small pictures with lengthier descriptions."/>
   <dgm:catLst>
-    <dgm:cat type="list" pri="3000"/>
-    <dgm:cat type="convert" pri="1000"/>
+    <dgm:cat type="icon" pri="500"/>
   </dgm:catLst>
-  <dgm:sampData>
+  <dgm:sampData useDef="1">
     <dgm:dataModel>
-      <dgm:ptLst>
-        <dgm:pt modelId="0" type="doc"/>
-        <dgm:pt modelId="1">
-          <dgm:prSet phldr="1"/>
-        </dgm:pt>
-        <dgm:pt modelId="11">
-          <dgm:prSet phldr="1"/>
-        </dgm:pt>
-        <dgm:pt modelId="2">
-          <dgm:prSet phldr="1"/>
-        </dgm:pt>
-        <dgm:pt modelId="21">
-          <dgm:prSet phldr="1"/>
-        </dgm:pt>
-      </dgm:ptLst>
-      <dgm:cxnLst>
-        <dgm:cxn modelId="4" srcId="0" destId="1" srcOrd="0" destOrd="0"/>
-        <dgm:cxn modelId="5" srcId="0" destId="2" srcOrd="1" destOrd="0"/>
-        <dgm:cxn modelId="12" srcId="1" destId="11" srcOrd="0" destOrd="0"/>
-        <dgm:cxn modelId="23" srcId="2" destId="21" srcOrd="0" destOrd="0"/>
-      </dgm:cxnLst>
+      <dgm:ptLst/>
       <dgm:bg/>
       <dgm:whole/>
     </dgm:dataModel>
   </dgm:sampData>
-  <dgm:styleData>
+  <dgm:styleData useDef="1">
     <dgm:dataModel>
-      <dgm:ptLst>
-        <dgm:pt modelId="0" type="doc"/>
-        <dgm:pt modelId="1"/>
-        <dgm:pt modelId="2"/>
-      </dgm:ptLst>
-      <dgm:cxnLst>
-        <dgm:cxn modelId="3" srcId="0" destId="1" srcOrd="0" destOrd="0"/>
-        <dgm:cxn modelId="4" srcId="0" destId="2" srcOrd="1" destOrd="0"/>
-      </dgm:cxnLst>
+      <dgm:ptLst/>
       <dgm:bg/>
       <dgm:whole/>
     </dgm:dataModel>
   </dgm:styleData>
-  <dgm:clrData>
+  <dgm:clrData useDef="1">
     <dgm:dataModel>
-      <dgm:ptLst>
-        <dgm:pt modelId="0" type="doc"/>
-        <dgm:pt modelId="1"/>
-        <dgm:pt modelId="2"/>
-        <dgm:pt modelId="3"/>
-        <dgm:pt modelId="4"/>
-      </dgm:ptLst>
-      <dgm:cxnLst>
-        <dgm:cxn modelId="5" srcId="0" destId="1" srcOrd="0" destOrd="0"/>
-        <dgm:cxn modelId="6" srcId="0" destId="2" srcOrd="1" destOrd="0"/>
-        <dgm:cxn modelId="7" srcId="0" destId="3" srcOrd="2" destOrd="0"/>
-        <dgm:cxn modelId="8" srcId="0" destId="4" srcOrd="3" destOrd="0"/>
-      </dgm:cxnLst>
+      <dgm:ptLst/>
       <dgm:bg/>
       <dgm:whole/>
     </dgm:dataModel>
   </dgm:clrData>
-  <dgm:layoutNode name="linear">
+  <dgm:layoutNode name="root">
     <dgm:varLst>
-      <dgm:animLvl val="lvl"/>
+      <dgm:dir/>
       <dgm:resizeHandles val="exact"/>
     </dgm:varLst>
-    <dgm:alg type="lin">
-      <dgm:param type="linDir" val="fromT"/>
-      <dgm:param type="vertAlign" val="mid"/>
-    </dgm:alg>
+    <dgm:choose name="Name0">
+      <dgm:if name="Name1" axis="self" func="var" arg="dir" op="equ" val="norm">
+        <dgm:alg type="lin">
+          <dgm:param type="linDir" val="fromT"/>
+          <dgm:param type="nodeHorzAlign" val="l"/>
+        </dgm:alg>
+      </dgm:if>
+      <dgm:else name="Name2">
+        <dgm:alg type="lin">
+          <dgm:param type="linDir" val="fromT"/>
+          <dgm:param type="nodeHorzAlign" val="r"/>
+        </dgm:alg>
+      </dgm:else>
+    </dgm:choose>
     <dgm:shape xmlns:r="http://schemas.openxmlformats.org/officeDocument/2006/relationships" r:blip="">
       <dgm:adjLst/>
     </dgm:shape>
     <dgm:presOf/>
-    <dgm:constrLst>
-      <dgm:constr type="w" for="ch" forName="parentText" refType="w"/>
-      <dgm:constr type="h" for="ch" forName="parentText" refType="primFontSz" refFor="ch" refForName="parentText" fact="0.52"/>
-      <dgm:constr type="w" for="ch" forName="childText" refType="w"/>
-      <dgm:constr type="h" for="ch" forName="childText" refType="primFontSz" refFor="ch" refForName="parentText" fact="0.46"/>
-      <dgm:constr type="h" for="ch" forName="parentText" op="equ"/>
-      <dgm:constr type="primFontSz" for="ch" forName="parentText" op="equ" val="65"/>
-      <dgm:constr type="primFontSz" for="ch" forName="childText" refType="primFontSz" refFor="ch" refForName="parentText" op="equ"/>
-      <dgm:constr type="h" for="ch" forName="spacer" refType="primFontSz" refFor="ch" refForName="parentText" fact="0.08"/>
-    </dgm:constrLst>
+    <dgm:choose name="Name3">
+      <dgm:if name="Name4" axis="ch" ptType="node" func="cnt" op="lte" val="3">
+        <dgm:constrLst>
+          <dgm:constr type="h" for="ch" forName="compNode" refType="h" fact="0.3"/>
+          <dgm:constr type="w" for="ch" forName="compNode" refType="w"/>
+          <dgm:constr type="h" for="ch" forName="sibTrans" refType="h" refFor="ch" refForName="compNode" fact="0.25"/>
+          <dgm:constr type="primFontSz" for="des" forName="parTx" val="25"/>
+          <dgm:constr type="primFontSz" for="des" forName="desTx" refType="primFontSz" refFor="des" refForName="parTx" op="lte" fact="0.75"/>
+          <dgm:constr type="h" for="des" forName="compNode" op="equ"/>
+          <dgm:constr type="h" for="des" forName="bgRect" op="equ"/>
+          <dgm:constr type="h" for="des" forName="iconRect" op="equ"/>
+          <dgm:constr type="w" for="des" forName="iconRect" op="equ"/>
+          <dgm:constr type="h" for="des" forName="spaceRect" op="equ"/>
+          <dgm:constr type="h" for="des" forName="parTx" op="equ"/>
+          <dgm:constr type="h" for="des" forName="desTx" op="equ"/>
+        </dgm:constrLst>
+      </dgm:if>
+      <dgm:if name="Name5" axis="ch" ptType="node" func="cnt" op="lte" val="4">
+        <dgm:constrLst>
+          <dgm:constr type="h" for="ch" forName="compNode" refType="h" fact="0.3"/>
+          <dgm:constr type="w" for="ch" forName="compNode" refType="w"/>
+          <dgm:constr type="h" for="ch" forName="sibTrans" refType="h" refFor="ch" refForName="compNode" fact="0.25"/>
+          <dgm:constr type="primFontSz" for="des" forName="parTx" val="22"/>
+          <dgm:constr type="primFontSz" for="des" forName="desTx" refType="primFontSz" refFor="des" refForName="parTx" op="lte" fact="0.75"/>
+          <dgm:constr type="h" for="des" forName="compNode" op="equ"/>
+          <dgm:constr type="h" for="des" forName="bgRect" op="equ"/>
+          <dgm:constr type="h" for="des" forName="iconRect" op="equ"/>
+          <dgm:constr type="w" for="des" forName="iconRect" op="equ"/>
+          <dgm:constr type="h" for="des" forName="spaceRect" op="equ"/>
+          <dgm:constr type="h" for="des" forName="parTx" op="equ"/>
+          <dgm:constr type="h" for="des" forName="desTx" op="equ"/>
+        </dgm:constrLst>
+      </dgm:if>
+      <dgm:if name="Name6" axis="ch" ptType="node" func="cnt" op="lte" val="6">
+        <dgm:constrLst>
+          <dgm:constr type="h" for="ch" forName="compNode" refType="h" fact="0.3"/>
+          <dgm:constr type="w" for="ch" forName="compNode" refType="w"/>
+          <dgm:constr type="h" for="ch" forName="sibTrans" refType="h" refFor="ch" refForName="compNode" fact="0.25"/>
+          <dgm:constr type="primFontSz" for="des" forName="parTx" val="19"/>
+          <dgm:constr type="primFontSz" for="des" forName="desTx" refType="primFontSz" refFor="des" refForName="parTx" op="lte" fact="0.75"/>
+          <dgm:constr type="h" for="des" forName="compNode" op="equ"/>
+          <dgm:constr type="h" for="des" forName="bgRect" op="equ"/>
+          <dgm:constr type="h" for="des" forName="iconRect" op="equ"/>
+          <dgm:constr type="w" for="des" forName="iconRect" op="equ"/>
+          <dgm:constr type="h" for="des" forName="spaceRect" op="equ"/>
+          <dgm:constr type="h" for="des" forName="parTx" op="equ"/>
+          <dgm:constr type="h" for="des" forName="desTx" op="equ"/>
+        </dgm:constrLst>
+      </dgm:if>
+      <dgm:else name="Name7">
+        <dgm:constrLst>
+          <dgm:constr type="h" for="ch" forName="compNode" refType="h" fact="0.3"/>
+          <dgm:constr type="w" for="ch" forName="compNode" refType="w"/>
+          <dgm:constr type="h" for="ch" forName="sibTrans" refType="h" refFor="ch" refForName="compNode" fact="0.25"/>
+          <dgm:constr type="primFontSz" for="des" forName="parTx" val="16"/>
+          <dgm:constr type="primFontSz" for="des" forName="desTx" refType="primFontSz" refFor="des" refForName="parTx" op="lte" fact="0.75"/>
+          <dgm:constr type="h" for="des" forName="compNode" op="equ"/>
+          <dgm:constr type="h" for="des" forName="bgRect" op="equ"/>
+          <dgm:constr type="h" for="des" forName="iconRect" op="equ"/>
+          <dgm:constr type="w" for="des" forName="iconRect" op="equ"/>
+          <dgm:constr type="h" for="des" forName="spaceRect" op="equ"/>
+          <dgm:constr type="h" for="des" forName="parTx" op="equ"/>
+          <dgm:constr type="h" for="des" forName="desTx" op="equ"/>
+        </dgm:constrLst>
+      </dgm:else>
+    </dgm:choose>
     <dgm:ruleLst>
-      <dgm:rule type="primFontSz" for="ch" forName="parentText" val="5" fact="NaN" max="NaN"/>
+      <dgm:rule type="h" for="ch" forName="compNode" val="0" fact="NaN" max="NaN"/>
     </dgm:ruleLst>
-    <dgm:forEach name="Name0" axis="ch" ptType="node">
-      <dgm:layoutNode name="parentText" styleLbl="node1">
-        <dgm:varLst>
-          <dgm:chMax val="0"/>
-          <dgm:bulletEnabled val="1"/>
-        </dgm:varLst>
-        <dgm:alg type="tx">
-          <dgm:param type="parTxLTRAlign" val="l"/>
-          <dgm:param type="parTxRTLAlign" val="r"/>
-        </dgm:alg>
-        <dgm:shape xmlns:r="http://schemas.openxmlformats.org/officeDocument/2006/relationships" type="roundRect" r:blip="">
+    <dgm:forEach name="Name8" axis="ch" ptType="node">
+      <dgm:layoutNode name="compNode">
+        <dgm:alg type="composite"/>
+        <dgm:shape xmlns:r="http://schemas.openxmlformats.org/officeDocument/2006/relationships" r:blip="">
           <dgm:adjLst/>
         </dgm:shape>
         <dgm:presOf axis="self"/>
-        <dgm:constrLst>
-          <dgm:constr type="tMarg" refType="primFontSz" fact="0.3"/>
-          <dgm:constr type="bMarg" refType="primFontSz" fact="0.3"/>
-          <dgm:constr type="lMarg" refType="primFontSz" fact="0.3"/>
-          <dgm:constr type="rMarg" refType="primFontSz" fact="0.3"/>
-        </dgm:constrLst>
+        <dgm:choose name="Name9">
+          <dgm:if name="Name10" axis="ch" ptType="node" func="cnt" op="gte" val="1">
+            <dgm:constrLst>
+              <dgm:constr type="w" for="ch" forName="bgRect" refType="w"/>
+              <dgm:constr type="h" for="ch" forName="bgRect" refType="h"/>
+              <dgm:constr type="l" for="ch" forName="bgRect"/>
+              <dgm:constr type="t" for="ch" forName="bgRect"/>
+              <dgm:constr type="h" for="ch" forName="iconRect" refType="h" fact="0.55"/>
+              <dgm:constr type="w" for="ch" forName="iconRect" refType="h" refFor="ch" refForName="iconRect"/>
+              <dgm:constr type="l" for="ch" forName="iconRect" refType="h" refFor="ch" refForName="iconRect" fact="0.55"/>
+              <dgm:constr type="ctrY" for="ch" forName="iconRect" refType="ctrY" refFor="ch" refForName="bgRect"/>
+              <dgm:constr type="w" for="ch" forName="spaceRect" refType="l" refFor="ch" refForName="iconRect"/>
+              <dgm:constr type="h" for="ch" forName="spaceRect" refType="h"/>
+              <dgm:constr type="l" for="ch" forName="spaceRect" refType="r" refFor="ch" refForName="iconRect"/>
+              <dgm:constr type="t" for="ch" forName="spaceRect"/>
+              <dgm:constr type="w" for="ch" forName="parTx" refType="w" fact="0.45"/>
+              <dgm:constr type="h" for="ch" forName="parTx" refType="h"/>
+              <dgm:constr type="l" for="ch" forName="parTx" refType="r" refFor="ch" refForName="spaceRect"/>
+              <dgm:constr type="t" for="ch" forName="parTx"/>
+              <dgm:constr type="h" for="ch" forName="desTx" refType="h"/>
+              <dgm:constr type="l" for="ch" forName="desTx" refType="r" refFor="ch" refForName="parTx"/>
+              <dgm:constr type="t" for="ch" forName="desTx"/>
+            </dgm:constrLst>
+          </dgm:if>
+          <dgm:else name="Name11">
+            <dgm:constrLst>
+              <dgm:constr type="w" for="ch" forName="bgRect" refType="w"/>
+              <dgm:constr type="h" for="ch" forName="bgRect" refType="h"/>
+              <dgm:constr type="l" for="ch" forName="bgRect"/>
+              <dgm:constr type="t" for="ch" forName="bgRect"/>
+              <dgm:constr type="h" for="ch" forName="iconRect" refType="h" fact="0.55"/>
+              <dgm:constr type="w" for="ch" forName="iconRect" refType="h" refFor="ch" refForName="iconRect"/>
+              <dgm:constr type="l" for="ch" forName="iconRect" refType="h" refFor="ch" refForName="iconRect" fact="0.55"/>
+              <dgm:constr type="ctrY" for="ch" forName="iconRect" refType="ctrY" refFor="ch" refForName="bgRect"/>
+              <dgm:constr type="w" for="ch" forName="spaceRect" refType="l" refFor="ch" refForName="iconRect"/>
+              <dgm:constr type="h" for="ch" forName="spaceRect" refType="h"/>
+              <dgm:constr type="l" for="ch" forName="spaceRect" refType="r" refFor="ch" refForName="iconRect"/>
+              <dgm:constr type="t" for="ch" forName="spaceRect"/>
+              <dgm:constr type="h" for="ch" forName="parTx" refType="h"/>
+              <dgm:constr type="l" for="ch" forName="parTx" refType="r" refFor="ch" refForName="spaceRect"/>
+              <dgm:constr type="t" for="ch" forName="parTx"/>
+            </dgm:constrLst>
+          </dgm:else>
+        </dgm:choose>
         <dgm:ruleLst>
           <dgm:rule type="h" val="INF" fact="NaN" max="NaN"/>
         </dgm:ruleLst>
+        <dgm:layoutNode name="bgRect" styleLbl="bgShp">
+          <dgm:alg type="sp"/>
+          <dgm:shape xmlns:r="http://schemas.openxmlformats.org/officeDocument/2006/relationships" type="roundRect" r:blip="">
+            <dgm:adjLst>
+              <dgm:adj idx="1" val="0.1"/>
+            </dgm:adjLst>
+          </dgm:shape>
+          <dgm:presOf/>
+          <dgm:constrLst/>
+          <dgm:ruleLst/>
+        </dgm:layoutNode>
+        <dgm:layoutNode name="iconRect" styleLbl="node1">
+          <dgm:alg type="sp"/>
+          <dgm:shape xmlns:r="http://schemas.openxmlformats.org/officeDocument/2006/relationships" type="rect" r:blip="" blipPhldr="1">
+            <dgm:adjLst/>
+          </dgm:shape>
+          <dgm:presOf/>
+          <dgm:constrLst/>
+          <dgm:ruleLst/>
+        </dgm:layoutNode>
+        <dgm:layoutNode name="spaceRect">
+          <dgm:alg type="sp"/>
+          <dgm:shape xmlns:r="http://schemas.openxmlformats.org/officeDocument/2006/relationships" r:blip="">
+            <dgm:adjLst/>
+          </dgm:shape>
+          <dgm:presOf/>
+          <dgm:constrLst/>
+          <dgm:ruleLst/>
+        </dgm:layoutNode>
+        <dgm:layoutNode name="parTx" styleLbl="revTx">
+          <dgm:varLst>
+            <dgm:chMax val="0"/>
+            <dgm:chPref val="0"/>
+          </dgm:varLst>
+          <dgm:alg type="tx">
+            <dgm:param type="txAnchorVert" val="mid"/>
+            <dgm:param type="parTxLTRAlign" val="l"/>
+            <dgm:param type="shpTxLTRAlignCh" val="l"/>
+            <dgm:param type="parTxRTLAlign" val="r"/>
+            <dgm:param type="shpTxRTLAlignCh" val="r"/>
+          </dgm:alg>
+          <dgm:shape xmlns:r="http://schemas.openxmlformats.org/officeDocument/2006/relationships" type="rect" r:blip="">
+            <dgm:adjLst/>
+          </dgm:shape>
+          <dgm:presOf axis="self" ptType="node"/>
+          <dgm:constrLst>
+            <dgm:constr type="lMarg" refType="h" fact="0.3"/>
+            <dgm:constr type="rMarg" refType="h" fact="0.3"/>
+            <dgm:constr type="tMarg" refType="h" fact="0.3"/>
+            <dgm:constr type="bMarg" refType="h" fact="0.3"/>
+          </dgm:constrLst>
+          <dgm:ruleLst>
+            <dgm:rule type="primFontSz" val="14" fact="NaN" max="NaN"/>
+            <dgm:rule type="h" val="INF" fact="NaN" max="NaN"/>
+          </dgm:ruleLst>
+        </dgm:layoutNode>
+        <dgm:choose name="Name12">
+          <dgm:if name="Name13" axis="ch" ptType="node" func="cnt" op="gte" val="1">
+            <dgm:layoutNode name="desTx" styleLbl="revTx">
+              <dgm:varLst/>
+              <dgm:alg type="tx">
+                <dgm:param type="txAnchorVertCh" val="mid"/>
+                <dgm:param type="parTxLTRAlign" val="l"/>
+                <dgm:param type="shpTxLTRAlignCh" val="l"/>
+                <dgm:param type="parTxRTLAlign" val="r"/>
+                <dgm:param type="shpTxRTLAlignCh" val="r"/>
+                <dgm:param type="stBulletLvl" val="0"/>
+              </dgm:alg>
+              <dgm:shape xmlns:r="http://schemas.openxmlformats.org/officeDocument/2006/relationships" type="rect" r:blip="">
+                <dgm:adjLst/>
+              </dgm:shape>
+              <dgm:presOf axis="des" ptType="node"/>
+              <dgm:constrLst>
+                <dgm:constr type="primFontSz" val="18"/>
+                <dgm:constr type="secFontSz" refType="primFontSz"/>
+                <dgm:constr type="lMarg" refType="h" fact="0.3"/>
+                <dgm:constr type="rMarg" refType="h" fact="0.3"/>
+                <dgm:constr type="tMarg" refType="h" fact="0.3"/>
+                <dgm:constr type="bMarg" refType="h" fact="0.3"/>
+              </dgm:constrLst>
+              <dgm:ruleLst>
+                <dgm:rule type="primFontSz" val="11" fact="NaN" max="NaN"/>
+              </dgm:ruleLst>
+            </dgm:layoutNode>
+          </dgm:if>
+          <dgm:else name="Name14"/>
+        </dgm:choose>
       </dgm:layoutNode>
-      <dgm:choose name="Name1">
-        <dgm:if name="Name2" axis="ch" ptType="node" func="cnt" op="gte" val="1">
-          <dgm:layoutNode name="childText" styleLbl="revTx">
-            <dgm:varLst>
-              <dgm:bulletEnabled val="1"/>
-            </dgm:varLst>
-            <dgm:alg type="tx">
-              <dgm:param type="stBulletLvl" val="1"/>
-              <dgm:param type="lnSpAfChP" val="20"/>
-            </dgm:alg>
-            <dgm:shape xmlns:r="http://schemas.openxmlformats.org/officeDocument/2006/relationships" type="rect" r:blip="">
-              <dgm:adjLst/>
-            </dgm:shape>
-            <dgm:presOf axis="des" ptType="node"/>
-            <dgm:constrLst>
-              <dgm:constr type="tMarg" refType="primFontSz" fact="0.1"/>
-              <dgm:constr type="bMarg" refType="primFontSz" fact="0.1"/>
-              <dgm:constr type="lMarg" refType="w" fact="0.09"/>
-            </dgm:constrLst>
-            <dgm:ruleLst>
-              <dgm:rule type="h" val="INF" fact="NaN" max="NaN"/>
-            </dgm:ruleLst>
-          </dgm:layoutNode>
-        </dgm:if>
-        <dgm:else name="Name3">
-          <dgm:choose name="Name4">
-            <dgm:if name="Name5" axis="par ch" ptType="doc node" func="cnt" op="gte" val="2">
-              <dgm:forEach name="Name6" axis="followSib" ptType="sibTrans" cnt="1">
-                <dgm:layoutNode name="spacer">
-                  <dgm:alg type="sp"/>
-                  <dgm:shape xmlns:r="http://schemas.openxmlformats.org/officeDocument/2006/relationships" r:blip="">
-                    <dgm:adjLst/>
-                  </dgm:shape>
-                  <dgm:presOf/>
-                  <dgm:constrLst/>
-                  <dgm:ruleLst/>
-                </dgm:layoutNode>
-              </dgm:forEach>
-            </dgm:if>
-            <dgm:else name="Name7"/>
-          </dgm:choose>
-        </dgm:else>
-      </dgm:choose>
+      <dgm:forEach name="Name15" axis="followSib" ptType="sibTrans" cnt="1">
+        <dgm:layoutNode name="sibTrans">
+          <dgm:alg type="sp"/>
+          <dgm:shape xmlns:r="http://schemas.openxmlformats.org/officeDocument/2006/relationships" r:blip="">
+            <dgm:adjLst/>
+          </dgm:shape>
+          <dgm:presOf axis="self"/>
+          <dgm:constrLst/>
+          <dgm:ruleLst/>
+        </dgm:layoutNode>
+      </dgm:forEach>
     </dgm:forEach>
   </dgm:layoutNode>
+  <dgm:extLst>
+    <a:ext uri="{68A01E43-0DF5-4B5B-8FA6-DAF915123BFB}">
+      <dgm1612:lstStyle xmlns:dgm1612="http://schemas.microsoft.com/office/drawing/2016/12/diagram">
+        <a:lvl1pPr>
+          <a:lnSpc>
+            <a:spcPct val="100000"/>
+          </a:lnSpc>
+        </a:lvl1pPr>
+        <a:lvl2pPr>
+          <a:lnSpc>
+            <a:spcPct val="100000"/>
+          </a:lnSpc>
+        </a:lvl2pPr>
+      </dgm1612:lstStyle>
+    </a:ext>
+  </dgm:extLst>
 </dgm:layoutDef>
 </file>
 
@@ -10312,11 +12287,11 @@
 </file>
 
 <file path=ppt/diagrams/quickStyle1.xml><?xml version="1.0" encoding="utf-8"?>
-<dgm:styleDef xmlns:dgm="http://schemas.openxmlformats.org/drawingml/2006/diagram" xmlns:a="http://schemas.openxmlformats.org/drawingml/2006/main" uniqueId="urn:microsoft.com/office/officeart/2005/8/quickstyle/simple4">
+<dgm:styleDef xmlns:dgm="http://schemas.openxmlformats.org/drawingml/2006/diagram" xmlns:a="http://schemas.openxmlformats.org/drawingml/2006/main" uniqueId="urn:microsoft.com/office/officeart/2005/8/quickstyle/simple1">
   <dgm:title val=""/>
   <dgm:desc val=""/>
   <dgm:catLst>
-    <dgm:cat type="simple" pri="10400"/>
+    <dgm:cat type="simple" pri="10100"/>
   </dgm:catLst>
   <dgm:scene3d>
     <a:camera prst="orthographicFront"/>
@@ -10330,13 +12305,13 @@
     <dgm:sp3d/>
     <dgm:txPr/>
     <dgm:style>
-      <a:lnRef idx="0">
-        <a:scrgbClr r="0" g="0" b="0"/>
-      </a:lnRef>
-      <a:fillRef idx="3">
-        <a:scrgbClr r="0" g="0" b="0"/>
-      </a:fillRef>
-      <a:effectRef idx="2">
+      <a:lnRef idx="2">
+        <a:scrgbClr r="0" g="0" b="0"/>
+      </a:lnRef>
+      <a:fillRef idx="1">
+        <a:scrgbClr r="0" g="0" b="0"/>
+      </a:fillRef>
+      <a:effectRef idx="0">
         <a:scrgbClr r="0" g="0" b="0"/>
       </a:effectRef>
       <a:fontRef idx="minor">
@@ -10352,13 +12327,13 @@
     <dgm:sp3d/>
     <dgm:txPr/>
     <dgm:style>
-      <a:lnRef idx="1">
-        <a:scrgbClr r="0" g="0" b="0"/>
-      </a:lnRef>
-      <a:fillRef idx="3">
-        <a:scrgbClr r="0" g="0" b="0"/>
-      </a:fillRef>
-      <a:effectRef idx="2">
+      <a:lnRef idx="2">
+        <a:scrgbClr r="0" g="0" b="0"/>
+      </a:lnRef>
+      <a:fillRef idx="1">
+        <a:scrgbClr r="0" g="0" b="0"/>
+      </a:fillRef>
+      <a:effectRef idx="0">
         <a:scrgbClr r="0" g="0" b="0"/>
       </a:effectRef>
       <a:fontRef idx="minor">
@@ -10374,10 +12349,10 @@
     <dgm:sp3d/>
     <dgm:txPr/>
     <dgm:style>
-      <a:lnRef idx="0">
-        <a:scrgbClr r="0" g="0" b="0"/>
-      </a:lnRef>
-      <a:fillRef idx="3">
+      <a:lnRef idx="2">
+        <a:scrgbClr r="0" g="0" b="0"/>
+      </a:lnRef>
+      <a:fillRef idx="1">
         <a:scrgbClr r="0" g="0" b="0"/>
       </a:fillRef>
       <a:effectRef idx="0">
@@ -10396,13 +12371,13 @@
     <dgm:sp3d/>
     <dgm:txPr/>
     <dgm:style>
-      <a:lnRef idx="1">
-        <a:scrgbClr r="0" g="0" b="0"/>
-      </a:lnRef>
-      <a:fillRef idx="3">
-        <a:scrgbClr r="0" g="0" b="0"/>
-      </a:fillRef>
-      <a:effectRef idx="2">
+      <a:lnRef idx="2">
+        <a:scrgbClr r="0" g="0" b="0"/>
+      </a:lnRef>
+      <a:fillRef idx="1">
+        <a:scrgbClr r="0" g="0" b="0"/>
+      </a:fillRef>
+      <a:effectRef idx="0">
         <a:scrgbClr r="0" g="0" b="0"/>
       </a:effectRef>
       <a:fontRef idx="minor">
@@ -10418,13 +12393,13 @@
     <dgm:sp3d/>
     <dgm:txPr/>
     <dgm:style>
-      <a:lnRef idx="0">
-        <a:scrgbClr r="0" g="0" b="0"/>
-      </a:lnRef>
-      <a:fillRef idx="3">
-        <a:scrgbClr r="0" g="0" b="0"/>
-      </a:fillRef>
-      <a:effectRef idx="2">
+      <a:lnRef idx="2">
+        <a:scrgbClr r="0" g="0" b="0"/>
+      </a:lnRef>
+      <a:fillRef idx="1">
+        <a:scrgbClr r="0" g="0" b="0"/>
+      </a:fillRef>
+      <a:effectRef idx="0">
         <a:scrgbClr r="0" g="0" b="0"/>
       </a:effectRef>
       <a:fontRef idx="minor">
@@ -10440,13 +12415,13 @@
     <dgm:sp3d/>
     <dgm:txPr/>
     <dgm:style>
-      <a:lnRef idx="0">
-        <a:scrgbClr r="0" g="0" b="0"/>
-      </a:lnRef>
-      <a:fillRef idx="3">
-        <a:scrgbClr r="0" g="0" b="0"/>
-      </a:fillRef>
-      <a:effectRef idx="2">
+      <a:lnRef idx="2">
+        <a:scrgbClr r="0" g="0" b="0"/>
+      </a:lnRef>
+      <a:fillRef idx="1">
+        <a:scrgbClr r="0" g="0" b="0"/>
+      </a:fillRef>
+      <a:effectRef idx="0">
         <a:scrgbClr r="0" g="0" b="0"/>
       </a:effectRef>
       <a:fontRef idx="minor">
@@ -10462,13 +12437,13 @@
     <dgm:sp3d/>
     <dgm:txPr/>
     <dgm:style>
-      <a:lnRef idx="0">
-        <a:scrgbClr r="0" g="0" b="0"/>
-      </a:lnRef>
-      <a:fillRef idx="3">
-        <a:scrgbClr r="0" g="0" b="0"/>
-      </a:fillRef>
-      <a:effectRef idx="2">
+      <a:lnRef idx="2">
+        <a:scrgbClr r="0" g="0" b="0"/>
+      </a:lnRef>
+      <a:fillRef idx="1">
+        <a:scrgbClr r="0" g="0" b="0"/>
+      </a:fillRef>
+      <a:effectRef idx="0">
         <a:scrgbClr r="0" g="0" b="0"/>
       </a:effectRef>
       <a:fontRef idx="minor">
@@ -10484,13 +12459,13 @@
     <dgm:sp3d/>
     <dgm:txPr/>
     <dgm:style>
-      <a:lnRef idx="0">
-        <a:scrgbClr r="0" g="0" b="0"/>
-      </a:lnRef>
-      <a:fillRef idx="3">
-        <a:scrgbClr r="0" g="0" b="0"/>
-      </a:fillRef>
-      <a:effectRef idx="2">
+      <a:lnRef idx="2">
+        <a:scrgbClr r="0" g="0" b="0"/>
+      </a:lnRef>
+      <a:fillRef idx="1">
+        <a:scrgbClr r="0" g="0" b="0"/>
+      </a:fillRef>
+      <a:effectRef idx="0">
         <a:scrgbClr r="0" g="0" b="0"/>
       </a:effectRef>
       <a:fontRef idx="minor">
@@ -10506,73 +12481,73 @@
     <dgm:sp3d/>
     <dgm:txPr/>
     <dgm:style>
+      <a:lnRef idx="2">
+        <a:scrgbClr r="0" g="0" b="0"/>
+      </a:lnRef>
+      <a:fillRef idx="1">
+        <a:scrgbClr r="0" g="0" b="0"/>
+      </a:fillRef>
+      <a:effectRef idx="0">
+        <a:scrgbClr r="0" g="0" b="0"/>
+      </a:effectRef>
+      <a:fontRef idx="minor"/>
+    </dgm:style>
+  </dgm:styleLbl>
+  <dgm:styleLbl name="alignImgPlace1">
+    <dgm:scene3d>
+      <a:camera prst="orthographicFront"/>
+      <a:lightRig rig="threePt" dir="t"/>
+    </dgm:scene3d>
+    <dgm:sp3d/>
+    <dgm:txPr/>
+    <dgm:style>
+      <a:lnRef idx="2">
+        <a:scrgbClr r="0" g="0" b="0"/>
+      </a:lnRef>
+      <a:fillRef idx="1">
+        <a:scrgbClr r="0" g="0" b="0"/>
+      </a:fillRef>
+      <a:effectRef idx="0">
+        <a:scrgbClr r="0" g="0" b="0"/>
+      </a:effectRef>
+      <a:fontRef idx="minor"/>
+    </dgm:style>
+  </dgm:styleLbl>
+  <dgm:styleLbl name="bgImgPlace1">
+    <dgm:scene3d>
+      <a:camera prst="orthographicFront"/>
+      <a:lightRig rig="threePt" dir="t"/>
+    </dgm:scene3d>
+    <dgm:sp3d/>
+    <dgm:txPr/>
+    <dgm:style>
+      <a:lnRef idx="2">
+        <a:scrgbClr r="0" g="0" b="0"/>
+      </a:lnRef>
+      <a:fillRef idx="1">
+        <a:scrgbClr r="0" g="0" b="0"/>
+      </a:fillRef>
+      <a:effectRef idx="0">
+        <a:scrgbClr r="0" g="0" b="0"/>
+      </a:effectRef>
+      <a:fontRef idx="minor"/>
+    </dgm:style>
+  </dgm:styleLbl>
+  <dgm:styleLbl name="sibTrans2D1">
+    <dgm:scene3d>
+      <a:camera prst="orthographicFront"/>
+      <a:lightRig rig="threePt" dir="t"/>
+    </dgm:scene3d>
+    <dgm:sp3d/>
+    <dgm:txPr/>
+    <dgm:style>
       <a:lnRef idx="0">
         <a:scrgbClr r="0" g="0" b="0"/>
       </a:lnRef>
       <a:fillRef idx="1">
         <a:scrgbClr r="0" g="0" b="0"/>
       </a:fillRef>
-      <a:effectRef idx="2">
-        <a:scrgbClr r="0" g="0" b="0"/>
-      </a:effectRef>
-      <a:fontRef idx="minor"/>
-    </dgm:style>
-  </dgm:styleLbl>
-  <dgm:styleLbl name="alignImgPlace1">
-    <dgm:scene3d>
-      <a:camera prst="orthographicFront"/>
-      <a:lightRig rig="threePt" dir="t"/>
-    </dgm:scene3d>
-    <dgm:sp3d/>
-    <dgm:txPr/>
-    <dgm:style>
-      <a:lnRef idx="0">
-        <a:scrgbClr r="0" g="0" b="0"/>
-      </a:lnRef>
-      <a:fillRef idx="1">
-        <a:scrgbClr r="0" g="0" b="0"/>
-      </a:fillRef>
-      <a:effectRef idx="2">
-        <a:scrgbClr r="0" g="0" b="0"/>
-      </a:effectRef>
-      <a:fontRef idx="minor"/>
-    </dgm:style>
-  </dgm:styleLbl>
-  <dgm:styleLbl name="bgImgPlace1">
-    <dgm:scene3d>
-      <a:camera prst="orthographicFront"/>
-      <a:lightRig rig="threePt" dir="t"/>
-    </dgm:scene3d>
-    <dgm:sp3d/>
-    <dgm:txPr/>
-    <dgm:style>
-      <a:lnRef idx="0">
-        <a:scrgbClr r="0" g="0" b="0"/>
-      </a:lnRef>
-      <a:fillRef idx="1">
-        <a:scrgbClr r="0" g="0" b="0"/>
-      </a:fillRef>
-      <a:effectRef idx="2">
-        <a:scrgbClr r="0" g="0" b="0"/>
-      </a:effectRef>
-      <a:fontRef idx="minor"/>
-    </dgm:style>
-  </dgm:styleLbl>
-  <dgm:styleLbl name="sibTrans2D1">
-    <dgm:scene3d>
-      <a:camera prst="orthographicFront"/>
-      <a:lightRig rig="threePt" dir="t"/>
-    </dgm:scene3d>
-    <dgm:sp3d/>
-    <dgm:txPr/>
-    <dgm:style>
-      <a:lnRef idx="0">
-        <a:scrgbClr r="0" g="0" b="0"/>
-      </a:lnRef>
-      <a:fillRef idx="3">
-        <a:scrgbClr r="0" g="0" b="0"/>
-      </a:fillRef>
-      <a:effectRef idx="2">
+      <a:effectRef idx="0">
         <a:scrgbClr r="0" g="0" b="0"/>
       </a:effectRef>
       <a:fontRef idx="minor">
@@ -10591,10 +12566,10 @@
       <a:lnRef idx="0">
         <a:scrgbClr r="0" g="0" b="0"/>
       </a:lnRef>
-      <a:fillRef idx="3">
-        <a:scrgbClr r="0" g="0" b="0"/>
-      </a:fillRef>
-      <a:effectRef idx="2">
+      <a:fillRef idx="1">
+        <a:scrgbClr r="0" g="0" b="0"/>
+      </a:fillRef>
+      <a:effectRef idx="0">
         <a:scrgbClr r="0" g="0" b="0"/>
       </a:effectRef>
       <a:fontRef idx="minor">
@@ -10613,10 +12588,10 @@
       <a:lnRef idx="0">
         <a:scrgbClr r="0" g="0" b="0"/>
       </a:lnRef>
-      <a:fillRef idx="3">
-        <a:scrgbClr r="0" g="0" b="0"/>
-      </a:fillRef>
-      <a:effectRef idx="2">
+      <a:fillRef idx="1">
+        <a:scrgbClr r="0" g="0" b="0"/>
+      </a:fillRef>
+      <a:effectRef idx="0">
         <a:scrgbClr r="0" g="0" b="0"/>
       </a:effectRef>
       <a:fontRef idx="minor">
@@ -10658,7 +12633,7 @@
       <a:fillRef idx="1">
         <a:scrgbClr r="0" g="0" b="0"/>
       </a:fillRef>
-      <a:effectRef idx="1">
+      <a:effectRef idx="0">
         <a:scrgbClr r="0" g="0" b="0"/>
       </a:effectRef>
       <a:fontRef idx="minor"/>
@@ -10672,13 +12647,13 @@
     <dgm:sp3d/>
     <dgm:txPr/>
     <dgm:style>
-      <a:lnRef idx="0">
-        <a:scrgbClr r="0" g="0" b="0"/>
-      </a:lnRef>
-      <a:fillRef idx="3">
-        <a:scrgbClr r="0" g="0" b="0"/>
-      </a:fillRef>
-      <a:effectRef idx="2">
+      <a:lnRef idx="2">
+        <a:scrgbClr r="0" g="0" b="0"/>
+      </a:lnRef>
+      <a:fillRef idx="1">
+        <a:scrgbClr r="0" g="0" b="0"/>
+      </a:fillRef>
+      <a:effectRef idx="0">
         <a:scrgbClr r="0" g="0" b="0"/>
       </a:effectRef>
       <a:fontRef idx="minor">
@@ -10694,13 +12669,13 @@
     <dgm:sp3d/>
     <dgm:txPr/>
     <dgm:style>
-      <a:lnRef idx="0">
-        <a:scrgbClr r="0" g="0" b="0"/>
-      </a:lnRef>
-      <a:fillRef idx="3">
-        <a:scrgbClr r="0" g="0" b="0"/>
-      </a:fillRef>
-      <a:effectRef idx="2">
+      <a:lnRef idx="2">
+        <a:scrgbClr r="0" g="0" b="0"/>
+      </a:lnRef>
+      <a:fillRef idx="1">
+        <a:scrgbClr r="0" g="0" b="0"/>
+      </a:fillRef>
+      <a:effectRef idx="0">
         <a:scrgbClr r="0" g="0" b="0"/>
       </a:effectRef>
       <a:fontRef idx="minor">
@@ -10716,13 +12691,13 @@
     <dgm:sp3d/>
     <dgm:txPr/>
     <dgm:style>
-      <a:lnRef idx="0">
-        <a:scrgbClr r="0" g="0" b="0"/>
-      </a:lnRef>
-      <a:fillRef idx="3">
-        <a:scrgbClr r="0" g="0" b="0"/>
-      </a:fillRef>
-      <a:effectRef idx="2">
+      <a:lnRef idx="2">
+        <a:scrgbClr r="0" g="0" b="0"/>
+      </a:lnRef>
+      <a:fillRef idx="1">
+        <a:scrgbClr r="0" g="0" b="0"/>
+      </a:fillRef>
+      <a:effectRef idx="0">
         <a:scrgbClr r="0" g="0" b="0"/>
       </a:effectRef>
       <a:fontRef idx="minor">
@@ -10738,13 +12713,13 @@
     <dgm:sp3d/>
     <dgm:txPr/>
     <dgm:style>
-      <a:lnRef idx="0">
-        <a:scrgbClr r="0" g="0" b="0"/>
-      </a:lnRef>
-      <a:fillRef idx="3">
-        <a:scrgbClr r="0" g="0" b="0"/>
-      </a:fillRef>
-      <a:effectRef idx="2">
+      <a:lnRef idx="2">
+        <a:scrgbClr r="0" g="0" b="0"/>
+      </a:lnRef>
+      <a:fillRef idx="1">
+        <a:scrgbClr r="0" g="0" b="0"/>
+      </a:fillRef>
+      <a:effectRef idx="0">
         <a:scrgbClr r="0" g="0" b="0"/>
       </a:effectRef>
       <a:fontRef idx="minor">
@@ -10760,13 +12735,13 @@
     <dgm:sp3d/>
     <dgm:txPr/>
     <dgm:style>
-      <a:lnRef idx="0">
-        <a:scrgbClr r="0" g="0" b="0"/>
-      </a:lnRef>
-      <a:fillRef idx="3">
-        <a:scrgbClr r="0" g="0" b="0"/>
-      </a:fillRef>
-      <a:effectRef idx="2">
+      <a:lnRef idx="2">
+        <a:scrgbClr r="0" g="0" b="0"/>
+      </a:lnRef>
+      <a:fillRef idx="1">
+        <a:scrgbClr r="0" g="0" b="0"/>
+      </a:fillRef>
+      <a:effectRef idx="0">
         <a:scrgbClr r="0" g="0" b="0"/>
       </a:effectRef>
       <a:fontRef idx="minor">
@@ -10782,13 +12757,13 @@
     <dgm:sp3d/>
     <dgm:txPr/>
     <dgm:style>
-      <a:lnRef idx="0">
-        <a:scrgbClr r="0" g="0" b="0"/>
-      </a:lnRef>
-      <a:fillRef idx="3">
-        <a:scrgbClr r="0" g="0" b="0"/>
-      </a:fillRef>
-      <a:effectRef idx="2">
+      <a:lnRef idx="2">
+        <a:scrgbClr r="0" g="0" b="0"/>
+      </a:lnRef>
+      <a:fillRef idx="1">
+        <a:scrgbClr r="0" g="0" b="0"/>
+      </a:fillRef>
+      <a:effectRef idx="0">
         <a:scrgbClr r="0" g="0" b="0"/>
       </a:effectRef>
       <a:fontRef idx="minor">
@@ -10804,13 +12779,13 @@
     <dgm:sp3d/>
     <dgm:txPr/>
     <dgm:style>
-      <a:lnRef idx="0">
-        <a:scrgbClr r="0" g="0" b="0"/>
-      </a:lnRef>
-      <a:fillRef idx="3">
-        <a:scrgbClr r="0" g="0" b="0"/>
-      </a:fillRef>
-      <a:effectRef idx="2">
+      <a:lnRef idx="2">
+        <a:scrgbClr r="0" g="0" b="0"/>
+      </a:lnRef>
+      <a:fillRef idx="1">
+        <a:scrgbClr r="0" g="0" b="0"/>
+      </a:fillRef>
+      <a:effectRef idx="0">
         <a:scrgbClr r="0" g="0" b="0"/>
       </a:effectRef>
       <a:fontRef idx="minor">
@@ -10826,13 +12801,13 @@
     <dgm:sp3d/>
     <dgm:txPr/>
     <dgm:style>
-      <a:lnRef idx="1">
-        <a:scrgbClr r="0" g="0" b="0"/>
-      </a:lnRef>
-      <a:fillRef idx="3">
-        <a:scrgbClr r="0" g="0" b="0"/>
-      </a:fillRef>
-      <a:effectRef idx="2">
+      <a:lnRef idx="2">
+        <a:scrgbClr r="0" g="0" b="0"/>
+      </a:lnRef>
+      <a:fillRef idx="1">
+        <a:scrgbClr r="0" g="0" b="0"/>
+      </a:fillRef>
+      <a:effectRef idx="0">
         <a:scrgbClr r="0" g="0" b="0"/>
       </a:effectRef>
       <a:fontRef idx="minor">
@@ -10848,13 +12823,13 @@
     <dgm:sp3d/>
     <dgm:txPr/>
     <dgm:style>
-      <a:lnRef idx="1">
-        <a:scrgbClr r="0" g="0" b="0"/>
-      </a:lnRef>
-      <a:fillRef idx="3">
-        <a:scrgbClr r="0" g="0" b="0"/>
-      </a:fillRef>
-      <a:effectRef idx="2">
+      <a:lnRef idx="2">
+        <a:scrgbClr r="0" g="0" b="0"/>
+      </a:lnRef>
+      <a:fillRef idx="1">
+        <a:scrgbClr r="0" g="0" b="0"/>
+      </a:fillRef>
+      <a:effectRef idx="0">
         <a:scrgbClr r="0" g="0" b="0"/>
       </a:effectRef>
       <a:fontRef idx="minor">
@@ -10870,10 +12845,150 @@
     <dgm:sp3d/>
     <dgm:txPr/>
     <dgm:style>
+      <a:lnRef idx="2">
+        <a:scrgbClr r="0" g="0" b="0"/>
+      </a:lnRef>
+      <a:fillRef idx="0">
+        <a:scrgbClr r="0" g="0" b="0"/>
+      </a:fillRef>
+      <a:effectRef idx="0">
+        <a:scrgbClr r="0" g="0" b="0"/>
+      </a:effectRef>
+      <a:fontRef idx="minor"/>
+    </dgm:style>
+  </dgm:styleLbl>
+  <dgm:styleLbl name="parChTrans1D2">
+    <dgm:scene3d>
+      <a:camera prst="orthographicFront"/>
+      <a:lightRig rig="threePt" dir="t"/>
+    </dgm:scene3d>
+    <dgm:sp3d/>
+    <dgm:txPr/>
+    <dgm:style>
+      <a:lnRef idx="2">
+        <a:scrgbClr r="0" g="0" b="0"/>
+      </a:lnRef>
+      <a:fillRef idx="0">
+        <a:scrgbClr r="0" g="0" b="0"/>
+      </a:fillRef>
+      <a:effectRef idx="0">
+        <a:scrgbClr r="0" g="0" b="0"/>
+      </a:effectRef>
+      <a:fontRef idx="minor"/>
+    </dgm:style>
+  </dgm:styleLbl>
+  <dgm:styleLbl name="parChTrans1D3">
+    <dgm:scene3d>
+      <a:camera prst="orthographicFront"/>
+      <a:lightRig rig="threePt" dir="t"/>
+    </dgm:scene3d>
+    <dgm:sp3d/>
+    <dgm:txPr/>
+    <dgm:style>
+      <a:lnRef idx="2">
+        <a:scrgbClr r="0" g="0" b="0"/>
+      </a:lnRef>
+      <a:fillRef idx="0">
+        <a:scrgbClr r="0" g="0" b="0"/>
+      </a:fillRef>
+      <a:effectRef idx="0">
+        <a:scrgbClr r="0" g="0" b="0"/>
+      </a:effectRef>
+      <a:fontRef idx="minor"/>
+    </dgm:style>
+  </dgm:styleLbl>
+  <dgm:styleLbl name="parChTrans1D4">
+    <dgm:scene3d>
+      <a:camera prst="orthographicFront"/>
+      <a:lightRig rig="threePt" dir="t"/>
+    </dgm:scene3d>
+    <dgm:sp3d/>
+    <dgm:txPr/>
+    <dgm:style>
+      <a:lnRef idx="2">
+        <a:scrgbClr r="0" g="0" b="0"/>
+      </a:lnRef>
+      <a:fillRef idx="0">
+        <a:scrgbClr r="0" g="0" b="0"/>
+      </a:fillRef>
+      <a:effectRef idx="0">
+        <a:scrgbClr r="0" g="0" b="0"/>
+      </a:effectRef>
+      <a:fontRef idx="minor"/>
+    </dgm:style>
+  </dgm:styleLbl>
+  <dgm:styleLbl name="fgAcc1">
+    <dgm:scene3d>
+      <a:camera prst="orthographicFront"/>
+      <a:lightRig rig="threePt" dir="t"/>
+    </dgm:scene3d>
+    <dgm:sp3d/>
+    <dgm:txPr/>
+    <dgm:style>
+      <a:lnRef idx="2">
+        <a:scrgbClr r="0" g="0" b="0"/>
+      </a:lnRef>
+      <a:fillRef idx="1">
+        <a:scrgbClr r="0" g="0" b="0"/>
+      </a:fillRef>
+      <a:effectRef idx="0">
+        <a:scrgbClr r="0" g="0" b="0"/>
+      </a:effectRef>
+      <a:fontRef idx="minor"/>
+    </dgm:style>
+  </dgm:styleLbl>
+  <dgm:styleLbl name="conFgAcc1">
+    <dgm:scene3d>
+      <a:camera prst="orthographicFront"/>
+      <a:lightRig rig="threePt" dir="t"/>
+    </dgm:scene3d>
+    <dgm:sp3d/>
+    <dgm:txPr/>
+    <dgm:style>
+      <a:lnRef idx="2">
+        <a:scrgbClr r="0" g="0" b="0"/>
+      </a:lnRef>
+      <a:fillRef idx="1">
+        <a:scrgbClr r="0" g="0" b="0"/>
+      </a:fillRef>
+      <a:effectRef idx="0">
+        <a:scrgbClr r="0" g="0" b="0"/>
+      </a:effectRef>
+      <a:fontRef idx="minor"/>
+    </dgm:style>
+  </dgm:styleLbl>
+  <dgm:styleLbl name="alignAcc1">
+    <dgm:scene3d>
+      <a:camera prst="orthographicFront"/>
+      <a:lightRig rig="threePt" dir="t"/>
+    </dgm:scene3d>
+    <dgm:sp3d/>
+    <dgm:txPr/>
+    <dgm:style>
+      <a:lnRef idx="2">
+        <a:scrgbClr r="0" g="0" b="0"/>
+      </a:lnRef>
+      <a:fillRef idx="1">
+        <a:scrgbClr r="0" g="0" b="0"/>
+      </a:fillRef>
+      <a:effectRef idx="0">
+        <a:scrgbClr r="0" g="0" b="0"/>
+      </a:effectRef>
+      <a:fontRef idx="minor"/>
+    </dgm:style>
+  </dgm:styleLbl>
+  <dgm:styleLbl name="trAlignAcc1">
+    <dgm:scene3d>
+      <a:camera prst="orthographicFront"/>
+      <a:lightRig rig="threePt" dir="t"/>
+    </dgm:scene3d>
+    <dgm:sp3d/>
+    <dgm:txPr/>
+    <dgm:style>
       <a:lnRef idx="1">
         <a:scrgbClr r="0" g="0" b="0"/>
       </a:lnRef>
-      <a:fillRef idx="0">
+      <a:fillRef idx="1">
         <a:scrgbClr r="0" g="0" b="0"/>
       </a:fillRef>
       <a:effectRef idx="0">
@@ -10882,18 +12997,18 @@
       <a:fontRef idx="minor"/>
     </dgm:style>
   </dgm:styleLbl>
-  <dgm:styleLbl name="parChTrans1D2">
-    <dgm:scene3d>
-      <a:camera prst="orthographicFront"/>
-      <a:lightRig rig="threePt" dir="t"/>
-    </dgm:scene3d>
-    <dgm:sp3d/>
-    <dgm:txPr/>
-    <dgm:style>
-      <a:lnRef idx="1">
-        <a:scrgbClr r="0" g="0" b="0"/>
-      </a:lnRef>
-      <a:fillRef idx="0">
+  <dgm:styleLbl name="bgAcc1">
+    <dgm:scene3d>
+      <a:camera prst="orthographicFront"/>
+      <a:lightRig rig="threePt" dir="t"/>
+    </dgm:scene3d>
+    <dgm:sp3d/>
+    <dgm:txPr/>
+    <dgm:style>
+      <a:lnRef idx="2">
+        <a:scrgbClr r="0" g="0" b="0"/>
+      </a:lnRef>
+      <a:fillRef idx="1">
         <a:scrgbClr r="0" g="0" b="0"/>
       </a:fillRef>
       <a:effectRef idx="0">
@@ -10902,18 +13017,18 @@
       <a:fontRef idx="minor"/>
     </dgm:style>
   </dgm:styleLbl>
-  <dgm:styleLbl name="parChTrans1D3">
-    <dgm:scene3d>
-      <a:camera prst="orthographicFront"/>
-      <a:lightRig rig="threePt" dir="t"/>
-    </dgm:scene3d>
-    <dgm:sp3d/>
-    <dgm:txPr/>
-    <dgm:style>
-      <a:lnRef idx="1">
-        <a:scrgbClr r="0" g="0" b="0"/>
-      </a:lnRef>
-      <a:fillRef idx="0">
+  <dgm:styleLbl name="solidFgAcc1">
+    <dgm:scene3d>
+      <a:camera prst="orthographicFront"/>
+      <a:lightRig rig="threePt" dir="t"/>
+    </dgm:scene3d>
+    <dgm:sp3d/>
+    <dgm:txPr/>
+    <dgm:style>
+      <a:lnRef idx="2">
+        <a:scrgbClr r="0" g="0" b="0"/>
+      </a:lnRef>
+      <a:fillRef idx="1">
         <a:scrgbClr r="0" g="0" b="0"/>
       </a:fillRef>
       <a:effectRef idx="0">
@@ -10922,18 +13037,18 @@
       <a:fontRef idx="minor"/>
     </dgm:style>
   </dgm:styleLbl>
-  <dgm:styleLbl name="parChTrans1D4">
-    <dgm:scene3d>
-      <a:camera prst="orthographicFront"/>
-      <a:lightRig rig="threePt" dir="t"/>
-    </dgm:scene3d>
-    <dgm:sp3d/>
-    <dgm:txPr/>
-    <dgm:style>
-      <a:lnRef idx="1">
-        <a:scrgbClr r="0" g="0" b="0"/>
-      </a:lnRef>
-      <a:fillRef idx="0">
+  <dgm:styleLbl name="solidAlignAcc1">
+    <dgm:scene3d>
+      <a:camera prst="orthographicFront"/>
+      <a:lightRig rig="threePt" dir="t"/>
+    </dgm:scene3d>
+    <dgm:sp3d/>
+    <dgm:txPr/>
+    <dgm:style>
+      <a:lnRef idx="2">
+        <a:scrgbClr r="0" g="0" b="0"/>
+      </a:lnRef>
+      <a:fillRef idx="1">
         <a:scrgbClr r="0" g="0" b="0"/>
       </a:fillRef>
       <a:effectRef idx="0">
@@ -10942,15 +13057,15 @@
       <a:fontRef idx="minor"/>
     </dgm:style>
   </dgm:styleLbl>
-  <dgm:styleLbl name="fgAcc1">
-    <dgm:scene3d>
-      <a:camera prst="orthographicFront"/>
-      <a:lightRig rig="threePt" dir="t"/>
-    </dgm:scene3d>
-    <dgm:sp3d/>
-    <dgm:txPr/>
-    <dgm:style>
-      <a:lnRef idx="1">
+  <dgm:styleLbl name="solidBgAcc1">
+    <dgm:scene3d>
+      <a:camera prst="orthographicFront"/>
+      <a:lightRig rig="threePt" dir="t"/>
+    </dgm:scene3d>
+    <dgm:sp3d/>
+    <dgm:txPr/>
+    <dgm:style>
+      <a:lnRef idx="2">
         <a:scrgbClr r="0" g="0" b="0"/>
       </a:lnRef>
       <a:fillRef idx="1">
@@ -10962,15 +13077,15 @@
       <a:fontRef idx="minor"/>
     </dgm:style>
   </dgm:styleLbl>
-  <dgm:styleLbl name="conFgAcc1">
-    <dgm:scene3d>
-      <a:camera prst="orthographicFront"/>
-      <a:lightRig rig="threePt" dir="t"/>
-    </dgm:scene3d>
-    <dgm:sp3d/>
-    <dgm:txPr/>
-    <dgm:style>
-      <a:lnRef idx="1">
+  <dgm:styleLbl name="fgAccFollowNode1">
+    <dgm:scene3d>
+      <a:camera prst="orthographicFront"/>
+      <a:lightRig rig="threePt" dir="t"/>
+    </dgm:scene3d>
+    <dgm:sp3d/>
+    <dgm:txPr/>
+    <dgm:style>
+      <a:lnRef idx="2">
         <a:scrgbClr r="0" g="0" b="0"/>
       </a:lnRef>
       <a:fillRef idx="1">
@@ -10982,15 +13097,15 @@
       <a:fontRef idx="minor"/>
     </dgm:style>
   </dgm:styleLbl>
-  <dgm:styleLbl name="alignAcc1">
-    <dgm:scene3d>
-      <a:camera prst="orthographicFront"/>
-      <a:lightRig rig="threePt" dir="t"/>
-    </dgm:scene3d>
-    <dgm:sp3d/>
-    <dgm:txPr/>
-    <dgm:style>
-      <a:lnRef idx="1">
+  <dgm:styleLbl name="alignAccFollowNode1">
+    <dgm:scene3d>
+      <a:camera prst="orthographicFront"/>
+      <a:lightRig rig="threePt" dir="t"/>
+    </dgm:scene3d>
+    <dgm:sp3d/>
+    <dgm:txPr/>
+    <dgm:style>
+      <a:lnRef idx="2">
         <a:scrgbClr r="0" g="0" b="0"/>
       </a:lnRef>
       <a:fillRef idx="1">
@@ -11002,15 +13117,15 @@
       <a:fontRef idx="minor"/>
     </dgm:style>
   </dgm:styleLbl>
-  <dgm:styleLbl name="trAlignAcc1">
-    <dgm:scene3d>
-      <a:camera prst="orthographicFront"/>
-      <a:lightRig rig="threePt" dir="t"/>
-    </dgm:scene3d>
-    <dgm:sp3d/>
-    <dgm:txPr/>
-    <dgm:style>
-      <a:lnRef idx="1">
+  <dgm:styleLbl name="bgAccFollowNode1">
+    <dgm:scene3d>
+      <a:camera prst="orthographicFront"/>
+      <a:lightRig rig="threePt" dir="t"/>
+    </dgm:scene3d>
+    <dgm:sp3d/>
+    <dgm:txPr/>
+    <dgm:style>
+      <a:lnRef idx="2">
         <a:scrgbClr r="0" g="0" b="0"/>
       </a:lnRef>
       <a:fillRef idx="1">
@@ -11022,15 +13137,15 @@
       <a:fontRef idx="minor"/>
     </dgm:style>
   </dgm:styleLbl>
-  <dgm:styleLbl name="bgAcc1">
-    <dgm:scene3d>
-      <a:camera prst="orthographicFront"/>
-      <a:lightRig rig="threePt" dir="t"/>
-    </dgm:scene3d>
-    <dgm:sp3d/>
-    <dgm:txPr/>
-    <dgm:style>
-      <a:lnRef idx="1">
+  <dgm:styleLbl name="fgAcc0">
+    <dgm:scene3d>
+      <a:camera prst="orthographicFront"/>
+      <a:lightRig rig="threePt" dir="t"/>
+    </dgm:scene3d>
+    <dgm:sp3d/>
+    <dgm:txPr/>
+    <dgm:style>
+      <a:lnRef idx="2">
         <a:scrgbClr r="0" g="0" b="0"/>
       </a:lnRef>
       <a:fillRef idx="1">
@@ -11042,15 +13157,15 @@
       <a:fontRef idx="minor"/>
     </dgm:style>
   </dgm:styleLbl>
-  <dgm:styleLbl name="solidFgAcc1">
-    <dgm:scene3d>
-      <a:camera prst="orthographicFront"/>
-      <a:lightRig rig="threePt" dir="t"/>
-    </dgm:scene3d>
-    <dgm:sp3d/>
-    <dgm:txPr/>
-    <dgm:style>
-      <a:lnRef idx="1">
+  <dgm:styleLbl name="fgAcc2">
+    <dgm:scene3d>
+      <a:camera prst="orthographicFront"/>
+      <a:lightRig rig="threePt" dir="t"/>
+    </dgm:scene3d>
+    <dgm:sp3d/>
+    <dgm:txPr/>
+    <dgm:style>
+      <a:lnRef idx="2">
         <a:scrgbClr r="0" g="0" b="0"/>
       </a:lnRef>
       <a:fillRef idx="1">
@@ -11062,15 +13177,15 @@
       <a:fontRef idx="minor"/>
     </dgm:style>
   </dgm:styleLbl>
-  <dgm:styleLbl name="solidAlignAcc1">
-    <dgm:scene3d>
-      <a:camera prst="orthographicFront"/>
-      <a:lightRig rig="threePt" dir="t"/>
-    </dgm:scene3d>
-    <dgm:sp3d/>
-    <dgm:txPr/>
-    <dgm:style>
-      <a:lnRef idx="1">
+  <dgm:styleLbl name="fgAcc3">
+    <dgm:scene3d>
+      <a:camera prst="orthographicFront"/>
+      <a:lightRig rig="threePt" dir="t"/>
+    </dgm:scene3d>
+    <dgm:sp3d/>
+    <dgm:txPr/>
+    <dgm:style>
+      <a:lnRef idx="2">
         <a:scrgbClr r="0" g="0" b="0"/>
       </a:lnRef>
       <a:fillRef idx="1">
@@ -11082,15 +13197,15 @@
       <a:fontRef idx="minor"/>
     </dgm:style>
   </dgm:styleLbl>
-  <dgm:styleLbl name="solidBgAcc1">
-    <dgm:scene3d>
-      <a:camera prst="orthographicFront"/>
-      <a:lightRig rig="threePt" dir="t"/>
-    </dgm:scene3d>
-    <dgm:sp3d/>
-    <dgm:txPr/>
-    <dgm:style>
-      <a:lnRef idx="1">
+  <dgm:styleLbl name="fgAcc4">
+    <dgm:scene3d>
+      <a:camera prst="orthographicFront"/>
+      <a:lightRig rig="threePt" dir="t"/>
+    </dgm:scene3d>
+    <dgm:sp3d/>
+    <dgm:txPr/>
+    <dgm:style>
+      <a:lnRef idx="2">
         <a:scrgbClr r="0" g="0" b="0"/>
       </a:lnRef>
       <a:fillRef idx="1">
@@ -11102,15 +13217,15 @@
       <a:fontRef idx="minor"/>
     </dgm:style>
   </dgm:styleLbl>
-  <dgm:styleLbl name="fgAccFollowNode1">
-    <dgm:scene3d>
-      <a:camera prst="orthographicFront"/>
-      <a:lightRig rig="threePt" dir="t"/>
-    </dgm:scene3d>
-    <dgm:sp3d/>
-    <dgm:txPr/>
-    <dgm:style>
-      <a:lnRef idx="1">
+  <dgm:styleLbl name="bgShp">
+    <dgm:scene3d>
+      <a:camera prst="orthographicFront"/>
+      <a:lightRig rig="threePt" dir="t"/>
+    </dgm:scene3d>
+    <dgm:sp3d/>
+    <dgm:txPr/>
+    <dgm:style>
+      <a:lnRef idx="0">
         <a:scrgbClr r="0" g="0" b="0"/>
       </a:lnRef>
       <a:fillRef idx="1">
@@ -11122,15 +13237,15 @@
       <a:fontRef idx="minor"/>
     </dgm:style>
   </dgm:styleLbl>
-  <dgm:styleLbl name="alignAccFollowNode1">
-    <dgm:scene3d>
-      <a:camera prst="orthographicFront"/>
-      <a:lightRig rig="threePt" dir="t"/>
-    </dgm:scene3d>
-    <dgm:sp3d/>
-    <dgm:txPr/>
-    <dgm:style>
-      <a:lnRef idx="1">
+  <dgm:styleLbl name="dkBgShp">
+    <dgm:scene3d>
+      <a:camera prst="orthographicFront"/>
+      <a:lightRig rig="threePt" dir="t"/>
+    </dgm:scene3d>
+    <dgm:sp3d/>
+    <dgm:txPr/>
+    <dgm:style>
+      <a:lnRef idx="0">
         <a:scrgbClr r="0" g="0" b="0"/>
       </a:lnRef>
       <a:fillRef idx="1">
@@ -11142,15 +13257,15 @@
       <a:fontRef idx="minor"/>
     </dgm:style>
   </dgm:styleLbl>
-  <dgm:styleLbl name="bgAccFollowNode1">
-    <dgm:scene3d>
-      <a:camera prst="orthographicFront"/>
-      <a:lightRig rig="threePt" dir="t"/>
-    </dgm:scene3d>
-    <dgm:sp3d/>
-    <dgm:txPr/>
-    <dgm:style>
-      <a:lnRef idx="1">
+  <dgm:styleLbl name="trBgShp">
+    <dgm:scene3d>
+      <a:camera prst="orthographicFront"/>
+      <a:lightRig rig="threePt" dir="t"/>
+    </dgm:scene3d>
+    <dgm:sp3d/>
+    <dgm:txPr/>
+    <dgm:style>
+      <a:lnRef idx="0">
         <a:scrgbClr r="0" g="0" b="0"/>
       </a:lnRef>
       <a:fillRef idx="1">
@@ -11162,161 +13277,21 @@
       <a:fontRef idx="minor"/>
     </dgm:style>
   </dgm:styleLbl>
-  <dgm:styleLbl name="fgAcc0">
-    <dgm:scene3d>
-      <a:camera prst="orthographicFront"/>
-      <a:lightRig rig="threePt" dir="t"/>
-    </dgm:scene3d>
-    <dgm:sp3d/>
-    <dgm:txPr/>
-    <dgm:style>
-      <a:lnRef idx="1">
+  <dgm:styleLbl name="fgShp">
+    <dgm:scene3d>
+      <a:camera prst="orthographicFront"/>
+      <a:lightRig rig="threePt" dir="t"/>
+    </dgm:scene3d>
+    <dgm:sp3d/>
+    <dgm:txPr/>
+    <dgm:style>
+      <a:lnRef idx="2">
         <a:scrgbClr r="0" g="0" b="0"/>
       </a:lnRef>
       <a:fillRef idx="1">
         <a:scrgbClr r="0" g="0" b="0"/>
       </a:fillRef>
       <a:effectRef idx="0">
-        <a:scrgbClr r="0" g="0" b="0"/>
-      </a:effectRef>
-      <a:fontRef idx="minor"/>
-    </dgm:style>
-  </dgm:styleLbl>
-  <dgm:styleLbl name="fgAcc2">
-    <dgm:scene3d>
-      <a:camera prst="orthographicFront"/>
-      <a:lightRig rig="threePt" dir="t"/>
-    </dgm:scene3d>
-    <dgm:sp3d/>
-    <dgm:txPr/>
-    <dgm:style>
-      <a:lnRef idx="1">
-        <a:scrgbClr r="0" g="0" b="0"/>
-      </a:lnRef>
-      <a:fillRef idx="1">
-        <a:scrgbClr r="0" g="0" b="0"/>
-      </a:fillRef>
-      <a:effectRef idx="0">
-        <a:scrgbClr r="0" g="0" b="0"/>
-      </a:effectRef>
-      <a:fontRef idx="minor"/>
-    </dgm:style>
-  </dgm:styleLbl>
-  <dgm:styleLbl name="fgAcc3">
-    <dgm:scene3d>
-      <a:camera prst="orthographicFront"/>
-      <a:lightRig rig="threePt" dir="t"/>
-    </dgm:scene3d>
-    <dgm:sp3d/>
-    <dgm:txPr/>
-    <dgm:style>
-      <a:lnRef idx="1">
-        <a:scrgbClr r="0" g="0" b="0"/>
-      </a:lnRef>
-      <a:fillRef idx="1">
-        <a:scrgbClr r="0" g="0" b="0"/>
-      </a:fillRef>
-      <a:effectRef idx="0">
-        <a:scrgbClr r="0" g="0" b="0"/>
-      </a:effectRef>
-      <a:fontRef idx="minor"/>
-    </dgm:style>
-  </dgm:styleLbl>
-  <dgm:styleLbl name="fgAcc4">
-    <dgm:scene3d>
-      <a:camera prst="orthographicFront"/>
-      <a:lightRig rig="threePt" dir="t"/>
-    </dgm:scene3d>
-    <dgm:sp3d/>
-    <dgm:txPr/>
-    <dgm:style>
-      <a:lnRef idx="1">
-        <a:scrgbClr r="0" g="0" b="0"/>
-      </a:lnRef>
-      <a:fillRef idx="1">
-        <a:scrgbClr r="0" g="0" b="0"/>
-      </a:fillRef>
-      <a:effectRef idx="0">
-        <a:scrgbClr r="0" g="0" b="0"/>
-      </a:effectRef>
-      <a:fontRef idx="minor"/>
-    </dgm:style>
-  </dgm:styleLbl>
-  <dgm:styleLbl name="bgShp">
-    <dgm:scene3d>
-      <a:camera prst="orthographicFront"/>
-      <a:lightRig rig="threePt" dir="t"/>
-    </dgm:scene3d>
-    <dgm:sp3d/>
-    <dgm:txPr/>
-    <dgm:style>
-      <a:lnRef idx="0">
-        <a:scrgbClr r="0" g="0" b="0"/>
-      </a:lnRef>
-      <a:fillRef idx="1">
-        <a:scrgbClr r="0" g="0" b="0"/>
-      </a:fillRef>
-      <a:effectRef idx="2">
-        <a:scrgbClr r="0" g="0" b="0"/>
-      </a:effectRef>
-      <a:fontRef idx="minor"/>
-    </dgm:style>
-  </dgm:styleLbl>
-  <dgm:styleLbl name="dkBgShp">
-    <dgm:scene3d>
-      <a:camera prst="orthographicFront"/>
-      <a:lightRig rig="threePt" dir="t"/>
-    </dgm:scene3d>
-    <dgm:sp3d/>
-    <dgm:txPr/>
-    <dgm:style>
-      <a:lnRef idx="0">
-        <a:scrgbClr r="0" g="0" b="0"/>
-      </a:lnRef>
-      <a:fillRef idx="1">
-        <a:scrgbClr r="0" g="0" b="0"/>
-      </a:fillRef>
-      <a:effectRef idx="2">
-        <a:scrgbClr r="0" g="0" b="0"/>
-      </a:effectRef>
-      <a:fontRef idx="minor"/>
-    </dgm:style>
-  </dgm:styleLbl>
-  <dgm:styleLbl name="trBgShp">
-    <dgm:scene3d>
-      <a:camera prst="orthographicFront"/>
-      <a:lightRig rig="threePt" dir="t"/>
-    </dgm:scene3d>
-    <dgm:sp3d/>
-    <dgm:txPr/>
-    <dgm:style>
-      <a:lnRef idx="0">
-        <a:scrgbClr r="0" g="0" b="0"/>
-      </a:lnRef>
-      <a:fillRef idx="1">
-        <a:scrgbClr r="0" g="0" b="0"/>
-      </a:fillRef>
-      <a:effectRef idx="0">
-        <a:scrgbClr r="0" g="0" b="0"/>
-      </a:effectRef>
-      <a:fontRef idx="minor"/>
-    </dgm:style>
-  </dgm:styleLbl>
-  <dgm:styleLbl name="fgShp">
-    <dgm:scene3d>
-      <a:camera prst="orthographicFront"/>
-      <a:lightRig rig="threePt" dir="t"/>
-    </dgm:scene3d>
-    <dgm:sp3d/>
-    <dgm:txPr/>
-    <dgm:style>
-      <a:lnRef idx="0">
-        <a:scrgbClr r="0" g="0" b="0"/>
-      </a:lnRef>
-      <a:fillRef idx="3">
-        <a:scrgbClr r="0" g="0" b="0"/>
-      </a:fillRef>
-      <a:effectRef idx="2">
         <a:scrgbClr r="0" g="0" b="0"/>
       </a:effectRef>
       <a:fontRef idx="minor"/>
@@ -19095,8 +21070,8 @@
         </p:nvSpPr>
         <p:spPr>
           <a:xfrm>
-            <a:off x="2558716" y="955309"/>
-            <a:ext cx="7074568" cy="2898975"/>
+            <a:off x="2271249" y="973597"/>
+            <a:ext cx="7649501" cy="2960183"/>
           </a:xfrm>
         </p:spPr>
         <p:txBody>
@@ -19736,10 +21711,10 @@
       </p:grpSpPr>
       <p:sp useBgFill="1">
         <p:nvSpPr>
-          <p:cNvPr id="9" name="Rectangle 8">
+          <p:cNvPr id="24" name="Rectangle 23">
             <a:extLst>
               <a:ext uri="{FF2B5EF4-FFF2-40B4-BE49-F238E27FC236}">
-                <a16:creationId xmlns:a16="http://schemas.microsoft.com/office/drawing/2014/main" id="{BACC6370-2D7E-4714-9D71-7542949D7D5D}"/>
+                <a16:creationId xmlns:a16="http://schemas.microsoft.com/office/drawing/2014/main" id="{2659FDB4-FCBE-4A89-B46D-43D4FA54464D}"/>
               </a:ext>
               <a:ext uri="{C183D7F6-B498-43B3-948B-1728B52AA6E4}">
                 <adec:decorative xmlns:adec="http://schemas.microsoft.com/office/drawing/2017/decorative" val="1"/>
@@ -19759,101 +21734,12 @@
         </p:nvSpPr>
         <p:spPr>
           <a:xfrm>
-            <a:off x="0" y="0"/>
+            <a:off x="0" y="8313"/>
             <a:ext cx="12192000" cy="6858000"/>
           </a:xfrm>
           <a:prstGeom prst="rect">
             <a:avLst/>
           </a:prstGeom>
-          <a:ln w="12700" cap="flat" cmpd="sng" algn="ctr">
-            <a:noFill/>
-            <a:prstDash val="solid"/>
-            <a:miter lim="800000"/>
-          </a:ln>
-          <a:effectLst/>
-          <a:extLst>
-            <a:ext uri="{91240B29-F687-4F45-9708-019B960494DF}">
-              <a14:hiddenLine xmlns:a14="http://schemas.microsoft.com/office/drawing/2010/main" w="12700" cap="flat" cmpd="sng" algn="ctr">
-                <a:solidFill>
-                  <a:schemeClr val="accent1">
-                    <a:shade val="50000"/>
-                  </a:schemeClr>
-                </a:solidFill>
-                <a:prstDash val="solid"/>
-                <a:miter lim="800000"/>
-              </a14:hiddenLine>
-            </a:ext>
-          </a:extLst>
-        </p:spPr>
-        <p:style>
-          <a:lnRef idx="2">
-            <a:schemeClr val="accent1">
-              <a:shade val="50000"/>
-            </a:schemeClr>
-          </a:lnRef>
-          <a:fillRef idx="1">
-            <a:schemeClr val="accent1"/>
-          </a:fillRef>
-          <a:effectRef idx="0">
-            <a:schemeClr val="accent1"/>
-          </a:effectRef>
-          <a:fontRef idx="minor">
-            <a:schemeClr val="lt1"/>
-          </a:fontRef>
-        </p:style>
-        <p:txBody>
-          <a:bodyPr rtlCol="0" anchor="ctr"/>
-          <a:lstStyle/>
-          <a:p>
-            <a:pPr algn="ctr"/>
-            <a:endParaRPr lang="en-US"/>
-          </a:p>
-        </p:txBody>
-      </p:sp>
-      <p:sp>
-        <p:nvSpPr>
-          <p:cNvPr id="11" name="Rectangle 10">
-            <a:extLst>
-              <a:ext uri="{FF2B5EF4-FFF2-40B4-BE49-F238E27FC236}">
-                <a16:creationId xmlns:a16="http://schemas.microsoft.com/office/drawing/2014/main" id="{256B2C21-A230-48C0-8DF1-C46611373C44}"/>
-              </a:ext>
-              <a:ext uri="{C183D7F6-B498-43B3-948B-1728B52AA6E4}">
-                <adec:decorative xmlns:adec="http://schemas.microsoft.com/office/drawing/2017/decorative" val="1"/>
-              </a:ext>
-            </a:extLst>
-          </p:cNvPr>
-          <p:cNvSpPr>
-            <a:spLocks noGrp="1" noRot="1" noChangeAspect="1" noMove="1" noResize="1" noEditPoints="1" noAdjustHandles="1" noChangeArrowheads="1" noChangeShapeType="1" noTextEdit="1"/>
-          </p:cNvSpPr>
-          <p:nvPr>
-            <p:extLst>
-              <p:ext uri="{386F3935-93C4-4BCD-93E2-E3B085C9AB24}">
-                <p16:designElem xmlns:p16="http://schemas.microsoft.com/office/powerpoint/2015/main" val="1"/>
-              </p:ext>
-            </p:extLst>
-          </p:nvPr>
-        </p:nvSpPr>
-        <p:spPr>
-          <a:xfrm rot="5400000" flipH="1">
-            <a:off x="-1410084" y="1410082"/>
-            <a:ext cx="6858000" cy="4037836"/>
-          </a:xfrm>
-          <a:prstGeom prst="rect">
-            <a:avLst/>
-          </a:prstGeom>
-          <a:gradFill>
-            <a:gsLst>
-              <a:gs pos="8000">
-                <a:srgbClr val="000000"/>
-              </a:gs>
-              <a:gs pos="100000">
-                <a:schemeClr val="accent1">
-                  <a:lumMod val="75000"/>
-                </a:schemeClr>
-              </a:gs>
-            </a:gsLst>
-            <a:lin ang="3000000" scaled="0"/>
-          </a:gradFill>
           <a:ln>
             <a:noFill/>
           </a:ln>
@@ -19879,404 +21765,11 @@
           <a:lstStyle/>
           <a:p>
             <a:pPr algn="ctr"/>
-            <a:endParaRPr lang="en-US"/>
-          </a:p>
-        </p:txBody>
-      </p:sp>
-      <p:sp>
-        <p:nvSpPr>
-          <p:cNvPr id="13" name="Rectangle 12">
-            <a:extLst>
-              <a:ext uri="{FF2B5EF4-FFF2-40B4-BE49-F238E27FC236}">
-                <a16:creationId xmlns:a16="http://schemas.microsoft.com/office/drawing/2014/main" id="{3847E18C-932D-4C95-AABA-FEC7C9499AD7}"/>
-              </a:ext>
-              <a:ext uri="{C183D7F6-B498-43B3-948B-1728B52AA6E4}">
-                <adec:decorative xmlns:adec="http://schemas.microsoft.com/office/drawing/2017/decorative" val="1"/>
-              </a:ext>
-            </a:extLst>
-          </p:cNvPr>
-          <p:cNvSpPr>
-            <a:spLocks noGrp="1" noRot="1" noChangeAspect="1" noMove="1" noResize="1" noEditPoints="1" noAdjustHandles="1" noChangeArrowheads="1" noChangeShapeType="1" noTextEdit="1"/>
-          </p:cNvSpPr>
-          <p:nvPr>
-            <p:extLst>
-              <p:ext uri="{386F3935-93C4-4BCD-93E2-E3B085C9AB24}">
-                <p16:designElem xmlns:p16="http://schemas.microsoft.com/office/powerpoint/2015/main" val="1"/>
-              </p:ext>
-            </p:extLst>
-          </p:nvPr>
-        </p:nvSpPr>
-        <p:spPr>
-          <a:xfrm rot="5400000" flipH="1">
-            <a:off x="-1410085" y="1420219"/>
-            <a:ext cx="6857999" cy="4037839"/>
-          </a:xfrm>
-          <a:prstGeom prst="rect">
-            <a:avLst/>
-          </a:prstGeom>
-          <a:gradFill>
-            <a:gsLst>
-              <a:gs pos="0">
-                <a:srgbClr val="000000">
-                  <a:alpha val="0"/>
-                </a:srgbClr>
-              </a:gs>
-              <a:gs pos="99000">
-                <a:schemeClr val="accent1">
-                  <a:alpha val="46000"/>
-                </a:schemeClr>
-              </a:gs>
-            </a:gsLst>
-            <a:lin ang="1800000" scaled="0"/>
-          </a:gradFill>
-          <a:ln>
-            <a:noFill/>
-          </a:ln>
-        </p:spPr>
-        <p:style>
-          <a:lnRef idx="2">
-            <a:schemeClr val="accent1">
-              <a:shade val="50000"/>
-            </a:schemeClr>
-          </a:lnRef>
-          <a:fillRef idx="1">
-            <a:schemeClr val="accent1"/>
-          </a:fillRef>
-          <a:effectRef idx="0">
-            <a:schemeClr val="accent1"/>
-          </a:effectRef>
-          <a:fontRef idx="minor">
-            <a:schemeClr val="lt1"/>
-          </a:fontRef>
-        </p:style>
-        <p:txBody>
-          <a:bodyPr rtlCol="0" anchor="ctr"/>
-          <a:lstStyle/>
-          <a:p>
-            <a:pPr algn="ctr"/>
-            <a:endParaRPr lang="en-US"/>
-          </a:p>
-        </p:txBody>
-      </p:sp>
-      <p:sp>
-        <p:nvSpPr>
-          <p:cNvPr id="15" name="Rectangle 14">
-            <a:extLst>
-              <a:ext uri="{FF2B5EF4-FFF2-40B4-BE49-F238E27FC236}">
-                <a16:creationId xmlns:a16="http://schemas.microsoft.com/office/drawing/2014/main" id="{3150CB11-0C61-439E-910F-5787759E72A0}"/>
-              </a:ext>
-              <a:ext uri="{C183D7F6-B498-43B3-948B-1728B52AA6E4}">
-                <adec:decorative xmlns:adec="http://schemas.microsoft.com/office/drawing/2017/decorative" val="1"/>
-              </a:ext>
-            </a:extLst>
-          </p:cNvPr>
-          <p:cNvSpPr>
-            <a:spLocks noGrp="1" noRot="1" noChangeAspect="1" noMove="1" noResize="1" noEditPoints="1" noAdjustHandles="1" noChangeArrowheads="1" noChangeShapeType="1" noTextEdit="1"/>
-          </p:cNvSpPr>
-          <p:nvPr>
-            <p:extLst>
-              <p:ext uri="{386F3935-93C4-4BCD-93E2-E3B085C9AB24}">
-                <p16:designElem xmlns:p16="http://schemas.microsoft.com/office/powerpoint/2015/main" val="1"/>
-              </p:ext>
-            </p:extLst>
-          </p:nvPr>
-        </p:nvSpPr>
-        <p:spPr>
-          <a:xfrm rot="5400000" flipH="1">
-            <a:off x="767923" y="3588085"/>
-            <a:ext cx="2501979" cy="4037841"/>
-          </a:xfrm>
-          <a:prstGeom prst="rect">
-            <a:avLst/>
-          </a:prstGeom>
-          <a:gradFill>
-            <a:gsLst>
-              <a:gs pos="2000">
-                <a:schemeClr val="accent1">
-                  <a:alpha val="29000"/>
-                </a:schemeClr>
-              </a:gs>
-              <a:gs pos="100000">
-                <a:srgbClr val="000000">
-                  <a:alpha val="30000"/>
-                </a:srgbClr>
-              </a:gs>
-            </a:gsLst>
-            <a:lin ang="7800000" scaled="0"/>
-          </a:gradFill>
-          <a:ln>
-            <a:noFill/>
-          </a:ln>
-        </p:spPr>
-        <p:style>
-          <a:lnRef idx="2">
-            <a:schemeClr val="accent1">
-              <a:shade val="50000"/>
-            </a:schemeClr>
-          </a:lnRef>
-          <a:fillRef idx="1">
-            <a:schemeClr val="accent1"/>
-          </a:fillRef>
-          <a:effectRef idx="0">
-            <a:schemeClr val="accent1"/>
-          </a:effectRef>
-          <a:fontRef idx="minor">
-            <a:schemeClr val="lt1"/>
-          </a:fontRef>
-        </p:style>
-        <p:txBody>
-          <a:bodyPr rtlCol="0" anchor="ctr"/>
-          <a:lstStyle/>
-          <a:p>
-            <a:pPr algn="ctr"/>
-            <a:endParaRPr lang="en-US" dirty="0"/>
-          </a:p>
-        </p:txBody>
-      </p:sp>
-      <p:sp>
-        <p:nvSpPr>
-          <p:cNvPr id="17" name="Freeform: Shape 16">
-            <a:extLst>
-              <a:ext uri="{FF2B5EF4-FFF2-40B4-BE49-F238E27FC236}">
-                <a16:creationId xmlns:a16="http://schemas.microsoft.com/office/drawing/2014/main" id="{43F8A58B-5155-44CE-A5FF-7647B47D0A7A}"/>
-              </a:ext>
-              <a:ext uri="{C183D7F6-B498-43B3-948B-1728B52AA6E4}">
-                <adec:decorative xmlns:adec="http://schemas.microsoft.com/office/drawing/2017/decorative" val="1"/>
-              </a:ext>
-            </a:extLst>
-          </p:cNvPr>
-          <p:cNvSpPr>
-            <a:spLocks noGrp="1" noRot="1" noChangeAspect="1" noMove="1" noResize="1" noEditPoints="1" noAdjustHandles="1" noChangeArrowheads="1" noChangeShapeType="1" noTextEdit="1"/>
-          </p:cNvSpPr>
-          <p:nvPr>
-            <p:extLst>
-              <p:ext uri="{386F3935-93C4-4BCD-93E2-E3B085C9AB24}">
-                <p16:designElem xmlns:p16="http://schemas.microsoft.com/office/powerpoint/2015/main" val="1"/>
-              </p:ext>
-            </p:extLst>
-          </p:nvPr>
-        </p:nvSpPr>
-        <p:spPr>
-          <a:xfrm rot="20635413">
-            <a:off x="-501737" y="969718"/>
-            <a:ext cx="3900357" cy="4178958"/>
-          </a:xfrm>
-          <a:custGeom>
-            <a:avLst/>
-            <a:gdLst>
-              <a:gd name="connsiteX0" fmla="*/ 2432225 w 3900357"/>
-              <a:gd name="connsiteY0" fmla="*/ 93939 h 4178958"/>
-              <a:gd name="connsiteX1" fmla="*/ 3900357 w 3900357"/>
-              <a:gd name="connsiteY1" fmla="*/ 2089479 h 4178958"/>
-              <a:gd name="connsiteX2" fmla="*/ 1810878 w 3900357"/>
-              <a:gd name="connsiteY2" fmla="*/ 4178958 h 4178958"/>
-              <a:gd name="connsiteX3" fmla="*/ 78249 w 3900357"/>
-              <a:gd name="connsiteY3" fmla="*/ 3257727 h 4178958"/>
-              <a:gd name="connsiteX4" fmla="*/ 0 w 3900357"/>
-              <a:gd name="connsiteY4" fmla="*/ 3128923 h 4178958"/>
-              <a:gd name="connsiteX5" fmla="*/ 831324 w 3900357"/>
-              <a:gd name="connsiteY5" fmla="*/ 244281 h 4178958"/>
-              <a:gd name="connsiteX6" fmla="*/ 997559 w 3900357"/>
-              <a:gd name="connsiteY6" fmla="*/ 164202 h 4178958"/>
-              <a:gd name="connsiteX7" fmla="*/ 1810878 w 3900357"/>
-              <a:gd name="connsiteY7" fmla="*/ 0 h 4178958"/>
-              <a:gd name="connsiteX8" fmla="*/ 2432225 w 3900357"/>
-              <a:gd name="connsiteY8" fmla="*/ 93939 h 4178958"/>
-            </a:gdLst>
-            <a:ahLst/>
-            <a:cxnLst>
-              <a:cxn ang="0">
-                <a:pos x="connsiteX0" y="connsiteY0"/>
-              </a:cxn>
-              <a:cxn ang="0">
-                <a:pos x="connsiteX1" y="connsiteY1"/>
-              </a:cxn>
-              <a:cxn ang="0">
-                <a:pos x="connsiteX2" y="connsiteY2"/>
-              </a:cxn>
-              <a:cxn ang="0">
-                <a:pos x="connsiteX3" y="connsiteY3"/>
-              </a:cxn>
-              <a:cxn ang="0">
-                <a:pos x="connsiteX4" y="connsiteY4"/>
-              </a:cxn>
-              <a:cxn ang="0">
-                <a:pos x="connsiteX5" y="connsiteY5"/>
-              </a:cxn>
-              <a:cxn ang="0">
-                <a:pos x="connsiteX6" y="connsiteY6"/>
-              </a:cxn>
-              <a:cxn ang="0">
-                <a:pos x="connsiteX7" y="connsiteY7"/>
-              </a:cxn>
-              <a:cxn ang="0">
-                <a:pos x="connsiteX8" y="connsiteY8"/>
-              </a:cxn>
-            </a:cxnLst>
-            <a:rect l="l" t="t" r="r" b="b"/>
-            <a:pathLst>
-              <a:path w="3900357" h="4178958">
-                <a:moveTo>
-                  <a:pt x="2432225" y="93939"/>
-                </a:moveTo>
-                <a:cubicBezTo>
-                  <a:pt x="3282786" y="358491"/>
-                  <a:pt x="3900357" y="1151865"/>
-                  <a:pt x="3900357" y="2089479"/>
-                </a:cubicBezTo>
-                <a:cubicBezTo>
-                  <a:pt x="3900357" y="3243466"/>
-                  <a:pt x="2964865" y="4178958"/>
-                  <a:pt x="1810878" y="4178958"/>
-                </a:cubicBezTo>
-                <a:cubicBezTo>
-                  <a:pt x="1089636" y="4178958"/>
-                  <a:pt x="453744" y="3813531"/>
-                  <a:pt x="78249" y="3257727"/>
-                </a:cubicBezTo>
-                <a:lnTo>
-                  <a:pt x="0" y="3128923"/>
-                </a:lnTo>
-                <a:lnTo>
-                  <a:pt x="831324" y="244281"/>
-                </a:lnTo>
-                <a:lnTo>
-                  <a:pt x="997559" y="164202"/>
-                </a:lnTo>
-                <a:cubicBezTo>
-                  <a:pt x="1247540" y="58468"/>
-                  <a:pt x="1522381" y="0"/>
-                  <a:pt x="1810878" y="0"/>
-                </a:cubicBezTo>
-                <a:cubicBezTo>
-                  <a:pt x="2027251" y="0"/>
-                  <a:pt x="2235942" y="32888"/>
-                  <a:pt x="2432225" y="93939"/>
-                </a:cubicBezTo>
-                <a:close/>
-              </a:path>
-            </a:pathLst>
-          </a:custGeom>
-          <a:gradFill>
-            <a:gsLst>
-              <a:gs pos="29000">
-                <a:srgbClr val="000000">
-                  <a:alpha val="0"/>
-                </a:srgbClr>
-              </a:gs>
-              <a:gs pos="100000">
-                <a:schemeClr val="accent1">
-                  <a:alpha val="43000"/>
-                </a:schemeClr>
-              </a:gs>
-            </a:gsLst>
-            <a:lin ang="1800000" scaled="0"/>
-          </a:gradFill>
-          <a:ln>
-            <a:noFill/>
-          </a:ln>
-        </p:spPr>
-        <p:style>
-          <a:lnRef idx="2">
-            <a:schemeClr val="accent1">
-              <a:shade val="50000"/>
-            </a:schemeClr>
-          </a:lnRef>
-          <a:fillRef idx="1">
-            <a:schemeClr val="accent1"/>
-          </a:fillRef>
-          <a:effectRef idx="0">
-            <a:schemeClr val="accent1"/>
-          </a:effectRef>
-          <a:fontRef idx="minor">
-            <a:schemeClr val="lt1"/>
-          </a:fontRef>
-        </p:style>
-        <p:txBody>
-          <a:bodyPr wrap="square" rtlCol="0" anchor="ctr">
-            <a:noAutofit/>
-          </a:bodyPr>
-          <a:lstStyle/>
-          <a:p>
-            <a:pPr algn="ctr"/>
-            <a:endParaRPr lang="en-US" dirty="0"/>
-          </a:p>
-        </p:txBody>
-      </p:sp>
-      <p:sp>
-        <p:nvSpPr>
-          <p:cNvPr id="19" name="Rectangle 18">
-            <a:extLst>
-              <a:ext uri="{FF2B5EF4-FFF2-40B4-BE49-F238E27FC236}">
-                <a16:creationId xmlns:a16="http://schemas.microsoft.com/office/drawing/2014/main" id="{443F2ACA-E6D6-4028-82DD-F03C262D5DE6}"/>
-              </a:ext>
-              <a:ext uri="{C183D7F6-B498-43B3-948B-1728B52AA6E4}">
-                <adec:decorative xmlns:adec="http://schemas.microsoft.com/office/drawing/2017/decorative" val="1"/>
-              </a:ext>
-            </a:extLst>
-          </p:cNvPr>
-          <p:cNvSpPr>
-            <a:spLocks noGrp="1" noRot="1" noChangeAspect="1" noMove="1" noResize="1" noEditPoints="1" noAdjustHandles="1" noChangeArrowheads="1" noChangeShapeType="1" noTextEdit="1"/>
-          </p:cNvSpPr>
-          <p:nvPr>
-            <p:extLst>
-              <p:ext uri="{386F3935-93C4-4BCD-93E2-E3B085C9AB24}">
-                <p16:designElem xmlns:p16="http://schemas.microsoft.com/office/powerpoint/2015/main" val="1"/>
-              </p:ext>
-            </p:extLst>
-          </p:nvPr>
-        </p:nvSpPr>
-        <p:spPr>
-          <a:xfrm rot="5400000" flipH="1">
-            <a:off x="-1410095" y="1410079"/>
-            <a:ext cx="6858003" cy="4037835"/>
-          </a:xfrm>
-          <a:prstGeom prst="rect">
-            <a:avLst/>
-          </a:prstGeom>
-          <a:gradFill>
-            <a:gsLst>
-              <a:gs pos="0">
-                <a:srgbClr val="000000">
-                  <a:alpha val="0"/>
-                </a:srgbClr>
-              </a:gs>
-              <a:gs pos="99000">
-                <a:schemeClr val="accent1">
-                  <a:lumMod val="60000"/>
-                  <a:lumOff val="40000"/>
-                  <a:alpha val="11000"/>
-                </a:schemeClr>
-              </a:gs>
-            </a:gsLst>
-            <a:lin ang="7200000" scaled="0"/>
-          </a:gradFill>
-          <a:ln>
-            <a:noFill/>
-          </a:ln>
-        </p:spPr>
-        <p:style>
-          <a:lnRef idx="2">
-            <a:schemeClr val="accent1">
-              <a:shade val="50000"/>
-            </a:schemeClr>
-          </a:lnRef>
-          <a:fillRef idx="1">
-            <a:schemeClr val="accent1"/>
-          </a:fillRef>
-          <a:effectRef idx="0">
-            <a:schemeClr val="accent1"/>
-          </a:effectRef>
-          <a:fontRef idx="minor">
-            <a:schemeClr val="lt1"/>
-          </a:fontRef>
-        </p:style>
-        <p:txBody>
-          <a:bodyPr rtlCol="0" anchor="ctr"/>
-          <a:lstStyle/>
-          <a:p>
-            <a:pPr algn="ctr"/>
-            <a:endParaRPr lang="en-US"/>
+            <a:endParaRPr lang="en-US">
+              <a:solidFill>
+                <a:schemeClr val="bg1"/>
+              </a:solidFill>
+            </a:endParaRPr>
           </a:p>
         </p:txBody>
       </p:sp>
@@ -20298,31 +21791,134 @@
         </p:nvSpPr>
         <p:spPr>
           <a:xfrm>
-            <a:off x="586478" y="1683756"/>
-            <a:ext cx="3115265" cy="2396359"/>
+            <a:off x="479394" y="1070800"/>
+            <a:ext cx="3939688" cy="5583126"/>
           </a:xfrm>
         </p:spPr>
         <p:txBody>
-          <a:bodyPr vert="horz" lIns="91440" tIns="45720" rIns="91440" bIns="45720" rtlCol="0" anchor="b">
+          <a:bodyPr vert="horz" lIns="91440" tIns="45720" rIns="91440" bIns="45720" rtlCol="0" anchor="ctr">
             <a:normAutofit/>
           </a:bodyPr>
           <a:lstStyle/>
           <a:p>
             <a:pPr algn="r"/>
             <a:r>
-              <a:rPr lang="en-US" sz="4000" kern="1200">
+              <a:rPr lang="en-US" sz="6600" kern="1200" dirty="0">
                 <a:solidFill>
-                  <a:srgbClr val="FFFFFF"/>
+                  <a:schemeClr val="tx1"/>
                 </a:solidFill>
                 <a:latin typeface="+mj-lt"/>
                 <a:ea typeface="+mj-ea"/>
                 <a:cs typeface="+mj-cs"/>
               </a:rPr>
-              <a:t>Latar Belakang &amp; Masalah</a:t>
+              <a:t>Latar </a:t>
             </a:r>
+            <a:r>
+              <a:rPr lang="en-US" sz="6600" kern="1200" dirty="0" err="1">
+                <a:solidFill>
+                  <a:schemeClr val="tx1"/>
+                </a:solidFill>
+                <a:latin typeface="+mj-lt"/>
+                <a:ea typeface="+mj-ea"/>
+                <a:cs typeface="+mj-cs"/>
+              </a:rPr>
+              <a:t>Belakang</a:t>
+            </a:r>
+            <a:r>
+              <a:rPr lang="en-US" sz="6600" kern="1200" dirty="0">
+                <a:solidFill>
+                  <a:schemeClr val="tx1"/>
+                </a:solidFill>
+                <a:latin typeface="+mj-lt"/>
+                <a:ea typeface="+mj-ea"/>
+                <a:cs typeface="+mj-cs"/>
+              </a:rPr>
+              <a:t> &amp; </a:t>
+            </a:r>
+            <a:r>
+              <a:rPr lang="en-US" sz="6600" kern="1200" dirty="0" err="1">
+                <a:solidFill>
+                  <a:schemeClr val="tx1"/>
+                </a:solidFill>
+                <a:latin typeface="+mj-lt"/>
+                <a:ea typeface="+mj-ea"/>
+                <a:cs typeface="+mj-cs"/>
+              </a:rPr>
+              <a:t>Masalah</a:t>
+            </a:r>
+            <a:endParaRPr lang="en-US" sz="6600" kern="1200" dirty="0">
+              <a:solidFill>
+                <a:schemeClr val="tx1"/>
+              </a:solidFill>
+              <a:latin typeface="+mj-lt"/>
+              <a:ea typeface="+mj-ea"/>
+              <a:cs typeface="+mj-cs"/>
+            </a:endParaRPr>
           </a:p>
         </p:txBody>
       </p:sp>
+      <p:cxnSp>
+        <p:nvCxnSpPr>
+          <p:cNvPr id="26" name="Straight Connector 25">
+            <a:extLst>
+              <a:ext uri="{FF2B5EF4-FFF2-40B4-BE49-F238E27FC236}">
+                <a16:creationId xmlns:a16="http://schemas.microsoft.com/office/drawing/2014/main" id="{C8F51B3F-8331-4E4A-AE96-D47B1006EEAD}"/>
+              </a:ext>
+              <a:ext uri="{C183D7F6-B498-43B3-948B-1728B52AA6E4}">
+                <adec:decorative xmlns:adec="http://schemas.microsoft.com/office/drawing/2017/decorative" val="1"/>
+              </a:ext>
+            </a:extLst>
+          </p:cNvPr>
+          <p:cNvCxnSpPr>
+            <a:cxnSpLocks noGrp="1" noRot="1" noChangeAspect="1" noMove="1" noResize="1" noEditPoints="1" noAdjustHandles="1" noChangeArrowheads="1" noChangeShapeType="1"/>
+          </p:cNvCxnSpPr>
+          <p:nvPr>
+            <p:extLst>
+              <p:ext uri="{386F3935-93C4-4BCD-93E2-E3B085C9AB24}">
+                <p16:designElem xmlns:p16="http://schemas.microsoft.com/office/powerpoint/2015/main" val="1"/>
+              </p:ext>
+            </p:extLst>
+          </p:nvPr>
+        </p:nvCxnSpPr>
+        <p:spPr>
+          <a:xfrm>
+            <a:off x="4728053" y="1132114"/>
+            <a:ext cx="0" cy="5717573"/>
+          </a:xfrm>
+          <a:prstGeom prst="line">
+            <a:avLst/>
+          </a:prstGeom>
+          <a:ln w="25400" cap="sq">
+            <a:gradFill flip="none" rotWithShape="1">
+              <a:gsLst>
+                <a:gs pos="0">
+                  <a:schemeClr val="accent1"/>
+                </a:gs>
+                <a:gs pos="100000">
+                  <a:schemeClr val="accent2"/>
+                </a:gs>
+              </a:gsLst>
+              <a:lin ang="16200000" scaled="1"/>
+              <a:tileRect/>
+            </a:gradFill>
+            <a:bevel/>
+          </a:ln>
+        </p:spPr>
+        <p:style>
+          <a:lnRef idx="1">
+            <a:schemeClr val="accent1"/>
+          </a:lnRef>
+          <a:fillRef idx="0">
+            <a:schemeClr val="accent1"/>
+          </a:fillRef>
+          <a:effectRef idx="0">
+            <a:schemeClr val="accent1"/>
+          </a:effectRef>
+          <a:fontRef idx="minor">
+            <a:schemeClr val="tx1"/>
+          </a:fontRef>
+        </p:style>
+      </p:cxnSp>
       <p:graphicFrame>
         <p:nvGraphicFramePr>
           <p:cNvPr id="5" name="Text Placeholder 2">
@@ -20336,14 +21932,14 @@
           <p:nvPr>
             <p:extLst>
               <p:ext uri="{D42A27DB-BD31-4B8C-83A1-F6EECF244321}">
-                <p14:modId xmlns:p14="http://schemas.microsoft.com/office/powerpoint/2010/main" val="4030750118"/>
+                <p14:modId xmlns:p14="http://schemas.microsoft.com/office/powerpoint/2010/main" val="2112926725"/>
               </p:ext>
             </p:extLst>
           </p:nvPr>
         </p:nvGraphicFramePr>
         <p:xfrm>
-          <a:off x="4905052" y="750440"/>
-          <a:ext cx="6666833" cy="5453920"/>
+          <a:off x="5108535" y="1070800"/>
+          <a:ext cx="6245265" cy="5589347"/>
         </p:xfrm>
         <a:graphic>
           <a:graphicData uri="http://schemas.openxmlformats.org/drawingml/2006/diagram">
@@ -20746,7 +22342,7 @@
           <p:nvPr>
             <p:extLst>
               <p:ext uri="{D42A27DB-BD31-4B8C-83A1-F6EECF244321}">
-                <p14:modId xmlns:p14="http://schemas.microsoft.com/office/powerpoint/2010/main" val="2598214956"/>
+                <p14:modId xmlns:p14="http://schemas.microsoft.com/office/powerpoint/2010/main" val="2754121743"/>
               </p:ext>
             </p:extLst>
           </p:nvPr>
@@ -20981,7 +22577,7 @@
           <p:nvPr>
             <p:extLst>
               <p:ext uri="{D42A27DB-BD31-4B8C-83A1-F6EECF244321}">
-                <p14:modId xmlns:p14="http://schemas.microsoft.com/office/powerpoint/2010/main" val="138762079"/>
+                <p14:modId xmlns:p14="http://schemas.microsoft.com/office/powerpoint/2010/main" val="2042970525"/>
               </p:ext>
             </p:extLst>
           </p:nvPr>
@@ -21391,7 +22987,7 @@
           <p:nvPr>
             <p:extLst>
               <p:ext uri="{D42A27DB-BD31-4B8C-83A1-F6EECF244321}">
-                <p14:modId xmlns:p14="http://schemas.microsoft.com/office/powerpoint/2010/main" val="1564730547"/>
+                <p14:modId xmlns:p14="http://schemas.microsoft.com/office/powerpoint/2010/main" val="2574505059"/>
               </p:ext>
             </p:extLst>
           </p:nvPr>
